--- a/Assets/Pontus Unit Builder.pptx
+++ b/Assets/Pontus Unit Builder.pptx
@@ -111,6 +111,11 @@
       </a:defRPr>
     </a:lvl9pPr>
   </p:defaultTextStyle>
+  <p:extLst>
+    <p:ext uri="{EFAFB233-063F-42B5-8137-9DF3F51BA10A}">
+      <p15:sldGuideLst xmlns:p15="http://schemas.microsoft.com/office/powerpoint/2012/main"/>
+    </p:ext>
+  </p:extLst>
 </p:presentation>
 </file>
 
@@ -897,15 +902,15 @@
 </file>
 
 <file path=ppt/diagrams/colors2.xml><?xml version="1.0" encoding="utf-8"?>
-<dgm:colorsDef xmlns:dgm="http://schemas.openxmlformats.org/drawingml/2006/diagram" xmlns:a="http://schemas.openxmlformats.org/drawingml/2006/main" uniqueId="urn:microsoft.com/office/officeart/2005/8/colors/colorful1">
+<dgm:colorsDef xmlns:dgm="http://schemas.openxmlformats.org/drawingml/2006/diagram" xmlns:a="http://schemas.openxmlformats.org/drawingml/2006/main" uniqueId="urn:microsoft.com/office/officeart/2005/8/colors/accent4_2">
   <dgm:title val=""/>
   <dgm:desc val=""/>
   <dgm:catLst>
-    <dgm:cat type="colorful" pri="10100"/>
+    <dgm:cat type="accent4" pri="11200"/>
   </dgm:catLst>
   <dgm:styleLbl name="node0">
     <dgm:fillClrLst meth="repeat">
-      <a:schemeClr val="accent1"/>
+      <a:schemeClr val="accent4"/>
     </dgm:fillClrLst>
     <dgm:linClrLst meth="repeat">
       <a:schemeClr val="lt1"/>
@@ -917,11 +922,7 @@
   </dgm:styleLbl>
   <dgm:styleLbl name="node1">
     <dgm:fillClrLst meth="repeat">
-      <a:schemeClr val="accent2"/>
-      <a:schemeClr val="accent3"/>
       <a:schemeClr val="accent4"/>
-      <a:schemeClr val="accent5"/>
-      <a:schemeClr val="accent6"/>
     </dgm:fillClrLst>
     <dgm:linClrLst meth="repeat">
       <a:schemeClr val="lt1"/>
@@ -933,18 +934,10 @@
   </dgm:styleLbl>
   <dgm:styleLbl name="alignNode1">
     <dgm:fillClrLst meth="repeat">
-      <a:schemeClr val="accent2"/>
-      <a:schemeClr val="accent3"/>
       <a:schemeClr val="accent4"/>
-      <a:schemeClr val="accent5"/>
-      <a:schemeClr val="accent6"/>
     </dgm:fillClrLst>
     <dgm:linClrLst meth="repeat">
-      <a:schemeClr val="accent2"/>
-      <a:schemeClr val="accent3"/>
       <a:schemeClr val="accent4"/>
-      <a:schemeClr val="accent5"/>
-      <a:schemeClr val="accent6"/>
     </dgm:linClrLst>
     <dgm:effectClrLst/>
     <dgm:txLinClrLst/>
@@ -953,11 +946,7 @@
   </dgm:styleLbl>
   <dgm:styleLbl name="lnNode1">
     <dgm:fillClrLst meth="repeat">
-      <a:schemeClr val="accent2"/>
-      <a:schemeClr val="accent3"/>
       <a:schemeClr val="accent4"/>
-      <a:schemeClr val="accent5"/>
-      <a:schemeClr val="accent6"/>
     </dgm:fillClrLst>
     <dgm:linClrLst meth="repeat">
       <a:schemeClr val="lt1"/>
@@ -969,19 +958,7 @@
   </dgm:styleLbl>
   <dgm:styleLbl name="vennNode1">
     <dgm:fillClrLst meth="repeat">
-      <a:schemeClr val="accent2">
-        <a:alpha val="50000"/>
-      </a:schemeClr>
-      <a:schemeClr val="accent3">
-        <a:alpha val="50000"/>
-      </a:schemeClr>
       <a:schemeClr val="accent4">
-        <a:alpha val="50000"/>
-      </a:schemeClr>
-      <a:schemeClr val="accent5">
-        <a:alpha val="50000"/>
-      </a:schemeClr>
-      <a:schemeClr val="accent6">
         <a:alpha val="50000"/>
       </a:schemeClr>
     </dgm:fillClrLst>
@@ -994,31 +971,7 @@
     <dgm:txEffectClrLst/>
   </dgm:styleLbl>
   <dgm:styleLbl name="node2">
-    <dgm:fillClrLst>
-      <a:schemeClr val="accent2"/>
-    </dgm:fillClrLst>
-    <dgm:linClrLst meth="repeat">
-      <a:schemeClr val="lt1"/>
-    </dgm:linClrLst>
-    <dgm:effectClrLst/>
-    <dgm:txLinClrLst/>
-    <dgm:txFillClrLst/>
-    <dgm:txEffectClrLst/>
-  </dgm:styleLbl>
-  <dgm:styleLbl name="node3">
-    <dgm:fillClrLst>
-      <a:schemeClr val="accent3"/>
-    </dgm:fillClrLst>
-    <dgm:linClrLst meth="repeat">
-      <a:schemeClr val="lt1"/>
-    </dgm:linClrLst>
-    <dgm:effectClrLst/>
-    <dgm:txLinClrLst/>
-    <dgm:txFillClrLst/>
-    <dgm:txEffectClrLst/>
-  </dgm:styleLbl>
-  <dgm:styleLbl name="node4">
-    <dgm:fillClrLst>
+    <dgm:fillClrLst meth="repeat">
       <a:schemeClr val="accent4"/>
     </dgm:fillClrLst>
     <dgm:linClrLst meth="repeat">
@@ -1029,21 +982,33 @@
     <dgm:txFillClrLst/>
     <dgm:txEffectClrLst/>
   </dgm:styleLbl>
+  <dgm:styleLbl name="node3">
+    <dgm:fillClrLst meth="repeat">
+      <a:schemeClr val="accent4"/>
+    </dgm:fillClrLst>
+    <dgm:linClrLst meth="repeat">
+      <a:schemeClr val="lt1"/>
+    </dgm:linClrLst>
+    <dgm:effectClrLst/>
+    <dgm:txLinClrLst/>
+    <dgm:txFillClrLst/>
+    <dgm:txEffectClrLst/>
+  </dgm:styleLbl>
+  <dgm:styleLbl name="node4">
+    <dgm:fillClrLst meth="repeat">
+      <a:schemeClr val="accent4"/>
+    </dgm:fillClrLst>
+    <dgm:linClrLst meth="repeat">
+      <a:schemeClr val="lt1"/>
+    </dgm:linClrLst>
+    <dgm:effectClrLst/>
+    <dgm:txLinClrLst/>
+    <dgm:txFillClrLst/>
+    <dgm:txEffectClrLst/>
+  </dgm:styleLbl>
   <dgm:styleLbl name="fgImgPlace1">
     <dgm:fillClrLst meth="repeat">
-      <a:schemeClr val="accent2">
-        <a:tint val="50000"/>
-      </a:schemeClr>
-      <a:schemeClr val="accent3">
-        <a:tint val="50000"/>
-      </a:schemeClr>
       <a:schemeClr val="accent4">
-        <a:tint val="50000"/>
-      </a:schemeClr>
-      <a:schemeClr val="accent5">
-        <a:tint val="50000"/>
-      </a:schemeClr>
-      <a:schemeClr val="accent6">
         <a:tint val="50000"/>
       </a:schemeClr>
     </dgm:fillClrLst>
@@ -1058,12 +1023,9 @@
     <dgm:txEffectClrLst/>
   </dgm:styleLbl>
   <dgm:styleLbl name="alignImgPlace1">
-    <dgm:fillClrLst>
-      <a:schemeClr val="accent1">
+    <dgm:fillClrLst meth="repeat">
+      <a:schemeClr val="accent4">
         <a:tint val="50000"/>
-      </a:schemeClr>
-      <a:schemeClr val="accent2">
-        <a:tint val="20000"/>
       </a:schemeClr>
     </dgm:fillClrLst>
     <dgm:linClrLst meth="repeat">
@@ -1077,12 +1039,9 @@
     <dgm:txEffectClrLst/>
   </dgm:styleLbl>
   <dgm:styleLbl name="bgImgPlace1">
-    <dgm:fillClrLst>
-      <a:schemeClr val="accent1">
+    <dgm:fillClrLst meth="repeat">
+      <a:schemeClr val="accent4">
         <a:tint val="50000"/>
-      </a:schemeClr>
-      <a:schemeClr val="accent2">
-        <a:tint val="20000"/>
       </a:schemeClr>
     </dgm:fillClrLst>
     <dgm:linClrLst meth="repeat">
@@ -1097,14 +1056,14 @@
   </dgm:styleLbl>
   <dgm:styleLbl name="sibTrans2D1">
     <dgm:fillClrLst meth="repeat">
-      <a:schemeClr val="accent2"/>
-      <a:schemeClr val="accent3"/>
-      <a:schemeClr val="accent4"/>
-      <a:schemeClr val="accent5"/>
-      <a:schemeClr val="accent6"/>
+      <a:schemeClr val="accent4">
+        <a:tint val="60000"/>
+      </a:schemeClr>
     </dgm:fillClrLst>
-    <dgm:linClrLst meth="cycle">
-      <a:schemeClr val="lt1"/>
+    <dgm:linClrLst meth="repeat">
+      <a:schemeClr val="accent4">
+        <a:tint val="60000"/>
+      </a:schemeClr>
     </dgm:linClrLst>
     <dgm:effectClrLst/>
     <dgm:txLinClrLst/>
@@ -1113,54 +1072,42 @@
   </dgm:styleLbl>
   <dgm:styleLbl name="fgSibTrans2D1">
     <dgm:fillClrLst meth="repeat">
-      <a:schemeClr val="accent2"/>
-      <a:schemeClr val="accent3"/>
-      <a:schemeClr val="accent4"/>
-      <a:schemeClr val="accent5"/>
-      <a:schemeClr val="accent6"/>
+      <a:schemeClr val="accent4">
+        <a:tint val="60000"/>
+      </a:schemeClr>
     </dgm:fillClrLst>
-    <dgm:linClrLst meth="cycle">
-      <a:schemeClr val="lt1"/>
+    <dgm:linClrLst meth="repeat">
+      <a:schemeClr val="accent4">
+        <a:tint val="60000"/>
+      </a:schemeClr>
     </dgm:linClrLst>
     <dgm:effectClrLst/>
     <dgm:txLinClrLst/>
-    <dgm:txFillClrLst meth="repeat">
-      <a:schemeClr val="lt1"/>
-    </dgm:txFillClrLst>
+    <dgm:txFillClrLst/>
     <dgm:txEffectClrLst/>
   </dgm:styleLbl>
   <dgm:styleLbl name="bgSibTrans2D1">
     <dgm:fillClrLst meth="repeat">
-      <a:schemeClr val="accent2"/>
-      <a:schemeClr val="accent3"/>
-      <a:schemeClr val="accent4"/>
-      <a:schemeClr val="accent5"/>
-      <a:schemeClr val="accent6"/>
+      <a:schemeClr val="accent4">
+        <a:tint val="60000"/>
+      </a:schemeClr>
     </dgm:fillClrLst>
-    <dgm:linClrLst meth="cycle">
-      <a:schemeClr val="lt1"/>
+    <dgm:linClrLst meth="repeat">
+      <a:schemeClr val="accent4">
+        <a:tint val="60000"/>
+      </a:schemeClr>
     </dgm:linClrLst>
     <dgm:effectClrLst/>
     <dgm:txLinClrLst/>
-    <dgm:txFillClrLst meth="repeat">
-      <a:schemeClr val="lt1"/>
-    </dgm:txFillClrLst>
+    <dgm:txFillClrLst/>
     <dgm:txEffectClrLst/>
   </dgm:styleLbl>
   <dgm:styleLbl name="sibTrans1D1">
     <dgm:fillClrLst meth="repeat">
-      <a:schemeClr val="accent2"/>
-      <a:schemeClr val="accent3"/>
       <a:schemeClr val="accent4"/>
-      <a:schemeClr val="accent5"/>
-      <a:schemeClr val="accent6"/>
     </dgm:fillClrLst>
     <dgm:linClrLst meth="repeat">
-      <a:schemeClr val="accent2"/>
-      <a:schemeClr val="accent3"/>
       <a:schemeClr val="accent4"/>
-      <a:schemeClr val="accent5"/>
-      <a:schemeClr val="accent6"/>
     </dgm:linClrLst>
     <dgm:effectClrLst/>
     <dgm:txLinClrLst/>
@@ -1171,10 +1118,10 @@
   </dgm:styleLbl>
   <dgm:styleLbl name="callout">
     <dgm:fillClrLst meth="repeat">
-      <a:schemeClr val="accent2"/>
+      <a:schemeClr val="accent4"/>
     </dgm:fillClrLst>
     <dgm:linClrLst meth="repeat">
-      <a:schemeClr val="accent2">
+      <a:schemeClr val="accent4">
         <a:tint val="50000"/>
       </a:schemeClr>
     </dgm:linClrLst>
@@ -1186,92 +1133,6 @@
     <dgm:txEffectClrLst/>
   </dgm:styleLbl>
   <dgm:styleLbl name="asst0">
-    <dgm:fillClrLst meth="repeat">
-      <a:schemeClr val="accent1"/>
-    </dgm:fillClrLst>
-    <dgm:linClrLst meth="repeat">
-      <a:schemeClr val="lt1"/>
-    </dgm:linClrLst>
-    <dgm:effectClrLst/>
-    <dgm:txLinClrLst/>
-    <dgm:txFillClrLst/>
-    <dgm:txEffectClrLst/>
-  </dgm:styleLbl>
-  <dgm:styleLbl name="asst1">
-    <dgm:fillClrLst meth="repeat">
-      <a:schemeClr val="accent2"/>
-    </dgm:fillClrLst>
-    <dgm:linClrLst meth="repeat">
-      <a:schemeClr val="lt1"/>
-    </dgm:linClrLst>
-    <dgm:effectClrLst/>
-    <dgm:txLinClrLst/>
-    <dgm:txFillClrLst/>
-    <dgm:txEffectClrLst/>
-  </dgm:styleLbl>
-  <dgm:styleLbl name="asst2">
-    <dgm:fillClrLst>
-      <a:schemeClr val="accent3"/>
-    </dgm:fillClrLst>
-    <dgm:linClrLst meth="repeat">
-      <a:schemeClr val="lt1"/>
-    </dgm:linClrLst>
-    <dgm:effectClrLst/>
-    <dgm:txLinClrLst/>
-    <dgm:txFillClrLst/>
-    <dgm:txEffectClrLst/>
-  </dgm:styleLbl>
-  <dgm:styleLbl name="asst3">
-    <dgm:fillClrLst>
-      <a:schemeClr val="accent4"/>
-    </dgm:fillClrLst>
-    <dgm:linClrLst meth="repeat">
-      <a:schemeClr val="lt1"/>
-    </dgm:linClrLst>
-    <dgm:effectClrLst/>
-    <dgm:txLinClrLst/>
-    <dgm:txFillClrLst/>
-    <dgm:txEffectClrLst/>
-  </dgm:styleLbl>
-  <dgm:styleLbl name="asst4">
-    <dgm:fillClrLst>
-      <a:schemeClr val="accent5"/>
-    </dgm:fillClrLst>
-    <dgm:linClrLst meth="repeat">
-      <a:schemeClr val="lt1"/>
-    </dgm:linClrLst>
-    <dgm:effectClrLst/>
-    <dgm:txLinClrLst/>
-    <dgm:txFillClrLst/>
-    <dgm:txEffectClrLst/>
-  </dgm:styleLbl>
-  <dgm:styleLbl name="parChTrans2D1">
-    <dgm:fillClrLst meth="repeat">
-      <a:schemeClr val="accent2"/>
-    </dgm:fillClrLst>
-    <dgm:linClrLst meth="repeat">
-      <a:schemeClr val="lt1"/>
-    </dgm:linClrLst>
-    <dgm:effectClrLst/>
-    <dgm:txLinClrLst/>
-    <dgm:txFillClrLst meth="repeat">
-      <a:schemeClr val="lt1"/>
-    </dgm:txFillClrLst>
-    <dgm:txEffectClrLst/>
-  </dgm:styleLbl>
-  <dgm:styleLbl name="parChTrans2D2">
-    <dgm:fillClrLst meth="repeat">
-      <a:schemeClr val="accent3"/>
-    </dgm:fillClrLst>
-    <dgm:linClrLst meth="repeat">
-      <a:schemeClr val="lt1"/>
-    </dgm:linClrLst>
-    <dgm:effectClrLst/>
-    <dgm:txLinClrLst/>
-    <dgm:txFillClrLst/>
-    <dgm:txEffectClrLst/>
-  </dgm:styleLbl>
-  <dgm:styleLbl name="parChTrans2D3">
     <dgm:fillClrLst meth="repeat">
       <a:schemeClr val="accent4"/>
     </dgm:fillClrLst>
@@ -1283,12 +1144,64 @@
     <dgm:txFillClrLst/>
     <dgm:txEffectClrLst/>
   </dgm:styleLbl>
-  <dgm:styleLbl name="parChTrans2D4">
+  <dgm:styleLbl name="asst1">
     <dgm:fillClrLst meth="repeat">
-      <a:schemeClr val="accent5"/>
+      <a:schemeClr val="accent4"/>
     </dgm:fillClrLst>
     <dgm:linClrLst meth="repeat">
       <a:schemeClr val="lt1"/>
+    </dgm:linClrLst>
+    <dgm:effectClrLst/>
+    <dgm:txLinClrLst/>
+    <dgm:txFillClrLst/>
+    <dgm:txEffectClrLst/>
+  </dgm:styleLbl>
+  <dgm:styleLbl name="asst2">
+    <dgm:fillClrLst meth="repeat">
+      <a:schemeClr val="accent4"/>
+    </dgm:fillClrLst>
+    <dgm:linClrLst meth="repeat">
+      <a:schemeClr val="lt1"/>
+    </dgm:linClrLst>
+    <dgm:effectClrLst/>
+    <dgm:txLinClrLst/>
+    <dgm:txFillClrLst/>
+    <dgm:txEffectClrLst/>
+  </dgm:styleLbl>
+  <dgm:styleLbl name="asst3">
+    <dgm:fillClrLst meth="repeat">
+      <a:schemeClr val="accent4"/>
+    </dgm:fillClrLst>
+    <dgm:linClrLst meth="repeat">
+      <a:schemeClr val="lt1"/>
+    </dgm:linClrLst>
+    <dgm:effectClrLst/>
+    <dgm:txLinClrLst/>
+    <dgm:txFillClrLst/>
+    <dgm:txEffectClrLst/>
+  </dgm:styleLbl>
+  <dgm:styleLbl name="asst4">
+    <dgm:fillClrLst meth="repeat">
+      <a:schemeClr val="accent4"/>
+    </dgm:fillClrLst>
+    <dgm:linClrLst meth="repeat">
+      <a:schemeClr val="lt1"/>
+    </dgm:linClrLst>
+    <dgm:effectClrLst/>
+    <dgm:txLinClrLst/>
+    <dgm:txFillClrLst/>
+    <dgm:txEffectClrLst/>
+  </dgm:styleLbl>
+  <dgm:styleLbl name="parChTrans2D1">
+    <dgm:fillClrLst meth="repeat">
+      <a:schemeClr val="accent4">
+        <a:tint val="60000"/>
+      </a:schemeClr>
+    </dgm:fillClrLst>
+    <dgm:linClrLst meth="repeat">
+      <a:schemeClr val="accent4">
+        <a:tint val="60000"/>
+      </a:schemeClr>
     </dgm:linClrLst>
     <dgm:effectClrLst/>
     <dgm:txLinClrLst/>
@@ -1297,12 +1210,56 @@
     </dgm:txFillClrLst>
     <dgm:txEffectClrLst/>
   </dgm:styleLbl>
+  <dgm:styleLbl name="parChTrans2D2">
+    <dgm:fillClrLst meth="repeat">
+      <a:schemeClr val="accent4"/>
+    </dgm:fillClrLst>
+    <dgm:linClrLst meth="repeat">
+      <a:schemeClr val="accent4"/>
+    </dgm:linClrLst>
+    <dgm:effectClrLst/>
+    <dgm:txLinClrLst/>
+    <dgm:txFillClrLst meth="repeat">
+      <a:schemeClr val="lt1"/>
+    </dgm:txFillClrLst>
+    <dgm:txEffectClrLst/>
+  </dgm:styleLbl>
+  <dgm:styleLbl name="parChTrans2D3">
+    <dgm:fillClrLst meth="repeat">
+      <a:schemeClr val="accent4"/>
+    </dgm:fillClrLst>
+    <dgm:linClrLst meth="repeat">
+      <a:schemeClr val="accent4"/>
+    </dgm:linClrLst>
+    <dgm:effectClrLst/>
+    <dgm:txLinClrLst/>
+    <dgm:txFillClrLst meth="repeat">
+      <a:schemeClr val="lt1"/>
+    </dgm:txFillClrLst>
+    <dgm:txEffectClrLst/>
+  </dgm:styleLbl>
+  <dgm:styleLbl name="parChTrans2D4">
+    <dgm:fillClrLst meth="repeat">
+      <a:schemeClr val="accent4"/>
+    </dgm:fillClrLst>
+    <dgm:linClrLst meth="repeat">
+      <a:schemeClr val="accent4"/>
+    </dgm:linClrLst>
+    <dgm:effectClrLst/>
+    <dgm:txLinClrLst/>
+    <dgm:txFillClrLst meth="repeat">
+      <a:schemeClr val="lt1"/>
+    </dgm:txFillClrLst>
+    <dgm:txEffectClrLst/>
+  </dgm:styleLbl>
   <dgm:styleLbl name="parChTrans1D1">
     <dgm:fillClrLst meth="repeat">
-      <a:schemeClr val="accent2"/>
+      <a:schemeClr val="accent4"/>
     </dgm:fillClrLst>
     <dgm:linClrLst meth="repeat">
-      <a:schemeClr val="accent1"/>
+      <a:schemeClr val="accent4">
+        <a:shade val="60000"/>
+      </a:schemeClr>
     </dgm:linClrLst>
     <dgm:effectClrLst/>
     <dgm:txLinClrLst/>
@@ -1313,12 +1270,12 @@
   </dgm:styleLbl>
   <dgm:styleLbl name="parChTrans1D2">
     <dgm:fillClrLst meth="repeat">
-      <a:schemeClr val="accent3">
-        <a:tint val="90000"/>
-      </a:schemeClr>
+      <a:schemeClr val="accent4"/>
     </dgm:fillClrLst>
     <dgm:linClrLst meth="repeat">
-      <a:schemeClr val="accent2"/>
+      <a:schemeClr val="accent4">
+        <a:shade val="60000"/>
+      </a:schemeClr>
     </dgm:linClrLst>
     <dgm:effectClrLst/>
     <dgm:txLinClrLst/>
@@ -1329,12 +1286,12 @@
   </dgm:styleLbl>
   <dgm:styleLbl name="parChTrans1D3">
     <dgm:fillClrLst meth="repeat">
-      <a:schemeClr val="accent4">
-        <a:tint val="70000"/>
-      </a:schemeClr>
+      <a:schemeClr val="accent4"/>
     </dgm:fillClrLst>
     <dgm:linClrLst meth="repeat">
-      <a:schemeClr val="accent3"/>
+      <a:schemeClr val="accent4">
+        <a:shade val="80000"/>
+      </a:schemeClr>
     </dgm:linClrLst>
     <dgm:effectClrLst/>
     <dgm:txLinClrLst/>
@@ -1345,8 +1302,24 @@
   </dgm:styleLbl>
   <dgm:styleLbl name="parChTrans1D4">
     <dgm:fillClrLst meth="repeat">
-      <a:schemeClr val="accent5">
-        <a:tint val="50000"/>
+      <a:schemeClr val="accent4"/>
+    </dgm:fillClrLst>
+    <dgm:linClrLst meth="repeat">
+      <a:schemeClr val="accent4">
+        <a:shade val="80000"/>
+      </a:schemeClr>
+    </dgm:linClrLst>
+    <dgm:effectClrLst/>
+    <dgm:txLinClrLst/>
+    <dgm:txFillClrLst meth="repeat">
+      <a:schemeClr val="tx1"/>
+    </dgm:txFillClrLst>
+    <dgm:txEffectClrLst/>
+  </dgm:styleLbl>
+  <dgm:styleLbl name="fgAcc1">
+    <dgm:fillClrLst meth="repeat">
+      <a:schemeClr val="lt1">
+        <a:alpha val="90000"/>
       </a:schemeClr>
     </dgm:fillClrLst>
     <dgm:linClrLst meth="repeat">
@@ -1355,22 +1328,18 @@
     <dgm:effectClrLst/>
     <dgm:txLinClrLst/>
     <dgm:txFillClrLst meth="repeat">
-      <a:schemeClr val="tx1"/>
+      <a:schemeClr val="dk1"/>
     </dgm:txFillClrLst>
     <dgm:txEffectClrLst/>
   </dgm:styleLbl>
-  <dgm:styleLbl name="fgAcc1">
+  <dgm:styleLbl name="conFgAcc1">
     <dgm:fillClrLst meth="repeat">
       <a:schemeClr val="lt1">
         <a:alpha val="90000"/>
       </a:schemeClr>
     </dgm:fillClrLst>
     <dgm:linClrLst meth="repeat">
-      <a:schemeClr val="accent2"/>
-      <a:schemeClr val="accent3"/>
       <a:schemeClr val="accent4"/>
-      <a:schemeClr val="accent5"/>
-      <a:schemeClr val="accent6"/>
     </dgm:linClrLst>
     <dgm:effectClrLst/>
     <dgm:txLinClrLst/>
@@ -1379,18 +1348,14 @@
     </dgm:txFillClrLst>
     <dgm:txEffectClrLst/>
   </dgm:styleLbl>
-  <dgm:styleLbl name="conFgAcc1">
+  <dgm:styleLbl name="alignAcc1">
     <dgm:fillClrLst meth="repeat">
       <a:schemeClr val="lt1">
         <a:alpha val="90000"/>
       </a:schemeClr>
     </dgm:fillClrLst>
     <dgm:linClrLst meth="repeat">
-      <a:schemeClr val="accent2"/>
-      <a:schemeClr val="accent3"/>
       <a:schemeClr val="accent4"/>
-      <a:schemeClr val="accent5"/>
-      <a:schemeClr val="accent6"/>
     </dgm:linClrLst>
     <dgm:effectClrLst/>
     <dgm:txLinClrLst/>
@@ -1399,18 +1364,14 @@
     </dgm:txFillClrLst>
     <dgm:txEffectClrLst/>
   </dgm:styleLbl>
-  <dgm:styleLbl name="alignAcc1">
+  <dgm:styleLbl name="trAlignAcc1">
     <dgm:fillClrLst meth="repeat">
       <a:schemeClr val="lt1">
-        <a:alpha val="90000"/>
+        <a:alpha val="40000"/>
       </a:schemeClr>
     </dgm:fillClrLst>
     <dgm:linClrLst meth="repeat">
-      <a:schemeClr val="accent2"/>
-      <a:schemeClr val="accent3"/>
       <a:schemeClr val="accent4"/>
-      <a:schemeClr val="accent5"/>
-      <a:schemeClr val="accent6"/>
     </dgm:linClrLst>
     <dgm:effectClrLst/>
     <dgm:txLinClrLst/>
@@ -1419,14 +1380,14 @@
     </dgm:txFillClrLst>
     <dgm:txEffectClrLst/>
   </dgm:styleLbl>
-  <dgm:styleLbl name="trAlignAcc1">
+  <dgm:styleLbl name="bgAcc1">
     <dgm:fillClrLst meth="repeat">
       <a:schemeClr val="lt1">
-        <a:alpha val="40000"/>
+        <a:alpha val="90000"/>
       </a:schemeClr>
     </dgm:fillClrLst>
     <dgm:linClrLst meth="repeat">
-      <a:schemeClr val="accent1"/>
+      <a:schemeClr val="accent4"/>
     </dgm:linClrLst>
     <dgm:effectClrLst/>
     <dgm:txLinClrLst/>
@@ -1435,18 +1396,12 @@
     </dgm:txFillClrLst>
     <dgm:txEffectClrLst/>
   </dgm:styleLbl>
-  <dgm:styleLbl name="bgAcc1">
+  <dgm:styleLbl name="solidFgAcc1">
     <dgm:fillClrLst meth="repeat">
-      <a:schemeClr val="lt1">
-        <a:alpha val="90000"/>
-      </a:schemeClr>
+      <a:schemeClr val="lt1"/>
     </dgm:fillClrLst>
     <dgm:linClrLst meth="repeat">
-      <a:schemeClr val="accent2"/>
-      <a:schemeClr val="accent3"/>
       <a:schemeClr val="accent4"/>
-      <a:schemeClr val="accent5"/>
-      <a:schemeClr val="accent6"/>
     </dgm:linClrLst>
     <dgm:effectClrLst/>
     <dgm:txLinClrLst/>
@@ -1455,16 +1410,12 @@
     </dgm:txFillClrLst>
     <dgm:txEffectClrLst/>
   </dgm:styleLbl>
-  <dgm:styleLbl name="solidFgAcc1">
+  <dgm:styleLbl name="solidAlignAcc1">
     <dgm:fillClrLst meth="repeat">
       <a:schemeClr val="lt1"/>
     </dgm:fillClrLst>
     <dgm:linClrLst meth="repeat">
-      <a:schemeClr val="accent2"/>
-      <a:schemeClr val="accent3"/>
       <a:schemeClr val="accent4"/>
-      <a:schemeClr val="accent5"/>
-      <a:schemeClr val="accent6"/>
     </dgm:linClrLst>
     <dgm:effectClrLst/>
     <dgm:txLinClrLst/>
@@ -1473,16 +1424,12 @@
     </dgm:txFillClrLst>
     <dgm:txEffectClrLst/>
   </dgm:styleLbl>
-  <dgm:styleLbl name="solidAlignAcc1">
+  <dgm:styleLbl name="solidBgAcc1">
     <dgm:fillClrLst meth="repeat">
       <a:schemeClr val="lt1"/>
     </dgm:fillClrLst>
     <dgm:linClrLst meth="repeat">
-      <a:schemeClr val="accent2"/>
-      <a:schemeClr val="accent3"/>
       <a:schemeClr val="accent4"/>
-      <a:schemeClr val="accent5"/>
-      <a:schemeClr val="accent6"/>
     </dgm:linClrLst>
     <dgm:effectClrLst/>
     <dgm:txLinClrLst/>
@@ -1491,67 +1438,17 @@
     </dgm:txFillClrLst>
     <dgm:txEffectClrLst/>
   </dgm:styleLbl>
-  <dgm:styleLbl name="solidBgAcc1">
-    <dgm:fillClrLst meth="repeat">
-      <a:schemeClr val="lt1"/>
-    </dgm:fillClrLst>
-    <dgm:linClrLst meth="repeat">
-      <a:schemeClr val="accent2"/>
-      <a:schemeClr val="accent3"/>
-      <a:schemeClr val="accent4"/>
-      <a:schemeClr val="accent5"/>
-      <a:schemeClr val="accent6"/>
-    </dgm:linClrLst>
-    <dgm:effectClrLst/>
-    <dgm:txLinClrLst/>
-    <dgm:txFillClrLst meth="repeat">
-      <a:schemeClr val="dk1"/>
-    </dgm:txFillClrLst>
-    <dgm:txEffectClrLst/>
-  </dgm:styleLbl>
   <dgm:styleLbl name="fgAccFollowNode1">
     <dgm:fillClrLst meth="repeat">
-      <a:schemeClr val="accent2">
+      <a:schemeClr val="accent4">
+        <a:alpha val="90000"/>
         <a:tint val="40000"/>
-        <a:alpha val="90000"/>
-      </a:schemeClr>
-      <a:schemeClr val="accent3">
-        <a:tint val="40000"/>
-        <a:alpha val="90000"/>
-      </a:schemeClr>
-      <a:schemeClr val="accent4">
-        <a:tint val="40000"/>
-        <a:alpha val="90000"/>
-      </a:schemeClr>
-      <a:schemeClr val="accent5">
-        <a:tint val="40000"/>
-        <a:alpha val="90000"/>
-      </a:schemeClr>
-      <a:schemeClr val="accent6">
-        <a:tint val="40000"/>
-        <a:alpha val="90000"/>
       </a:schemeClr>
     </dgm:fillClrLst>
     <dgm:linClrLst meth="repeat">
-      <a:schemeClr val="accent2">
+      <a:schemeClr val="accent4">
+        <a:alpha val="90000"/>
         <a:tint val="40000"/>
-        <a:alpha val="90000"/>
-      </a:schemeClr>
-      <a:schemeClr val="accent3">
-        <a:tint val="40000"/>
-        <a:alpha val="90000"/>
-      </a:schemeClr>
-      <a:schemeClr val="accent4">
-        <a:tint val="40000"/>
-        <a:alpha val="90000"/>
-      </a:schemeClr>
-      <a:schemeClr val="accent5">
-        <a:tint val="40000"/>
-        <a:alpha val="90000"/>
-      </a:schemeClr>
-      <a:schemeClr val="accent6">
-        <a:tint val="40000"/>
-        <a:alpha val="90000"/>
       </a:schemeClr>
     </dgm:linClrLst>
     <dgm:effectClrLst/>
@@ -1563,47 +1460,15 @@
   </dgm:styleLbl>
   <dgm:styleLbl name="alignAccFollowNode1">
     <dgm:fillClrLst meth="repeat">
-      <a:schemeClr val="accent2">
+      <a:schemeClr val="accent4">
+        <a:alpha val="90000"/>
         <a:tint val="40000"/>
-        <a:alpha val="90000"/>
-      </a:schemeClr>
-      <a:schemeClr val="accent3">
-        <a:tint val="40000"/>
-        <a:alpha val="90000"/>
-      </a:schemeClr>
-      <a:schemeClr val="accent4">
-        <a:tint val="40000"/>
-        <a:alpha val="90000"/>
-      </a:schemeClr>
-      <a:schemeClr val="accent5">
-        <a:tint val="40000"/>
-        <a:alpha val="90000"/>
-      </a:schemeClr>
-      <a:schemeClr val="accent6">
-        <a:tint val="40000"/>
-        <a:alpha val="90000"/>
       </a:schemeClr>
     </dgm:fillClrLst>
     <dgm:linClrLst meth="repeat">
-      <a:schemeClr val="accent2">
+      <a:schemeClr val="accent4">
+        <a:alpha val="90000"/>
         <a:tint val="40000"/>
-        <a:alpha val="90000"/>
-      </a:schemeClr>
-      <a:schemeClr val="accent3">
-        <a:tint val="40000"/>
-        <a:alpha val="90000"/>
-      </a:schemeClr>
-      <a:schemeClr val="accent4">
-        <a:tint val="40000"/>
-        <a:alpha val="90000"/>
-      </a:schemeClr>
-      <a:schemeClr val="accent5">
-        <a:tint val="40000"/>
-        <a:alpha val="90000"/>
-      </a:schemeClr>
-      <a:schemeClr val="accent6">
-        <a:tint val="40000"/>
-        <a:alpha val="90000"/>
       </a:schemeClr>
     </dgm:linClrLst>
     <dgm:effectClrLst/>
@@ -1615,47 +1480,15 @@
   </dgm:styleLbl>
   <dgm:styleLbl name="bgAccFollowNode1">
     <dgm:fillClrLst meth="repeat">
-      <a:schemeClr val="accent2">
+      <a:schemeClr val="accent4">
+        <a:alpha val="90000"/>
         <a:tint val="40000"/>
-        <a:alpha val="90000"/>
-      </a:schemeClr>
-      <a:schemeClr val="accent3">
-        <a:tint val="40000"/>
-        <a:alpha val="90000"/>
-      </a:schemeClr>
-      <a:schemeClr val="accent4">
-        <a:tint val="40000"/>
-        <a:alpha val="90000"/>
-      </a:schemeClr>
-      <a:schemeClr val="accent5">
-        <a:tint val="40000"/>
-        <a:alpha val="90000"/>
-      </a:schemeClr>
-      <a:schemeClr val="accent6">
-        <a:tint val="40000"/>
-        <a:alpha val="90000"/>
       </a:schemeClr>
     </dgm:fillClrLst>
     <dgm:linClrLst meth="repeat">
-      <a:schemeClr val="accent2">
+      <a:schemeClr val="accent4">
+        <a:alpha val="90000"/>
         <a:tint val="40000"/>
-        <a:alpha val="90000"/>
-      </a:schemeClr>
-      <a:schemeClr val="accent3">
-        <a:tint val="40000"/>
-        <a:alpha val="90000"/>
-      </a:schemeClr>
-      <a:schemeClr val="accent4">
-        <a:tint val="40000"/>
-        <a:alpha val="90000"/>
-      </a:schemeClr>
-      <a:schemeClr val="accent5">
-        <a:tint val="40000"/>
-        <a:alpha val="90000"/>
-      </a:schemeClr>
-      <a:schemeClr val="accent6">
-        <a:tint val="40000"/>
-        <a:alpha val="90000"/>
       </a:schemeClr>
     </dgm:linClrLst>
     <dgm:effectClrLst/>
@@ -1671,55 +1504,7 @@
         <a:alpha val="90000"/>
       </a:schemeClr>
     </dgm:fillClrLst>
-    <dgm:linClrLst>
-      <a:schemeClr val="accent1"/>
-    </dgm:linClrLst>
-    <dgm:effectClrLst/>
-    <dgm:txLinClrLst/>
-    <dgm:txFillClrLst meth="repeat">
-      <a:schemeClr val="dk1"/>
-    </dgm:txFillClrLst>
-    <dgm:txEffectClrLst/>
-  </dgm:styleLbl>
-  <dgm:styleLbl name="fgAcc2">
-    <dgm:fillClrLst meth="repeat">
-      <a:schemeClr val="lt1">
-        <a:alpha val="90000"/>
-      </a:schemeClr>
-    </dgm:fillClrLst>
-    <dgm:linClrLst>
-      <a:schemeClr val="accent2"/>
-    </dgm:linClrLst>
-    <dgm:effectClrLst/>
-    <dgm:txLinClrLst/>
-    <dgm:txFillClrLst meth="repeat">
-      <a:schemeClr val="dk1"/>
-    </dgm:txFillClrLst>
-    <dgm:txEffectClrLst/>
-  </dgm:styleLbl>
-  <dgm:styleLbl name="fgAcc3">
-    <dgm:fillClrLst meth="repeat">
-      <a:schemeClr val="lt1">
-        <a:alpha val="90000"/>
-      </a:schemeClr>
-    </dgm:fillClrLst>
-    <dgm:linClrLst>
-      <a:schemeClr val="accent3"/>
-    </dgm:linClrLst>
-    <dgm:effectClrLst/>
-    <dgm:txLinClrLst/>
-    <dgm:txFillClrLst meth="repeat">
-      <a:schemeClr val="dk1"/>
-    </dgm:txFillClrLst>
-    <dgm:txEffectClrLst/>
-  </dgm:styleLbl>
-  <dgm:styleLbl name="fgAcc4">
-    <dgm:fillClrLst meth="repeat">
-      <a:schemeClr val="lt1">
-        <a:alpha val="90000"/>
-      </a:schemeClr>
-    </dgm:fillClrLst>
-    <dgm:linClrLst>
+    <dgm:linClrLst meth="repeat">
       <a:schemeClr val="accent4"/>
     </dgm:linClrLst>
     <dgm:effectClrLst/>
@@ -1729,14 +1514,14 @@
     </dgm:txFillClrLst>
     <dgm:txEffectClrLst/>
   </dgm:styleLbl>
-  <dgm:styleLbl name="bgShp">
+  <dgm:styleLbl name="fgAcc2">
     <dgm:fillClrLst meth="repeat">
-      <a:schemeClr val="accent2">
-        <a:tint val="40000"/>
+      <a:schemeClr val="lt1">
+        <a:alpha val="90000"/>
       </a:schemeClr>
     </dgm:fillClrLst>
     <dgm:linClrLst meth="repeat">
-      <a:schemeClr val="dk1"/>
+      <a:schemeClr val="accent4"/>
     </dgm:linClrLst>
     <dgm:effectClrLst/>
     <dgm:txLinClrLst/>
@@ -1745,14 +1530,62 @@
     </dgm:txFillClrLst>
     <dgm:txEffectClrLst/>
   </dgm:styleLbl>
-  <dgm:styleLbl name="dkBgShp">
+  <dgm:styleLbl name="fgAcc3">
     <dgm:fillClrLst meth="repeat">
-      <a:schemeClr val="accent2">
-        <a:shade val="90000"/>
+      <a:schemeClr val="lt1">
+        <a:alpha val="90000"/>
       </a:schemeClr>
     </dgm:fillClrLst>
     <dgm:linClrLst meth="repeat">
+      <a:schemeClr val="accent4"/>
+    </dgm:linClrLst>
+    <dgm:effectClrLst/>
+    <dgm:txLinClrLst/>
+    <dgm:txFillClrLst meth="repeat">
       <a:schemeClr val="dk1"/>
+    </dgm:txFillClrLst>
+    <dgm:txEffectClrLst/>
+  </dgm:styleLbl>
+  <dgm:styleLbl name="fgAcc4">
+    <dgm:fillClrLst meth="repeat">
+      <a:schemeClr val="lt1">
+        <a:alpha val="90000"/>
+      </a:schemeClr>
+    </dgm:fillClrLst>
+    <dgm:linClrLst meth="repeat">
+      <a:schemeClr val="accent4"/>
+    </dgm:linClrLst>
+    <dgm:effectClrLst/>
+    <dgm:txLinClrLst/>
+    <dgm:txFillClrLst meth="repeat">
+      <a:schemeClr val="dk1"/>
+    </dgm:txFillClrLst>
+    <dgm:txEffectClrLst/>
+  </dgm:styleLbl>
+  <dgm:styleLbl name="bgShp">
+    <dgm:fillClrLst meth="repeat">
+      <a:schemeClr val="accent4">
+        <a:tint val="40000"/>
+      </a:schemeClr>
+    </dgm:fillClrLst>
+    <dgm:linClrLst meth="repeat">
+      <a:schemeClr val="accent4"/>
+    </dgm:linClrLst>
+    <dgm:effectClrLst/>
+    <dgm:txLinClrLst/>
+    <dgm:txFillClrLst meth="repeat">
+      <a:schemeClr val="dk1"/>
+    </dgm:txFillClrLst>
+    <dgm:txEffectClrLst/>
+  </dgm:styleLbl>
+  <dgm:styleLbl name="dkBgShp">
+    <dgm:fillClrLst meth="repeat">
+      <a:schemeClr val="accent4">
+        <a:shade val="80000"/>
+      </a:schemeClr>
+    </dgm:fillClrLst>
+    <dgm:linClrLst meth="repeat">
+      <a:schemeClr val="accent4"/>
     </dgm:linClrLst>
     <dgm:effectClrLst/>
     <dgm:txLinClrLst/>
@@ -1763,13 +1596,13 @@
   </dgm:styleLbl>
   <dgm:styleLbl name="trBgShp">
     <dgm:fillClrLst meth="repeat">
-      <a:schemeClr val="accent1">
+      <a:schemeClr val="accent4">
         <a:tint val="50000"/>
         <a:alpha val="40000"/>
       </a:schemeClr>
     </dgm:fillClrLst>
     <dgm:linClrLst meth="repeat">
-      <a:schemeClr val="accent2"/>
+      <a:schemeClr val="accent4"/>
     </dgm:linClrLst>
     <dgm:effectClrLst/>
     <dgm:txLinClrLst/>
@@ -1780,8 +1613,8 @@
   </dgm:styleLbl>
   <dgm:styleLbl name="fgShp">
     <dgm:fillClrLst meth="repeat">
-      <a:schemeClr val="accent2">
-        <a:tint val="40000"/>
+      <a:schemeClr val="accent4">
+        <a:tint val="60000"/>
       </a:schemeClr>
     </dgm:fillClrLst>
     <dgm:linClrLst meth="repeat">
@@ -2060,7 +1893,7 @@
 <dgm:dataModel xmlns:dgm="http://schemas.openxmlformats.org/drawingml/2006/diagram" xmlns:a="http://schemas.openxmlformats.org/drawingml/2006/main">
   <dgm:ptLst>
     <dgm:pt modelId="{DEFE90E0-E9D9-468C-8BA0-207D32ED87DD}" type="doc">
-      <dgm:prSet loTypeId="urn:microsoft.com/office/officeart/2005/8/layout/hierarchy1" loCatId="hierarchy" qsTypeId="urn:microsoft.com/office/officeart/2005/8/quickstyle/simple4" qsCatId="simple" csTypeId="urn:microsoft.com/office/officeart/2005/8/colors/colorful1" csCatId="colorful"/>
+      <dgm:prSet loTypeId="urn:microsoft.com/office/officeart/2005/8/layout/vProcess5" loCatId="process" qsTypeId="urn:microsoft.com/office/officeart/2005/8/quickstyle/simple4" qsCatId="simple" csTypeId="urn:microsoft.com/office/officeart/2005/8/colors/accent4_2" csCatId="accent4"/>
       <dgm:spPr/>
       <dgm:t>
         <a:bodyPr/>
@@ -2178,114 +2011,109 @@
         </a:p>
       </dgm:t>
     </dgm:pt>
-    <dgm:pt modelId="{23609652-C529-478B-928F-B0197D27F14F}" type="pres">
-      <dgm:prSet presAssocID="{DEFE90E0-E9D9-468C-8BA0-207D32ED87DD}" presName="hierChild1" presStyleCnt="0">
+    <dgm:pt modelId="{1093A6F8-4B6A-487E-B978-E0E9D42FADC9}" type="pres">
+      <dgm:prSet presAssocID="{DEFE90E0-E9D9-468C-8BA0-207D32ED87DD}" presName="outerComposite" presStyleCnt="0">
         <dgm:presLayoutVars>
-          <dgm:chPref val="1"/>
+          <dgm:chMax val="5"/>
           <dgm:dir/>
-          <dgm:animOne val="branch"/>
-          <dgm:animLvl val="lvl"/>
-          <dgm:resizeHandles/>
+          <dgm:resizeHandles val="exact"/>
         </dgm:presLayoutVars>
       </dgm:prSet>
       <dgm:spPr/>
     </dgm:pt>
-    <dgm:pt modelId="{5575963D-8D16-47E4-A476-48799840B73B}" type="pres">
-      <dgm:prSet presAssocID="{8CB66B61-6D8C-476A-B6D3-EF6B9EFC87E0}" presName="hierRoot1" presStyleCnt="0"/>
+    <dgm:pt modelId="{97200CA2-2313-4F2B-ACBE-3A89BE46A2EB}" type="pres">
+      <dgm:prSet presAssocID="{DEFE90E0-E9D9-468C-8BA0-207D32ED87DD}" presName="dummyMaxCanvas" presStyleCnt="0">
+        <dgm:presLayoutVars/>
+      </dgm:prSet>
       <dgm:spPr/>
     </dgm:pt>
-    <dgm:pt modelId="{BA128FE5-8DCC-4D8F-9AE1-A985261267E3}" type="pres">
-      <dgm:prSet presAssocID="{8CB66B61-6D8C-476A-B6D3-EF6B9EFC87E0}" presName="composite" presStyleCnt="0"/>
-      <dgm:spPr/>
-    </dgm:pt>
-    <dgm:pt modelId="{5F2AEF09-E59B-430A-BB22-0277E6D8CFA9}" type="pres">
-      <dgm:prSet presAssocID="{8CB66B61-6D8C-476A-B6D3-EF6B9EFC87E0}" presName="background" presStyleLbl="node0" presStyleIdx="0" presStyleCnt="3"/>
-      <dgm:spPr/>
-    </dgm:pt>
-    <dgm:pt modelId="{E2F16E59-3A7F-4DDF-8655-40A0A26F1BD4}" type="pres">
-      <dgm:prSet presAssocID="{8CB66B61-6D8C-476A-B6D3-EF6B9EFC87E0}" presName="text" presStyleLbl="fgAcc0" presStyleIdx="0" presStyleCnt="3">
+    <dgm:pt modelId="{1B590B65-C8C9-441A-969C-D21003777B64}" type="pres">
+      <dgm:prSet presAssocID="{DEFE90E0-E9D9-468C-8BA0-207D32ED87DD}" presName="ThreeNodes_1" presStyleLbl="node1" presStyleIdx="0" presStyleCnt="3">
         <dgm:presLayoutVars>
-          <dgm:chPref val="3"/>
+          <dgm:bulletEnabled val="1"/>
         </dgm:presLayoutVars>
       </dgm:prSet>
       <dgm:spPr/>
     </dgm:pt>
-    <dgm:pt modelId="{00809D5E-070A-4819-8EEF-9FB0A9D6CA72}" type="pres">
-      <dgm:prSet presAssocID="{8CB66B61-6D8C-476A-B6D3-EF6B9EFC87E0}" presName="hierChild2" presStyleCnt="0"/>
-      <dgm:spPr/>
-    </dgm:pt>
-    <dgm:pt modelId="{7B07FFD7-B033-4677-A7F3-6EB3FC7712E0}" type="pres">
-      <dgm:prSet presAssocID="{B02FABFD-C35E-4467-BA37-39C572D66AA5}" presName="hierRoot1" presStyleCnt="0"/>
-      <dgm:spPr/>
-    </dgm:pt>
-    <dgm:pt modelId="{C2D4093B-78C6-4ECE-A2B6-90E7E3CD971B}" type="pres">
-      <dgm:prSet presAssocID="{B02FABFD-C35E-4467-BA37-39C572D66AA5}" presName="composite" presStyleCnt="0"/>
-      <dgm:spPr/>
-    </dgm:pt>
-    <dgm:pt modelId="{56164882-75A8-43F2-B40B-0EC3993A6D2A}" type="pres">
-      <dgm:prSet presAssocID="{B02FABFD-C35E-4467-BA37-39C572D66AA5}" presName="background" presStyleLbl="node0" presStyleIdx="1" presStyleCnt="3"/>
-      <dgm:spPr/>
-    </dgm:pt>
-    <dgm:pt modelId="{3BFC3610-8B46-436E-BF17-A2B1679B7ECA}" type="pres">
-      <dgm:prSet presAssocID="{B02FABFD-C35E-4467-BA37-39C572D66AA5}" presName="text" presStyleLbl="fgAcc0" presStyleIdx="1" presStyleCnt="3">
+    <dgm:pt modelId="{8ABEE9C2-5782-4BD8-AFAF-E9FA6248E268}" type="pres">
+      <dgm:prSet presAssocID="{DEFE90E0-E9D9-468C-8BA0-207D32ED87DD}" presName="ThreeNodes_2" presStyleLbl="node1" presStyleIdx="1" presStyleCnt="3">
         <dgm:presLayoutVars>
-          <dgm:chPref val="3"/>
+          <dgm:bulletEnabled val="1"/>
         </dgm:presLayoutVars>
       </dgm:prSet>
       <dgm:spPr/>
     </dgm:pt>
-    <dgm:pt modelId="{2C5DF845-F565-40F8-B7AA-2B146DE97547}" type="pres">
-      <dgm:prSet presAssocID="{B02FABFD-C35E-4467-BA37-39C572D66AA5}" presName="hierChild2" presStyleCnt="0"/>
-      <dgm:spPr/>
-    </dgm:pt>
-    <dgm:pt modelId="{4C5FFCBF-C8BC-471D-AE1B-0AE167DCEE33}" type="pres">
-      <dgm:prSet presAssocID="{1B418AF8-0519-4599-92F0-42DF18FFA3FC}" presName="hierRoot1" presStyleCnt="0"/>
-      <dgm:spPr/>
-    </dgm:pt>
-    <dgm:pt modelId="{253A3B09-D4C6-44EC-85EB-E0E7CBB93944}" type="pres">
-      <dgm:prSet presAssocID="{1B418AF8-0519-4599-92F0-42DF18FFA3FC}" presName="composite" presStyleCnt="0"/>
-      <dgm:spPr/>
-    </dgm:pt>
-    <dgm:pt modelId="{6CC9C727-6A1C-44C3-9E81-78D582FD8CD8}" type="pres">
-      <dgm:prSet presAssocID="{1B418AF8-0519-4599-92F0-42DF18FFA3FC}" presName="background" presStyleLbl="node0" presStyleIdx="2" presStyleCnt="3"/>
-      <dgm:spPr/>
-    </dgm:pt>
-    <dgm:pt modelId="{182EF8D1-4C32-4660-9A22-E0118CBD163F}" type="pres">
-      <dgm:prSet presAssocID="{1B418AF8-0519-4599-92F0-42DF18FFA3FC}" presName="text" presStyleLbl="fgAcc0" presStyleIdx="2" presStyleCnt="3">
+    <dgm:pt modelId="{96A6DF29-E7A6-4D66-B110-6A9CFCDC5DDF}" type="pres">
+      <dgm:prSet presAssocID="{DEFE90E0-E9D9-468C-8BA0-207D32ED87DD}" presName="ThreeNodes_3" presStyleLbl="node1" presStyleIdx="2" presStyleCnt="3">
         <dgm:presLayoutVars>
-          <dgm:chPref val="3"/>
+          <dgm:bulletEnabled val="1"/>
         </dgm:presLayoutVars>
       </dgm:prSet>
       <dgm:spPr/>
     </dgm:pt>
-    <dgm:pt modelId="{2D42BD18-7C17-4C9A-A3AC-D3DFC822B838}" type="pres">
-      <dgm:prSet presAssocID="{1B418AF8-0519-4599-92F0-42DF18FFA3FC}" presName="hierChild2" presStyleCnt="0"/>
+    <dgm:pt modelId="{3EE1DA01-E508-488B-A2B7-17EF1381B5B1}" type="pres">
+      <dgm:prSet presAssocID="{DEFE90E0-E9D9-468C-8BA0-207D32ED87DD}" presName="ThreeConn_1-2" presStyleLbl="fgAccFollowNode1" presStyleIdx="0" presStyleCnt="2">
+        <dgm:presLayoutVars>
+          <dgm:bulletEnabled val="1"/>
+        </dgm:presLayoutVars>
+      </dgm:prSet>
+      <dgm:spPr/>
+    </dgm:pt>
+    <dgm:pt modelId="{21A9CE28-5885-4E78-94CA-2FB4F1A5C28A}" type="pres">
+      <dgm:prSet presAssocID="{DEFE90E0-E9D9-468C-8BA0-207D32ED87DD}" presName="ThreeConn_2-3" presStyleLbl="fgAccFollowNode1" presStyleIdx="1" presStyleCnt="2">
+        <dgm:presLayoutVars>
+          <dgm:bulletEnabled val="1"/>
+        </dgm:presLayoutVars>
+      </dgm:prSet>
+      <dgm:spPr/>
+    </dgm:pt>
+    <dgm:pt modelId="{0E65FC7B-9A39-4E03-B919-DB1AA40F5106}" type="pres">
+      <dgm:prSet presAssocID="{DEFE90E0-E9D9-468C-8BA0-207D32ED87DD}" presName="ThreeNodes_1_text" presStyleLbl="node1" presStyleIdx="2" presStyleCnt="3">
+        <dgm:presLayoutVars>
+          <dgm:bulletEnabled val="1"/>
+        </dgm:presLayoutVars>
+      </dgm:prSet>
+      <dgm:spPr/>
+    </dgm:pt>
+    <dgm:pt modelId="{6EABC6D8-725C-49BE-86BB-1588DF4AD9FF}" type="pres">
+      <dgm:prSet presAssocID="{DEFE90E0-E9D9-468C-8BA0-207D32ED87DD}" presName="ThreeNodes_2_text" presStyleLbl="node1" presStyleIdx="2" presStyleCnt="3">
+        <dgm:presLayoutVars>
+          <dgm:bulletEnabled val="1"/>
+        </dgm:presLayoutVars>
+      </dgm:prSet>
+      <dgm:spPr/>
+    </dgm:pt>
+    <dgm:pt modelId="{88AFC986-FFA9-41F5-B957-8EA98964317C}" type="pres">
+      <dgm:prSet presAssocID="{DEFE90E0-E9D9-468C-8BA0-207D32ED87DD}" presName="ThreeNodes_3_text" presStyleLbl="node1" presStyleIdx="2" presStyleCnt="3">
+        <dgm:presLayoutVars>
+          <dgm:bulletEnabled val="1"/>
+        </dgm:presLayoutVars>
+      </dgm:prSet>
       <dgm:spPr/>
     </dgm:pt>
   </dgm:ptLst>
   <dgm:cxnLst>
-    <dgm:cxn modelId="{92DF2D3E-DDD9-4AD5-8EBA-68A2FDFA5E29}" type="presOf" srcId="{1B418AF8-0519-4599-92F0-42DF18FFA3FC}" destId="{182EF8D1-4C32-4660-9A22-E0118CBD163F}" srcOrd="0" destOrd="0" presId="urn:microsoft.com/office/officeart/2005/8/layout/hierarchy1"/>
-    <dgm:cxn modelId="{D616863F-EE27-442B-93C7-0EDF1E150791}" type="presOf" srcId="{DEFE90E0-E9D9-468C-8BA0-207D32ED87DD}" destId="{23609652-C529-478B-928F-B0197D27F14F}" srcOrd="0" destOrd="0" presId="urn:microsoft.com/office/officeart/2005/8/layout/hierarchy1"/>
+    <dgm:cxn modelId="{53E1F605-D7E5-4699-B3F2-E22675433A50}" type="presOf" srcId="{B02FABFD-C35E-4467-BA37-39C572D66AA5}" destId="{6EABC6D8-725C-49BE-86BB-1588DF4AD9FF}" srcOrd="1" destOrd="0" presId="urn:microsoft.com/office/officeart/2005/8/layout/vProcess5"/>
+    <dgm:cxn modelId="{16E21411-17FF-421C-BECD-FF76F74C35F8}" type="presOf" srcId="{1B418AF8-0519-4599-92F0-42DF18FFA3FC}" destId="{96A6DF29-E7A6-4D66-B110-6A9CFCDC5DDF}" srcOrd="0" destOrd="0" presId="urn:microsoft.com/office/officeart/2005/8/layout/vProcess5"/>
+    <dgm:cxn modelId="{73B9D05F-E705-4CF1-9383-9E0773C15631}" type="presOf" srcId="{8CB66B61-6D8C-476A-B6D3-EF6B9EFC87E0}" destId="{1B590B65-C8C9-441A-969C-D21003777B64}" srcOrd="0" destOrd="0" presId="urn:microsoft.com/office/officeart/2005/8/layout/vProcess5"/>
+    <dgm:cxn modelId="{74A37E67-32AD-4F04-9EF2-EDE62F84C37E}" type="presOf" srcId="{B02FABFD-C35E-4467-BA37-39C572D66AA5}" destId="{8ABEE9C2-5782-4BD8-AFAF-E9FA6248E268}" srcOrd="0" destOrd="0" presId="urn:microsoft.com/office/officeart/2005/8/layout/vProcess5"/>
     <dgm:cxn modelId="{331E7F4C-5715-4961-BCD6-AFE58394869E}" srcId="{DEFE90E0-E9D9-468C-8BA0-207D32ED87DD}" destId="{1B418AF8-0519-4599-92F0-42DF18FFA3FC}" srcOrd="2" destOrd="0" parTransId="{CECBAC92-80E2-4F8E-B199-37D1781C64B1}" sibTransId="{0B959A7F-2871-4EBC-BCF0-0802AB751288}"/>
     <dgm:cxn modelId="{CA62707C-5675-472D-818A-5DB5DB0B8974}" srcId="{DEFE90E0-E9D9-468C-8BA0-207D32ED87DD}" destId="{8CB66B61-6D8C-476A-B6D3-EF6B9EFC87E0}" srcOrd="0" destOrd="0" parTransId="{A03AAF81-6E5C-422E-B5B3-0767CC39391D}" sibTransId="{EC54041D-EA04-4F61-8425-ACA30640C502}"/>
-    <dgm:cxn modelId="{B706F0A9-604F-427B-9D79-6C57509D0028}" type="presOf" srcId="{8CB66B61-6D8C-476A-B6D3-EF6B9EFC87E0}" destId="{E2F16E59-3A7F-4DDF-8655-40A0A26F1BD4}" srcOrd="0" destOrd="0" presId="urn:microsoft.com/office/officeart/2005/8/layout/hierarchy1"/>
+    <dgm:cxn modelId="{09B5E685-157B-41A0-8C43-1BF6B83DA7D7}" type="presOf" srcId="{A8AD8669-D61F-41FD-8701-078AB074DFC7}" destId="{21A9CE28-5885-4E78-94CA-2FB4F1A5C28A}" srcOrd="0" destOrd="0" presId="urn:microsoft.com/office/officeart/2005/8/layout/vProcess5"/>
+    <dgm:cxn modelId="{F286B889-9555-4044-BD81-615E4150D98C}" type="presOf" srcId="{8CB66B61-6D8C-476A-B6D3-EF6B9EFC87E0}" destId="{0E65FC7B-9A39-4E03-B919-DB1AA40F5106}" srcOrd="1" destOrd="0" presId="urn:microsoft.com/office/officeart/2005/8/layout/vProcess5"/>
     <dgm:cxn modelId="{C91A13CD-CA78-4273-9B95-D353256AF6DB}" srcId="{DEFE90E0-E9D9-468C-8BA0-207D32ED87DD}" destId="{B02FABFD-C35E-4467-BA37-39C572D66AA5}" srcOrd="1" destOrd="0" parTransId="{CB674EE9-77B2-4BFE-B7D2-4FEE5FC58328}" sibTransId="{A8AD8669-D61F-41FD-8701-078AB074DFC7}"/>
-    <dgm:cxn modelId="{3C34E6CE-F4DC-4015-85DD-5262CD1F6AED}" type="presOf" srcId="{B02FABFD-C35E-4467-BA37-39C572D66AA5}" destId="{3BFC3610-8B46-436E-BF17-A2B1679B7ECA}" srcOrd="0" destOrd="0" presId="urn:microsoft.com/office/officeart/2005/8/layout/hierarchy1"/>
-    <dgm:cxn modelId="{1FD6A365-48B1-436C-BFCA-023C2227260A}" type="presParOf" srcId="{23609652-C529-478B-928F-B0197D27F14F}" destId="{5575963D-8D16-47E4-A476-48799840B73B}" srcOrd="0" destOrd="0" presId="urn:microsoft.com/office/officeart/2005/8/layout/hierarchy1"/>
-    <dgm:cxn modelId="{8BB06FA2-CF1B-478F-B61A-E39461518680}" type="presParOf" srcId="{5575963D-8D16-47E4-A476-48799840B73B}" destId="{BA128FE5-8DCC-4D8F-9AE1-A985261267E3}" srcOrd="0" destOrd="0" presId="urn:microsoft.com/office/officeart/2005/8/layout/hierarchy1"/>
-    <dgm:cxn modelId="{EACF52C6-CE06-4D11-9526-83EB16093CFA}" type="presParOf" srcId="{BA128FE5-8DCC-4D8F-9AE1-A985261267E3}" destId="{5F2AEF09-E59B-430A-BB22-0277E6D8CFA9}" srcOrd="0" destOrd="0" presId="urn:microsoft.com/office/officeart/2005/8/layout/hierarchy1"/>
-    <dgm:cxn modelId="{09981972-20A4-4D98-89A1-071568960B46}" type="presParOf" srcId="{BA128FE5-8DCC-4D8F-9AE1-A985261267E3}" destId="{E2F16E59-3A7F-4DDF-8655-40A0A26F1BD4}" srcOrd="1" destOrd="0" presId="urn:microsoft.com/office/officeart/2005/8/layout/hierarchy1"/>
-    <dgm:cxn modelId="{C6C690B1-8996-4E20-A5DD-64DE9163A225}" type="presParOf" srcId="{5575963D-8D16-47E4-A476-48799840B73B}" destId="{00809D5E-070A-4819-8EEF-9FB0A9D6CA72}" srcOrd="1" destOrd="0" presId="urn:microsoft.com/office/officeart/2005/8/layout/hierarchy1"/>
-    <dgm:cxn modelId="{1D9AE461-728E-4942-AFDC-FEEBFB6C27E2}" type="presParOf" srcId="{23609652-C529-478B-928F-B0197D27F14F}" destId="{7B07FFD7-B033-4677-A7F3-6EB3FC7712E0}" srcOrd="1" destOrd="0" presId="urn:microsoft.com/office/officeart/2005/8/layout/hierarchy1"/>
-    <dgm:cxn modelId="{2523FDAF-01F6-4B64-9E63-C7D68B0817B8}" type="presParOf" srcId="{7B07FFD7-B033-4677-A7F3-6EB3FC7712E0}" destId="{C2D4093B-78C6-4ECE-A2B6-90E7E3CD971B}" srcOrd="0" destOrd="0" presId="urn:microsoft.com/office/officeart/2005/8/layout/hierarchy1"/>
-    <dgm:cxn modelId="{7C4551E2-09C9-4AF7-9EE9-F54EEFB8ED7D}" type="presParOf" srcId="{C2D4093B-78C6-4ECE-A2B6-90E7E3CD971B}" destId="{56164882-75A8-43F2-B40B-0EC3993A6D2A}" srcOrd="0" destOrd="0" presId="urn:microsoft.com/office/officeart/2005/8/layout/hierarchy1"/>
-    <dgm:cxn modelId="{CE15ECEB-1A81-4778-90E2-3E26823F65E4}" type="presParOf" srcId="{C2D4093B-78C6-4ECE-A2B6-90E7E3CD971B}" destId="{3BFC3610-8B46-436E-BF17-A2B1679B7ECA}" srcOrd="1" destOrd="0" presId="urn:microsoft.com/office/officeart/2005/8/layout/hierarchy1"/>
-    <dgm:cxn modelId="{08BCD074-ED3C-4BF1-AB53-0A24843255E3}" type="presParOf" srcId="{7B07FFD7-B033-4677-A7F3-6EB3FC7712E0}" destId="{2C5DF845-F565-40F8-B7AA-2B146DE97547}" srcOrd="1" destOrd="0" presId="urn:microsoft.com/office/officeart/2005/8/layout/hierarchy1"/>
-    <dgm:cxn modelId="{857CF894-5A22-416A-B468-16086BE65C87}" type="presParOf" srcId="{23609652-C529-478B-928F-B0197D27F14F}" destId="{4C5FFCBF-C8BC-471D-AE1B-0AE167DCEE33}" srcOrd="2" destOrd="0" presId="urn:microsoft.com/office/officeart/2005/8/layout/hierarchy1"/>
-    <dgm:cxn modelId="{A81A8799-C1D9-40B5-9D43-7F92F563F1E0}" type="presParOf" srcId="{4C5FFCBF-C8BC-471D-AE1B-0AE167DCEE33}" destId="{253A3B09-D4C6-44EC-85EB-E0E7CBB93944}" srcOrd="0" destOrd="0" presId="urn:microsoft.com/office/officeart/2005/8/layout/hierarchy1"/>
-    <dgm:cxn modelId="{A5C9AC85-59E9-4D23-A986-A84CAEDE9FC0}" type="presParOf" srcId="{253A3B09-D4C6-44EC-85EB-E0E7CBB93944}" destId="{6CC9C727-6A1C-44C3-9E81-78D582FD8CD8}" srcOrd="0" destOrd="0" presId="urn:microsoft.com/office/officeart/2005/8/layout/hierarchy1"/>
-    <dgm:cxn modelId="{2C893AB9-01D3-42D4-A107-197F52205E02}" type="presParOf" srcId="{253A3B09-D4C6-44EC-85EB-E0E7CBB93944}" destId="{182EF8D1-4C32-4660-9A22-E0118CBD163F}" srcOrd="1" destOrd="0" presId="urn:microsoft.com/office/officeart/2005/8/layout/hierarchy1"/>
-    <dgm:cxn modelId="{D6AC6E01-8C27-4DD3-9784-D48647E93D40}" type="presParOf" srcId="{4C5FFCBF-C8BC-471D-AE1B-0AE167DCEE33}" destId="{2D42BD18-7C17-4C9A-A3AC-D3DFC822B838}" srcOrd="1" destOrd="0" presId="urn:microsoft.com/office/officeart/2005/8/layout/hierarchy1"/>
+    <dgm:cxn modelId="{F8717FDB-9675-4345-AF01-6636F600A830}" type="presOf" srcId="{EC54041D-EA04-4F61-8425-ACA30640C502}" destId="{3EE1DA01-E508-488B-A2B7-17EF1381B5B1}" srcOrd="0" destOrd="0" presId="urn:microsoft.com/office/officeart/2005/8/layout/vProcess5"/>
+    <dgm:cxn modelId="{680354F2-C658-4940-83E7-95AAB1680E04}" type="presOf" srcId="{DEFE90E0-E9D9-468C-8BA0-207D32ED87DD}" destId="{1093A6F8-4B6A-487E-B978-E0E9D42FADC9}" srcOrd="0" destOrd="0" presId="urn:microsoft.com/office/officeart/2005/8/layout/vProcess5"/>
+    <dgm:cxn modelId="{80FC50FA-FE90-476D-816E-CDE29A604410}" type="presOf" srcId="{1B418AF8-0519-4599-92F0-42DF18FFA3FC}" destId="{88AFC986-FFA9-41F5-B957-8EA98964317C}" srcOrd="1" destOrd="0" presId="urn:microsoft.com/office/officeart/2005/8/layout/vProcess5"/>
+    <dgm:cxn modelId="{8A0F2A37-BCC0-4284-848E-BA0196827436}" type="presParOf" srcId="{1093A6F8-4B6A-487E-B978-E0E9D42FADC9}" destId="{97200CA2-2313-4F2B-ACBE-3A89BE46A2EB}" srcOrd="0" destOrd="0" presId="urn:microsoft.com/office/officeart/2005/8/layout/vProcess5"/>
+    <dgm:cxn modelId="{4BF20C8E-333B-4646-B590-EADDDF4434FD}" type="presParOf" srcId="{1093A6F8-4B6A-487E-B978-E0E9D42FADC9}" destId="{1B590B65-C8C9-441A-969C-D21003777B64}" srcOrd="1" destOrd="0" presId="urn:microsoft.com/office/officeart/2005/8/layout/vProcess5"/>
+    <dgm:cxn modelId="{4E2C5FBC-3B53-4419-A56B-2D8259915949}" type="presParOf" srcId="{1093A6F8-4B6A-487E-B978-E0E9D42FADC9}" destId="{8ABEE9C2-5782-4BD8-AFAF-E9FA6248E268}" srcOrd="2" destOrd="0" presId="urn:microsoft.com/office/officeart/2005/8/layout/vProcess5"/>
+    <dgm:cxn modelId="{E47CD090-D626-4683-AFBD-58A902174FE3}" type="presParOf" srcId="{1093A6F8-4B6A-487E-B978-E0E9D42FADC9}" destId="{96A6DF29-E7A6-4D66-B110-6A9CFCDC5DDF}" srcOrd="3" destOrd="0" presId="urn:microsoft.com/office/officeart/2005/8/layout/vProcess5"/>
+    <dgm:cxn modelId="{CACFF988-B4A7-450D-800A-E1343A2734AF}" type="presParOf" srcId="{1093A6F8-4B6A-487E-B978-E0E9D42FADC9}" destId="{3EE1DA01-E508-488B-A2B7-17EF1381B5B1}" srcOrd="4" destOrd="0" presId="urn:microsoft.com/office/officeart/2005/8/layout/vProcess5"/>
+    <dgm:cxn modelId="{BF97038B-E636-437C-9C82-C32A76535A0C}" type="presParOf" srcId="{1093A6F8-4B6A-487E-B978-E0E9D42FADC9}" destId="{21A9CE28-5885-4E78-94CA-2FB4F1A5C28A}" srcOrd="5" destOrd="0" presId="urn:microsoft.com/office/officeart/2005/8/layout/vProcess5"/>
+    <dgm:cxn modelId="{27672F2B-1235-496D-95DA-5E77BC94CC89}" type="presParOf" srcId="{1093A6F8-4B6A-487E-B978-E0E9D42FADC9}" destId="{0E65FC7B-9A39-4E03-B919-DB1AA40F5106}" srcOrd="6" destOrd="0" presId="urn:microsoft.com/office/officeart/2005/8/layout/vProcess5"/>
+    <dgm:cxn modelId="{3ABD1BCA-DA46-4AAC-83C4-A0BDF701ED7A}" type="presParOf" srcId="{1093A6F8-4B6A-487E-B978-E0E9D42FADC9}" destId="{6EABC6D8-725C-49BE-86BB-1588DF4AD9FF}" srcOrd="7" destOrd="0" presId="urn:microsoft.com/office/officeart/2005/8/layout/vProcess5"/>
+    <dgm:cxn modelId="{5E0ED746-E300-4993-B196-8DA9C5EBDA66}" type="presParOf" srcId="{1093A6F8-4B6A-487E-B978-E0E9D42FADC9}" destId="{88AFC986-FFA9-41F5-B957-8EA98964317C}" srcOrd="8" destOrd="0" presId="urn:microsoft.com/office/officeart/2005/8/layout/vProcess5"/>
   </dgm:cxnLst>
   <dgm:bg/>
   <dgm:whole/>
@@ -2791,15 +2619,15 @@
       <dsp:cNvGrpSpPr/>
     </dsp:nvGrpSpPr>
     <dsp:grpSpPr/>
-    <dsp:sp modelId="{5F2AEF09-E59B-430A-BB22-0277E6D8CFA9}">
+    <dsp:sp modelId="{1B590B65-C8C9-441A-969C-D21003777B64}">
       <dsp:nvSpPr>
         <dsp:cNvPr id="0" name=""/>
         <dsp:cNvSpPr/>
       </dsp:nvSpPr>
       <dsp:spPr>
         <a:xfrm>
-          <a:off x="0" y="1080567"/>
-          <a:ext cx="2957512" cy="1878020"/>
+          <a:off x="0" y="0"/>
+          <a:ext cx="8938260" cy="1305401"/>
         </a:xfrm>
         <a:prstGeom prst="roundRect">
           <a:avLst>
@@ -2809,7 +2637,7 @@
         <a:gradFill rotWithShape="0">
           <a:gsLst>
             <a:gs pos="0">
-              <a:schemeClr val="accent1">
+              <a:schemeClr val="accent4">
                 <a:hueOff val="0"/>
                 <a:satOff val="0"/>
                 <a:lumOff val="0"/>
@@ -2820,7 +2648,7 @@
               </a:schemeClr>
             </a:gs>
             <a:gs pos="50000">
-              <a:schemeClr val="accent1">
+              <a:schemeClr val="accent4">
                 <a:hueOff val="0"/>
                 <a:satOff val="0"/>
                 <a:lumOff val="0"/>
@@ -2831,7 +2659,7 @@
               </a:schemeClr>
             </a:gs>
             <a:gs pos="100000">
-              <a:schemeClr val="accent1">
+              <a:schemeClr val="accent4">
                 <a:hueOff val="0"/>
                 <a:satOff val="0"/>
                 <a:lumOff val="0"/>
@@ -2863,64 +2691,13 @@
           <a:schemeClr val="lt1"/>
         </a:fontRef>
       </dsp:style>
-    </dsp:sp>
-    <dsp:sp modelId="{E2F16E59-3A7F-4DDF-8655-40A0A26F1BD4}">
-      <dsp:nvSpPr>
-        <dsp:cNvPr id="0" name=""/>
-        <dsp:cNvSpPr/>
-      </dsp:nvSpPr>
-      <dsp:spPr>
-        <a:xfrm>
-          <a:off x="328612" y="1392749"/>
-          <a:ext cx="2957512" cy="1878020"/>
-        </a:xfrm>
-        <a:prstGeom prst="roundRect">
-          <a:avLst>
-            <a:gd name="adj" fmla="val 10000"/>
-          </a:avLst>
-        </a:prstGeom>
-        <a:solidFill>
-          <a:schemeClr val="lt1">
-            <a:alpha val="90000"/>
-            <a:hueOff val="0"/>
-            <a:satOff val="0"/>
-            <a:lumOff val="0"/>
-            <a:alphaOff val="0"/>
-          </a:schemeClr>
-        </a:solidFill>
-        <a:ln w="12700" cap="flat" cmpd="sng" algn="ctr">
-          <a:solidFill>
-            <a:schemeClr val="accent1">
-              <a:hueOff val="0"/>
-              <a:satOff val="0"/>
-              <a:lumOff val="0"/>
-              <a:alphaOff val="0"/>
-            </a:schemeClr>
-          </a:solidFill>
-          <a:prstDash val="solid"/>
-          <a:miter lim="800000"/>
-        </a:ln>
-        <a:effectLst/>
-      </dsp:spPr>
-      <dsp:style>
-        <a:lnRef idx="1">
-          <a:scrgbClr r="0" g="0" b="0"/>
-        </a:lnRef>
-        <a:fillRef idx="1">
-          <a:scrgbClr r="0" g="0" b="0"/>
-        </a:fillRef>
-        <a:effectRef idx="0">
-          <a:scrgbClr r="0" g="0" b="0"/>
-        </a:effectRef>
-        <a:fontRef idx="minor"/>
-      </dsp:style>
       <dsp:txBody>
-        <a:bodyPr spcFirstLastPara="0" vert="horz" wrap="square" lIns="95250" tIns="95250" rIns="95250" bIns="95250" numCol="1" spcCol="1270" anchor="ctr" anchorCtr="0">
+        <a:bodyPr spcFirstLastPara="0" vert="horz" wrap="square" lIns="129540" tIns="129540" rIns="129540" bIns="129540" numCol="1" spcCol="1270" anchor="ctr" anchorCtr="0">
           <a:noAutofit/>
         </a:bodyPr>
         <a:lstStyle/>
         <a:p>
-          <a:pPr marL="0" lvl="0" indent="0" algn="ctr" defTabSz="1111250">
+          <a:pPr marL="0" lvl="0" indent="0" algn="l" defTabSz="1511300">
             <a:lnSpc>
               <a:spcPct val="90000"/>
             </a:lnSpc>
@@ -2933,25 +2710,25 @@
             <a:buNone/>
           </a:pPr>
           <a:r>
-            <a:rPr lang="en-US" sz="2500" kern="1200"/>
+            <a:rPr lang="en-US" sz="3400" kern="1200"/>
             <a:t>UI Button Prefab trycks på och läggs ut</a:t>
           </a:r>
         </a:p>
       </dsp:txBody>
       <dsp:txXfrm>
-        <a:off x="383617" y="1447754"/>
-        <a:ext cx="2847502" cy="1768010"/>
+        <a:off x="38234" y="38234"/>
+        <a:ext cx="7529629" cy="1228933"/>
       </dsp:txXfrm>
     </dsp:sp>
-    <dsp:sp modelId="{56164882-75A8-43F2-B40B-0EC3993A6D2A}">
+    <dsp:sp modelId="{8ABEE9C2-5782-4BD8-AFAF-E9FA6248E268}">
       <dsp:nvSpPr>
         <dsp:cNvPr id="0" name=""/>
         <dsp:cNvSpPr/>
       </dsp:nvSpPr>
       <dsp:spPr>
         <a:xfrm>
-          <a:off x="3614737" y="1080567"/>
-          <a:ext cx="2957512" cy="1878020"/>
+          <a:off x="788669" y="1522968"/>
+          <a:ext cx="8938260" cy="1305401"/>
         </a:xfrm>
         <a:prstGeom prst="roundRect">
           <a:avLst>
@@ -2961,7 +2738,7 @@
         <a:gradFill rotWithShape="0">
           <a:gsLst>
             <a:gs pos="0">
-              <a:schemeClr val="accent1">
+              <a:schemeClr val="accent4">
                 <a:hueOff val="0"/>
                 <a:satOff val="0"/>
                 <a:lumOff val="0"/>
@@ -2972,7 +2749,7 @@
               </a:schemeClr>
             </a:gs>
             <a:gs pos="50000">
-              <a:schemeClr val="accent1">
+              <a:schemeClr val="accent4">
                 <a:hueOff val="0"/>
                 <a:satOff val="0"/>
                 <a:lumOff val="0"/>
@@ -2983,7 +2760,7 @@
               </a:schemeClr>
             </a:gs>
             <a:gs pos="100000">
-              <a:schemeClr val="accent1">
+              <a:schemeClr val="accent4">
                 <a:hueOff val="0"/>
                 <a:satOff val="0"/>
                 <a:lumOff val="0"/>
@@ -3015,64 +2792,13 @@
           <a:schemeClr val="lt1"/>
         </a:fontRef>
       </dsp:style>
-    </dsp:sp>
-    <dsp:sp modelId="{3BFC3610-8B46-436E-BF17-A2B1679B7ECA}">
-      <dsp:nvSpPr>
-        <dsp:cNvPr id="0" name=""/>
-        <dsp:cNvSpPr/>
-      </dsp:nvSpPr>
-      <dsp:spPr>
-        <a:xfrm>
-          <a:off x="3943350" y="1392749"/>
-          <a:ext cx="2957512" cy="1878020"/>
-        </a:xfrm>
-        <a:prstGeom prst="roundRect">
-          <a:avLst>
-            <a:gd name="adj" fmla="val 10000"/>
-          </a:avLst>
-        </a:prstGeom>
-        <a:solidFill>
-          <a:schemeClr val="lt1">
-            <a:alpha val="90000"/>
-            <a:hueOff val="0"/>
-            <a:satOff val="0"/>
-            <a:lumOff val="0"/>
-            <a:alphaOff val="0"/>
-          </a:schemeClr>
-        </a:solidFill>
-        <a:ln w="12700" cap="flat" cmpd="sng" algn="ctr">
-          <a:solidFill>
-            <a:schemeClr val="accent1">
-              <a:hueOff val="0"/>
-              <a:satOff val="0"/>
-              <a:lumOff val="0"/>
-              <a:alphaOff val="0"/>
-            </a:schemeClr>
-          </a:solidFill>
-          <a:prstDash val="solid"/>
-          <a:miter lim="800000"/>
-        </a:ln>
-        <a:effectLst/>
-      </dsp:spPr>
-      <dsp:style>
-        <a:lnRef idx="1">
-          <a:scrgbClr r="0" g="0" b="0"/>
-        </a:lnRef>
-        <a:fillRef idx="1">
-          <a:scrgbClr r="0" g="0" b="0"/>
-        </a:fillRef>
-        <a:effectRef idx="0">
-          <a:scrgbClr r="0" g="0" b="0"/>
-        </a:effectRef>
-        <a:fontRef idx="minor"/>
-      </dsp:style>
       <dsp:txBody>
-        <a:bodyPr spcFirstLastPara="0" vert="horz" wrap="square" lIns="95250" tIns="95250" rIns="95250" bIns="95250" numCol="1" spcCol="1270" anchor="ctr" anchorCtr="0">
+        <a:bodyPr spcFirstLastPara="0" vert="horz" wrap="square" lIns="129540" tIns="129540" rIns="129540" bIns="129540" numCol="1" spcCol="1270" anchor="ctr" anchorCtr="0">
           <a:noAutofit/>
         </a:bodyPr>
         <a:lstStyle/>
         <a:p>
-          <a:pPr marL="0" lvl="0" indent="0" algn="ctr" defTabSz="1111250">
+          <a:pPr marL="0" lvl="0" indent="0" algn="l" defTabSz="1511300">
             <a:lnSpc>
               <a:spcPct val="90000"/>
             </a:lnSpc>
@@ -3085,25 +2811,25 @@
             <a:buNone/>
           </a:pPr>
           <a:r>
-            <a:rPr lang="en-US" sz="2500" kern="1200"/>
+            <a:rPr lang="en-US" sz="3400" kern="1200"/>
             <a:t>Unit Definition refereras och säger vilken prefab som spawnas</a:t>
           </a:r>
         </a:p>
       </dsp:txBody>
       <dsp:txXfrm>
-        <a:off x="3998355" y="1447754"/>
-        <a:ext cx="2847502" cy="1768010"/>
+        <a:off x="826903" y="1561202"/>
+        <a:ext cx="7224611" cy="1228933"/>
       </dsp:txXfrm>
     </dsp:sp>
-    <dsp:sp modelId="{6CC9C727-6A1C-44C3-9E81-78D582FD8CD8}">
+    <dsp:sp modelId="{96A6DF29-E7A6-4D66-B110-6A9CFCDC5DDF}">
       <dsp:nvSpPr>
         <dsp:cNvPr id="0" name=""/>
         <dsp:cNvSpPr/>
       </dsp:nvSpPr>
       <dsp:spPr>
         <a:xfrm>
-          <a:off x="7229475" y="1080567"/>
-          <a:ext cx="2957512" cy="1878020"/>
+          <a:off x="1577339" y="3045936"/>
+          <a:ext cx="8938260" cy="1305401"/>
         </a:xfrm>
         <a:prstGeom prst="roundRect">
           <a:avLst>
@@ -3113,7 +2839,7 @@
         <a:gradFill rotWithShape="0">
           <a:gsLst>
             <a:gs pos="0">
-              <a:schemeClr val="accent1">
+              <a:schemeClr val="accent4">
                 <a:hueOff val="0"/>
                 <a:satOff val="0"/>
                 <a:lumOff val="0"/>
@@ -3124,7 +2850,7 @@
               </a:schemeClr>
             </a:gs>
             <a:gs pos="50000">
-              <a:schemeClr val="accent1">
+              <a:schemeClr val="accent4">
                 <a:hueOff val="0"/>
                 <a:satOff val="0"/>
                 <a:lumOff val="0"/>
@@ -3135,7 +2861,7 @@
               </a:schemeClr>
             </a:gs>
             <a:gs pos="100000">
-              <a:schemeClr val="accent1">
+              <a:schemeClr val="accent4">
                 <a:hueOff val="0"/>
                 <a:satOff val="0"/>
                 <a:lumOff val="0"/>
@@ -3167,25 +2893,55 @@
           <a:schemeClr val="lt1"/>
         </a:fontRef>
       </dsp:style>
+      <dsp:txBody>
+        <a:bodyPr spcFirstLastPara="0" vert="horz" wrap="square" lIns="129540" tIns="129540" rIns="129540" bIns="129540" numCol="1" spcCol="1270" anchor="ctr" anchorCtr="0">
+          <a:noAutofit/>
+        </a:bodyPr>
+        <a:lstStyle/>
+        <a:p>
+          <a:pPr marL="0" lvl="0" indent="0" algn="l" defTabSz="1511300">
+            <a:lnSpc>
+              <a:spcPct val="90000"/>
+            </a:lnSpc>
+            <a:spcBef>
+              <a:spcPct val="0"/>
+            </a:spcBef>
+            <a:spcAft>
+              <a:spcPct val="35000"/>
+            </a:spcAft>
+            <a:buNone/>
+          </a:pPr>
+          <a:r>
+            <a:rPr lang="en-US" sz="3400" kern="1200"/>
+            <a:t>Unit Prefab Spawnas där den blivit tillsagd</a:t>
+          </a:r>
+        </a:p>
+      </dsp:txBody>
+      <dsp:txXfrm>
+        <a:off x="1615573" y="3084170"/>
+        <a:ext cx="7224611" cy="1228933"/>
+      </dsp:txXfrm>
     </dsp:sp>
-    <dsp:sp modelId="{182EF8D1-4C32-4660-9A22-E0118CBD163F}">
+    <dsp:sp modelId="{3EE1DA01-E508-488B-A2B7-17EF1381B5B1}">
       <dsp:nvSpPr>
         <dsp:cNvPr id="0" name=""/>
         <dsp:cNvSpPr/>
       </dsp:nvSpPr>
       <dsp:spPr>
         <a:xfrm>
-          <a:off x="7558087" y="1392749"/>
-          <a:ext cx="2957512" cy="1878020"/>
+          <a:off x="8089749" y="989929"/>
+          <a:ext cx="848510" cy="848510"/>
         </a:xfrm>
-        <a:prstGeom prst="roundRect">
+        <a:prstGeom prst="downArrow">
           <a:avLst>
-            <a:gd name="adj" fmla="val 10000"/>
+            <a:gd name="adj1" fmla="val 55000"/>
+            <a:gd name="adj2" fmla="val 45000"/>
           </a:avLst>
         </a:prstGeom>
         <a:solidFill>
-          <a:schemeClr val="lt1">
+          <a:schemeClr val="accent4">
             <a:alpha val="90000"/>
+            <a:tint val="40000"/>
             <a:hueOff val="0"/>
             <a:satOff val="0"/>
             <a:lumOff val="0"/>
@@ -3194,7 +2950,9 @@
         </a:solidFill>
         <a:ln w="12700" cap="flat" cmpd="sng" algn="ctr">
           <a:solidFill>
-            <a:schemeClr val="accent1">
+            <a:schemeClr val="accent4">
+              <a:alpha val="90000"/>
+              <a:tint val="40000"/>
               <a:hueOff val="0"/>
               <a:satOff val="0"/>
               <a:lumOff val="0"/>
@@ -3219,12 +2977,12 @@
         <a:fontRef idx="minor"/>
       </dsp:style>
       <dsp:txBody>
-        <a:bodyPr spcFirstLastPara="0" vert="horz" wrap="square" lIns="95250" tIns="95250" rIns="95250" bIns="95250" numCol="1" spcCol="1270" anchor="ctr" anchorCtr="0">
+        <a:bodyPr spcFirstLastPara="0" vert="horz" wrap="square" lIns="45720" tIns="45720" rIns="45720" bIns="45720" numCol="1" spcCol="1270" anchor="ctr" anchorCtr="0">
           <a:noAutofit/>
         </a:bodyPr>
         <a:lstStyle/>
         <a:p>
-          <a:pPr marL="0" lvl="0" indent="0" algn="ctr" defTabSz="1111250">
+          <a:pPr marL="0" lvl="0" indent="0" algn="ctr" defTabSz="1600200">
             <a:lnSpc>
               <a:spcPct val="90000"/>
             </a:lnSpc>
@@ -3236,15 +2994,92 @@
             </a:spcAft>
             <a:buNone/>
           </a:pPr>
-          <a:r>
-            <a:rPr lang="en-US" sz="2500" kern="1200"/>
-            <a:t>Unit Prefab Spawnas där den blivit tillsagd</a:t>
-          </a:r>
+          <a:endParaRPr lang="en-US" sz="3600" kern="1200"/>
         </a:p>
       </dsp:txBody>
       <dsp:txXfrm>
-        <a:off x="7613092" y="1447754"/>
-        <a:ext cx="2847502" cy="1768010"/>
+        <a:off x="8280664" y="989929"/>
+        <a:ext cx="466680" cy="638504"/>
+      </dsp:txXfrm>
+    </dsp:sp>
+    <dsp:sp modelId="{21A9CE28-5885-4E78-94CA-2FB4F1A5C28A}">
+      <dsp:nvSpPr>
+        <dsp:cNvPr id="0" name=""/>
+        <dsp:cNvSpPr/>
+      </dsp:nvSpPr>
+      <dsp:spPr>
+        <a:xfrm>
+          <a:off x="8878419" y="2504195"/>
+          <a:ext cx="848510" cy="848510"/>
+        </a:xfrm>
+        <a:prstGeom prst="downArrow">
+          <a:avLst>
+            <a:gd name="adj1" fmla="val 55000"/>
+            <a:gd name="adj2" fmla="val 45000"/>
+          </a:avLst>
+        </a:prstGeom>
+        <a:solidFill>
+          <a:schemeClr val="accent4">
+            <a:alpha val="90000"/>
+            <a:tint val="40000"/>
+            <a:hueOff val="0"/>
+            <a:satOff val="0"/>
+            <a:lumOff val="0"/>
+            <a:alphaOff val="0"/>
+          </a:schemeClr>
+        </a:solidFill>
+        <a:ln w="12700" cap="flat" cmpd="sng" algn="ctr">
+          <a:solidFill>
+            <a:schemeClr val="accent4">
+              <a:alpha val="90000"/>
+              <a:tint val="40000"/>
+              <a:hueOff val="0"/>
+              <a:satOff val="0"/>
+              <a:lumOff val="0"/>
+              <a:alphaOff val="0"/>
+            </a:schemeClr>
+          </a:solidFill>
+          <a:prstDash val="solid"/>
+          <a:miter lim="800000"/>
+        </a:ln>
+        <a:effectLst/>
+      </dsp:spPr>
+      <dsp:style>
+        <a:lnRef idx="1">
+          <a:scrgbClr r="0" g="0" b="0"/>
+        </a:lnRef>
+        <a:fillRef idx="1">
+          <a:scrgbClr r="0" g="0" b="0"/>
+        </a:fillRef>
+        <a:effectRef idx="0">
+          <a:scrgbClr r="0" g="0" b="0"/>
+        </a:effectRef>
+        <a:fontRef idx="minor"/>
+      </dsp:style>
+      <dsp:txBody>
+        <a:bodyPr spcFirstLastPara="0" vert="horz" wrap="square" lIns="45720" tIns="45720" rIns="45720" bIns="45720" numCol="1" spcCol="1270" anchor="ctr" anchorCtr="0">
+          <a:noAutofit/>
+        </a:bodyPr>
+        <a:lstStyle/>
+        <a:p>
+          <a:pPr marL="0" lvl="0" indent="0" algn="ctr" defTabSz="1600200">
+            <a:lnSpc>
+              <a:spcPct val="90000"/>
+            </a:lnSpc>
+            <a:spcBef>
+              <a:spcPct val="0"/>
+            </a:spcBef>
+            <a:spcAft>
+              <a:spcPct val="35000"/>
+            </a:spcAft>
+            <a:buNone/>
+          </a:pPr>
+          <a:endParaRPr lang="en-US" sz="3600" kern="1200"/>
+        </a:p>
+      </dsp:txBody>
+      <dsp:txXfrm>
+        <a:off x="9069334" y="2504195"/>
+        <a:ext cx="466680" cy="638504"/>
       </dsp:txXfrm>
     </dsp:sp>
   </dsp:spTree>
@@ -3815,11 +3650,11 @@
 </file>
 
 <file path=ppt/diagrams/layout2.xml><?xml version="1.0" encoding="utf-8"?>
-<dgm:layoutDef xmlns:dgm="http://schemas.openxmlformats.org/drawingml/2006/diagram" xmlns:a="http://schemas.openxmlformats.org/drawingml/2006/main" uniqueId="urn:microsoft.com/office/officeart/2005/8/layout/hierarchy1">
+<dgm:layoutDef xmlns:dgm="http://schemas.openxmlformats.org/drawingml/2006/diagram" xmlns:a="http://schemas.openxmlformats.org/drawingml/2006/main" uniqueId="urn:microsoft.com/office/officeart/2005/8/layout/vProcess5">
   <dgm:title val=""/>
   <dgm:desc val=""/>
   <dgm:catLst>
-    <dgm:cat type="hierarchy" pri="2000"/>
+    <dgm:cat type="process" pri="14000"/>
   </dgm:catLst>
   <dgm:sampData>
     <dgm:dataModel>
@@ -3831,26 +3666,14 @@
         <dgm:pt modelId="2">
           <dgm:prSet phldr="1"/>
         </dgm:pt>
-        <dgm:pt modelId="21">
-          <dgm:prSet phldr="1"/>
-        </dgm:pt>
-        <dgm:pt modelId="22">
-          <dgm:prSet phldr="1"/>
-        </dgm:pt>
         <dgm:pt modelId="3">
-          <dgm:prSet phldr="1"/>
-        </dgm:pt>
-        <dgm:pt modelId="31">
           <dgm:prSet phldr="1"/>
         </dgm:pt>
       </dgm:ptLst>
       <dgm:cxnLst>
-        <dgm:cxn modelId="4" srcId="0" destId="1" srcOrd="0" destOrd="0"/>
-        <dgm:cxn modelId="5" srcId="1" destId="2" srcOrd="0" destOrd="0"/>
-        <dgm:cxn modelId="6" srcId="1" destId="3" srcOrd="1" destOrd="0"/>
-        <dgm:cxn modelId="23" srcId="2" destId="21" srcOrd="0" destOrd="0"/>
-        <dgm:cxn modelId="24" srcId="2" destId="22" srcOrd="1" destOrd="0"/>
-        <dgm:cxn modelId="33" srcId="3" destId="31" srcOrd="0" destOrd="0"/>
+        <dgm:cxn modelId="5" srcId="0" destId="1" srcOrd="0" destOrd="0"/>
+        <dgm:cxn modelId="6" srcId="0" destId="2" srcOrd="1" destOrd="0"/>
+        <dgm:cxn modelId="7" srcId="0" destId="3" srcOrd="2" destOrd="0"/>
       </dgm:cxnLst>
       <dgm:bg/>
       <dgm:whole/>
@@ -3861,13 +3684,11 @@
       <dgm:ptLst>
         <dgm:pt modelId="0" type="doc"/>
         <dgm:pt modelId="1"/>
-        <dgm:pt modelId="11"/>
-        <dgm:pt modelId="12"/>
+        <dgm:pt modelId="2"/>
       </dgm:ptLst>
       <dgm:cxnLst>
-        <dgm:cxn modelId="2" srcId="0" destId="1" srcOrd="0" destOrd="0"/>
-        <dgm:cxn modelId="13" srcId="1" destId="11" srcOrd="0" destOrd="0"/>
-        <dgm:cxn modelId="14" srcId="1" destId="12" srcOrd="1" destOrd="0"/>
+        <dgm:cxn modelId="3" srcId="0" destId="1" srcOrd="0" destOrd="0"/>
+        <dgm:cxn modelId="4" srcId="0" destId="2" srcOrd="1" destOrd="0"/>
       </dgm:cxnLst>
       <dgm:bg/>
       <dgm:whole/>
@@ -3879,500 +3700,1177 @@
         <dgm:pt modelId="0" type="doc"/>
         <dgm:pt modelId="1"/>
         <dgm:pt modelId="2"/>
-        <dgm:pt modelId="21"/>
-        <dgm:pt modelId="211"/>
         <dgm:pt modelId="3"/>
-        <dgm:pt modelId="31"/>
-        <dgm:pt modelId="311"/>
+        <dgm:pt modelId="4"/>
       </dgm:ptLst>
       <dgm:cxnLst>
-        <dgm:cxn modelId="4" srcId="0" destId="1" srcOrd="0" destOrd="0"/>
-        <dgm:cxn modelId="5" srcId="1" destId="2" srcOrd="0" destOrd="0"/>
-        <dgm:cxn modelId="6" srcId="1" destId="3" srcOrd="1" destOrd="0"/>
-        <dgm:cxn modelId="23" srcId="2" destId="21" srcOrd="0" destOrd="0"/>
-        <dgm:cxn modelId="24" srcId="21" destId="211" srcOrd="0" destOrd="0"/>
-        <dgm:cxn modelId="33" srcId="3" destId="31" srcOrd="0" destOrd="0"/>
-        <dgm:cxn modelId="34" srcId="31" destId="311" srcOrd="0" destOrd="0"/>
+        <dgm:cxn modelId="6" srcId="0" destId="1" srcOrd="0" destOrd="0"/>
+        <dgm:cxn modelId="7" srcId="0" destId="2" srcOrd="1" destOrd="0"/>
+        <dgm:cxn modelId="8" srcId="0" destId="3" srcOrd="2" destOrd="0"/>
+        <dgm:cxn modelId="9" srcId="0" destId="4" srcOrd="3" destOrd="0"/>
       </dgm:cxnLst>
       <dgm:bg/>
       <dgm:whole/>
     </dgm:dataModel>
   </dgm:clrData>
-  <dgm:layoutNode name="hierChild1">
+  <dgm:layoutNode name="outerComposite">
     <dgm:varLst>
-      <dgm:chPref val="1"/>
+      <dgm:chMax val="5"/>
       <dgm:dir/>
-      <dgm:animOne val="branch"/>
-      <dgm:animLvl val="lvl"/>
-      <dgm:resizeHandles/>
+      <dgm:resizeHandles val="exact"/>
     </dgm:varLst>
-    <dgm:choose name="Name0">
-      <dgm:if name="Name1" func="var" arg="dir" op="equ" val="norm">
-        <dgm:alg type="hierChild">
-          <dgm:param type="linDir" val="fromL"/>
-        </dgm:alg>
-      </dgm:if>
-      <dgm:else name="Name2">
-        <dgm:alg type="hierChild">
-          <dgm:param type="linDir" val="fromR"/>
-        </dgm:alg>
-      </dgm:else>
-    </dgm:choose>
+    <dgm:alg type="composite"/>
     <dgm:shape xmlns:r="http://schemas.openxmlformats.org/officeDocument/2006/relationships" r:blip="">
       <dgm:adjLst/>
     </dgm:shape>
     <dgm:presOf/>
-    <dgm:constrLst>
-      <dgm:constr type="primFontSz" for="des" ptType="node" op="equ" val="65"/>
-      <dgm:constr type="w" for="des" forName="composite" refType="w"/>
-      <dgm:constr type="h" for="des" forName="composite" refType="w" refFor="des" refForName="composite" fact="0.667"/>
-      <dgm:constr type="w" for="des" forName="composite2" refType="w" refFor="des" refForName="composite"/>
-      <dgm:constr type="h" for="des" forName="composite2" refType="h" refFor="des" refForName="composite"/>
-      <dgm:constr type="w" for="des" forName="composite3" refType="w" refFor="des" refForName="composite"/>
-      <dgm:constr type="h" for="des" forName="composite3" refType="h" refFor="des" refForName="composite"/>
-      <dgm:constr type="w" for="des" forName="composite4" refType="w" refFor="des" refForName="composite"/>
-      <dgm:constr type="h" for="des" forName="composite4" refType="h" refFor="des" refForName="composite"/>
-      <dgm:constr type="w" for="des" forName="composite5" refType="w" refFor="des" refForName="composite"/>
-      <dgm:constr type="h" for="des" forName="composite5" refType="h" refFor="des" refForName="composite"/>
-      <dgm:constr type="sibSp" refType="w" refFor="des" refForName="composite" fact="0.1"/>
-      <dgm:constr type="sibSp" for="des" forName="hierChild2" refType="sibSp"/>
-      <dgm:constr type="sibSp" for="des" forName="hierChild3" refType="sibSp"/>
-      <dgm:constr type="sibSp" for="des" forName="hierChild4" refType="sibSp"/>
-      <dgm:constr type="sibSp" for="des" forName="hierChild5" refType="sibSp"/>
-      <dgm:constr type="sibSp" for="des" forName="hierChild6" refType="sibSp"/>
-      <dgm:constr type="sp" for="des" forName="hierRoot1" refType="h" refFor="des" refForName="composite" fact="0.25"/>
-      <dgm:constr type="sp" for="des" forName="hierRoot2" refType="sp" refFor="des" refForName="hierRoot1"/>
-      <dgm:constr type="sp" for="des" forName="hierRoot3" refType="sp" refFor="des" refForName="hierRoot1"/>
-      <dgm:constr type="sp" for="des" forName="hierRoot4" refType="sp" refFor="des" refForName="hierRoot1"/>
-      <dgm:constr type="sp" for="des" forName="hierRoot5" refType="sp" refFor="des" refForName="hierRoot1"/>
-    </dgm:constrLst>
+    <dgm:choose name="Name0">
+      <dgm:if name="Name1" func="var" arg="dir" op="equ" val="norm">
+        <dgm:constrLst>
+          <dgm:constr type="primFontSz" for="ch" ptType="node" op="equ" val="65"/>
+          <dgm:constr type="w" for="ch" forName="dummyMaxCanvas" refType="w"/>
+          <dgm:constr type="h" for="ch" forName="dummyMaxCanvas" refType="h"/>
+          <dgm:constr type="w" for="ch" forName="OneNode_1" refType="w"/>
+          <dgm:constr type="h" for="ch" forName="OneNode_1" refType="h" fact="0.5"/>
+          <dgm:constr type="ctrY" for="ch" forName="OneNode_1" refType="h" fact="0.5"/>
+          <dgm:constr type="w" for="ch" forName="TwoNodes_1" refType="w" fact="0.85"/>
+          <dgm:constr type="h" for="ch" forName="TwoNodes_1" refType="h" fact="0.45"/>
+          <dgm:constr type="t" for="ch" forName="TwoNodes_1"/>
+          <dgm:constr type="l" for="ch" forName="TwoNodes_1"/>
+          <dgm:constr type="w" for="ch" forName="TwoNodes_2" refType="w" fact="0.85"/>
+          <dgm:constr type="h" for="ch" forName="TwoNodes_2" refType="h" fact="0.45"/>
+          <dgm:constr type="b" for="ch" forName="TwoNodes_2" refType="h"/>
+          <dgm:constr type="r" for="ch" forName="TwoNodes_2" refType="w"/>
+          <dgm:constr type="w" for="ch" forName="TwoConn_1-2" refType="h" refFor="ch" refForName="TwoNodes_1" fact="0.65"/>
+          <dgm:constr type="h" for="ch" forName="TwoConn_1-2" refType="h" refFor="ch" refForName="TwoNodes_1" fact="0.65"/>
+          <dgm:constr type="ctrY" for="ch" forName="TwoConn_1-2" refType="h" fact="0.5"/>
+          <dgm:constr type="r" for="ch" forName="TwoConn_1-2" refType="r" refFor="ch" refForName="TwoNodes_1"/>
+          <dgm:constr type="r" for="ch" forName="TwoNodes_1_text" refType="l" refFor="ch" refForName="TwoConn_1-2"/>
+          <dgm:constr type="rOff" for="ch" forName="TwoNodes_1_text" refType="w" refFor="ch" refForName="TwoConn_1-2" fact="-0.5"/>
+          <dgm:constr type="t" for="ch" forName="TwoNodes_1_text" refType="t" refFor="ch" refForName="TwoNodes_1"/>
+          <dgm:constr type="b" for="ch" forName="TwoNodes_1_text" refType="b" refFor="ch" refForName="TwoNodes_1"/>
+          <dgm:constr type="l" for="ch" forName="TwoNodes_1_text" refType="l" refFor="ch" refForName="TwoNodes_1"/>
+          <dgm:constr type="r" for="ch" forName="TwoNodes_2_text" refType="l" refFor="ch" refForName="TwoConn_1-2"/>
+          <dgm:constr type="t" for="ch" forName="TwoNodes_2_text" refType="t" refFor="ch" refForName="TwoNodes_2"/>
+          <dgm:constr type="b" for="ch" forName="TwoNodes_2_text" refType="b" refFor="ch" refForName="TwoNodes_2"/>
+          <dgm:constr type="l" for="ch" forName="TwoNodes_2_text" refType="l" refFor="ch" refForName="TwoNodes_2"/>
+          <dgm:constr type="w" for="ch" forName="ThreeNodes_1" refType="w" fact="0.85"/>
+          <dgm:constr type="h" for="ch" forName="ThreeNodes_1" refType="h" fact="0.3"/>
+          <dgm:constr type="t" for="ch" forName="ThreeNodes_1"/>
+          <dgm:constr type="l" for="ch" forName="ThreeNodes_1"/>
+          <dgm:constr type="w" for="ch" forName="ThreeNodes_2" refType="w" fact="0.85"/>
+          <dgm:constr type="h" for="ch" forName="ThreeNodes_2" refType="h" fact="0.3"/>
+          <dgm:constr type="ctrY" for="ch" forName="ThreeNodes_2" refType="h" fact="0.5"/>
+          <dgm:constr type="ctrX" for="ch" forName="ThreeNodes_2" refType="w" fact="0.5"/>
+          <dgm:constr type="w" for="ch" forName="ThreeNodes_3" refType="w" fact="0.85"/>
+          <dgm:constr type="h" for="ch" forName="ThreeNodes_3" refType="h" fact="0.3"/>
+          <dgm:constr type="b" for="ch" forName="ThreeNodes_3" refType="h"/>
+          <dgm:constr type="r" for="ch" forName="ThreeNodes_3" refType="w"/>
+          <dgm:constr type="w" for="ch" forName="ThreeConn_1-2" refType="h" refFor="ch" refForName="ThreeNodes_1" fact="0.65"/>
+          <dgm:constr type="h" for="ch" forName="ThreeConn_1-2" refType="h" refFor="ch" refForName="ThreeNodes_1" fact="0.65"/>
+          <dgm:constr type="ctrY" for="ch" forName="ThreeConn_1-2" refType="h" fact="0.325"/>
+          <dgm:constr type="r" for="ch" forName="ThreeConn_1-2" refType="r" refFor="ch" refForName="ThreeNodes_1"/>
+          <dgm:constr type="w" for="ch" forName="ThreeConn_2-3" refType="h" refFor="ch" refForName="ThreeNodes_2" fact="0.65"/>
+          <dgm:constr type="h" for="ch" forName="ThreeConn_2-3" refType="h" refFor="ch" refForName="ThreeNodes_2" fact="0.65"/>
+          <dgm:constr type="ctrY" for="ch" forName="ThreeConn_2-3" refType="h" fact="0.673"/>
+          <dgm:constr type="r" for="ch" forName="ThreeConn_2-3" refType="r" refFor="ch" refForName="ThreeNodes_2"/>
+          <dgm:constr type="r" for="ch" forName="ThreeNodes_1_text" refType="l" refFor="ch" refForName="ThreeConn_1-2"/>
+          <dgm:constr type="rOff" for="ch" forName="ThreeNodes_1_text" refType="w" refFor="ch" refForName="ThreeConn_1-2" fact="-0.57"/>
+          <dgm:constr type="t" for="ch" forName="ThreeNodes_1_text" refType="t" refFor="ch" refForName="ThreeNodes_1"/>
+          <dgm:constr type="b" for="ch" forName="ThreeNodes_1_text" refType="b" refFor="ch" refForName="ThreeNodes_1"/>
+          <dgm:constr type="l" for="ch" forName="ThreeNodes_1_text" refType="l" refFor="ch" refForName="ThreeNodes_1"/>
+          <dgm:constr type="r" for="ch" forName="ThreeNodes_2_text" refType="l" refFor="ch" refForName="ThreeConn_1-2"/>
+          <dgm:constr type="t" for="ch" forName="ThreeNodes_2_text" refType="t" refFor="ch" refForName="ThreeNodes_2"/>
+          <dgm:constr type="b" for="ch" forName="ThreeNodes_2_text" refType="b" refFor="ch" refForName="ThreeNodes_2"/>
+          <dgm:constr type="l" for="ch" forName="ThreeNodes_2_text" refType="l" refFor="ch" refForName="ThreeNodes_2"/>
+          <dgm:constr type="r" for="ch" forName="ThreeNodes_3_text" refType="l" refFor="ch" refForName="ThreeConn_2-3"/>
+          <dgm:constr type="t" for="ch" forName="ThreeNodes_3_text" refType="t" refFor="ch" refForName="ThreeNodes_3"/>
+          <dgm:constr type="b" for="ch" forName="ThreeNodes_3_text" refType="b" refFor="ch" refForName="ThreeNodes_3"/>
+          <dgm:constr type="l" for="ch" forName="ThreeNodes_3_text" refType="l" refFor="ch" refForName="ThreeNodes_3"/>
+          <dgm:constr type="w" for="ch" forName="FourNodes_1" refType="w" fact="0.8"/>
+          <dgm:constr type="h" for="ch" forName="FourNodes_1" refType="h" fact="0.22"/>
+          <dgm:constr type="t" for="ch" forName="FourNodes_1"/>
+          <dgm:constr type="l" for="ch" forName="FourNodes_1"/>
+          <dgm:constr type="w" for="ch" forName="FourNodes_2" refType="w" fact="0.8"/>
+          <dgm:constr type="h" for="ch" forName="FourNodes_2" refType="h" fact="0.22"/>
+          <dgm:constr type="ctrY" for="ch" forName="FourNodes_2" refType="h" fact="0.37"/>
+          <dgm:constr type="ctrX" for="ch" forName="FourNodes_2" refType="w" fact="0.467"/>
+          <dgm:constr type="w" for="ch" forName="FourNodes_3" refType="w" fact="0.8"/>
+          <dgm:constr type="h" for="ch" forName="FourNodes_3" refType="h" fact="0.22"/>
+          <dgm:constr type="ctrY" for="ch" forName="FourNodes_3" refType="h" fact="0.63"/>
+          <dgm:constr type="ctrX" for="ch" forName="FourNodes_3" refType="w" fact="0.533"/>
+          <dgm:constr type="w" for="ch" forName="FourNodes_4" refType="w" fact="0.8"/>
+          <dgm:constr type="h" for="ch" forName="FourNodes_4" refType="h" fact="0.22"/>
+          <dgm:constr type="b" for="ch" forName="FourNodes_4" refType="h"/>
+          <dgm:constr type="r" for="ch" forName="FourNodes_4" refType="w"/>
+          <dgm:constr type="w" for="ch" forName="FourConn_1-2" refType="h" refFor="ch" refForName="FourNodes_1" fact="0.65"/>
+          <dgm:constr type="h" for="ch" forName="FourConn_1-2" refType="h" refFor="ch" refForName="FourNodes_1" fact="0.65"/>
+          <dgm:constr type="ctrY" for="ch" forName="FourConn_1-2" refType="h" fact="0.24"/>
+          <dgm:constr type="r" for="ch" forName="FourConn_1-2" refType="r" refFor="ch" refForName="FourNodes_1"/>
+          <dgm:constr type="w" for="ch" forName="FourConn_2-3" refType="h" refFor="ch" refForName="FourNodes_2" fact="0.65"/>
+          <dgm:constr type="h" for="ch" forName="FourConn_2-3" refType="h" refFor="ch" refForName="FourNodes_2" fact="0.65"/>
+          <dgm:constr type="ctrY" for="ch" forName="FourConn_2-3" refType="h" fact="0.5"/>
+          <dgm:constr type="r" for="ch" forName="FourConn_2-3" refType="r" refFor="ch" refForName="FourNodes_2"/>
+          <dgm:constr type="w" for="ch" forName="FourConn_3-4" refType="h" refFor="ch" refForName="FourNodes_3" fact="0.65"/>
+          <dgm:constr type="h" for="ch" forName="FourConn_3-4" refType="h" refFor="ch" refForName="FourNodes_3" fact="0.65"/>
+          <dgm:constr type="ctrY" for="ch" forName="FourConn_3-4" refType="h" fact="0.76"/>
+          <dgm:constr type="r" for="ch" forName="FourConn_3-4" refType="r" refFor="ch" refForName="FourNodes_3"/>
+          <dgm:constr type="r" for="ch" forName="FourNodes_1_text" refType="l" refFor="ch" refForName="FourConn_1-2"/>
+          <dgm:constr type="rOff" for="ch" forName="FourNodes_1_text" refType="w" refFor="ch" refForName="FourConn_1-2" fact="-0.7"/>
+          <dgm:constr type="t" for="ch" forName="FourNodes_1_text" refType="t" refFor="ch" refForName="FourNodes_1"/>
+          <dgm:constr type="b" for="ch" forName="FourNodes_1_text" refType="b" refFor="ch" refForName="FourNodes_1"/>
+          <dgm:constr type="l" for="ch" forName="FourNodes_1_text" refType="l" refFor="ch" refForName="FourNodes_1"/>
+          <dgm:constr type="r" for="ch" forName="FourNodes_2_text" refType="l" refFor="ch" refForName="FourConn_1-2"/>
+          <dgm:constr type="t" for="ch" forName="FourNodes_2_text" refType="t" refFor="ch" refForName="FourNodes_2"/>
+          <dgm:constr type="b" for="ch" forName="FourNodes_2_text" refType="b" refFor="ch" refForName="FourNodes_2"/>
+          <dgm:constr type="l" for="ch" forName="FourNodes_2_text" refType="l" refFor="ch" refForName="FourNodes_2"/>
+          <dgm:constr type="r" for="ch" forName="FourNodes_3_text" refType="l" refFor="ch" refForName="FourConn_2-3"/>
+          <dgm:constr type="t" for="ch" forName="FourNodes_3_text" refType="t" refFor="ch" refForName="FourNodes_3"/>
+          <dgm:constr type="b" for="ch" forName="FourNodes_3_text" refType="b" refFor="ch" refForName="FourNodes_3"/>
+          <dgm:constr type="l" for="ch" forName="FourNodes_3_text" refType="l" refFor="ch" refForName="FourNodes_3"/>
+          <dgm:constr type="r" for="ch" forName="FourNodes_4_text" refType="l" refFor="ch" refForName="FourConn_3-4"/>
+          <dgm:constr type="t" for="ch" forName="FourNodes_4_text" refType="t" refFor="ch" refForName="FourNodes_4"/>
+          <dgm:constr type="b" for="ch" forName="FourNodes_4_text" refType="b" refFor="ch" refForName="FourNodes_4"/>
+          <dgm:constr type="l" for="ch" forName="FourNodes_4_text" refType="l" refFor="ch" refForName="FourNodes_4"/>
+          <dgm:constr type="w" for="ch" forName="FiveNodes_1" refType="w" fact="0.77"/>
+          <dgm:constr type="h" for="ch" forName="FiveNodes_1" refType="h" fact="0.18"/>
+          <dgm:constr type="t" for="ch" forName="FiveNodes_1"/>
+          <dgm:constr type="l" for="ch" forName="FiveNodes_1"/>
+          <dgm:constr type="w" for="ch" forName="FiveNodes_2" refType="w" fact="0.77"/>
+          <dgm:constr type="h" for="ch" forName="FiveNodes_2" refType="h" fact="0.18"/>
+          <dgm:constr type="ctrY" for="ch" forName="FiveNodes_2" refType="h" fact="0.295"/>
+          <dgm:constr type="ctrX" for="ch" forName="FiveNodes_2" refType="w" fact="0.4425"/>
+          <dgm:constr type="w" for="ch" forName="FiveNodes_3" refType="w" fact="0.77"/>
+          <dgm:constr type="h" for="ch" forName="FiveNodes_3" refType="h" fact="0.18"/>
+          <dgm:constr type="ctrY" for="ch" forName="FiveNodes_3" refType="h" fact="0.5"/>
+          <dgm:constr type="ctrX" for="ch" forName="FiveNodes_3" refType="w" fact="0.5"/>
+          <dgm:constr type="w" for="ch" forName="FiveNodes_4" refType="w" fact="0.77"/>
+          <dgm:constr type="h" for="ch" forName="FiveNodes_4" refType="h" fact="0.18"/>
+          <dgm:constr type="ctrY" for="ch" forName="FiveNodes_4" refType="h" fact="0.705"/>
+          <dgm:constr type="ctrX" for="ch" forName="FiveNodes_4" refType="w" fact="0.5575"/>
+          <dgm:constr type="w" for="ch" forName="FiveNodes_5" refType="w" fact="0.77"/>
+          <dgm:constr type="h" for="ch" forName="FiveNodes_5" refType="h" fact="0.18"/>
+          <dgm:constr type="b" for="ch" forName="FiveNodes_5" refType="h"/>
+          <dgm:constr type="r" for="ch" forName="FiveNodes_5" refType="w"/>
+          <dgm:constr type="w" for="ch" forName="FiveConn_1-2" refType="h" refFor="ch" refForName="FiveNodes_1" fact="0.65"/>
+          <dgm:constr type="h" for="ch" forName="FiveConn_1-2" refType="h" refFor="ch" refForName="FiveNodes_1" fact="0.65"/>
+          <dgm:constr type="ctrY" for="ch" forName="FiveConn_1-2" refType="h" fact="0.19"/>
+          <dgm:constr type="r" for="ch" forName="FiveConn_1-2" refType="r" refFor="ch" refForName="FiveNodes_1"/>
+          <dgm:constr type="w" for="ch" forName="FiveConn_2-3" refType="h" refFor="ch" refForName="FiveNodes_2" fact="0.65"/>
+          <dgm:constr type="h" for="ch" forName="FiveConn_2-3" refType="h" refFor="ch" refForName="FiveNodes_2" fact="0.65"/>
+          <dgm:constr type="ctrY" for="ch" forName="FiveConn_2-3" refType="h" fact="0.395"/>
+          <dgm:constr type="r" for="ch" forName="FiveConn_2-3" refType="r" refFor="ch" refForName="FiveNodes_2"/>
+          <dgm:constr type="w" for="ch" forName="FiveConn_3-4" refType="h" refFor="ch" refForName="FiveNodes_3" fact="0.65"/>
+          <dgm:constr type="h" for="ch" forName="FiveConn_3-4" refType="h" refFor="ch" refForName="FiveNodes_3" fact="0.65"/>
+          <dgm:constr type="ctrY" for="ch" forName="FiveConn_3-4" refType="h" fact="0.597"/>
+          <dgm:constr type="r" for="ch" forName="FiveConn_3-4" refType="r" refFor="ch" refForName="FiveNodes_3"/>
+          <dgm:constr type="w" for="ch" forName="FiveConn_4-5" refType="h" refFor="ch" refForName="FiveNodes_4" fact="0.65"/>
+          <dgm:constr type="h" for="ch" forName="FiveConn_4-5" refType="h" refFor="ch" refForName="FiveNodes_4" fact="0.65"/>
+          <dgm:constr type="ctrY" for="ch" forName="FiveConn_4-5" refType="h" fact="0.804"/>
+          <dgm:constr type="r" for="ch" forName="FiveConn_4-5" refType="r" refFor="ch" refForName="FiveNodes_4"/>
+          <dgm:constr type="r" for="ch" forName="FiveNodes_1_text" refType="l" refFor="ch" refForName="FiveConn_1-2"/>
+          <dgm:constr type="rOff" for="ch" forName="FiveNodes_1_text" refType="w" refFor="ch" refForName="FiveConn_1-2" fact="-0.75"/>
+          <dgm:constr type="t" for="ch" forName="FiveNodes_1_text" refType="t" refFor="ch" refForName="FiveNodes_1"/>
+          <dgm:constr type="b" for="ch" forName="FiveNodes_1_text" refType="b" refFor="ch" refForName="FiveNodes_1"/>
+          <dgm:constr type="l" for="ch" forName="FiveNodes_1_text" refType="l" refFor="ch" refForName="FiveNodes_1"/>
+          <dgm:constr type="r" for="ch" forName="FiveNodes_2_text" refType="l" refFor="ch" refForName="FiveConn_1-2"/>
+          <dgm:constr type="t" for="ch" forName="FiveNodes_2_text" refType="t" refFor="ch" refForName="FiveNodes_2"/>
+          <dgm:constr type="b" for="ch" forName="FiveNodes_2_text" refType="b" refFor="ch" refForName="FiveNodes_2"/>
+          <dgm:constr type="l" for="ch" forName="FiveNodes_2_text" refType="l" refFor="ch" refForName="FiveNodes_2"/>
+          <dgm:constr type="r" for="ch" forName="FiveNodes_3_text" refType="l" refFor="ch" refForName="FiveConn_2-3"/>
+          <dgm:constr type="t" for="ch" forName="FiveNodes_3_text" refType="t" refFor="ch" refForName="FiveNodes_3"/>
+          <dgm:constr type="b" for="ch" forName="FiveNodes_3_text" refType="b" refFor="ch" refForName="FiveNodes_3"/>
+          <dgm:constr type="l" for="ch" forName="FiveNodes_3_text" refType="l" refFor="ch" refForName="FiveNodes_3"/>
+          <dgm:constr type="r" for="ch" forName="FiveNodes_4_text" refType="l" refFor="ch" refForName="FiveConn_3-4"/>
+          <dgm:constr type="t" for="ch" forName="FiveNodes_4_text" refType="t" refFor="ch" refForName="FiveNodes_4"/>
+          <dgm:constr type="b" for="ch" forName="FiveNodes_4_text" refType="b" refFor="ch" refForName="FiveNodes_4"/>
+          <dgm:constr type="l" for="ch" forName="FiveNodes_4_text" refType="l" refFor="ch" refForName="FiveNodes_4"/>
+          <dgm:constr type="r" for="ch" forName="FiveNodes_5_text" refType="l" refFor="ch" refForName="FiveConn_4-5"/>
+          <dgm:constr type="t" for="ch" forName="FiveNodes_5_text" refType="t" refFor="ch" refForName="FiveNodes_5"/>
+          <dgm:constr type="b" for="ch" forName="FiveNodes_5_text" refType="b" refFor="ch" refForName="FiveNodes_5"/>
+          <dgm:constr type="l" for="ch" forName="FiveNodes_5_text" refType="l" refFor="ch" refForName="FiveNodes_5"/>
+        </dgm:constrLst>
+      </dgm:if>
+      <dgm:else name="Name2">
+        <dgm:constrLst>
+          <dgm:constr type="primFontSz" for="ch" ptType="node" op="equ" val="65"/>
+          <dgm:constr type="w" for="ch" forName="dummyMaxCanvas" refType="w"/>
+          <dgm:constr type="h" for="ch" forName="dummyMaxCanvas" refType="h"/>
+          <dgm:constr type="w" for="ch" forName="OneNode_1" refType="w"/>
+          <dgm:constr type="h" for="ch" forName="OneNode_1" refType="h" fact="0.5"/>
+          <dgm:constr type="ctrY" for="ch" forName="OneNode_1" refType="h" fact="0.5"/>
+          <dgm:constr type="w" for="ch" forName="TwoNodes_1" refType="w" fact="0.85"/>
+          <dgm:constr type="h" for="ch" forName="TwoNodes_1" refType="h" fact="0.45"/>
+          <dgm:constr type="t" for="ch" forName="TwoNodes_1"/>
+          <dgm:constr type="r" for="ch" forName="TwoNodes_1" refType="w"/>
+          <dgm:constr type="w" for="ch" forName="TwoNodes_2" refType="w" fact="0.85"/>
+          <dgm:constr type="h" for="ch" forName="TwoNodes_2" refType="h" fact="0.45"/>
+          <dgm:constr type="b" for="ch" forName="TwoNodes_2" refType="h"/>
+          <dgm:constr type="l" for="ch" forName="TwoNodes_2"/>
+          <dgm:constr type="w" for="ch" forName="TwoConn_1-2" refType="h" refFor="ch" refForName="TwoNodes_1" fact="0.65"/>
+          <dgm:constr type="h" for="ch" forName="TwoConn_1-2" refType="h" refFor="ch" refForName="TwoNodes_1" fact="0.65"/>
+          <dgm:constr type="ctrY" for="ch" forName="TwoConn_1-2" refType="h" fact="0.5"/>
+          <dgm:constr type="l" for="ch" forName="TwoConn_1-2" refType="l" refFor="ch" refForName="TwoNodes_1"/>
+          <dgm:constr type="l" for="ch" forName="TwoNodes_1_text" refType="r" refFor="ch" refForName="TwoConn_1-2"/>
+          <dgm:constr type="lOff" for="ch" forName="TwoNodes_1_text" refType="w" refFor="ch" refForName="TwoConn_1-2" fact="0.5"/>
+          <dgm:constr type="t" for="ch" forName="TwoNodes_1_text" refType="t" refFor="ch" refForName="TwoNodes_1"/>
+          <dgm:constr type="b" for="ch" forName="TwoNodes_1_text" refType="b" refFor="ch" refForName="TwoNodes_1"/>
+          <dgm:constr type="r" for="ch" forName="TwoNodes_1_text" refType="r" refFor="ch" refForName="TwoNodes_1"/>
+          <dgm:constr type="l" for="ch" forName="TwoNodes_2_text" refType="r" refFor="ch" refForName="TwoConn_1-2"/>
+          <dgm:constr type="t" for="ch" forName="TwoNodes_2_text" refType="t" refFor="ch" refForName="TwoNodes_2"/>
+          <dgm:constr type="b" for="ch" forName="TwoNodes_2_text" refType="b" refFor="ch" refForName="TwoNodes_2"/>
+          <dgm:constr type="r" for="ch" forName="TwoNodes_2_text" refType="r" refFor="ch" refForName="TwoNodes_2"/>
+          <dgm:constr type="w" for="ch" forName="ThreeNodes_1" refType="w" fact="0.85"/>
+          <dgm:constr type="h" for="ch" forName="ThreeNodes_1" refType="h" fact="0.3"/>
+          <dgm:constr type="t" for="ch" forName="ThreeNodes_1"/>
+          <dgm:constr type="r" for="ch" forName="ThreeNodes_1" refType="w"/>
+          <dgm:constr type="w" for="ch" forName="ThreeNodes_2" refType="w" fact="0.85"/>
+          <dgm:constr type="h" for="ch" forName="ThreeNodes_2" refType="h" fact="0.3"/>
+          <dgm:constr type="ctrY" for="ch" forName="ThreeNodes_2" refType="h" fact="0.5"/>
+          <dgm:constr type="ctrX" for="ch" forName="ThreeNodes_2" refType="w" fact="0.5"/>
+          <dgm:constr type="w" for="ch" forName="ThreeNodes_3" refType="w" fact="0.85"/>
+          <dgm:constr type="h" for="ch" forName="ThreeNodes_3" refType="h" fact="0.3"/>
+          <dgm:constr type="b" for="ch" forName="ThreeNodes_3" refType="h"/>
+          <dgm:constr type="l" for="ch" forName="ThreeNodes_3"/>
+          <dgm:constr type="w" for="ch" forName="ThreeConn_1-2" refType="h" refFor="ch" refForName="ThreeNodes_1" fact="0.65"/>
+          <dgm:constr type="h" for="ch" forName="ThreeConn_1-2" refType="h" refFor="ch" refForName="ThreeNodes_1" fact="0.65"/>
+          <dgm:constr type="ctrY" for="ch" forName="ThreeConn_1-2" refType="h" fact="0.325"/>
+          <dgm:constr type="l" for="ch" forName="ThreeConn_1-2" refType="l" refFor="ch" refForName="ThreeNodes_1"/>
+          <dgm:constr type="w" for="ch" forName="ThreeConn_2-3" refType="h" refFor="ch" refForName="ThreeNodes_2" fact="0.65"/>
+          <dgm:constr type="h" for="ch" forName="ThreeConn_2-3" refType="h" refFor="ch" refForName="ThreeNodes_2" fact="0.65"/>
+          <dgm:constr type="ctrY" for="ch" forName="ThreeConn_2-3" refType="h" fact="0.673"/>
+          <dgm:constr type="l" for="ch" forName="ThreeConn_2-3" refType="l" refFor="ch" refForName="ThreeNodes_2"/>
+          <dgm:constr type="l" for="ch" forName="ThreeNodes_1_text" refType="r" refFor="ch" refForName="ThreeConn_1-2"/>
+          <dgm:constr type="lOff" for="ch" forName="ThreeNodes_1_text" refType="w" refFor="ch" refForName="ThreeConn_1-2" fact="0.55"/>
+          <dgm:constr type="t" for="ch" forName="ThreeNodes_1_text" refType="t" refFor="ch" refForName="ThreeNodes_1"/>
+          <dgm:constr type="b" for="ch" forName="ThreeNodes_1_text" refType="b" refFor="ch" refForName="ThreeNodes_1"/>
+          <dgm:constr type="r" for="ch" forName="ThreeNodes_1_text" refType="r" refFor="ch" refForName="ThreeNodes_1"/>
+          <dgm:constr type="l" for="ch" forName="ThreeNodes_2_text" refType="r" refFor="ch" refForName="ThreeConn_1-2"/>
+          <dgm:constr type="t" for="ch" forName="ThreeNodes_2_text" refType="t" refFor="ch" refForName="ThreeNodes_2"/>
+          <dgm:constr type="b" for="ch" forName="ThreeNodes_2_text" refType="b" refFor="ch" refForName="ThreeNodes_2"/>
+          <dgm:constr type="r" for="ch" forName="ThreeNodes_2_text" refType="r" refFor="ch" refForName="ThreeNodes_2"/>
+          <dgm:constr type="l" for="ch" forName="ThreeNodes_3_text" refType="r" refFor="ch" refForName="ThreeConn_2-3"/>
+          <dgm:constr type="t" for="ch" forName="ThreeNodes_3_text" refType="t" refFor="ch" refForName="ThreeNodes_3"/>
+          <dgm:constr type="b" for="ch" forName="ThreeNodes_3_text" refType="b" refFor="ch" refForName="ThreeNodes_3"/>
+          <dgm:constr type="r" for="ch" forName="ThreeNodes_3_text" refType="r" refFor="ch" refForName="ThreeNodes_3"/>
+          <dgm:constr type="w" for="ch" forName="FourNodes_1" refType="w" fact="0.8"/>
+          <dgm:constr type="h" for="ch" forName="FourNodes_1" refType="h" fact="0.22"/>
+          <dgm:constr type="t" for="ch" forName="FourNodes_1"/>
+          <dgm:constr type="r" for="ch" forName="FourNodes_1" refType="w"/>
+          <dgm:constr type="w" for="ch" forName="FourNodes_2" refType="w" fact="0.8"/>
+          <dgm:constr type="h" for="ch" forName="FourNodes_2" refType="h" fact="0.22"/>
+          <dgm:constr type="ctrY" for="ch" forName="FourNodes_2" refType="h" fact="0.37"/>
+          <dgm:constr type="ctrX" for="ch" forName="FourNodes_2" refType="w" fact="0.533"/>
+          <dgm:constr type="w" for="ch" forName="FourNodes_3" refType="w" fact="0.8"/>
+          <dgm:constr type="h" for="ch" forName="FourNodes_3" refType="h" fact="0.22"/>
+          <dgm:constr type="ctrY" for="ch" forName="FourNodes_3" refType="h" fact="0.63"/>
+          <dgm:constr type="ctrX" for="ch" forName="FourNodes_3" refType="w" fact="0.467"/>
+          <dgm:constr type="w" for="ch" forName="FourNodes_4" refType="w" fact="0.8"/>
+          <dgm:constr type="h" for="ch" forName="FourNodes_4" refType="h" fact="0.22"/>
+          <dgm:constr type="b" for="ch" forName="FourNodes_4" refType="h"/>
+          <dgm:constr type="l" for="ch" forName="FourNodes_4"/>
+          <dgm:constr type="w" for="ch" forName="FourConn_1-2" refType="h" refFor="ch" refForName="FourNodes_1" fact="0.65"/>
+          <dgm:constr type="h" for="ch" forName="FourConn_1-2" refType="h" refFor="ch" refForName="FourNodes_1" fact="0.65"/>
+          <dgm:constr type="ctrY" for="ch" forName="FourConn_1-2" refType="h" fact="0.24"/>
+          <dgm:constr type="l" for="ch" forName="FourConn_1-2" refType="l" refFor="ch" refForName="FourNodes_1"/>
+          <dgm:constr type="w" for="ch" forName="FourConn_2-3" refType="h" refFor="ch" refForName="FourNodes_2" fact="0.65"/>
+          <dgm:constr type="h" for="ch" forName="FourConn_2-3" refType="h" refFor="ch" refForName="FourNodes_2" fact="0.65"/>
+          <dgm:constr type="ctrY" for="ch" forName="FourConn_2-3" refType="h" fact="0.5"/>
+          <dgm:constr type="l" for="ch" forName="FourConn_2-3" refType="l" refFor="ch" refForName="FourNodes_2"/>
+          <dgm:constr type="w" for="ch" forName="FourConn_3-4" refType="h" refFor="ch" refForName="FourNodes_3" fact="0.65"/>
+          <dgm:constr type="h" for="ch" forName="FourConn_3-4" refType="h" refFor="ch" refForName="FourNodes_3" fact="0.65"/>
+          <dgm:constr type="ctrY" for="ch" forName="FourConn_3-4" refType="h" fact="0.76"/>
+          <dgm:constr type="l" for="ch" forName="FourConn_3-4" refType="l" refFor="ch" refForName="FourNodes_3"/>
+          <dgm:constr type="l" for="ch" forName="FourNodes_1_text" refType="r" refFor="ch" refForName="FourConn_1-2"/>
+          <dgm:constr type="lOff" for="ch" forName="FourNodes_1_text" refType="w" refFor="ch" refForName="FourConn_1-2" fact="0.69"/>
+          <dgm:constr type="t" for="ch" forName="FourNodes_1_text" refType="t" refFor="ch" refForName="FourNodes_1"/>
+          <dgm:constr type="b" for="ch" forName="FourNodes_1_text" refType="b" refFor="ch" refForName="FourNodes_1"/>
+          <dgm:constr type="r" for="ch" forName="FourNodes_1_text" refType="r" refFor="ch" refForName="FourNodes_1"/>
+          <dgm:constr type="l" for="ch" forName="FourNodes_2_text" refType="r" refFor="ch" refForName="FourConn_1-2"/>
+          <dgm:constr type="t" for="ch" forName="FourNodes_2_text" refType="t" refFor="ch" refForName="FourNodes_2"/>
+          <dgm:constr type="b" for="ch" forName="FourNodes_2_text" refType="b" refFor="ch" refForName="FourNodes_2"/>
+          <dgm:constr type="r" for="ch" forName="FourNodes_2_text" refType="r" refFor="ch" refForName="FourNodes_2"/>
+          <dgm:constr type="l" for="ch" forName="FourNodes_3_text" refType="r" refFor="ch" refForName="FourConn_2-3"/>
+          <dgm:constr type="t" for="ch" forName="FourNodes_3_text" refType="t" refFor="ch" refForName="FourNodes_3"/>
+          <dgm:constr type="b" for="ch" forName="FourNodes_3_text" refType="b" refFor="ch" refForName="FourNodes_3"/>
+          <dgm:constr type="r" for="ch" forName="FourNodes_3_text" refType="r" refFor="ch" refForName="FourNodes_3"/>
+          <dgm:constr type="l" for="ch" forName="FourNodes_4_text" refType="r" refFor="ch" refForName="FourConn_3-4"/>
+          <dgm:constr type="t" for="ch" forName="FourNodes_4_text" refType="t" refFor="ch" refForName="FourNodes_4"/>
+          <dgm:constr type="b" for="ch" forName="FourNodes_4_text" refType="b" refFor="ch" refForName="FourNodes_4"/>
+          <dgm:constr type="r" for="ch" forName="FourNodes_4_text" refType="r" refFor="ch" refForName="FourNodes_4"/>
+          <dgm:constr type="w" for="ch" forName="FiveNodes_1" refType="w" fact="0.77"/>
+          <dgm:constr type="h" for="ch" forName="FiveNodes_1" refType="h" fact="0.18"/>
+          <dgm:constr type="t" for="ch" forName="FiveNodes_1"/>
+          <dgm:constr type="r" for="ch" forName="FiveNodes_1" refType="w"/>
+          <dgm:constr type="w" for="ch" forName="FiveNodes_2" refType="w" fact="0.77"/>
+          <dgm:constr type="h" for="ch" forName="FiveNodes_2" refType="h" fact="0.18"/>
+          <dgm:constr type="ctrY" for="ch" forName="FiveNodes_2" refType="h" fact="0.295"/>
+          <dgm:constr type="ctrX" for="ch" forName="FiveNodes_2" refType="w" fact="0.5575"/>
+          <dgm:constr type="w" for="ch" forName="FiveNodes_3" refType="w" fact="0.77"/>
+          <dgm:constr type="h" for="ch" forName="FiveNodes_3" refType="h" fact="0.18"/>
+          <dgm:constr type="ctrY" for="ch" forName="FiveNodes_3" refType="h" fact="0.5"/>
+          <dgm:constr type="ctrX" for="ch" forName="FiveNodes_3" refType="w" fact="0.5"/>
+          <dgm:constr type="w" for="ch" forName="FiveNodes_4" refType="w" fact="0.77"/>
+          <dgm:constr type="h" for="ch" forName="FiveNodes_4" refType="h" fact="0.18"/>
+          <dgm:constr type="ctrY" for="ch" forName="FiveNodes_4" refType="h" fact="0.705"/>
+          <dgm:constr type="ctrX" for="ch" forName="FiveNodes_4" refType="w" fact="0.4425"/>
+          <dgm:constr type="w" for="ch" forName="FiveNodes_5" refType="w" fact="0.77"/>
+          <dgm:constr type="h" for="ch" forName="FiveNodes_5" refType="h" fact="0.18"/>
+          <dgm:constr type="b" for="ch" forName="FiveNodes_5" refType="h"/>
+          <dgm:constr type="l" for="ch" forName="FiveNodes_5"/>
+          <dgm:constr type="w" for="ch" forName="FiveConn_1-2" refType="h" refFor="ch" refForName="FiveNodes_1" fact="0.65"/>
+          <dgm:constr type="h" for="ch" forName="FiveConn_1-2" refType="h" refFor="ch" refForName="FiveNodes_1" fact="0.65"/>
+          <dgm:constr type="ctrY" for="ch" forName="FiveConn_1-2" refType="h" fact="0.19"/>
+          <dgm:constr type="l" for="ch" forName="FiveConn_1-2" refType="l" refFor="ch" refForName="FiveNodes_1"/>
+          <dgm:constr type="w" for="ch" forName="FiveConn_2-3" refType="h" refFor="ch" refForName="FiveNodes_2" fact="0.65"/>
+          <dgm:constr type="h" for="ch" forName="FiveConn_2-3" refType="h" refFor="ch" refForName="FiveNodes_2" fact="0.65"/>
+          <dgm:constr type="ctrY" for="ch" forName="FiveConn_2-3" refType="h" fact="0.395"/>
+          <dgm:constr type="l" for="ch" forName="FiveConn_2-3" refType="l" refFor="ch" refForName="FiveNodes_2"/>
+          <dgm:constr type="w" for="ch" forName="FiveConn_3-4" refType="h" refFor="ch" refForName="FiveNodes_3" fact="0.65"/>
+          <dgm:constr type="h" for="ch" forName="FiveConn_3-4" refType="h" refFor="ch" refForName="FiveNodes_3" fact="0.65"/>
+          <dgm:constr type="ctrY" for="ch" forName="FiveConn_3-4" refType="h" fact="0.597"/>
+          <dgm:constr type="l" for="ch" forName="FiveConn_3-4" refType="l" refFor="ch" refForName="FiveNodes_3"/>
+          <dgm:constr type="w" for="ch" forName="FiveConn_4-5" refType="h" refFor="ch" refForName="FiveNodes_4" fact="0.65"/>
+          <dgm:constr type="h" for="ch" forName="FiveConn_4-5" refType="h" refFor="ch" refForName="FiveNodes_4" fact="0.65"/>
+          <dgm:constr type="ctrY" for="ch" forName="FiveConn_4-5" refType="h" fact="0.804"/>
+          <dgm:constr type="l" for="ch" forName="FiveConn_4-5" refType="l" refFor="ch" refForName="FiveNodes_4"/>
+          <dgm:constr type="l" for="ch" forName="FiveNodes_1_text" refType="r" refFor="ch" refForName="FiveConn_1-2"/>
+          <dgm:constr type="lOff" for="ch" forName="FiveNodes_1_text" refType="w" refFor="ch" refForName="FiveConn_1-2" fact="0.73"/>
+          <dgm:constr type="t" for="ch" forName="FiveNodes_1_text" refType="t" refFor="ch" refForName="FiveNodes_1"/>
+          <dgm:constr type="b" for="ch" forName="FiveNodes_1_text" refType="b" refFor="ch" refForName="FiveNodes_1"/>
+          <dgm:constr type="r" for="ch" forName="FiveNodes_1_text" refType="r" refFor="ch" refForName="FiveNodes_1"/>
+          <dgm:constr type="l" for="ch" forName="FiveNodes_2_text" refType="r" refFor="ch" refForName="FiveConn_1-2"/>
+          <dgm:constr type="t" for="ch" forName="FiveNodes_2_text" refType="t" refFor="ch" refForName="FiveNodes_2"/>
+          <dgm:constr type="b" for="ch" forName="FiveNodes_2_text" refType="b" refFor="ch" refForName="FiveNodes_2"/>
+          <dgm:constr type="r" for="ch" forName="FiveNodes_2_text" refType="r" refFor="ch" refForName="FiveNodes_2"/>
+          <dgm:constr type="l" for="ch" forName="FiveNodes_3_text" refType="r" refFor="ch" refForName="FiveConn_2-3"/>
+          <dgm:constr type="t" for="ch" forName="FiveNodes_3_text" refType="t" refFor="ch" refForName="FiveNodes_3"/>
+          <dgm:constr type="b" for="ch" forName="FiveNodes_3_text" refType="b" refFor="ch" refForName="FiveNodes_3"/>
+          <dgm:constr type="r" for="ch" forName="FiveNodes_3_text" refType="r" refFor="ch" refForName="FiveNodes_3"/>
+          <dgm:constr type="l" for="ch" forName="FiveNodes_4_text" refType="r" refFor="ch" refForName="FiveConn_3-4"/>
+          <dgm:constr type="t" for="ch" forName="FiveNodes_4_text" refType="t" refFor="ch" refForName="FiveNodes_4"/>
+          <dgm:constr type="b" for="ch" forName="FiveNodes_4_text" refType="b" refFor="ch" refForName="FiveNodes_4"/>
+          <dgm:constr type="r" for="ch" forName="FiveNodes_4_text" refType="r" refFor="ch" refForName="FiveNodes_4"/>
+          <dgm:constr type="l" for="ch" forName="FiveNodes_5_text" refType="r" refFor="ch" refForName="FiveConn_4-5"/>
+          <dgm:constr type="t" for="ch" forName="FiveNodes_5_text" refType="t" refFor="ch" refForName="FiveNodes_5"/>
+          <dgm:constr type="b" for="ch" forName="FiveNodes_5_text" refType="b" refFor="ch" refForName="FiveNodes_5"/>
+          <dgm:constr type="r" for="ch" forName="FiveNodes_5_text" refType="r" refFor="ch" refForName="FiveNodes_5"/>
+        </dgm:constrLst>
+      </dgm:else>
+    </dgm:choose>
     <dgm:ruleLst/>
-    <dgm:forEach name="Name3" axis="ch">
-      <dgm:forEach name="Name4" axis="self" ptType="node">
-        <dgm:layoutNode name="hierRoot1">
-          <dgm:alg type="hierRoot"/>
-          <dgm:shape xmlns:r="http://schemas.openxmlformats.org/officeDocument/2006/relationships" r:blip="">
-            <dgm:adjLst/>
+    <dgm:layoutNode name="dummyMaxCanvas">
+      <dgm:varLst/>
+      <dgm:alg type="sp"/>
+      <dgm:shape xmlns:r="http://schemas.openxmlformats.org/officeDocument/2006/relationships" r:blip="">
+        <dgm:adjLst/>
+      </dgm:shape>
+      <dgm:presOf/>
+      <dgm:constrLst/>
+      <dgm:ruleLst/>
+    </dgm:layoutNode>
+    <dgm:choose name="Name3">
+      <dgm:if name="Name4" axis="ch" ptType="node" func="cnt" op="equ" val="1">
+        <dgm:layoutNode name="OneNode_1">
+          <dgm:varLst>
+            <dgm:bulletEnabled val="1"/>
+          </dgm:varLst>
+          <dgm:alg type="tx"/>
+          <dgm:shape xmlns:r="http://schemas.openxmlformats.org/officeDocument/2006/relationships" type="roundRect" r:blip="">
+            <dgm:adjLst>
+              <dgm:adj idx="1" val="0.1"/>
+            </dgm:adjLst>
           </dgm:shape>
-          <dgm:presOf/>
+          <dgm:presOf axis="ch desOrSelf" ptType="node node" st="1 1" cnt="1 0"/>
           <dgm:constrLst>
-            <dgm:constr type="bendDist" for="des" ptType="parTrans" refType="sp" fact="0.5"/>
+            <dgm:constr type="lMarg" refType="primFontSz" fact="0.3"/>
+            <dgm:constr type="rMarg" refType="primFontSz" fact="0.3"/>
+            <dgm:constr type="tMarg" refType="primFontSz" fact="0.3"/>
+            <dgm:constr type="bMarg" refType="primFontSz" fact="0.3"/>
           </dgm:constrLst>
-          <dgm:ruleLst/>
-          <dgm:layoutNode name="composite">
-            <dgm:alg type="composite"/>
-            <dgm:shape xmlns:r="http://schemas.openxmlformats.org/officeDocument/2006/relationships" r:blip="">
-              <dgm:adjLst/>
-            </dgm:shape>
-            <dgm:presOf/>
-            <dgm:constrLst>
-              <dgm:constr type="w" for="ch" forName="background" refType="w" fact="0.9"/>
-              <dgm:constr type="h" for="ch" forName="background" refType="w" refFor="ch" refForName="background" fact="0.635"/>
-              <dgm:constr type="t" for="ch" forName="background"/>
-              <dgm:constr type="l" for="ch" forName="background"/>
-              <dgm:constr type="w" for="ch" forName="text" refType="w" fact="0.9"/>
-              <dgm:constr type="h" for="ch" forName="text" refType="w" refFor="ch" refForName="text" fact="0.635"/>
-              <dgm:constr type="t" for="ch" forName="text" refType="w" fact="0.095"/>
-              <dgm:constr type="l" for="ch" forName="text" refType="w" fact="0.1"/>
-            </dgm:constrLst>
-            <dgm:ruleLst/>
-            <dgm:layoutNode name="background" styleLbl="node0" moveWith="text">
+          <dgm:ruleLst>
+            <dgm:rule type="primFontSz" val="5" fact="NaN" max="NaN"/>
+          </dgm:ruleLst>
+        </dgm:layoutNode>
+      </dgm:if>
+      <dgm:else name="Name5">
+        <dgm:choose name="Name6">
+          <dgm:if name="Name7" axis="ch" ptType="node" func="cnt" op="equ" val="2">
+            <dgm:layoutNode name="TwoNodes_1">
+              <dgm:varLst>
+                <dgm:bulletEnabled val="1"/>
+              </dgm:varLst>
               <dgm:alg type="sp"/>
               <dgm:shape xmlns:r="http://schemas.openxmlformats.org/officeDocument/2006/relationships" type="roundRect" r:blip="">
                 <dgm:adjLst>
                   <dgm:adj idx="1" val="0.1"/>
                 </dgm:adjLst>
               </dgm:shape>
-              <dgm:presOf/>
+              <dgm:presOf axis="ch desOrSelf" ptType="node node" st="1 1" cnt="1 0"/>
               <dgm:constrLst/>
               <dgm:ruleLst/>
             </dgm:layoutNode>
-            <dgm:layoutNode name="text" styleLbl="fgAcc0">
+            <dgm:layoutNode name="TwoNodes_2">
               <dgm:varLst>
-                <dgm:chPref val="3"/>
+                <dgm:bulletEnabled val="1"/>
               </dgm:varLst>
-              <dgm:alg type="tx"/>
+              <dgm:alg type="sp"/>
               <dgm:shape xmlns:r="http://schemas.openxmlformats.org/officeDocument/2006/relationships" type="roundRect" r:blip="">
                 <dgm:adjLst>
                   <dgm:adj idx="1" val="0.1"/>
                 </dgm:adjLst>
               </dgm:shape>
-              <dgm:presOf axis="self"/>
+              <dgm:presOf axis="ch desOrSelf" ptType="node node" st="2 1" cnt="1 0"/>
+              <dgm:constrLst/>
+              <dgm:ruleLst/>
+            </dgm:layoutNode>
+            <dgm:layoutNode name="TwoConn_1-2" styleLbl="fgAccFollowNode1">
+              <dgm:varLst>
+                <dgm:bulletEnabled val="1"/>
+              </dgm:varLst>
+              <dgm:alg type="tx"/>
+              <dgm:shape xmlns:r="http://schemas.openxmlformats.org/officeDocument/2006/relationships" type="downArrow" r:blip="">
+                <dgm:adjLst>
+                  <dgm:adj idx="1" val="0.55"/>
+                  <dgm:adj idx="2" val="0.45"/>
+                </dgm:adjLst>
+              </dgm:shape>
+              <dgm:presOf axis="ch" ptType="sibTrans" cnt="1"/>
               <dgm:constrLst>
-                <dgm:constr type="tMarg" refType="primFontSz" fact="0.3"/>
-                <dgm:constr type="bMarg" refType="primFontSz" fact="0.3"/>
-                <dgm:constr type="lMarg" refType="primFontSz" fact="0.3"/>
-                <dgm:constr type="rMarg" refType="primFontSz" fact="0.3"/>
+                <dgm:constr type="lMarg" refType="primFontSz" fact="0.1"/>
+                <dgm:constr type="rMarg" refType="primFontSz" fact="0.1"/>
+                <dgm:constr type="tMarg" refType="primFontSz" fact="0.1"/>
+                <dgm:constr type="bMarg" refType="primFontSz" fact="0.1"/>
               </dgm:constrLst>
               <dgm:ruleLst>
                 <dgm:rule type="primFontSz" val="5" fact="NaN" max="NaN"/>
               </dgm:ruleLst>
             </dgm:layoutNode>
-          </dgm:layoutNode>
-          <dgm:layoutNode name="hierChild2">
-            <dgm:choose name="Name5">
-              <dgm:if name="Name6" func="var" arg="dir" op="equ" val="norm">
-                <dgm:alg type="hierChild">
-                  <dgm:param type="linDir" val="fromL"/>
-                </dgm:alg>
-              </dgm:if>
-              <dgm:else name="Name7">
-                <dgm:alg type="hierChild">
-                  <dgm:param type="linDir" val="fromR"/>
-                </dgm:alg>
-              </dgm:else>
-            </dgm:choose>
-            <dgm:shape xmlns:r="http://schemas.openxmlformats.org/officeDocument/2006/relationships" r:blip="">
-              <dgm:adjLst/>
-            </dgm:shape>
-            <dgm:presOf/>
-            <dgm:constrLst/>
-            <dgm:ruleLst/>
-            <dgm:forEach name="Name8" axis="ch">
-              <dgm:forEach name="Name9" axis="self" ptType="parTrans" cnt="1">
-                <dgm:layoutNode name="Name10">
-                  <dgm:alg type="conn">
-                    <dgm:param type="dim" val="1D"/>
-                    <dgm:param type="endSty" val="noArr"/>
-                    <dgm:param type="connRout" val="bend"/>
-                    <dgm:param type="bendPt" val="end"/>
-                    <dgm:param type="begPts" val="bCtr"/>
-                    <dgm:param type="endPts" val="tCtr"/>
-                    <dgm:param type="srcNode" val="background"/>
-                    <dgm:param type="dstNode" val="background2"/>
-                  </dgm:alg>
-                  <dgm:shape xmlns:r="http://schemas.openxmlformats.org/officeDocument/2006/relationships" type="conn" r:blip="" zOrderOff="-999">
-                    <dgm:adjLst/>
+            <dgm:layoutNode name="TwoNodes_1_text">
+              <dgm:varLst>
+                <dgm:bulletEnabled val="1"/>
+              </dgm:varLst>
+              <dgm:alg type="tx">
+                <dgm:param type="parTxLTRAlign" val="l"/>
+                <dgm:param type="txAnchorVertCh" val="mid"/>
+              </dgm:alg>
+              <dgm:shape xmlns:r="http://schemas.openxmlformats.org/officeDocument/2006/relationships" type="roundRect" r:blip="" hideGeom="1">
+                <dgm:adjLst>
+                  <dgm:adj idx="1" val="0.1"/>
+                </dgm:adjLst>
+              </dgm:shape>
+              <dgm:presOf axis="ch desOrSelf" ptType="node node" st="1 1" cnt="1 0"/>
+              <dgm:constrLst>
+                <dgm:constr type="lMarg" refType="primFontSz" fact="0.3"/>
+                <dgm:constr type="rMarg" refType="primFontSz" fact="0.3"/>
+                <dgm:constr type="tMarg" refType="primFontSz" fact="0.3"/>
+                <dgm:constr type="bMarg" refType="primFontSz" fact="0.3"/>
+              </dgm:constrLst>
+              <dgm:ruleLst>
+                <dgm:rule type="primFontSz" val="5" fact="NaN" max="NaN"/>
+              </dgm:ruleLst>
+            </dgm:layoutNode>
+            <dgm:layoutNode name="TwoNodes_2_text">
+              <dgm:varLst>
+                <dgm:bulletEnabled val="1"/>
+              </dgm:varLst>
+              <dgm:alg type="tx">
+                <dgm:param type="parTxLTRAlign" val="l"/>
+                <dgm:param type="txAnchorVertCh" val="mid"/>
+              </dgm:alg>
+              <dgm:shape xmlns:r="http://schemas.openxmlformats.org/officeDocument/2006/relationships" type="roundRect" r:blip="" hideGeom="1">
+                <dgm:adjLst>
+                  <dgm:adj idx="1" val="0.1"/>
+                </dgm:adjLst>
+              </dgm:shape>
+              <dgm:presOf axis="ch desOrSelf" ptType="node node" st="2 1" cnt="1 0"/>
+              <dgm:constrLst>
+                <dgm:constr type="lMarg" refType="primFontSz" fact="0.3"/>
+                <dgm:constr type="rMarg" refType="primFontSz" fact="0.3"/>
+                <dgm:constr type="tMarg" refType="primFontSz" fact="0.3"/>
+                <dgm:constr type="bMarg" refType="primFontSz" fact="0.3"/>
+              </dgm:constrLst>
+              <dgm:ruleLst>
+                <dgm:rule type="primFontSz" val="5" fact="NaN" max="NaN"/>
+              </dgm:ruleLst>
+            </dgm:layoutNode>
+          </dgm:if>
+          <dgm:else name="Name8">
+            <dgm:choose name="Name9">
+              <dgm:if name="Name10" axis="ch" ptType="node" func="cnt" op="equ" val="3">
+                <dgm:layoutNode name="ThreeNodes_1">
+                  <dgm:varLst>
+                    <dgm:bulletEnabled val="1"/>
+                  </dgm:varLst>
+                  <dgm:alg type="sp"/>
+                  <dgm:shape xmlns:r="http://schemas.openxmlformats.org/officeDocument/2006/relationships" type="roundRect" r:blip="">
+                    <dgm:adjLst>
+                      <dgm:adj idx="1" val="0.1"/>
+                    </dgm:adjLst>
                   </dgm:shape>
-                  <dgm:presOf axis="self"/>
-                  <dgm:constrLst>
-                    <dgm:constr type="begPad"/>
-                    <dgm:constr type="endPad"/>
-                  </dgm:constrLst>
+                  <dgm:presOf axis="ch desOrSelf" ptType="node node" st="1 1" cnt="1 0"/>
+                  <dgm:constrLst/>
                   <dgm:ruleLst/>
                 </dgm:layoutNode>
-              </dgm:forEach>
-              <dgm:forEach name="Name11" axis="self" ptType="node">
-                <dgm:layoutNode name="hierRoot2">
-                  <dgm:alg type="hierRoot"/>
-                  <dgm:shape xmlns:r="http://schemas.openxmlformats.org/officeDocument/2006/relationships" r:blip="">
-                    <dgm:adjLst/>
+                <dgm:layoutNode name="ThreeNodes_2">
+                  <dgm:varLst>
+                    <dgm:bulletEnabled val="1"/>
+                  </dgm:varLst>
+                  <dgm:alg type="sp"/>
+                  <dgm:shape xmlns:r="http://schemas.openxmlformats.org/officeDocument/2006/relationships" type="roundRect" r:blip="">
+                    <dgm:adjLst>
+                      <dgm:adj idx="1" val="0.1"/>
+                    </dgm:adjLst>
                   </dgm:shape>
-                  <dgm:presOf/>
+                  <dgm:presOf axis="ch desOrSelf" ptType="node node" st="2 1" cnt="1 0"/>
+                  <dgm:constrLst/>
+                  <dgm:ruleLst/>
+                </dgm:layoutNode>
+                <dgm:layoutNode name="ThreeNodes_3">
+                  <dgm:varLst>
+                    <dgm:bulletEnabled val="1"/>
+                  </dgm:varLst>
+                  <dgm:alg type="sp"/>
+                  <dgm:shape xmlns:r="http://schemas.openxmlformats.org/officeDocument/2006/relationships" type="roundRect" r:blip="">
+                    <dgm:adjLst>
+                      <dgm:adj idx="1" val="0.1"/>
+                    </dgm:adjLst>
+                  </dgm:shape>
+                  <dgm:presOf axis="ch desOrSelf" ptType="node node" st="3 1" cnt="1 0"/>
+                  <dgm:constrLst/>
+                  <dgm:ruleLst/>
+                </dgm:layoutNode>
+                <dgm:layoutNode name="ThreeConn_1-2" styleLbl="fgAccFollowNode1">
+                  <dgm:varLst>
+                    <dgm:bulletEnabled val="1"/>
+                  </dgm:varLst>
+                  <dgm:alg type="tx"/>
+                  <dgm:shape xmlns:r="http://schemas.openxmlformats.org/officeDocument/2006/relationships" type="downArrow" r:blip="">
+                    <dgm:adjLst>
+                      <dgm:adj idx="1" val="0.55"/>
+                      <dgm:adj idx="2" val="0.45"/>
+                    </dgm:adjLst>
+                  </dgm:shape>
+                  <dgm:presOf axis="ch" ptType="sibTrans" cnt="1"/>
                   <dgm:constrLst>
-                    <dgm:constr type="bendDist" for="des" ptType="parTrans" refType="sp" fact="0.5"/>
+                    <dgm:constr type="lMarg" refType="primFontSz" fact="0.1"/>
+                    <dgm:constr type="rMarg" refType="primFontSz" fact="0.1"/>
+                    <dgm:constr type="tMarg" refType="primFontSz" fact="0.1"/>
+                    <dgm:constr type="bMarg" refType="primFontSz" fact="0.1"/>
                   </dgm:constrLst>
-                  <dgm:ruleLst/>
-                  <dgm:layoutNode name="composite2">
-                    <dgm:alg type="composite"/>
-                    <dgm:shape xmlns:r="http://schemas.openxmlformats.org/officeDocument/2006/relationships" r:blip="">
-                      <dgm:adjLst/>
-                    </dgm:shape>
-                    <dgm:presOf/>
-                    <dgm:constrLst>
-                      <dgm:constr type="w" for="ch" forName="background2" refType="w" fact="0.9"/>
-                      <dgm:constr type="h" for="ch" forName="background2" refType="w" refFor="ch" refForName="background2" fact="0.635"/>
-                      <dgm:constr type="t" for="ch" forName="background2"/>
-                      <dgm:constr type="l" for="ch" forName="background2"/>
-                      <dgm:constr type="w" for="ch" forName="text2" refType="w" fact="0.9"/>
-                      <dgm:constr type="h" for="ch" forName="text2" refType="w" refFor="ch" refForName="text2" fact="0.635"/>
-                      <dgm:constr type="t" for="ch" forName="text2" refType="w" fact="0.095"/>
-                      <dgm:constr type="l" for="ch" forName="text2" refType="w" fact="0.1"/>
-                    </dgm:constrLst>
-                    <dgm:ruleLst/>
-                    <dgm:layoutNode name="background2" moveWith="text2">
+                  <dgm:ruleLst>
+                    <dgm:rule type="primFontSz" val="5" fact="NaN" max="NaN"/>
+                  </dgm:ruleLst>
+                </dgm:layoutNode>
+                <dgm:layoutNode name="ThreeConn_2-3" styleLbl="fgAccFollowNode1">
+                  <dgm:varLst>
+                    <dgm:bulletEnabled val="1"/>
+                  </dgm:varLst>
+                  <dgm:alg type="tx"/>
+                  <dgm:shape xmlns:r="http://schemas.openxmlformats.org/officeDocument/2006/relationships" type="downArrow" r:blip="">
+                    <dgm:adjLst>
+                      <dgm:adj idx="1" val="0.55"/>
+                      <dgm:adj idx="2" val="0.45"/>
+                    </dgm:adjLst>
+                  </dgm:shape>
+                  <dgm:presOf axis="ch" ptType="sibTrans" st="2" cnt="1"/>
+                  <dgm:constrLst>
+                    <dgm:constr type="lMarg" refType="primFontSz" fact="0.1"/>
+                    <dgm:constr type="rMarg" refType="primFontSz" fact="0.1"/>
+                    <dgm:constr type="tMarg" refType="primFontSz" fact="0.1"/>
+                    <dgm:constr type="bMarg" refType="primFontSz" fact="0.1"/>
+                  </dgm:constrLst>
+                  <dgm:ruleLst>
+                    <dgm:rule type="primFontSz" val="5" fact="NaN" max="NaN"/>
+                  </dgm:ruleLst>
+                </dgm:layoutNode>
+                <dgm:layoutNode name="ThreeNodes_1_text">
+                  <dgm:varLst>
+                    <dgm:bulletEnabled val="1"/>
+                  </dgm:varLst>
+                  <dgm:alg type="tx">
+                    <dgm:param type="parTxLTRAlign" val="l"/>
+                    <dgm:param type="txAnchorVertCh" val="mid"/>
+                  </dgm:alg>
+                  <dgm:shape xmlns:r="http://schemas.openxmlformats.org/officeDocument/2006/relationships" type="roundRect" r:blip="" hideGeom="1">
+                    <dgm:adjLst>
+                      <dgm:adj idx="1" val="0.1"/>
+                    </dgm:adjLst>
+                  </dgm:shape>
+                  <dgm:presOf axis="ch desOrSelf" ptType="node node" st="1 1" cnt="1 0"/>
+                  <dgm:constrLst>
+                    <dgm:constr type="lMarg" refType="primFontSz" fact="0.3"/>
+                    <dgm:constr type="rMarg" refType="primFontSz" fact="0.3"/>
+                    <dgm:constr type="tMarg" refType="primFontSz" fact="0.3"/>
+                    <dgm:constr type="bMarg" refType="primFontSz" fact="0.3"/>
+                  </dgm:constrLst>
+                  <dgm:ruleLst>
+                    <dgm:rule type="primFontSz" val="5" fact="NaN" max="NaN"/>
+                  </dgm:ruleLst>
+                </dgm:layoutNode>
+                <dgm:layoutNode name="ThreeNodes_2_text">
+                  <dgm:varLst>
+                    <dgm:bulletEnabled val="1"/>
+                  </dgm:varLst>
+                  <dgm:alg type="tx">
+                    <dgm:param type="parTxLTRAlign" val="l"/>
+                    <dgm:param type="txAnchorVertCh" val="mid"/>
+                  </dgm:alg>
+                  <dgm:shape xmlns:r="http://schemas.openxmlformats.org/officeDocument/2006/relationships" type="roundRect" r:blip="" hideGeom="1">
+                    <dgm:adjLst>
+                      <dgm:adj idx="1" val="0.1"/>
+                    </dgm:adjLst>
+                  </dgm:shape>
+                  <dgm:presOf axis="ch desOrSelf" ptType="node node" st="2 1" cnt="1 0"/>
+                  <dgm:constrLst>
+                    <dgm:constr type="lMarg" refType="primFontSz" fact="0.3"/>
+                    <dgm:constr type="rMarg" refType="primFontSz" fact="0.3"/>
+                    <dgm:constr type="tMarg" refType="primFontSz" fact="0.3"/>
+                    <dgm:constr type="bMarg" refType="primFontSz" fact="0.3"/>
+                  </dgm:constrLst>
+                  <dgm:ruleLst>
+                    <dgm:rule type="primFontSz" val="5" fact="NaN" max="NaN"/>
+                  </dgm:ruleLst>
+                </dgm:layoutNode>
+                <dgm:layoutNode name="ThreeNodes_3_text">
+                  <dgm:varLst>
+                    <dgm:bulletEnabled val="1"/>
+                  </dgm:varLst>
+                  <dgm:alg type="tx">
+                    <dgm:param type="parTxLTRAlign" val="l"/>
+                    <dgm:param type="txAnchorVertCh" val="mid"/>
+                  </dgm:alg>
+                  <dgm:shape xmlns:r="http://schemas.openxmlformats.org/officeDocument/2006/relationships" type="roundRect" r:blip="" hideGeom="1">
+                    <dgm:adjLst>
+                      <dgm:adj idx="1" val="0.1"/>
+                    </dgm:adjLst>
+                  </dgm:shape>
+                  <dgm:presOf axis="ch desOrSelf" ptType="node node" st="3 1" cnt="1 0"/>
+                  <dgm:constrLst>
+                    <dgm:constr type="lMarg" refType="primFontSz" fact="0.3"/>
+                    <dgm:constr type="rMarg" refType="primFontSz" fact="0.3"/>
+                    <dgm:constr type="tMarg" refType="primFontSz" fact="0.3"/>
+                    <dgm:constr type="bMarg" refType="primFontSz" fact="0.3"/>
+                  </dgm:constrLst>
+                  <dgm:ruleLst>
+                    <dgm:rule type="primFontSz" val="5" fact="NaN" max="NaN"/>
+                  </dgm:ruleLst>
+                </dgm:layoutNode>
+              </dgm:if>
+              <dgm:else name="Name11">
+                <dgm:choose name="Name12">
+                  <dgm:if name="Name13" axis="ch" ptType="node" func="cnt" op="equ" val="4">
+                    <dgm:layoutNode name="FourNodes_1">
+                      <dgm:varLst>
+                        <dgm:bulletEnabled val="1"/>
+                      </dgm:varLst>
                       <dgm:alg type="sp"/>
                       <dgm:shape xmlns:r="http://schemas.openxmlformats.org/officeDocument/2006/relationships" type="roundRect" r:blip="">
                         <dgm:adjLst>
                           <dgm:adj idx="1" val="0.1"/>
                         </dgm:adjLst>
                       </dgm:shape>
-                      <dgm:presOf/>
+                      <dgm:presOf axis="ch desOrSelf" ptType="node node" st="1 1" cnt="1 0"/>
                       <dgm:constrLst/>
                       <dgm:ruleLst/>
                     </dgm:layoutNode>
-                    <dgm:layoutNode name="text2" styleLbl="fgAcc2">
+                    <dgm:layoutNode name="FourNodes_2">
                       <dgm:varLst>
-                        <dgm:chPref val="3"/>
+                        <dgm:bulletEnabled val="1"/>
                       </dgm:varLst>
-                      <dgm:alg type="tx"/>
+                      <dgm:alg type="sp"/>
                       <dgm:shape xmlns:r="http://schemas.openxmlformats.org/officeDocument/2006/relationships" type="roundRect" r:blip="">
                         <dgm:adjLst>
                           <dgm:adj idx="1" val="0.1"/>
                         </dgm:adjLst>
                       </dgm:shape>
-                      <dgm:presOf axis="self"/>
+                      <dgm:presOf axis="ch desOrSelf" ptType="node node" st="2 1" cnt="1 0"/>
+                      <dgm:constrLst/>
+                      <dgm:ruleLst/>
+                    </dgm:layoutNode>
+                    <dgm:layoutNode name="FourNodes_3">
+                      <dgm:varLst>
+                        <dgm:bulletEnabled val="1"/>
+                      </dgm:varLst>
+                      <dgm:alg type="sp"/>
+                      <dgm:shape xmlns:r="http://schemas.openxmlformats.org/officeDocument/2006/relationships" type="roundRect" r:blip="">
+                        <dgm:adjLst>
+                          <dgm:adj idx="1" val="0.1"/>
+                        </dgm:adjLst>
+                      </dgm:shape>
+                      <dgm:presOf axis="ch desOrSelf" ptType="node node" st="3 1" cnt="1 0"/>
+                      <dgm:constrLst/>
+                      <dgm:ruleLst/>
+                    </dgm:layoutNode>
+                    <dgm:layoutNode name="FourNodes_4">
+                      <dgm:varLst>
+                        <dgm:bulletEnabled val="1"/>
+                      </dgm:varLst>
+                      <dgm:alg type="sp"/>
+                      <dgm:shape xmlns:r="http://schemas.openxmlformats.org/officeDocument/2006/relationships" type="roundRect" r:blip="">
+                        <dgm:adjLst>
+                          <dgm:adj idx="1" val="0.1"/>
+                        </dgm:adjLst>
+                      </dgm:shape>
+                      <dgm:presOf axis="ch desOrSelf" ptType="node node" st="4 1" cnt="1 0"/>
+                      <dgm:constrLst/>
+                      <dgm:ruleLst/>
+                    </dgm:layoutNode>
+                    <dgm:layoutNode name="FourConn_1-2" styleLbl="fgAccFollowNode1">
+                      <dgm:varLst>
+                        <dgm:bulletEnabled val="1"/>
+                      </dgm:varLst>
+                      <dgm:alg type="tx"/>
+                      <dgm:shape xmlns:r="http://schemas.openxmlformats.org/officeDocument/2006/relationships" type="downArrow" r:blip="">
+                        <dgm:adjLst>
+                          <dgm:adj idx="1" val="0.55"/>
+                          <dgm:adj idx="2" val="0.45"/>
+                        </dgm:adjLst>
+                      </dgm:shape>
+                      <dgm:presOf axis="ch" ptType="sibTrans" cnt="1"/>
                       <dgm:constrLst>
-                        <dgm:constr type="tMarg" refType="primFontSz" fact="0.3"/>
-                        <dgm:constr type="bMarg" refType="primFontSz" fact="0.3"/>
-                        <dgm:constr type="lMarg" refType="primFontSz" fact="0.3"/>
-                        <dgm:constr type="rMarg" refType="primFontSz" fact="0.3"/>
+                        <dgm:constr type="lMarg" refType="primFontSz" fact="0.1"/>
+                        <dgm:constr type="rMarg" refType="primFontSz" fact="0.1"/>
+                        <dgm:constr type="tMarg" refType="primFontSz" fact="0.1"/>
+                        <dgm:constr type="bMarg" refType="primFontSz" fact="0.1"/>
                       </dgm:constrLst>
                       <dgm:ruleLst>
                         <dgm:rule type="primFontSz" val="5" fact="NaN" max="NaN"/>
                       </dgm:ruleLst>
                     </dgm:layoutNode>
-                  </dgm:layoutNode>
-                  <dgm:layoutNode name="hierChild3">
-                    <dgm:choose name="Name12">
-                      <dgm:if name="Name13" func="var" arg="dir" op="equ" val="norm">
-                        <dgm:alg type="hierChild">
-                          <dgm:param type="linDir" val="fromL"/>
-                        </dgm:alg>
-                      </dgm:if>
-                      <dgm:else name="Name14">
-                        <dgm:alg type="hierChild">
-                          <dgm:param type="linDir" val="fromR"/>
-                        </dgm:alg>
-                      </dgm:else>
-                    </dgm:choose>
-                    <dgm:shape xmlns:r="http://schemas.openxmlformats.org/officeDocument/2006/relationships" r:blip="">
-                      <dgm:adjLst/>
-                    </dgm:shape>
-                    <dgm:presOf/>
-                    <dgm:constrLst/>
-                    <dgm:ruleLst/>
-                    <dgm:forEach name="Name15" axis="ch">
-                      <dgm:forEach name="Name16" axis="self" ptType="parTrans" cnt="1">
-                        <dgm:layoutNode name="Name17">
-                          <dgm:alg type="conn">
-                            <dgm:param type="dim" val="1D"/>
-                            <dgm:param type="endSty" val="noArr"/>
-                            <dgm:param type="connRout" val="bend"/>
-                            <dgm:param type="bendPt" val="end"/>
-                            <dgm:param type="begPts" val="bCtr"/>
-                            <dgm:param type="endPts" val="tCtr"/>
-                            <dgm:param type="srcNode" val="background2"/>
-                            <dgm:param type="dstNode" val="background3"/>
-                          </dgm:alg>
-                          <dgm:shape xmlns:r="http://schemas.openxmlformats.org/officeDocument/2006/relationships" type="conn" r:blip="" zOrderOff="-999">
-                            <dgm:adjLst/>
+                    <dgm:layoutNode name="FourConn_2-3" styleLbl="fgAccFollowNode1">
+                      <dgm:varLst>
+                        <dgm:bulletEnabled val="1"/>
+                      </dgm:varLst>
+                      <dgm:alg type="tx"/>
+                      <dgm:shape xmlns:r="http://schemas.openxmlformats.org/officeDocument/2006/relationships" type="downArrow" r:blip="">
+                        <dgm:adjLst>
+                          <dgm:adj idx="1" val="0.55"/>
+                          <dgm:adj idx="2" val="0.45"/>
+                        </dgm:adjLst>
+                      </dgm:shape>
+                      <dgm:presOf axis="ch" ptType="sibTrans" st="2" cnt="1"/>
+                      <dgm:constrLst>
+                        <dgm:constr type="lMarg" refType="primFontSz" fact="0.1"/>
+                        <dgm:constr type="rMarg" refType="primFontSz" fact="0.1"/>
+                        <dgm:constr type="tMarg" refType="primFontSz" fact="0.1"/>
+                        <dgm:constr type="bMarg" refType="primFontSz" fact="0.1"/>
+                      </dgm:constrLst>
+                      <dgm:ruleLst>
+                        <dgm:rule type="primFontSz" val="5" fact="NaN" max="NaN"/>
+                      </dgm:ruleLst>
+                    </dgm:layoutNode>
+                    <dgm:layoutNode name="FourConn_3-4" styleLbl="fgAccFollowNode1">
+                      <dgm:varLst>
+                        <dgm:bulletEnabled val="1"/>
+                      </dgm:varLst>
+                      <dgm:alg type="tx"/>
+                      <dgm:shape xmlns:r="http://schemas.openxmlformats.org/officeDocument/2006/relationships" type="downArrow" r:blip="">
+                        <dgm:adjLst>
+                          <dgm:adj idx="1" val="0.55"/>
+                          <dgm:adj idx="2" val="0.45"/>
+                        </dgm:adjLst>
+                      </dgm:shape>
+                      <dgm:presOf axis="ch" ptType="sibTrans" st="3" cnt="1"/>
+                      <dgm:constrLst>
+                        <dgm:constr type="lMarg" refType="primFontSz" fact="0.1"/>
+                        <dgm:constr type="rMarg" refType="primFontSz" fact="0.1"/>
+                        <dgm:constr type="tMarg" refType="primFontSz" fact="0.1"/>
+                        <dgm:constr type="bMarg" refType="primFontSz" fact="0.1"/>
+                      </dgm:constrLst>
+                      <dgm:ruleLst>
+                        <dgm:rule type="primFontSz" val="5" fact="NaN" max="NaN"/>
+                      </dgm:ruleLst>
+                    </dgm:layoutNode>
+                    <dgm:layoutNode name="FourNodes_1_text">
+                      <dgm:varLst>
+                        <dgm:bulletEnabled val="1"/>
+                      </dgm:varLst>
+                      <dgm:alg type="tx">
+                        <dgm:param type="parTxLTRAlign" val="l"/>
+                        <dgm:param type="txAnchorVertCh" val="mid"/>
+                      </dgm:alg>
+                      <dgm:shape xmlns:r="http://schemas.openxmlformats.org/officeDocument/2006/relationships" type="roundRect" r:blip="" hideGeom="1">
+                        <dgm:adjLst>
+                          <dgm:adj idx="1" val="0.1"/>
+                        </dgm:adjLst>
+                      </dgm:shape>
+                      <dgm:presOf axis="ch desOrSelf" ptType="node node" st="1 1" cnt="1 0"/>
+                      <dgm:constrLst>
+                        <dgm:constr type="lMarg" refType="primFontSz" fact="0.3"/>
+                        <dgm:constr type="rMarg" refType="primFontSz" fact="0.3"/>
+                        <dgm:constr type="tMarg" refType="primFontSz" fact="0.3"/>
+                        <dgm:constr type="bMarg" refType="primFontSz" fact="0.3"/>
+                      </dgm:constrLst>
+                      <dgm:ruleLst>
+                        <dgm:rule type="primFontSz" val="5" fact="NaN" max="NaN"/>
+                      </dgm:ruleLst>
+                    </dgm:layoutNode>
+                    <dgm:layoutNode name="FourNodes_2_text">
+                      <dgm:varLst>
+                        <dgm:bulletEnabled val="1"/>
+                      </dgm:varLst>
+                      <dgm:alg type="tx">
+                        <dgm:param type="parTxLTRAlign" val="l"/>
+                        <dgm:param type="txAnchorVertCh" val="mid"/>
+                      </dgm:alg>
+                      <dgm:shape xmlns:r="http://schemas.openxmlformats.org/officeDocument/2006/relationships" type="roundRect" r:blip="" hideGeom="1">
+                        <dgm:adjLst>
+                          <dgm:adj idx="1" val="0.1"/>
+                        </dgm:adjLst>
+                      </dgm:shape>
+                      <dgm:presOf axis="ch desOrSelf" ptType="node node" st="2 1" cnt="1 0"/>
+                      <dgm:constrLst>
+                        <dgm:constr type="lMarg" refType="primFontSz" fact="0.3"/>
+                        <dgm:constr type="rMarg" refType="primFontSz" fact="0.3"/>
+                        <dgm:constr type="tMarg" refType="primFontSz" fact="0.3"/>
+                        <dgm:constr type="bMarg" refType="primFontSz" fact="0.3"/>
+                      </dgm:constrLst>
+                      <dgm:ruleLst>
+                        <dgm:rule type="primFontSz" val="5" fact="NaN" max="NaN"/>
+                      </dgm:ruleLst>
+                    </dgm:layoutNode>
+                    <dgm:layoutNode name="FourNodes_3_text">
+                      <dgm:varLst>
+                        <dgm:bulletEnabled val="1"/>
+                      </dgm:varLst>
+                      <dgm:alg type="tx">
+                        <dgm:param type="parTxLTRAlign" val="l"/>
+                        <dgm:param type="txAnchorVertCh" val="mid"/>
+                      </dgm:alg>
+                      <dgm:shape xmlns:r="http://schemas.openxmlformats.org/officeDocument/2006/relationships" type="roundRect" r:blip="" hideGeom="1">
+                        <dgm:adjLst>
+                          <dgm:adj idx="1" val="0.1"/>
+                        </dgm:adjLst>
+                      </dgm:shape>
+                      <dgm:presOf axis="ch desOrSelf" ptType="node node" st="3 1" cnt="1 0"/>
+                      <dgm:constrLst>
+                        <dgm:constr type="lMarg" refType="primFontSz" fact="0.3"/>
+                        <dgm:constr type="rMarg" refType="primFontSz" fact="0.3"/>
+                        <dgm:constr type="tMarg" refType="primFontSz" fact="0.3"/>
+                        <dgm:constr type="bMarg" refType="primFontSz" fact="0.3"/>
+                      </dgm:constrLst>
+                      <dgm:ruleLst>
+                        <dgm:rule type="primFontSz" val="5" fact="NaN" max="NaN"/>
+                      </dgm:ruleLst>
+                    </dgm:layoutNode>
+                    <dgm:layoutNode name="FourNodes_4_text">
+                      <dgm:varLst>
+                        <dgm:bulletEnabled val="1"/>
+                      </dgm:varLst>
+                      <dgm:alg type="tx">
+                        <dgm:param type="parTxLTRAlign" val="l"/>
+                        <dgm:param type="txAnchorVertCh" val="mid"/>
+                      </dgm:alg>
+                      <dgm:shape xmlns:r="http://schemas.openxmlformats.org/officeDocument/2006/relationships" type="roundRect" r:blip="" hideGeom="1">
+                        <dgm:adjLst>
+                          <dgm:adj idx="1" val="0.1"/>
+                        </dgm:adjLst>
+                      </dgm:shape>
+                      <dgm:presOf axis="ch desOrSelf" ptType="node node" st="4 1" cnt="1 0"/>
+                      <dgm:constrLst>
+                        <dgm:constr type="lMarg" refType="primFontSz" fact="0.3"/>
+                        <dgm:constr type="rMarg" refType="primFontSz" fact="0.3"/>
+                        <dgm:constr type="tMarg" refType="primFontSz" fact="0.3"/>
+                        <dgm:constr type="bMarg" refType="primFontSz" fact="0.3"/>
+                      </dgm:constrLst>
+                      <dgm:ruleLst>
+                        <dgm:rule type="primFontSz" val="5" fact="NaN" max="NaN"/>
+                      </dgm:ruleLst>
+                    </dgm:layoutNode>
+                  </dgm:if>
+                  <dgm:else name="Name14">
+                    <dgm:choose name="Name15">
+                      <dgm:if name="Name16" axis="ch" ptType="node" func="cnt" op="gte" val="5">
+                        <dgm:layoutNode name="FiveNodes_1">
+                          <dgm:varLst>
+                            <dgm:bulletEnabled val="1"/>
+                          </dgm:varLst>
+                          <dgm:alg type="sp"/>
+                          <dgm:shape xmlns:r="http://schemas.openxmlformats.org/officeDocument/2006/relationships" type="roundRect" r:blip="">
+                            <dgm:adjLst>
+                              <dgm:adj idx="1" val="0.1"/>
+                            </dgm:adjLst>
                           </dgm:shape>
-                          <dgm:presOf axis="self"/>
-                          <dgm:constrLst>
-                            <dgm:constr type="begPad"/>
-                            <dgm:constr type="endPad"/>
-                          </dgm:constrLst>
+                          <dgm:presOf axis="ch desOrSelf" ptType="node node" st="1 1" cnt="1 0"/>
+                          <dgm:constrLst/>
                           <dgm:ruleLst/>
                         </dgm:layoutNode>
-                      </dgm:forEach>
-                      <dgm:forEach name="Name18" axis="self" ptType="node">
-                        <dgm:layoutNode name="hierRoot3">
-                          <dgm:alg type="hierRoot"/>
-                          <dgm:shape xmlns:r="http://schemas.openxmlformats.org/officeDocument/2006/relationships" r:blip="">
-                            <dgm:adjLst/>
+                        <dgm:layoutNode name="FiveNodes_2">
+                          <dgm:varLst>
+                            <dgm:bulletEnabled val="1"/>
+                          </dgm:varLst>
+                          <dgm:alg type="sp"/>
+                          <dgm:shape xmlns:r="http://schemas.openxmlformats.org/officeDocument/2006/relationships" type="roundRect" r:blip="">
+                            <dgm:adjLst>
+                              <dgm:adj idx="1" val="0.1"/>
+                            </dgm:adjLst>
                           </dgm:shape>
-                          <dgm:presOf/>
+                          <dgm:presOf axis="ch desOrSelf" ptType="node node" st="2 1" cnt="1 0"/>
+                          <dgm:constrLst/>
+                          <dgm:ruleLst/>
+                        </dgm:layoutNode>
+                        <dgm:layoutNode name="FiveNodes_3">
+                          <dgm:varLst>
+                            <dgm:bulletEnabled val="1"/>
+                          </dgm:varLst>
+                          <dgm:alg type="sp"/>
+                          <dgm:shape xmlns:r="http://schemas.openxmlformats.org/officeDocument/2006/relationships" type="roundRect" r:blip="">
+                            <dgm:adjLst>
+                              <dgm:adj idx="1" val="0.1"/>
+                            </dgm:adjLst>
+                          </dgm:shape>
+                          <dgm:presOf axis="ch desOrSelf" ptType="node node" st="3 1" cnt="1 0"/>
+                          <dgm:constrLst/>
+                          <dgm:ruleLst/>
+                        </dgm:layoutNode>
+                        <dgm:layoutNode name="FiveNodes_4">
+                          <dgm:varLst>
+                            <dgm:bulletEnabled val="1"/>
+                          </dgm:varLst>
+                          <dgm:alg type="sp"/>
+                          <dgm:shape xmlns:r="http://schemas.openxmlformats.org/officeDocument/2006/relationships" type="roundRect" r:blip="">
+                            <dgm:adjLst>
+                              <dgm:adj idx="1" val="0.1"/>
+                            </dgm:adjLst>
+                          </dgm:shape>
+                          <dgm:presOf axis="ch desOrSelf" ptType="node node" st="4 1" cnt="1 0"/>
+                          <dgm:constrLst/>
+                          <dgm:ruleLst/>
+                        </dgm:layoutNode>
+                        <dgm:layoutNode name="FiveNodes_5">
+                          <dgm:varLst>
+                            <dgm:bulletEnabled val="1"/>
+                          </dgm:varLst>
+                          <dgm:alg type="sp"/>
+                          <dgm:shape xmlns:r="http://schemas.openxmlformats.org/officeDocument/2006/relationships" type="roundRect" r:blip="">
+                            <dgm:adjLst>
+                              <dgm:adj idx="1" val="0.1"/>
+                            </dgm:adjLst>
+                          </dgm:shape>
+                          <dgm:presOf axis="ch desOrSelf" ptType="node node" st="5 1" cnt="1 0"/>
+                          <dgm:constrLst/>
+                          <dgm:ruleLst/>
+                        </dgm:layoutNode>
+                        <dgm:layoutNode name="FiveConn_1-2" styleLbl="fgAccFollowNode1">
+                          <dgm:varLst>
+                            <dgm:bulletEnabled val="1"/>
+                          </dgm:varLst>
+                          <dgm:alg type="tx"/>
+                          <dgm:shape xmlns:r="http://schemas.openxmlformats.org/officeDocument/2006/relationships" type="downArrow" r:blip="">
+                            <dgm:adjLst>
+                              <dgm:adj idx="1" val="0.55"/>
+                              <dgm:adj idx="2" val="0.45"/>
+                            </dgm:adjLst>
+                          </dgm:shape>
+                          <dgm:presOf axis="ch" ptType="sibTrans" cnt="1"/>
                           <dgm:constrLst>
-                            <dgm:constr type="bendDist" for="des" ptType="parTrans" refType="sp" fact="0.5"/>
+                            <dgm:constr type="lMarg" refType="primFontSz" fact="0.1"/>
+                            <dgm:constr type="rMarg" refType="primFontSz" fact="0.1"/>
+                            <dgm:constr type="tMarg" refType="primFontSz" fact="0.1"/>
+                            <dgm:constr type="bMarg" refType="primFontSz" fact="0.1"/>
                           </dgm:constrLst>
-                          <dgm:ruleLst/>
-                          <dgm:layoutNode name="composite3">
-                            <dgm:alg type="composite"/>
-                            <dgm:shape xmlns:r="http://schemas.openxmlformats.org/officeDocument/2006/relationships" r:blip="">
-                              <dgm:adjLst/>
-                            </dgm:shape>
-                            <dgm:presOf/>
-                            <dgm:constrLst>
-                              <dgm:constr type="w" for="ch" forName="background3" refType="w" fact="0.9"/>
-                              <dgm:constr type="h" for="ch" forName="background3" refType="w" refFor="ch" refForName="background3" fact="0.635"/>
-                              <dgm:constr type="t" for="ch" forName="background3"/>
-                              <dgm:constr type="l" for="ch" forName="background3"/>
-                              <dgm:constr type="w" for="ch" forName="text3" refType="w" fact="0.9"/>
-                              <dgm:constr type="h" for="ch" forName="text3" refType="w" refFor="ch" refForName="text3" fact="0.635"/>
-                              <dgm:constr type="t" for="ch" forName="text3" refType="w" fact="0.095"/>
-                              <dgm:constr type="l" for="ch" forName="text3" refType="w" fact="0.1"/>
-                            </dgm:constrLst>
-                            <dgm:ruleLst/>
-                            <dgm:layoutNode name="background3" moveWith="text3">
-                              <dgm:alg type="sp"/>
-                              <dgm:shape xmlns:r="http://schemas.openxmlformats.org/officeDocument/2006/relationships" type="roundRect" r:blip="">
-                                <dgm:adjLst>
-                                  <dgm:adj idx="1" val="0.1"/>
-                                </dgm:adjLst>
-                              </dgm:shape>
-                              <dgm:presOf/>
-                              <dgm:constrLst/>
-                              <dgm:ruleLst/>
-                            </dgm:layoutNode>
-                            <dgm:layoutNode name="text3" styleLbl="fgAcc3">
-                              <dgm:varLst>
-                                <dgm:chPref val="3"/>
-                              </dgm:varLst>
-                              <dgm:alg type="tx"/>
-                              <dgm:shape xmlns:r="http://schemas.openxmlformats.org/officeDocument/2006/relationships" type="roundRect" r:blip="">
-                                <dgm:adjLst>
-                                  <dgm:adj idx="1" val="0.1"/>
-                                </dgm:adjLst>
-                              </dgm:shape>
-                              <dgm:presOf axis="self"/>
-                              <dgm:constrLst>
-                                <dgm:constr type="tMarg" refType="primFontSz" fact="0.3"/>
-                                <dgm:constr type="bMarg" refType="primFontSz" fact="0.3"/>
-                                <dgm:constr type="lMarg" refType="primFontSz" fact="0.3"/>
-                                <dgm:constr type="rMarg" refType="primFontSz" fact="0.3"/>
-                              </dgm:constrLst>
-                              <dgm:ruleLst>
-                                <dgm:rule type="primFontSz" val="5" fact="NaN" max="NaN"/>
-                              </dgm:ruleLst>
-                            </dgm:layoutNode>
-                          </dgm:layoutNode>
-                          <dgm:layoutNode name="hierChild4">
-                            <dgm:choose name="Name19">
-                              <dgm:if name="Name20" func="var" arg="dir" op="equ" val="norm">
-                                <dgm:alg type="hierChild">
-                                  <dgm:param type="linDir" val="fromL"/>
-                                </dgm:alg>
-                              </dgm:if>
-                              <dgm:else name="Name21">
-                                <dgm:alg type="hierChild">
-                                  <dgm:param type="linDir" val="fromR"/>
-                                </dgm:alg>
-                              </dgm:else>
-                            </dgm:choose>
-                            <dgm:shape xmlns:r="http://schemas.openxmlformats.org/officeDocument/2006/relationships" r:blip="">
-                              <dgm:adjLst/>
-                            </dgm:shape>
-                            <dgm:presOf/>
-                            <dgm:constrLst/>
-                            <dgm:ruleLst/>
-                            <dgm:forEach name="repeat" axis="ch">
-                              <dgm:forEach name="Name22" axis="self" ptType="parTrans" cnt="1">
-                                <dgm:layoutNode name="Name23">
-                                  <dgm:choose name="Name24">
-                                    <dgm:if name="Name25" axis="self" func="depth" op="lte" val="4">
-                                      <dgm:alg type="conn">
-                                        <dgm:param type="dim" val="1D"/>
-                                        <dgm:param type="endSty" val="noArr"/>
-                                        <dgm:param type="connRout" val="bend"/>
-                                        <dgm:param type="bendPt" val="end"/>
-                                        <dgm:param type="begPts" val="bCtr"/>
-                                        <dgm:param type="endPts" val="tCtr"/>
-                                        <dgm:param type="srcNode" val="background3"/>
-                                        <dgm:param type="dstNode" val="background4"/>
-                                      </dgm:alg>
-                                    </dgm:if>
-                                    <dgm:else name="Name26">
-                                      <dgm:alg type="conn">
-                                        <dgm:param type="dim" val="1D"/>
-                                        <dgm:param type="endSty" val="noArr"/>
-                                        <dgm:param type="connRout" val="bend"/>
-                                        <dgm:param type="bendPt" val="end"/>
-                                        <dgm:param type="begPts" val="bCtr"/>
-                                        <dgm:param type="endPts" val="tCtr"/>
-                                        <dgm:param type="srcNode" val="background4"/>
-                                        <dgm:param type="dstNode" val="background4"/>
-                                      </dgm:alg>
-                                    </dgm:else>
-                                  </dgm:choose>
-                                  <dgm:shape xmlns:r="http://schemas.openxmlformats.org/officeDocument/2006/relationships" type="conn" r:blip="" zOrderOff="-999">
-                                    <dgm:adjLst/>
-                                  </dgm:shape>
-                                  <dgm:presOf axis="self"/>
-                                  <dgm:constrLst>
-                                    <dgm:constr type="begPad"/>
-                                    <dgm:constr type="endPad"/>
-                                  </dgm:constrLst>
-                                  <dgm:ruleLst/>
-                                </dgm:layoutNode>
-                              </dgm:forEach>
-                              <dgm:forEach name="Name27" axis="self" ptType="node">
-                                <dgm:layoutNode name="hierRoot4">
-                                  <dgm:alg type="hierRoot"/>
-                                  <dgm:shape xmlns:r="http://schemas.openxmlformats.org/officeDocument/2006/relationships" r:blip="">
-                                    <dgm:adjLst/>
-                                  </dgm:shape>
-                                  <dgm:presOf/>
-                                  <dgm:constrLst>
-                                    <dgm:constr type="bendDist" for="des" ptType="parTrans" refType="sp" fact="0.5"/>
-                                  </dgm:constrLst>
-                                  <dgm:ruleLst/>
-                                  <dgm:layoutNode name="composite4">
-                                    <dgm:alg type="composite"/>
-                                    <dgm:shape xmlns:r="http://schemas.openxmlformats.org/officeDocument/2006/relationships" r:blip="">
-                                      <dgm:adjLst/>
-                                    </dgm:shape>
-                                    <dgm:presOf/>
-                                    <dgm:constrLst>
-                                      <dgm:constr type="w" for="ch" forName="background4" refType="w" fact="0.9"/>
-                                      <dgm:constr type="h" for="ch" forName="background4" refType="w" refFor="ch" refForName="background4" fact="0.635"/>
-                                      <dgm:constr type="t" for="ch" forName="background4"/>
-                                      <dgm:constr type="l" for="ch" forName="background4"/>
-                                      <dgm:constr type="w" for="ch" forName="text4" refType="w" fact="0.9"/>
-                                      <dgm:constr type="h" for="ch" forName="text4" refType="w" refFor="ch" refForName="text4" fact="0.635"/>
-                                      <dgm:constr type="t" for="ch" forName="text4" refType="w" fact="0.095"/>
-                                      <dgm:constr type="l" for="ch" forName="text4" refType="w" fact="0.1"/>
-                                    </dgm:constrLst>
-                                    <dgm:ruleLst/>
-                                    <dgm:layoutNode name="background4" moveWith="text4">
-                                      <dgm:alg type="sp"/>
-                                      <dgm:shape xmlns:r="http://schemas.openxmlformats.org/officeDocument/2006/relationships" type="roundRect" r:blip="">
-                                        <dgm:adjLst>
-                                          <dgm:adj idx="1" val="0.1"/>
-                                        </dgm:adjLst>
-                                      </dgm:shape>
-                                      <dgm:presOf/>
-                                      <dgm:constrLst/>
-                                      <dgm:ruleLst/>
-                                    </dgm:layoutNode>
-                                    <dgm:layoutNode name="text4" styleLbl="fgAcc4">
-                                      <dgm:varLst>
-                                        <dgm:chPref val="3"/>
-                                      </dgm:varLst>
-                                      <dgm:alg type="tx"/>
-                                      <dgm:shape xmlns:r="http://schemas.openxmlformats.org/officeDocument/2006/relationships" type="roundRect" r:blip="">
-                                        <dgm:adjLst>
-                                          <dgm:adj idx="1" val="0.1"/>
-                                        </dgm:adjLst>
-                                      </dgm:shape>
-                                      <dgm:presOf axis="self"/>
-                                      <dgm:constrLst>
-                                        <dgm:constr type="tMarg" refType="primFontSz" fact="0.3"/>
-                                        <dgm:constr type="bMarg" refType="primFontSz" fact="0.3"/>
-                                        <dgm:constr type="lMarg" refType="primFontSz" fact="0.3"/>
-                                        <dgm:constr type="rMarg" refType="primFontSz" fact="0.3"/>
-                                      </dgm:constrLst>
-                                      <dgm:ruleLst>
-                                        <dgm:rule type="primFontSz" val="5" fact="NaN" max="NaN"/>
-                                      </dgm:ruleLst>
-                                    </dgm:layoutNode>
-                                  </dgm:layoutNode>
-                                  <dgm:layoutNode name="hierChild5">
-                                    <dgm:choose name="Name28">
-                                      <dgm:if name="Name29" func="var" arg="dir" op="equ" val="norm">
-                                        <dgm:alg type="hierChild">
-                                          <dgm:param type="linDir" val="fromL"/>
-                                        </dgm:alg>
-                                      </dgm:if>
-                                      <dgm:else name="Name30">
-                                        <dgm:alg type="hierChild">
-                                          <dgm:param type="linDir" val="fromR"/>
-                                        </dgm:alg>
-                                      </dgm:else>
-                                    </dgm:choose>
-                                    <dgm:shape xmlns:r="http://schemas.openxmlformats.org/officeDocument/2006/relationships" r:blip="">
-                                      <dgm:adjLst/>
-                                    </dgm:shape>
-                                    <dgm:presOf/>
-                                    <dgm:constrLst/>
-                                    <dgm:ruleLst/>
-                                    <dgm:forEach name="Name31" ref="repeat"/>
-                                  </dgm:layoutNode>
-                                </dgm:layoutNode>
-                              </dgm:forEach>
-                            </dgm:forEach>
-                          </dgm:layoutNode>
+                          <dgm:ruleLst>
+                            <dgm:rule type="primFontSz" val="5" fact="NaN" max="NaN"/>
+                          </dgm:ruleLst>
                         </dgm:layoutNode>
-                      </dgm:forEach>
-                    </dgm:forEach>
-                  </dgm:layoutNode>
-                </dgm:layoutNode>
-              </dgm:forEach>
-            </dgm:forEach>
-          </dgm:layoutNode>
-        </dgm:layoutNode>
-      </dgm:forEach>
-    </dgm:forEach>
+                        <dgm:layoutNode name="FiveConn_2-3" styleLbl="fgAccFollowNode1">
+                          <dgm:varLst>
+                            <dgm:bulletEnabled val="1"/>
+                          </dgm:varLst>
+                          <dgm:alg type="tx"/>
+                          <dgm:shape xmlns:r="http://schemas.openxmlformats.org/officeDocument/2006/relationships" type="downArrow" r:blip="">
+                            <dgm:adjLst>
+                              <dgm:adj idx="1" val="0.55"/>
+                              <dgm:adj idx="2" val="0.45"/>
+                            </dgm:adjLst>
+                          </dgm:shape>
+                          <dgm:presOf axis="ch" ptType="sibTrans" st="2" cnt="1"/>
+                          <dgm:constrLst>
+                            <dgm:constr type="lMarg" refType="primFontSz" fact="0.1"/>
+                            <dgm:constr type="rMarg" refType="primFontSz" fact="0.1"/>
+                            <dgm:constr type="tMarg" refType="primFontSz" fact="0.1"/>
+                            <dgm:constr type="bMarg" refType="primFontSz" fact="0.1"/>
+                          </dgm:constrLst>
+                          <dgm:ruleLst>
+                            <dgm:rule type="primFontSz" val="5" fact="NaN" max="NaN"/>
+                          </dgm:ruleLst>
+                        </dgm:layoutNode>
+                        <dgm:layoutNode name="FiveConn_3-4" styleLbl="fgAccFollowNode1">
+                          <dgm:varLst>
+                            <dgm:bulletEnabled val="1"/>
+                          </dgm:varLst>
+                          <dgm:alg type="tx"/>
+                          <dgm:shape xmlns:r="http://schemas.openxmlformats.org/officeDocument/2006/relationships" type="downArrow" r:blip="">
+                            <dgm:adjLst>
+                              <dgm:adj idx="1" val="0.55"/>
+                              <dgm:adj idx="2" val="0.45"/>
+                            </dgm:adjLst>
+                          </dgm:shape>
+                          <dgm:presOf axis="ch" ptType="sibTrans" st="3" cnt="1"/>
+                          <dgm:constrLst>
+                            <dgm:constr type="lMarg" refType="primFontSz" fact="0.1"/>
+                            <dgm:constr type="rMarg" refType="primFontSz" fact="0.1"/>
+                            <dgm:constr type="tMarg" refType="primFontSz" fact="0.1"/>
+                            <dgm:constr type="bMarg" refType="primFontSz" fact="0.1"/>
+                          </dgm:constrLst>
+                          <dgm:ruleLst>
+                            <dgm:rule type="primFontSz" val="5" fact="NaN" max="NaN"/>
+                          </dgm:ruleLst>
+                        </dgm:layoutNode>
+                        <dgm:layoutNode name="FiveConn_4-5" styleLbl="fgAccFollowNode1">
+                          <dgm:varLst>
+                            <dgm:bulletEnabled val="1"/>
+                          </dgm:varLst>
+                          <dgm:alg type="tx"/>
+                          <dgm:shape xmlns:r="http://schemas.openxmlformats.org/officeDocument/2006/relationships" type="downArrow" r:blip="">
+                            <dgm:adjLst>
+                              <dgm:adj idx="1" val="0.55"/>
+                              <dgm:adj idx="2" val="0.45"/>
+                            </dgm:adjLst>
+                          </dgm:shape>
+                          <dgm:presOf axis="ch" ptType="sibTrans" st="4" cnt="1"/>
+                          <dgm:constrLst>
+                            <dgm:constr type="lMarg" refType="primFontSz" fact="0.1"/>
+                            <dgm:constr type="rMarg" refType="primFontSz" fact="0.1"/>
+                            <dgm:constr type="tMarg" refType="primFontSz" fact="0.1"/>
+                            <dgm:constr type="bMarg" refType="primFontSz" fact="0.1"/>
+                          </dgm:constrLst>
+                          <dgm:ruleLst>
+                            <dgm:rule type="primFontSz" val="5" fact="NaN" max="NaN"/>
+                          </dgm:ruleLst>
+                        </dgm:layoutNode>
+                        <dgm:layoutNode name="FiveNodes_1_text">
+                          <dgm:varLst>
+                            <dgm:bulletEnabled val="1"/>
+                          </dgm:varLst>
+                          <dgm:alg type="tx">
+                            <dgm:param type="parTxLTRAlign" val="l"/>
+                            <dgm:param type="txAnchorVertCh" val="mid"/>
+                          </dgm:alg>
+                          <dgm:shape xmlns:r="http://schemas.openxmlformats.org/officeDocument/2006/relationships" type="roundRect" r:blip="" hideGeom="1">
+                            <dgm:adjLst>
+                              <dgm:adj idx="1" val="0.1"/>
+                            </dgm:adjLst>
+                          </dgm:shape>
+                          <dgm:presOf axis="ch desOrSelf" ptType="node node" st="1 1" cnt="1 0"/>
+                          <dgm:constrLst>
+                            <dgm:constr type="lMarg" refType="primFontSz" fact="0.3"/>
+                            <dgm:constr type="rMarg" refType="primFontSz" fact="0.3"/>
+                            <dgm:constr type="tMarg" refType="primFontSz" fact="0.3"/>
+                            <dgm:constr type="bMarg" refType="primFontSz" fact="0.3"/>
+                          </dgm:constrLst>
+                          <dgm:ruleLst>
+                            <dgm:rule type="primFontSz" val="5" fact="NaN" max="NaN"/>
+                          </dgm:ruleLst>
+                        </dgm:layoutNode>
+                        <dgm:layoutNode name="FiveNodes_2_text">
+                          <dgm:varLst>
+                            <dgm:bulletEnabled val="1"/>
+                          </dgm:varLst>
+                          <dgm:alg type="tx">
+                            <dgm:param type="parTxLTRAlign" val="l"/>
+                            <dgm:param type="txAnchorVertCh" val="mid"/>
+                          </dgm:alg>
+                          <dgm:shape xmlns:r="http://schemas.openxmlformats.org/officeDocument/2006/relationships" type="roundRect" r:blip="" hideGeom="1">
+                            <dgm:adjLst>
+                              <dgm:adj idx="1" val="0.1"/>
+                            </dgm:adjLst>
+                          </dgm:shape>
+                          <dgm:presOf axis="ch desOrSelf" ptType="node node" st="2 1" cnt="1 0"/>
+                          <dgm:constrLst>
+                            <dgm:constr type="lMarg" refType="primFontSz" fact="0.3"/>
+                            <dgm:constr type="rMarg" refType="primFontSz" fact="0.3"/>
+                            <dgm:constr type="tMarg" refType="primFontSz" fact="0.3"/>
+                            <dgm:constr type="bMarg" refType="primFontSz" fact="0.3"/>
+                          </dgm:constrLst>
+                          <dgm:ruleLst>
+                            <dgm:rule type="primFontSz" val="5" fact="NaN" max="NaN"/>
+                          </dgm:ruleLst>
+                        </dgm:layoutNode>
+                        <dgm:layoutNode name="FiveNodes_3_text">
+                          <dgm:varLst>
+                            <dgm:bulletEnabled val="1"/>
+                          </dgm:varLst>
+                          <dgm:alg type="tx">
+                            <dgm:param type="parTxLTRAlign" val="l"/>
+                            <dgm:param type="txAnchorVertCh" val="mid"/>
+                          </dgm:alg>
+                          <dgm:shape xmlns:r="http://schemas.openxmlformats.org/officeDocument/2006/relationships" type="roundRect" r:blip="" hideGeom="1">
+                            <dgm:adjLst>
+                              <dgm:adj idx="1" val="0.1"/>
+                            </dgm:adjLst>
+                          </dgm:shape>
+                          <dgm:presOf axis="ch desOrSelf" ptType="node node" st="3 1" cnt="1 0"/>
+                          <dgm:constrLst>
+                            <dgm:constr type="lMarg" refType="primFontSz" fact="0.3"/>
+                            <dgm:constr type="rMarg" refType="primFontSz" fact="0.3"/>
+                            <dgm:constr type="tMarg" refType="primFontSz" fact="0.3"/>
+                            <dgm:constr type="bMarg" refType="primFontSz" fact="0.3"/>
+                          </dgm:constrLst>
+                          <dgm:ruleLst>
+                            <dgm:rule type="primFontSz" val="5" fact="NaN" max="NaN"/>
+                          </dgm:ruleLst>
+                        </dgm:layoutNode>
+                        <dgm:layoutNode name="FiveNodes_4_text">
+                          <dgm:varLst>
+                            <dgm:bulletEnabled val="1"/>
+                          </dgm:varLst>
+                          <dgm:alg type="tx">
+                            <dgm:param type="parTxLTRAlign" val="l"/>
+                            <dgm:param type="txAnchorVertCh" val="mid"/>
+                          </dgm:alg>
+                          <dgm:shape xmlns:r="http://schemas.openxmlformats.org/officeDocument/2006/relationships" type="roundRect" r:blip="" hideGeom="1">
+                            <dgm:adjLst>
+                              <dgm:adj idx="1" val="0.1"/>
+                            </dgm:adjLst>
+                          </dgm:shape>
+                          <dgm:presOf axis="ch desOrSelf" ptType="node node" st="4 1" cnt="1 0"/>
+                          <dgm:constrLst>
+                            <dgm:constr type="lMarg" refType="primFontSz" fact="0.3"/>
+                            <dgm:constr type="rMarg" refType="primFontSz" fact="0.3"/>
+                            <dgm:constr type="tMarg" refType="primFontSz" fact="0.3"/>
+                            <dgm:constr type="bMarg" refType="primFontSz" fact="0.3"/>
+                          </dgm:constrLst>
+                          <dgm:ruleLst>
+                            <dgm:rule type="primFontSz" val="5" fact="NaN" max="NaN"/>
+                          </dgm:ruleLst>
+                        </dgm:layoutNode>
+                        <dgm:layoutNode name="FiveNodes_5_text">
+                          <dgm:varLst>
+                            <dgm:bulletEnabled val="1"/>
+                          </dgm:varLst>
+                          <dgm:alg type="tx">
+                            <dgm:param type="parTxLTRAlign" val="l"/>
+                            <dgm:param type="txAnchorVertCh" val="mid"/>
+                          </dgm:alg>
+                          <dgm:shape xmlns:r="http://schemas.openxmlformats.org/officeDocument/2006/relationships" type="roundRect" r:blip="" hideGeom="1">
+                            <dgm:adjLst>
+                              <dgm:adj idx="1" val="0.1"/>
+                            </dgm:adjLst>
+                          </dgm:shape>
+                          <dgm:presOf axis="ch desOrSelf" ptType="node node" st="5 1" cnt="1 0"/>
+                          <dgm:constrLst>
+                            <dgm:constr type="lMarg" refType="primFontSz" fact="0.3"/>
+                            <dgm:constr type="rMarg" refType="primFontSz" fact="0.3"/>
+                            <dgm:constr type="tMarg" refType="primFontSz" fact="0.3"/>
+                            <dgm:constr type="bMarg" refType="primFontSz" fact="0.3"/>
+                          </dgm:constrLst>
+                          <dgm:ruleLst>
+                            <dgm:rule type="primFontSz" val="5" fact="NaN" max="NaN"/>
+                          </dgm:ruleLst>
+                        </dgm:layoutNode>
+                      </dgm:if>
+                      <dgm:else name="Name17"/>
+                    </dgm:choose>
+                  </dgm:else>
+                </dgm:choose>
+              </dgm:else>
+            </dgm:choose>
+          </dgm:else>
+        </dgm:choose>
+      </dgm:else>
+    </dgm:choose>
   </dgm:layoutNode>
 </dgm:layoutDef>
 </file>
@@ -10727,10 +11225,10 @@
           <a:lstStyle/>
           <a:p>
             <a:r>
-              <a:rPr lang="en-US" sz="4000"/>
-              <a:t>Button UI Prefab</a:t>
-            </a:r>
-            <a:endParaRPr lang="sv-SE" sz="4000"/>
+              <a:rPr lang="en-US" sz="4000" dirty="0"/>
+              <a:t> UI Button Prefab</a:t>
+            </a:r>
+            <a:endParaRPr lang="sv-SE" sz="4000" dirty="0"/>
           </a:p>
         </p:txBody>
       </p:sp>
@@ -12035,7 +12533,7 @@
       </p:pic>
       <p:sp>
         <p:nvSpPr>
-          <p:cNvPr id="11" name="Rectangle 10">
+          <p:cNvPr id="16" name="Rectangle 15">
             <a:extLst>
               <a:ext uri="{FF2B5EF4-FFF2-40B4-BE49-F238E27FC236}">
                 <a16:creationId xmlns:a16="http://schemas.microsoft.com/office/drawing/2014/main" id="{B50AB553-2A96-4A92-96F2-93548E096954}"/>
@@ -12146,6 +12644,88 @@
           </a:p>
         </p:txBody>
       </p:sp>
+      <p:cxnSp>
+        <p:nvCxnSpPr>
+          <p:cNvPr id="4" name="Rak pilkoppling 3">
+            <a:extLst>
+              <a:ext uri="{FF2B5EF4-FFF2-40B4-BE49-F238E27FC236}">
+                <a16:creationId xmlns:a16="http://schemas.microsoft.com/office/drawing/2014/main" id="{F5054B59-3A17-F321-29C3-E6F5D1CACAB3}"/>
+              </a:ext>
+            </a:extLst>
+          </p:cNvPr>
+          <p:cNvCxnSpPr>
+            <a:cxnSpLocks/>
+          </p:cNvCxnSpPr>
+          <p:nvPr/>
+        </p:nvCxnSpPr>
+        <p:spPr>
+          <a:xfrm flipV="1">
+            <a:off x="3913632" y="5029200"/>
+            <a:ext cx="768096" cy="164592"/>
+          </a:xfrm>
+          <a:prstGeom prst="straightConnector1">
+            <a:avLst/>
+          </a:prstGeom>
+          <a:ln>
+            <a:tailEnd type="triangle"/>
+          </a:ln>
+        </p:spPr>
+        <p:style>
+          <a:lnRef idx="2">
+            <a:schemeClr val="accent1"/>
+          </a:lnRef>
+          <a:fillRef idx="0">
+            <a:schemeClr val="accent1"/>
+          </a:fillRef>
+          <a:effectRef idx="1">
+            <a:schemeClr val="accent1"/>
+          </a:effectRef>
+          <a:fontRef idx="minor">
+            <a:schemeClr val="tx1"/>
+          </a:fontRef>
+        </p:style>
+      </p:cxnSp>
+      <p:cxnSp>
+        <p:nvCxnSpPr>
+          <p:cNvPr id="8" name="Rak pilkoppling 7">
+            <a:extLst>
+              <a:ext uri="{FF2B5EF4-FFF2-40B4-BE49-F238E27FC236}">
+                <a16:creationId xmlns:a16="http://schemas.microsoft.com/office/drawing/2014/main" id="{1038750E-DEFA-8C15-DBE3-E7098CEA76CC}"/>
+              </a:ext>
+            </a:extLst>
+          </p:cNvPr>
+          <p:cNvCxnSpPr>
+            <a:cxnSpLocks/>
+          </p:cNvCxnSpPr>
+          <p:nvPr/>
+        </p:nvCxnSpPr>
+        <p:spPr>
+          <a:xfrm flipV="1">
+            <a:off x="7677912" y="4864608"/>
+            <a:ext cx="768096" cy="164592"/>
+          </a:xfrm>
+          <a:prstGeom prst="straightConnector1">
+            <a:avLst/>
+          </a:prstGeom>
+          <a:ln>
+            <a:tailEnd type="triangle"/>
+          </a:ln>
+        </p:spPr>
+        <p:style>
+          <a:lnRef idx="2">
+            <a:schemeClr val="accent1"/>
+          </a:lnRef>
+          <a:fillRef idx="0">
+            <a:schemeClr val="accent1"/>
+          </a:fillRef>
+          <a:effectRef idx="1">
+            <a:schemeClr val="accent1"/>
+          </a:effectRef>
+          <a:fontRef idx="minor">
+            <a:schemeClr val="tx1"/>
+          </a:fontRef>
+        </p:style>
+      </p:cxnSp>
       <p:graphicFrame>
         <p:nvGraphicFramePr>
           <p:cNvPr id="5" name="Platshållare för innehåll 2">
@@ -12162,7 +12742,7 @@
             <p:ph idx="1"/>
             <p:extLst>
               <p:ext uri="{D42A27DB-BD31-4B8C-83A1-F6EECF244321}">
-                <p14:modId xmlns:p14="http://schemas.microsoft.com/office/powerpoint/2010/main" val="4227423048"/>
+                <p14:modId xmlns:p14="http://schemas.microsoft.com/office/powerpoint/2010/main" val="3196450395"/>
               </p:ext>
             </p:extLst>
           </p:nvPr>
@@ -12381,7 +12961,15 @@
             </a:r>
             <a:r>
               <a:rPr lang="en-US" sz="2000" dirty="0"/>
-              <a:t> in den Unit Definition man </a:t>
+              <a:t> in den </a:t>
+            </a:r>
+            <a:r>
+              <a:rPr lang="en-US" sz="2000" b="1" dirty="0"/>
+              <a:t>Unit Definition </a:t>
+            </a:r>
+            <a:r>
+              <a:rPr lang="en-US" sz="2000" dirty="0"/>
+              <a:t>man </a:t>
             </a:r>
             <a:r>
               <a:rPr lang="en-US" sz="2000" dirty="0" err="1"/>

--- a/Assets/Pontus Unit Builder.pptx
+++ b/Assets/Pontus Unit Builder.pptx
@@ -1652,7 +1652,7 @@
 <dgm:dataModel xmlns:dgm="http://schemas.openxmlformats.org/drawingml/2006/diagram" xmlns:a="http://schemas.openxmlformats.org/drawingml/2006/main">
   <dgm:ptLst>
     <dgm:pt modelId="{7AF7EC9B-E4BE-42C2-9C54-FE101322F5B6}" type="doc">
-      <dgm:prSet loTypeId="urn:microsoft.com/office/officeart/2005/8/layout/hierarchy1" loCatId="hierarchy" qsTypeId="urn:microsoft.com/office/officeart/2005/8/quickstyle/simple5" qsCatId="simple" csTypeId="urn:microsoft.com/office/officeart/2005/8/colors/colorful5" csCatId="colorful"/>
+      <dgm:prSet loTypeId="urn:microsoft.com/office/officeart/2005/8/layout/hierarchy1" loCatId="hierarchy" qsTypeId="urn:microsoft.com/office/officeart/2005/8/quickstyle/simple5" qsCatId="simple" csTypeId="urn:microsoft.com/office/officeart/2005/8/colors/colorful5" csCatId="colorful" phldr="1"/>
       <dgm:spPr/>
       <dgm:t>
         <a:bodyPr/>
@@ -1670,8 +1670,8 @@
         <a:lstStyle/>
         <a:p>
           <a:r>
-            <a:rPr lang="en-US"/>
-            <a:t>Unit Definition</a:t>
+            <a:rPr lang="en-US" dirty="0"/>
+            <a:t>UI Button Prefab</a:t>
           </a:r>
         </a:p>
       </dgm:t>
@@ -1706,7 +1706,7 @@
         <a:lstStyle/>
         <a:p>
           <a:r>
-            <a:rPr lang="en-US"/>
+            <a:rPr lang="en-US" dirty="0"/>
             <a:t>Unit Prefab</a:t>
           </a:r>
         </a:p>
@@ -1734,7 +1734,7 @@
         </a:p>
       </dgm:t>
     </dgm:pt>
-    <dgm:pt modelId="{EF7DFDC8-8206-4307-B86A-DC929613297F}">
+    <dgm:pt modelId="{A9E93178-A3B0-4D86-B109-D44AE95E728E}">
       <dgm:prSet/>
       <dgm:spPr/>
       <dgm:t>
@@ -1743,30 +1743,30 @@
         <a:p>
           <a:r>
             <a:rPr lang="en-US"/>
-            <a:t>UI Button Prefab</a:t>
+            <a:t>Unit Definition</a:t>
           </a:r>
         </a:p>
       </dgm:t>
     </dgm:pt>
-    <dgm:pt modelId="{9B76F775-DB3D-4629-831C-D194C25A27D6}" type="parTrans" cxnId="{8719E90A-D465-4BB6-A6D6-34030E25FCFB}">
+    <dgm:pt modelId="{FD83E4B5-7675-4039-825F-377AB191B930}" type="parTrans" cxnId="{771D3647-6960-431F-AA5B-928E404091A5}">
       <dgm:prSet/>
       <dgm:spPr/>
       <dgm:t>
         <a:bodyPr/>
         <a:lstStyle/>
         <a:p>
-          <a:endParaRPr lang="en-US"/>
+          <a:endParaRPr lang="sv-SE"/>
         </a:p>
       </dgm:t>
     </dgm:pt>
-    <dgm:pt modelId="{33612F10-044A-49C1-9B77-29B19F41FFD9}" type="sibTrans" cxnId="{8719E90A-D465-4BB6-A6D6-34030E25FCFB}">
+    <dgm:pt modelId="{6AE2789F-196D-4A21-88F3-4868CC5DB399}" type="sibTrans" cxnId="{771D3647-6960-431F-AA5B-928E404091A5}">
       <dgm:prSet/>
       <dgm:spPr/>
       <dgm:t>
         <a:bodyPr/>
         <a:lstStyle/>
         <a:p>
-          <a:endParaRPr lang="en-US"/>
+          <a:endParaRPr lang="sv-SE"/>
         </a:p>
       </dgm:t>
     </dgm:pt>
@@ -1806,6 +1806,30 @@
       <dgm:prSet presAssocID="{D48BD687-449A-4797-A0D3-7B06551E1ABD}" presName="hierChild2" presStyleCnt="0"/>
       <dgm:spPr/>
     </dgm:pt>
+    <dgm:pt modelId="{53B31079-6191-4C3B-BFFC-D5550563E947}" type="pres">
+      <dgm:prSet presAssocID="{A9E93178-A3B0-4D86-B109-D44AE95E728E}" presName="hierRoot1" presStyleCnt="0"/>
+      <dgm:spPr/>
+    </dgm:pt>
+    <dgm:pt modelId="{445937C8-D356-4978-8015-611388CBA308}" type="pres">
+      <dgm:prSet presAssocID="{A9E93178-A3B0-4D86-B109-D44AE95E728E}" presName="composite" presStyleCnt="0"/>
+      <dgm:spPr/>
+    </dgm:pt>
+    <dgm:pt modelId="{122008A8-7DCA-4952-AFED-C89470539ED5}" type="pres">
+      <dgm:prSet presAssocID="{A9E93178-A3B0-4D86-B109-D44AE95E728E}" presName="background" presStyleLbl="node0" presStyleIdx="1" presStyleCnt="3"/>
+      <dgm:spPr/>
+    </dgm:pt>
+    <dgm:pt modelId="{F5329F4A-C37A-4F02-88AB-93E7F9657F2A}" type="pres">
+      <dgm:prSet presAssocID="{A9E93178-A3B0-4D86-B109-D44AE95E728E}" presName="text" presStyleLbl="fgAcc0" presStyleIdx="1" presStyleCnt="3">
+        <dgm:presLayoutVars>
+          <dgm:chPref val="3"/>
+        </dgm:presLayoutVars>
+      </dgm:prSet>
+      <dgm:spPr/>
+    </dgm:pt>
+    <dgm:pt modelId="{8A2AEBE6-AF8A-4DAE-8661-823AE0CD7CF8}" type="pres">
+      <dgm:prSet presAssocID="{A9E93178-A3B0-4D86-B109-D44AE95E728E}" presName="hierChild2" presStyleCnt="0"/>
+      <dgm:spPr/>
+    </dgm:pt>
     <dgm:pt modelId="{8D568D53-EA23-4B25-91D6-9079172EDED5}" type="pres">
       <dgm:prSet presAssocID="{8BD2D37A-FDA6-4D11-8724-EC25935A0CE0}" presName="hierRoot1" presStyleCnt="0"/>
       <dgm:spPr/>
@@ -1815,11 +1839,11 @@
       <dgm:spPr/>
     </dgm:pt>
     <dgm:pt modelId="{606C66B2-3BE0-4EF5-86FD-114B5BA219CC}" type="pres">
-      <dgm:prSet presAssocID="{8BD2D37A-FDA6-4D11-8724-EC25935A0CE0}" presName="background" presStyleLbl="node0" presStyleIdx="1" presStyleCnt="3"/>
+      <dgm:prSet presAssocID="{8BD2D37A-FDA6-4D11-8724-EC25935A0CE0}" presName="background" presStyleLbl="node0" presStyleIdx="2" presStyleCnt="3"/>
       <dgm:spPr/>
     </dgm:pt>
     <dgm:pt modelId="{8B7A3C08-F071-4860-AF10-1E8E8FCE62FF}" type="pres">
-      <dgm:prSet presAssocID="{8BD2D37A-FDA6-4D11-8724-EC25935A0CE0}" presName="text" presStyleLbl="fgAcc0" presStyleIdx="1" presStyleCnt="3">
+      <dgm:prSet presAssocID="{8BD2D37A-FDA6-4D11-8724-EC25935A0CE0}" presName="text" presStyleLbl="fgAcc0" presStyleIdx="2" presStyleCnt="3">
         <dgm:presLayoutVars>
           <dgm:chPref val="3"/>
         </dgm:presLayoutVars>
@@ -1830,54 +1854,30 @@
       <dgm:prSet presAssocID="{8BD2D37A-FDA6-4D11-8724-EC25935A0CE0}" presName="hierChild2" presStyleCnt="0"/>
       <dgm:spPr/>
     </dgm:pt>
-    <dgm:pt modelId="{B21E98F3-23FB-4A90-9D0B-864834CA7475}" type="pres">
-      <dgm:prSet presAssocID="{EF7DFDC8-8206-4307-B86A-DC929613297F}" presName="hierRoot1" presStyleCnt="0"/>
-      <dgm:spPr/>
-    </dgm:pt>
-    <dgm:pt modelId="{AC2285D1-7B1A-438B-B4E6-6415F3322435}" type="pres">
-      <dgm:prSet presAssocID="{EF7DFDC8-8206-4307-B86A-DC929613297F}" presName="composite" presStyleCnt="0"/>
-      <dgm:spPr/>
-    </dgm:pt>
-    <dgm:pt modelId="{DCC12738-4C00-4AB3-9168-ED42A05B8018}" type="pres">
-      <dgm:prSet presAssocID="{EF7DFDC8-8206-4307-B86A-DC929613297F}" presName="background" presStyleLbl="node0" presStyleIdx="2" presStyleCnt="3"/>
-      <dgm:spPr/>
-    </dgm:pt>
-    <dgm:pt modelId="{2CFCE7C6-EA88-4740-A845-30781C2A0671}" type="pres">
-      <dgm:prSet presAssocID="{EF7DFDC8-8206-4307-B86A-DC929613297F}" presName="text" presStyleLbl="fgAcc0" presStyleIdx="2" presStyleCnt="3">
-        <dgm:presLayoutVars>
-          <dgm:chPref val="3"/>
-        </dgm:presLayoutVars>
-      </dgm:prSet>
-      <dgm:spPr/>
-    </dgm:pt>
-    <dgm:pt modelId="{23E579B2-4BA1-406D-B16A-84409AB2966A}" type="pres">
-      <dgm:prSet presAssocID="{EF7DFDC8-8206-4307-B86A-DC929613297F}" presName="hierChild2" presStyleCnt="0"/>
-      <dgm:spPr/>
-    </dgm:pt>
   </dgm:ptLst>
   <dgm:cxnLst>
-    <dgm:cxn modelId="{8719E90A-D465-4BB6-A6D6-34030E25FCFB}" srcId="{7AF7EC9B-E4BE-42C2-9C54-FE101322F5B6}" destId="{EF7DFDC8-8206-4307-B86A-DC929613297F}" srcOrd="2" destOrd="0" parTransId="{9B76F775-DB3D-4629-831C-D194C25A27D6}" sibTransId="{33612F10-044A-49C1-9B77-29B19F41FFD9}"/>
     <dgm:cxn modelId="{0EA6325D-3074-49D9-95F9-9A1E0AD48042}" type="presOf" srcId="{8BD2D37A-FDA6-4D11-8724-EC25935A0CE0}" destId="{8B7A3C08-F071-4860-AF10-1E8E8FCE62FF}" srcOrd="0" destOrd="0" presId="urn:microsoft.com/office/officeart/2005/8/layout/hierarchy1"/>
+    <dgm:cxn modelId="{771D3647-6960-431F-AA5B-928E404091A5}" srcId="{7AF7EC9B-E4BE-42C2-9C54-FE101322F5B6}" destId="{A9E93178-A3B0-4D86-B109-D44AE95E728E}" srcOrd="1" destOrd="0" parTransId="{FD83E4B5-7675-4039-825F-377AB191B930}" sibTransId="{6AE2789F-196D-4A21-88F3-4868CC5DB399}"/>
     <dgm:cxn modelId="{1389F668-8C47-4F65-AEF9-A42DD1961514}" type="presOf" srcId="{7AF7EC9B-E4BE-42C2-9C54-FE101322F5B6}" destId="{E318A0E8-2DA0-481E-AF0B-88751D9BC4B9}" srcOrd="0" destOrd="0" presId="urn:microsoft.com/office/officeart/2005/8/layout/hierarchy1"/>
+    <dgm:cxn modelId="{CBDA7078-8867-4C1F-AE7A-96B254C41A2C}" type="presOf" srcId="{A9E93178-A3B0-4D86-B109-D44AE95E728E}" destId="{F5329F4A-C37A-4F02-88AB-93E7F9657F2A}" srcOrd="0" destOrd="0" presId="urn:microsoft.com/office/officeart/2005/8/layout/hierarchy1"/>
     <dgm:cxn modelId="{3E6A037A-7513-4791-AAF1-4D75E6C0082A}" type="presOf" srcId="{D48BD687-449A-4797-A0D3-7B06551E1ABD}" destId="{4D8E17D3-4DDA-407A-8CA4-524764F70662}" srcOrd="0" destOrd="0" presId="urn:microsoft.com/office/officeart/2005/8/layout/hierarchy1"/>
-    <dgm:cxn modelId="{7894F8C2-0AF0-4BD0-A27E-2A3BCFF7CCFD}" srcId="{7AF7EC9B-E4BE-42C2-9C54-FE101322F5B6}" destId="{8BD2D37A-FDA6-4D11-8724-EC25935A0CE0}" srcOrd="1" destOrd="0" parTransId="{965689BA-A386-4509-A9AF-0E0A0B5DD1C4}" sibTransId="{4D1C09AB-3835-4268-8B94-90D9644D6861}"/>
+    <dgm:cxn modelId="{7894F8C2-0AF0-4BD0-A27E-2A3BCFF7CCFD}" srcId="{7AF7EC9B-E4BE-42C2-9C54-FE101322F5B6}" destId="{8BD2D37A-FDA6-4D11-8724-EC25935A0CE0}" srcOrd="2" destOrd="0" parTransId="{965689BA-A386-4509-A9AF-0E0A0B5DD1C4}" sibTransId="{4D1C09AB-3835-4268-8B94-90D9644D6861}"/>
     <dgm:cxn modelId="{D3898CE0-593A-4FDD-A9E7-133ACECD75A8}" srcId="{7AF7EC9B-E4BE-42C2-9C54-FE101322F5B6}" destId="{D48BD687-449A-4797-A0D3-7B06551E1ABD}" srcOrd="0" destOrd="0" parTransId="{4605E369-2C5C-495C-9E88-180CC035866E}" sibTransId="{091D725F-5CCF-4951-B19F-BED51D1125AD}"/>
-    <dgm:cxn modelId="{4DE19FE0-0797-4437-9A1C-9D9B7BA879B9}" type="presOf" srcId="{EF7DFDC8-8206-4307-B86A-DC929613297F}" destId="{2CFCE7C6-EA88-4740-A845-30781C2A0671}" srcOrd="0" destOrd="0" presId="urn:microsoft.com/office/officeart/2005/8/layout/hierarchy1"/>
     <dgm:cxn modelId="{87F82CFB-E323-4899-824A-2BEDF33D5D2B}" type="presParOf" srcId="{E318A0E8-2DA0-481E-AF0B-88751D9BC4B9}" destId="{B50A4686-795F-4293-B012-276A9A139853}" srcOrd="0" destOrd="0" presId="urn:microsoft.com/office/officeart/2005/8/layout/hierarchy1"/>
     <dgm:cxn modelId="{D80E4045-8CB6-48D2-9B8E-BAEAF4553528}" type="presParOf" srcId="{B50A4686-795F-4293-B012-276A9A139853}" destId="{60B14C1F-DBF4-4D8E-A4C0-2DB4F377A11E}" srcOrd="0" destOrd="0" presId="urn:microsoft.com/office/officeart/2005/8/layout/hierarchy1"/>
     <dgm:cxn modelId="{005DA9E9-F35E-40E9-9FE7-5D115C82561B}" type="presParOf" srcId="{60B14C1F-DBF4-4D8E-A4C0-2DB4F377A11E}" destId="{274AECA2-A2C6-4293-8387-0DD08C634900}" srcOrd="0" destOrd="0" presId="urn:microsoft.com/office/officeart/2005/8/layout/hierarchy1"/>
     <dgm:cxn modelId="{F2BECD38-0AE0-4881-A80D-B19AE74B092A}" type="presParOf" srcId="{60B14C1F-DBF4-4D8E-A4C0-2DB4F377A11E}" destId="{4D8E17D3-4DDA-407A-8CA4-524764F70662}" srcOrd="1" destOrd="0" presId="urn:microsoft.com/office/officeart/2005/8/layout/hierarchy1"/>
     <dgm:cxn modelId="{B16CD2B6-5C3C-4651-BA6A-66C1B9878B2D}" type="presParOf" srcId="{B50A4686-795F-4293-B012-276A9A139853}" destId="{27833DF5-D900-4968-83D8-7FA2DAFF451E}" srcOrd="1" destOrd="0" presId="urn:microsoft.com/office/officeart/2005/8/layout/hierarchy1"/>
-    <dgm:cxn modelId="{EFF3B398-450C-4AB1-ACEC-DE0313D73935}" type="presParOf" srcId="{E318A0E8-2DA0-481E-AF0B-88751D9BC4B9}" destId="{8D568D53-EA23-4B25-91D6-9079172EDED5}" srcOrd="1" destOrd="0" presId="urn:microsoft.com/office/officeart/2005/8/layout/hierarchy1"/>
+    <dgm:cxn modelId="{7B2DF468-4FD5-48C3-877D-E38A2B7798AD}" type="presParOf" srcId="{E318A0E8-2DA0-481E-AF0B-88751D9BC4B9}" destId="{53B31079-6191-4C3B-BFFC-D5550563E947}" srcOrd="1" destOrd="0" presId="urn:microsoft.com/office/officeart/2005/8/layout/hierarchy1"/>
+    <dgm:cxn modelId="{AB4EFAEE-DB42-4B2F-8805-C78E2BAFE698}" type="presParOf" srcId="{53B31079-6191-4C3B-BFFC-D5550563E947}" destId="{445937C8-D356-4978-8015-611388CBA308}" srcOrd="0" destOrd="0" presId="urn:microsoft.com/office/officeart/2005/8/layout/hierarchy1"/>
+    <dgm:cxn modelId="{B57C2FA6-82C2-49D1-9DCB-BEFA7A22D96B}" type="presParOf" srcId="{445937C8-D356-4978-8015-611388CBA308}" destId="{122008A8-7DCA-4952-AFED-C89470539ED5}" srcOrd="0" destOrd="0" presId="urn:microsoft.com/office/officeart/2005/8/layout/hierarchy1"/>
+    <dgm:cxn modelId="{7B2A09D9-7FF3-4DA9-A76E-93946AC9EAB0}" type="presParOf" srcId="{445937C8-D356-4978-8015-611388CBA308}" destId="{F5329F4A-C37A-4F02-88AB-93E7F9657F2A}" srcOrd="1" destOrd="0" presId="urn:microsoft.com/office/officeart/2005/8/layout/hierarchy1"/>
+    <dgm:cxn modelId="{CB6FF542-342B-4957-8B96-D8CCE63F5825}" type="presParOf" srcId="{53B31079-6191-4C3B-BFFC-D5550563E947}" destId="{8A2AEBE6-AF8A-4DAE-8661-823AE0CD7CF8}" srcOrd="1" destOrd="0" presId="urn:microsoft.com/office/officeart/2005/8/layout/hierarchy1"/>
+    <dgm:cxn modelId="{EFF3B398-450C-4AB1-ACEC-DE0313D73935}" type="presParOf" srcId="{E318A0E8-2DA0-481E-AF0B-88751D9BC4B9}" destId="{8D568D53-EA23-4B25-91D6-9079172EDED5}" srcOrd="2" destOrd="0" presId="urn:microsoft.com/office/officeart/2005/8/layout/hierarchy1"/>
     <dgm:cxn modelId="{A31F455D-23E2-4CC3-9B9B-73237B44087B}" type="presParOf" srcId="{8D568D53-EA23-4B25-91D6-9079172EDED5}" destId="{DE48D3E0-9A52-417D-AD6F-94E4C3D5F93A}" srcOrd="0" destOrd="0" presId="urn:microsoft.com/office/officeart/2005/8/layout/hierarchy1"/>
     <dgm:cxn modelId="{61E25A7D-E4F4-4C7D-A9B9-812B239961B5}" type="presParOf" srcId="{DE48D3E0-9A52-417D-AD6F-94E4C3D5F93A}" destId="{606C66B2-3BE0-4EF5-86FD-114B5BA219CC}" srcOrd="0" destOrd="0" presId="urn:microsoft.com/office/officeart/2005/8/layout/hierarchy1"/>
     <dgm:cxn modelId="{60DF4570-A613-42AC-967A-82094B3355E4}" type="presParOf" srcId="{DE48D3E0-9A52-417D-AD6F-94E4C3D5F93A}" destId="{8B7A3C08-F071-4860-AF10-1E8E8FCE62FF}" srcOrd="1" destOrd="0" presId="urn:microsoft.com/office/officeart/2005/8/layout/hierarchy1"/>
     <dgm:cxn modelId="{285278F1-369A-4F19-8ED0-048B86786BBF}" type="presParOf" srcId="{8D568D53-EA23-4B25-91D6-9079172EDED5}" destId="{8A80818B-AF78-448C-AD8D-9B8008743BB9}" srcOrd="1" destOrd="0" presId="urn:microsoft.com/office/officeart/2005/8/layout/hierarchy1"/>
-    <dgm:cxn modelId="{08A2C29D-80AD-447F-A795-45ED39568F9E}" type="presParOf" srcId="{E318A0E8-2DA0-481E-AF0B-88751D9BC4B9}" destId="{B21E98F3-23FB-4A90-9D0B-864834CA7475}" srcOrd="2" destOrd="0" presId="urn:microsoft.com/office/officeart/2005/8/layout/hierarchy1"/>
-    <dgm:cxn modelId="{216A980E-14A1-470F-8A95-D2F436529F11}" type="presParOf" srcId="{B21E98F3-23FB-4A90-9D0B-864834CA7475}" destId="{AC2285D1-7B1A-438B-B4E6-6415F3322435}" srcOrd="0" destOrd="0" presId="urn:microsoft.com/office/officeart/2005/8/layout/hierarchy1"/>
-    <dgm:cxn modelId="{440C7C90-2741-404B-BDAC-B9862612EEBF}" type="presParOf" srcId="{AC2285D1-7B1A-438B-B4E6-6415F3322435}" destId="{DCC12738-4C00-4AB3-9168-ED42A05B8018}" srcOrd="0" destOrd="0" presId="urn:microsoft.com/office/officeart/2005/8/layout/hierarchy1"/>
-    <dgm:cxn modelId="{98C3F359-4E2C-4AC7-A58F-A4F6E0D08437}" type="presParOf" srcId="{AC2285D1-7B1A-438B-B4E6-6415F3322435}" destId="{2CFCE7C6-EA88-4740-A845-30781C2A0671}" srcOrd="1" destOrd="0" presId="urn:microsoft.com/office/officeart/2005/8/layout/hierarchy1"/>
-    <dgm:cxn modelId="{DE1B0447-E754-4CED-9399-08AF3B9F3F36}" type="presParOf" srcId="{B21E98F3-23FB-4A90-9D0B-864834CA7475}" destId="{23E579B2-4BA1-406D-B16A-84409AB2966A}" srcOrd="1" destOrd="0" presId="urn:microsoft.com/office/officeart/2005/8/layout/hierarchy1"/>
   </dgm:cxnLst>
   <dgm:bg/>
   <dgm:whole/>
@@ -1893,7 +1893,7 @@
 <dgm:dataModel xmlns:dgm="http://schemas.openxmlformats.org/drawingml/2006/diagram" xmlns:a="http://schemas.openxmlformats.org/drawingml/2006/main">
   <dgm:ptLst>
     <dgm:pt modelId="{DEFE90E0-E9D9-468C-8BA0-207D32ED87DD}" type="doc">
-      <dgm:prSet loTypeId="urn:microsoft.com/office/officeart/2005/8/layout/vProcess5" loCatId="process" qsTypeId="urn:microsoft.com/office/officeart/2005/8/quickstyle/simple4" qsCatId="simple" csTypeId="urn:microsoft.com/office/officeart/2005/8/colors/accent4_2" csCatId="accent4"/>
+      <dgm:prSet loTypeId="urn:microsoft.com/office/officeart/2005/8/layout/vProcess5" loCatId="process" qsTypeId="urn:microsoft.com/office/officeart/2005/8/quickstyle/simple4" qsCatId="simple" csTypeId="urn:microsoft.com/office/officeart/2005/8/colors/accent4_2" csCatId="accent4" phldr="1"/>
       <dgm:spPr/>
       <dgm:t>
         <a:bodyPr/>
@@ -1911,9 +1911,30 @@
         <a:lstStyle/>
         <a:p>
           <a:r>
-            <a:rPr lang="en-US"/>
-            <a:t>UI Button Prefab trycks på och läggs ut</a:t>
+            <a:rPr lang="en-US" dirty="0"/>
+            <a:t>UI Button Prefab </a:t>
           </a:r>
+          <a:r>
+            <a:rPr lang="en-US" dirty="0" err="1"/>
+            <a:t>interageras</a:t>
+          </a:r>
+          <a:r>
+            <a:rPr lang="en-US" dirty="0"/>
+            <a:t> med under </a:t>
+          </a:r>
+          <a:r>
+            <a:rPr lang="en-US" dirty="0" err="1"/>
+            <a:t>spelets</a:t>
+          </a:r>
+          <a:r>
+            <a:rPr lang="en-US" dirty="0"/>
+            <a:t> </a:t>
+          </a:r>
+          <a:r>
+            <a:rPr lang="en-US" dirty="0" err="1"/>
+            <a:t>gång</a:t>
+          </a:r>
+          <a:endParaRPr lang="en-US" dirty="0"/>
         </a:p>
       </dgm:t>
     </dgm:pt>
@@ -2281,8 +2302,8 @@
             <a:buNone/>
           </a:pPr>
           <a:r>
-            <a:rPr lang="en-US" sz="4600" kern="1200"/>
-            <a:t>Unit Definition</a:t>
+            <a:rPr lang="en-US" sz="4600" kern="1200" dirty="0"/>
+            <a:t>UI Button Prefab</a:t>
           </a:r>
         </a:p>
       </dsp:txBody>
@@ -2291,7 +2312,7 @@
         <a:ext cx="2847502" cy="1768010"/>
       </dsp:txXfrm>
     </dsp:sp>
-    <dsp:sp modelId="{606C66B2-3BE0-4EF5-86FD-114B5BA219CC}">
+    <dsp:sp modelId="{122008A8-7DCA-4952-AFED-C89470539ED5}">
       <dsp:nvSpPr>
         <dsp:cNvPr id="0" name=""/>
         <dsp:cNvSpPr/>
@@ -2370,7 +2391,7 @@
         </a:fontRef>
       </dsp:style>
     </dsp:sp>
-    <dsp:sp modelId="{8B7A3C08-F071-4860-AF10-1E8E8FCE62FF}">
+    <dsp:sp modelId="{F5329F4A-C37A-4F02-88AB-93E7F9657F2A}">
       <dsp:nvSpPr>
         <dsp:cNvPr id="0" name=""/>
         <dsp:cNvSpPr/>
@@ -2440,7 +2461,7 @@
           </a:pPr>
           <a:r>
             <a:rPr lang="en-US" sz="4600" kern="1200"/>
-            <a:t>Unit Prefab</a:t>
+            <a:t>Unit Definition</a:t>
           </a:r>
         </a:p>
       </dsp:txBody>
@@ -2449,7 +2470,7 @@
         <a:ext cx="2847502" cy="1768010"/>
       </dsp:txXfrm>
     </dsp:sp>
-    <dsp:sp modelId="{DCC12738-4C00-4AB3-9168-ED42A05B8018}">
+    <dsp:sp modelId="{606C66B2-3BE0-4EF5-86FD-114B5BA219CC}">
       <dsp:nvSpPr>
         <dsp:cNvPr id="0" name=""/>
         <dsp:cNvSpPr/>
@@ -2528,7 +2549,7 @@
         </a:fontRef>
       </dsp:style>
     </dsp:sp>
-    <dsp:sp modelId="{2CFCE7C6-EA88-4740-A845-30781C2A0671}">
+    <dsp:sp modelId="{8B7A3C08-F071-4860-AF10-1E8E8FCE62FF}">
       <dsp:nvSpPr>
         <dsp:cNvPr id="0" name=""/>
         <dsp:cNvSpPr/>
@@ -2597,8 +2618,8 @@
             <a:buNone/>
           </a:pPr>
           <a:r>
-            <a:rPr lang="en-US" sz="4600" kern="1200"/>
-            <a:t>UI Button Prefab</a:t>
+            <a:rPr lang="en-US" sz="4600" kern="1200" dirty="0"/>
+            <a:t>Unit Prefab</a:t>
           </a:r>
         </a:p>
       </dsp:txBody>
@@ -2710,9 +2731,30 @@
             <a:buNone/>
           </a:pPr>
           <a:r>
-            <a:rPr lang="en-US" sz="3400" kern="1200"/>
-            <a:t>UI Button Prefab trycks på och läggs ut</a:t>
+            <a:rPr lang="en-US" sz="3400" kern="1200" dirty="0"/>
+            <a:t>UI Button Prefab </a:t>
           </a:r>
+          <a:r>
+            <a:rPr lang="en-US" sz="3400" kern="1200" dirty="0" err="1"/>
+            <a:t>interageras</a:t>
+          </a:r>
+          <a:r>
+            <a:rPr lang="en-US" sz="3400" kern="1200" dirty="0"/>
+            <a:t> med under </a:t>
+          </a:r>
+          <a:r>
+            <a:rPr lang="en-US" sz="3400" kern="1200" dirty="0" err="1"/>
+            <a:t>spelets</a:t>
+          </a:r>
+          <a:r>
+            <a:rPr lang="en-US" sz="3400" kern="1200" dirty="0"/>
+            <a:t> </a:t>
+          </a:r>
+          <a:r>
+            <a:rPr lang="en-US" sz="3400" kern="1200" dirty="0" err="1"/>
+            <a:t>gång</a:t>
+          </a:r>
+          <a:endParaRPr lang="en-US" sz="3400" kern="1200" dirty="0"/>
         </a:p>
       </dsp:txBody>
       <dsp:txXfrm>
@@ -11061,7 +11103,7 @@
             <p:ph idx="1"/>
             <p:extLst>
               <p:ext uri="{D42A27DB-BD31-4B8C-83A1-F6EECF244321}">
-                <p14:modId xmlns:p14="http://schemas.microsoft.com/office/powerpoint/2010/main" val="2729910544"/>
+                <p14:modId xmlns:p14="http://schemas.microsoft.com/office/powerpoint/2010/main" val="2009835851"/>
               </p:ext>
             </p:extLst>
           </p:nvPr>
@@ -11404,6 +11446,28 @@
               <a:rPr lang="en-US" sz="2000" dirty="0"/>
               <a:t> etc.</a:t>
             </a:r>
+          </a:p>
+          <a:p>
+            <a:r>
+              <a:rPr lang="en-US" sz="2000" dirty="0"/>
+              <a:t>Detta </a:t>
+            </a:r>
+            <a:r>
+              <a:rPr lang="en-US" sz="2000" dirty="0" err="1"/>
+              <a:t>hanteras</a:t>
+            </a:r>
+            <a:r>
+              <a:rPr lang="en-US" sz="2000" dirty="0"/>
+              <a:t> I </a:t>
+            </a:r>
+            <a:r>
+              <a:rPr lang="en-US" sz="2000" b="1" dirty="0"/>
+              <a:t>Triangle Grid </a:t>
+            </a:r>
+            <a:r>
+              <a:rPr lang="en-US" sz="2000" b="1" dirty="0" err="1"/>
+              <a:t>scenen</a:t>
+            </a:r>
             <a:endParaRPr lang="sv-SE" sz="2000" dirty="0"/>
           </a:p>
         </p:txBody>
@@ -11864,7 +11928,25 @@
               <a:rPr lang="en-US" sz="2000" b="1" dirty="0"/>
               <a:t>Unit Builder</a:t>
             </a:r>
-            <a:endParaRPr lang="sv-SE" sz="2000" dirty="0"/>
+          </a:p>
+          <a:p>
+            <a:r>
+              <a:rPr lang="en-US" sz="2000" dirty="0"/>
+              <a:t>Relevant för </a:t>
+            </a:r>
+            <a:r>
+              <a:rPr lang="en-US" sz="2000" b="1" dirty="0" err="1"/>
+              <a:t>båda</a:t>
+            </a:r>
+            <a:r>
+              <a:rPr lang="en-US" sz="2000" b="1" dirty="0"/>
+              <a:t> </a:t>
+            </a:r>
+            <a:r>
+              <a:rPr lang="en-US" sz="2000" b="1" dirty="0" err="1"/>
+              <a:t>scenerna</a:t>
+            </a:r>
+            <a:endParaRPr lang="sv-SE" sz="2000" b="1" dirty="0"/>
           </a:p>
         </p:txBody>
       </p:sp>
@@ -12229,22 +12311,101 @@
           <a:lstStyle/>
           <a:p>
             <a:r>
-              <a:rPr lang="en-US" sz="2000"/>
-              <a:t>En unit prefab är vad som spawnas</a:t>
-            </a:r>
-          </a:p>
-          <a:p>
-            <a:r>
-              <a:rPr lang="en-US" sz="2000"/>
-              <a:t>Här finns referens till Unit Definition</a:t>
-            </a:r>
-          </a:p>
-          <a:p>
-            <a:r>
-              <a:rPr lang="en-US" sz="2000"/>
-              <a:t>Dessutom Finns visuella komponenten (nuvarade sprite)</a:t>
-            </a:r>
-            <a:endParaRPr lang="sv-SE" sz="2000"/>
+              <a:rPr lang="en-US" sz="2000" dirty="0"/>
+              <a:t>En unit prefab är </a:t>
+            </a:r>
+            <a:r>
+              <a:rPr lang="en-US" sz="2000" dirty="0" err="1"/>
+              <a:t>vad</a:t>
+            </a:r>
+            <a:r>
+              <a:rPr lang="en-US" sz="2000" dirty="0"/>
+              <a:t> </a:t>
+            </a:r>
+            <a:r>
+              <a:rPr lang="en-US" sz="2000" dirty="0" err="1"/>
+              <a:t>som</a:t>
+            </a:r>
+            <a:r>
+              <a:rPr lang="en-US" sz="2000" dirty="0"/>
+              <a:t> </a:t>
+            </a:r>
+            <a:r>
+              <a:rPr lang="en-US" sz="2000" dirty="0" err="1"/>
+              <a:t>spawnas</a:t>
+            </a:r>
+            <a:endParaRPr lang="en-US" sz="2000" dirty="0"/>
+          </a:p>
+          <a:p>
+            <a:r>
+              <a:rPr lang="en-US" sz="2000" dirty="0" err="1"/>
+              <a:t>Här</a:t>
+            </a:r>
+            <a:r>
+              <a:rPr lang="en-US" sz="2000" dirty="0"/>
+              <a:t> </a:t>
+            </a:r>
+            <a:r>
+              <a:rPr lang="en-US" sz="2000" dirty="0" err="1"/>
+              <a:t>finns</a:t>
+            </a:r>
+            <a:r>
+              <a:rPr lang="en-US" sz="2000" dirty="0"/>
+              <a:t> </a:t>
+            </a:r>
+            <a:r>
+              <a:rPr lang="en-US" sz="2000" dirty="0" err="1"/>
+              <a:t>referens</a:t>
+            </a:r>
+            <a:r>
+              <a:rPr lang="en-US" sz="2000" dirty="0"/>
+              <a:t> till Unit Definition</a:t>
+            </a:r>
+          </a:p>
+          <a:p>
+            <a:r>
+              <a:rPr lang="en-US" sz="2000" dirty="0" err="1"/>
+              <a:t>Dessutom</a:t>
+            </a:r>
+            <a:r>
+              <a:rPr lang="en-US" sz="2000" dirty="0"/>
+              <a:t> Finns </a:t>
+            </a:r>
+            <a:r>
+              <a:rPr lang="en-US" sz="2000" dirty="0" err="1"/>
+              <a:t>visuella</a:t>
+            </a:r>
+            <a:r>
+              <a:rPr lang="en-US" sz="2000" dirty="0"/>
+              <a:t> </a:t>
+            </a:r>
+            <a:r>
+              <a:rPr lang="en-US" sz="2000" dirty="0" err="1"/>
+              <a:t>komponenten</a:t>
+            </a:r>
+            <a:r>
+              <a:rPr lang="en-US" sz="2000" dirty="0"/>
+              <a:t> (</a:t>
+            </a:r>
+            <a:r>
+              <a:rPr lang="en-US" sz="2000" dirty="0" err="1"/>
+              <a:t>nuvarade</a:t>
+            </a:r>
+            <a:r>
+              <a:rPr lang="en-US" sz="2000" dirty="0"/>
+              <a:t> sprite)</a:t>
+            </a:r>
+          </a:p>
+          <a:p>
+            <a:r>
+              <a:rPr lang="en-US" sz="2000" dirty="0"/>
+              <a:t>Bara relevant för </a:t>
+            </a:r>
+            <a:r>
+              <a:rPr lang="en-US" sz="2000" b="1" dirty="0"/>
+              <a:t>Unit Definition</a:t>
+            </a:r>
+            <a:endParaRPr lang="sv-SE" sz="2000" dirty="0"/>
           </a:p>
         </p:txBody>
       </p:sp>
@@ -12742,7 +12903,7 @@
             <p:ph idx="1"/>
             <p:extLst>
               <p:ext uri="{D42A27DB-BD31-4B8C-83A1-F6EECF244321}">
-                <p14:modId xmlns:p14="http://schemas.microsoft.com/office/powerpoint/2010/main" val="3196450395"/>
+                <p14:modId xmlns:p14="http://schemas.microsoft.com/office/powerpoint/2010/main" val="1452129881"/>
               </p:ext>
             </p:extLst>
           </p:nvPr>
@@ -12931,7 +13092,7 @@
         </p:spPr>
         <p:txBody>
           <a:bodyPr>
-            <a:normAutofit/>
+            <a:normAutofit lnSpcReduction="10000"/>
           </a:bodyPr>
           <a:lstStyle/>
           <a:p>
@@ -13211,7 +13372,38 @@
               <a:rPr lang="en-US" sz="2000" dirty="0" err="1"/>
               <a:t>listor</a:t>
             </a:r>
-            <a:endParaRPr lang="sv-SE" sz="2000" dirty="0"/>
+            <a:endParaRPr lang="en-US" sz="2000" dirty="0"/>
+          </a:p>
+          <a:p>
+            <a:r>
+              <a:rPr lang="en-US" sz="2000" dirty="0" err="1"/>
+              <a:t>Varje</a:t>
+            </a:r>
+            <a:r>
+              <a:rPr lang="en-US" sz="2000" dirty="0"/>
+              <a:t> </a:t>
+            </a:r>
+            <a:r>
+              <a:rPr lang="en-US" sz="2000" dirty="0" err="1"/>
+              <a:t>knapp</a:t>
+            </a:r>
+            <a:r>
+              <a:rPr lang="en-US" sz="2000" dirty="0"/>
+              <a:t> </a:t>
+            </a:r>
+            <a:r>
+              <a:rPr lang="en-US" sz="2000" dirty="0" err="1"/>
+              <a:t>har</a:t>
+            </a:r>
+            <a:r>
+              <a:rPr lang="en-US" sz="2000" dirty="0"/>
+              <a:t> </a:t>
+            </a:r>
+            <a:r>
+              <a:rPr lang="en-US" sz="2000" b="1" dirty="0"/>
+              <a:t>shortcuts</a:t>
+            </a:r>
+            <a:endParaRPr lang="sv-SE" sz="2000" b="1" dirty="0"/>
           </a:p>
         </p:txBody>
       </p:sp>
@@ -13237,7 +13429,7 @@
         </p:blipFill>
         <p:spPr>
           <a:xfrm>
-            <a:off x="7809518" y="799365"/>
+            <a:off x="7844635" y="130559"/>
             <a:ext cx="3453364" cy="2210153"/>
           </a:xfrm>
           <a:prstGeom prst="rect">
@@ -13267,8 +13459,8 @@
         </p:blipFill>
         <p:spPr>
           <a:xfrm>
-            <a:off x="8296018" y="3375824"/>
-            <a:ext cx="2451653" cy="2243263"/>
+            <a:off x="7726680" y="2699168"/>
+            <a:ext cx="3944535" cy="3609250"/>
           </a:xfrm>
           <a:prstGeom prst="rect">
             <a:avLst/>
@@ -13558,7 +13750,7 @@
               <a:t>Triangle Grid </a:t>
             </a:r>
             <a:r>
-              <a:rPr lang="en-US" sz="4000"/>
+              <a:rPr lang="en-US" sz="4000" dirty="0" err="1"/>
               <a:t>Scenen</a:t>
             </a:r>
             <a:endParaRPr lang="sv-SE" sz="4000" dirty="0"/>
@@ -13673,7 +13865,7 @@
             </a:r>
             <a:r>
               <a:rPr lang="en-US" sz="2000" dirty="0"/>
-              <a:t> Uin </a:t>
+              <a:t> UIn </a:t>
             </a:r>
             <a:r>
               <a:rPr lang="en-US" sz="2000" dirty="0" err="1"/>
@@ -13719,16 +13911,13 @@
             </a:r>
             <a:r>
               <a:rPr lang="en-US" sz="2000" dirty="0"/>
-              <a:t> </a:t>
+              <a:t> all information är </a:t>
             </a:r>
             <a:r>
               <a:rPr lang="en-US" sz="2000" dirty="0" err="1"/>
-              <a:t>allt</a:t>
-            </a:r>
-            <a:r>
-              <a:rPr lang="en-US" sz="2000" dirty="0"/>
-              <a:t> stammer</a:t>
-            </a:r>
+              <a:t>ifylld</a:t>
+            </a:r>
+            <a:endParaRPr lang="en-US" sz="2000" dirty="0"/>
           </a:p>
           <a:p>
             <a:r>

--- a/Assets/Pontus Unit Builder.pptx
+++ b/Assets/Pontus Unit Builder.pptx
@@ -7,8 +7,8 @@
   <p:sldIdLst>
     <p:sldId id="256" r:id="rId2"/>
     <p:sldId id="257" r:id="rId3"/>
-    <p:sldId id="261" r:id="rId4"/>
-    <p:sldId id="258" r:id="rId5"/>
+    <p:sldId id="258" r:id="rId4"/>
+    <p:sldId id="261" r:id="rId5"/>
     <p:sldId id="260" r:id="rId6"/>
     <p:sldId id="262" r:id="rId7"/>
     <p:sldId id="263" r:id="rId8"/>
@@ -120,15 +120,15 @@
 </file>
 
 <file path=ppt/diagrams/colors1.xml><?xml version="1.0" encoding="utf-8"?>
-<dgm:colorsDef xmlns:dgm="http://schemas.openxmlformats.org/drawingml/2006/diagram" xmlns:a="http://schemas.openxmlformats.org/drawingml/2006/main" uniqueId="urn:microsoft.com/office/officeart/2005/8/colors/colorful5">
+<dgm:colorsDef xmlns:dgm="http://schemas.openxmlformats.org/drawingml/2006/diagram" xmlns:a="http://schemas.openxmlformats.org/drawingml/2006/main" uniqueId="urn:microsoft.com/office/officeart/2005/8/colors/accent1_2">
   <dgm:title val=""/>
   <dgm:desc val=""/>
   <dgm:catLst>
-    <dgm:cat type="colorful" pri="10500"/>
+    <dgm:cat type="accent1" pri="11200"/>
   </dgm:catLst>
   <dgm:styleLbl name="node0">
     <dgm:fillClrLst meth="repeat">
-      <a:schemeClr val="accent4"/>
+      <a:schemeClr val="accent1"/>
     </dgm:fillClrLst>
     <dgm:linClrLst meth="repeat">
       <a:schemeClr val="lt1"/>
@@ -138,10 +138,21 @@
     <dgm:txFillClrLst/>
     <dgm:txEffectClrLst/>
   </dgm:styleLbl>
+  <dgm:styleLbl name="alignNode1">
+    <dgm:fillClrLst meth="repeat">
+      <a:schemeClr val="accent1"/>
+    </dgm:fillClrLst>
+    <dgm:linClrLst meth="repeat">
+      <a:schemeClr val="accent1"/>
+    </dgm:linClrLst>
+    <dgm:effectClrLst/>
+    <dgm:txLinClrLst/>
+    <dgm:txFillClrLst/>
+    <dgm:txEffectClrLst/>
+  </dgm:styleLbl>
   <dgm:styleLbl name="node1">
-    <dgm:fillClrLst>
-      <a:schemeClr val="accent5"/>
-      <a:schemeClr val="accent6"/>
+    <dgm:fillClrLst meth="repeat">
+      <a:schemeClr val="accent1"/>
     </dgm:fillClrLst>
     <dgm:linClrLst meth="repeat">
       <a:schemeClr val="lt1"/>
@@ -151,24 +162,9 @@
     <dgm:txFillClrLst/>
     <dgm:txEffectClrLst/>
   </dgm:styleLbl>
-  <dgm:styleLbl name="alignNode1">
-    <dgm:fillClrLst>
-      <a:schemeClr val="accent5"/>
-      <a:schemeClr val="accent6"/>
-    </dgm:fillClrLst>
-    <dgm:linClrLst>
-      <a:schemeClr val="accent5"/>
-      <a:schemeClr val="accent6"/>
-    </dgm:linClrLst>
-    <dgm:effectClrLst/>
-    <dgm:txLinClrLst/>
-    <dgm:txFillClrLst/>
-    <dgm:txEffectClrLst/>
-  </dgm:styleLbl>
   <dgm:styleLbl name="lnNode1">
-    <dgm:fillClrLst>
-      <a:schemeClr val="accent5"/>
-      <a:schemeClr val="accent6"/>
+    <dgm:fillClrLst meth="repeat">
+      <a:schemeClr val="accent1"/>
     </dgm:fillClrLst>
     <dgm:linClrLst meth="repeat">
       <a:schemeClr val="lt1"/>
@@ -179,11 +175,8 @@
     <dgm:txEffectClrLst/>
   </dgm:styleLbl>
   <dgm:styleLbl name="vennNode1">
-    <dgm:fillClrLst>
-      <a:schemeClr val="accent5">
-        <a:alpha val="50000"/>
-      </a:schemeClr>
-      <a:schemeClr val="accent6">
+    <dgm:fillClrLst meth="repeat">
+      <a:schemeClr val="accent1">
         <a:alpha val="50000"/>
       </a:schemeClr>
     </dgm:fillClrLst>
@@ -196,19 +189,7 @@
     <dgm:txEffectClrLst/>
   </dgm:styleLbl>
   <dgm:styleLbl name="node2">
-    <dgm:fillClrLst>
-      <a:schemeClr val="accent6"/>
-    </dgm:fillClrLst>
-    <dgm:linClrLst meth="repeat">
-      <a:schemeClr val="lt1"/>
-    </dgm:linClrLst>
-    <dgm:effectClrLst/>
-    <dgm:txLinClrLst/>
-    <dgm:txFillClrLst/>
-    <dgm:txEffectClrLst/>
-  </dgm:styleLbl>
-  <dgm:styleLbl name="node3">
-    <dgm:fillClrLst>
+    <dgm:fillClrLst meth="repeat">
       <a:schemeClr val="accent1"/>
     </dgm:fillClrLst>
     <dgm:linClrLst meth="repeat">
@@ -219,9 +200,9 @@
     <dgm:txFillClrLst/>
     <dgm:txEffectClrLst/>
   </dgm:styleLbl>
-  <dgm:styleLbl name="node4">
-    <dgm:fillClrLst>
-      <a:schemeClr val="accent2"/>
+  <dgm:styleLbl name="node3">
+    <dgm:fillClrLst meth="repeat">
+      <a:schemeClr val="accent1"/>
     </dgm:fillClrLst>
     <dgm:linClrLst meth="repeat">
       <a:schemeClr val="lt1"/>
@@ -231,12 +212,21 @@
     <dgm:txFillClrLst/>
     <dgm:txEffectClrLst/>
   </dgm:styleLbl>
+  <dgm:styleLbl name="node4">
+    <dgm:fillClrLst meth="repeat">
+      <a:schemeClr val="accent1"/>
+    </dgm:fillClrLst>
+    <dgm:linClrLst meth="repeat">
+      <a:schemeClr val="lt1"/>
+    </dgm:linClrLst>
+    <dgm:effectClrLst/>
+    <dgm:txLinClrLst/>
+    <dgm:txFillClrLst/>
+    <dgm:txEffectClrLst/>
+  </dgm:styleLbl>
   <dgm:styleLbl name="fgImgPlace1">
-    <dgm:fillClrLst>
-      <a:schemeClr val="accent5">
-        <a:tint val="50000"/>
-      </a:schemeClr>
-      <a:schemeClr val="accent6">
+    <dgm:fillClrLst meth="repeat">
+      <a:schemeClr val="accent1">
         <a:tint val="50000"/>
       </a:schemeClr>
     </dgm:fillClrLst>
@@ -251,12 +241,9 @@
     <dgm:txEffectClrLst/>
   </dgm:styleLbl>
   <dgm:styleLbl name="alignImgPlace1">
-    <dgm:fillClrLst>
-      <a:schemeClr val="accent5">
+    <dgm:fillClrLst meth="repeat">
+      <a:schemeClr val="accent1">
         <a:tint val="50000"/>
-      </a:schemeClr>
-      <a:schemeClr val="accent6">
-        <a:tint val="20000"/>
       </a:schemeClr>
     </dgm:fillClrLst>
     <dgm:linClrLst meth="repeat">
@@ -270,12 +257,9 @@
     <dgm:txEffectClrLst/>
   </dgm:styleLbl>
   <dgm:styleLbl name="bgImgPlace1">
-    <dgm:fillClrLst>
-      <a:schemeClr val="accent5">
+    <dgm:fillClrLst meth="repeat">
+      <a:schemeClr val="accent1">
         <a:tint val="50000"/>
-      </a:schemeClr>
-      <a:schemeClr val="accent6">
-        <a:tint val="20000"/>
       </a:schemeClr>
     </dgm:fillClrLst>
     <dgm:linClrLst meth="repeat">
@@ -289,84 +273,14 @@
     <dgm:txEffectClrLst/>
   </dgm:styleLbl>
   <dgm:styleLbl name="sibTrans2D1">
-    <dgm:fillClrLst>
-      <a:schemeClr val="accent5"/>
-      <a:schemeClr val="accent6"/>
+    <dgm:fillClrLst meth="repeat">
+      <a:schemeClr val="accent1">
+        <a:tint val="60000"/>
+      </a:schemeClr>
     </dgm:fillClrLst>
     <dgm:linClrLst meth="repeat">
-      <a:schemeClr val="lt1"/>
-    </dgm:linClrLst>
-    <dgm:effectClrLst/>
-    <dgm:txLinClrLst/>
-    <dgm:txFillClrLst/>
-    <dgm:txEffectClrLst/>
-  </dgm:styleLbl>
-  <dgm:styleLbl name="fgSibTrans2D1">
-    <dgm:fillClrLst>
-      <a:schemeClr val="accent5"/>
-      <a:schemeClr val="accent6"/>
-    </dgm:fillClrLst>
-    <dgm:linClrLst meth="repeat">
-      <a:schemeClr val="lt1"/>
-    </dgm:linClrLst>
-    <dgm:effectClrLst/>
-    <dgm:txLinClrLst/>
-    <dgm:txFillClrLst meth="repeat">
-      <a:schemeClr val="lt1"/>
-    </dgm:txFillClrLst>
-    <dgm:txEffectClrLst/>
-  </dgm:styleLbl>
-  <dgm:styleLbl name="bgSibTrans2D1">
-    <dgm:fillClrLst>
-      <a:schemeClr val="accent5"/>
-      <a:schemeClr val="accent6"/>
-    </dgm:fillClrLst>
-    <dgm:linClrLst meth="repeat">
-      <a:schemeClr val="lt1"/>
-    </dgm:linClrLst>
-    <dgm:effectClrLst/>
-    <dgm:txLinClrLst/>
-    <dgm:txFillClrLst meth="repeat">
-      <a:schemeClr val="lt1"/>
-    </dgm:txFillClrLst>
-    <dgm:txEffectClrLst/>
-  </dgm:styleLbl>
-  <dgm:styleLbl name="sibTrans1D1">
-    <dgm:fillClrLst/>
-    <dgm:linClrLst>
-      <a:schemeClr val="accent5"/>
-      <a:schemeClr val="accent6"/>
-    </dgm:linClrLst>
-    <dgm:effectClrLst/>
-    <dgm:txLinClrLst/>
-    <dgm:txFillClrLst meth="repeat">
-      <a:schemeClr val="tx1"/>
-    </dgm:txFillClrLst>
-    <dgm:txEffectClrLst/>
-  </dgm:styleLbl>
-  <dgm:styleLbl name="callout">
-    <dgm:fillClrLst meth="repeat">
-      <a:schemeClr val="accent5"/>
-    </dgm:fillClrLst>
-    <dgm:linClrLst meth="repeat">
-      <a:schemeClr val="accent5">
-        <a:tint val="50000"/>
-      </a:schemeClr>
-    </dgm:linClrLst>
-    <dgm:effectClrLst/>
-    <dgm:txLinClrLst/>
-    <dgm:txFillClrLst meth="repeat">
-      <a:schemeClr val="tx1"/>
-    </dgm:txFillClrLst>
-    <dgm:txEffectClrLst/>
-  </dgm:styleLbl>
-  <dgm:styleLbl name="asst0">
-    <dgm:fillClrLst meth="repeat">
-      <a:schemeClr val="accent5"/>
-    </dgm:fillClrLst>
-    <dgm:linClrLst meth="repeat">
-      <a:schemeClr val="lt1">
-        <a:shade val="80000"/>
+      <a:schemeClr val="accent1">
+        <a:tint val="60000"/>
       </a:schemeClr>
     </dgm:linClrLst>
     <dgm:effectClrLst/>
@@ -374,13 +288,15 @@
     <dgm:txFillClrLst/>
     <dgm:txEffectClrLst/>
   </dgm:styleLbl>
-  <dgm:styleLbl name="asst1">
+  <dgm:styleLbl name="fgSibTrans2D1">
     <dgm:fillClrLst meth="repeat">
-      <a:schemeClr val="accent6"/>
+      <a:schemeClr val="accent1">
+        <a:tint val="60000"/>
+      </a:schemeClr>
     </dgm:fillClrLst>
     <dgm:linClrLst meth="repeat">
-      <a:schemeClr val="lt1">
-        <a:shade val="80000"/>
+      <a:schemeClr val="accent1">
+        <a:tint val="60000"/>
       </a:schemeClr>
     </dgm:linClrLst>
     <dgm:effectClrLst/>
@@ -388,129 +304,25 @@
     <dgm:txFillClrLst/>
     <dgm:txEffectClrLst/>
   </dgm:styleLbl>
-  <dgm:styleLbl name="asst2">
-    <dgm:fillClrLst>
-      <a:schemeClr val="accent1"/>
+  <dgm:styleLbl name="bgSibTrans2D1">
+    <dgm:fillClrLst meth="repeat">
+      <a:schemeClr val="accent1">
+        <a:tint val="60000"/>
+      </a:schemeClr>
     </dgm:fillClrLst>
     <dgm:linClrLst meth="repeat">
-      <a:schemeClr val="lt1"/>
+      <a:schemeClr val="accent1">
+        <a:tint val="60000"/>
+      </a:schemeClr>
     </dgm:linClrLst>
     <dgm:effectClrLst/>
     <dgm:txLinClrLst/>
     <dgm:txFillClrLst/>
     <dgm:txEffectClrLst/>
   </dgm:styleLbl>
-  <dgm:styleLbl name="asst3">
-    <dgm:fillClrLst>
-      <a:schemeClr val="accent2"/>
-    </dgm:fillClrLst>
-    <dgm:linClrLst meth="repeat">
-      <a:schemeClr val="lt1"/>
-    </dgm:linClrLst>
-    <dgm:effectClrLst/>
-    <dgm:txLinClrLst/>
-    <dgm:txFillClrLst/>
-    <dgm:txEffectClrLst/>
-  </dgm:styleLbl>
-  <dgm:styleLbl name="asst4">
-    <dgm:fillClrLst>
-      <a:schemeClr val="accent3"/>
-    </dgm:fillClrLst>
-    <dgm:linClrLst meth="repeat">
-      <a:schemeClr val="lt1"/>
-    </dgm:linClrLst>
-    <dgm:effectClrLst/>
-    <dgm:txLinClrLst/>
-    <dgm:txFillClrLst/>
-    <dgm:txEffectClrLst/>
-  </dgm:styleLbl>
-  <dgm:styleLbl name="parChTrans2D1">
-    <dgm:fillClrLst meth="repeat">
-      <a:schemeClr val="accent5"/>
-    </dgm:fillClrLst>
-    <dgm:linClrLst meth="repeat">
-      <a:schemeClr val="lt1"/>
-    </dgm:linClrLst>
-    <dgm:effectClrLst/>
-    <dgm:txLinClrLst/>
-    <dgm:txFillClrLst meth="repeat">
-      <a:schemeClr val="lt1"/>
-    </dgm:txFillClrLst>
-    <dgm:txEffectClrLst/>
-  </dgm:styleLbl>
-  <dgm:styleLbl name="parChTrans2D2">
-    <dgm:fillClrLst meth="repeat">
-      <a:schemeClr val="accent6"/>
-    </dgm:fillClrLst>
-    <dgm:linClrLst meth="repeat">
-      <a:schemeClr val="lt1"/>
-    </dgm:linClrLst>
-    <dgm:effectClrLst/>
-    <dgm:txLinClrLst/>
-    <dgm:txFillClrLst/>
-    <dgm:txEffectClrLst/>
-  </dgm:styleLbl>
-  <dgm:styleLbl name="parChTrans2D3">
-    <dgm:fillClrLst meth="repeat">
-      <a:schemeClr val="accent6"/>
-    </dgm:fillClrLst>
-    <dgm:linClrLst meth="repeat">
-      <a:schemeClr val="lt1"/>
-    </dgm:linClrLst>
-    <dgm:effectClrLst/>
-    <dgm:txLinClrLst/>
-    <dgm:txFillClrLst/>
-    <dgm:txEffectClrLst/>
-  </dgm:styleLbl>
-  <dgm:styleLbl name="parChTrans2D4">
+  <dgm:styleLbl name="sibTrans1D1">
     <dgm:fillClrLst meth="repeat">
       <a:schemeClr val="accent1"/>
-    </dgm:fillClrLst>
-    <dgm:linClrLst meth="repeat">
-      <a:schemeClr val="lt1"/>
-    </dgm:linClrLst>
-    <dgm:effectClrLst/>
-    <dgm:txLinClrLst/>
-    <dgm:txFillClrLst meth="repeat">
-      <a:schemeClr val="lt1"/>
-    </dgm:txFillClrLst>
-    <dgm:txEffectClrLst/>
-  </dgm:styleLbl>
-  <dgm:styleLbl name="parChTrans1D1">
-    <dgm:fillClrLst meth="repeat">
-      <a:schemeClr val="accent5"/>
-    </dgm:fillClrLst>
-    <dgm:linClrLst meth="repeat">
-      <a:schemeClr val="accent5"/>
-    </dgm:linClrLst>
-    <dgm:effectClrLst/>
-    <dgm:txLinClrLst/>
-    <dgm:txFillClrLst meth="repeat">
-      <a:schemeClr val="tx1"/>
-    </dgm:txFillClrLst>
-    <dgm:txEffectClrLst/>
-  </dgm:styleLbl>
-  <dgm:styleLbl name="parChTrans1D2">
-    <dgm:fillClrLst meth="repeat">
-      <a:schemeClr val="accent6">
-        <a:tint val="90000"/>
-      </a:schemeClr>
-    </dgm:fillClrLst>
-    <dgm:linClrLst meth="repeat">
-      <a:schemeClr val="accent6"/>
-    </dgm:linClrLst>
-    <dgm:effectClrLst/>
-    <dgm:txLinClrLst/>
-    <dgm:txFillClrLst meth="repeat">
-      <a:schemeClr val="tx1"/>
-    </dgm:txFillClrLst>
-    <dgm:txEffectClrLst/>
-  </dgm:styleLbl>
-  <dgm:styleLbl name="parChTrans1D3">
-    <dgm:fillClrLst meth="repeat">
-      <a:schemeClr val="accent6">
-        <a:tint val="70000"/>
-      </a:schemeClr>
     </dgm:fillClrLst>
     <dgm:linClrLst meth="repeat">
       <a:schemeClr val="accent1"/>
@@ -522,14 +334,14 @@
     </dgm:txFillClrLst>
     <dgm:txEffectClrLst/>
   </dgm:styleLbl>
-  <dgm:styleLbl name="parChTrans1D4">
+  <dgm:styleLbl name="callout">
     <dgm:fillClrLst meth="repeat">
-      <a:schemeClr val="accent6">
+      <a:schemeClr val="accent1"/>
+    </dgm:fillClrLst>
+    <dgm:linClrLst meth="repeat">
+      <a:schemeClr val="accent1">
         <a:tint val="50000"/>
       </a:schemeClr>
-    </dgm:fillClrLst>
-    <dgm:linClrLst meth="repeat">
-      <a:schemeClr val="accent2"/>
     </dgm:linClrLst>
     <dgm:effectClrLst/>
     <dgm:txLinClrLst/>
@@ -538,15 +350,198 @@
     </dgm:txFillClrLst>
     <dgm:txEffectClrLst/>
   </dgm:styleLbl>
+  <dgm:styleLbl name="asst0">
+    <dgm:fillClrLst meth="repeat">
+      <a:schemeClr val="accent1"/>
+    </dgm:fillClrLst>
+    <dgm:linClrLst meth="repeat">
+      <a:schemeClr val="lt1"/>
+    </dgm:linClrLst>
+    <dgm:effectClrLst/>
+    <dgm:txLinClrLst/>
+    <dgm:txFillClrLst/>
+    <dgm:txEffectClrLst/>
+  </dgm:styleLbl>
+  <dgm:styleLbl name="asst1">
+    <dgm:fillClrLst meth="repeat">
+      <a:schemeClr val="accent1"/>
+    </dgm:fillClrLst>
+    <dgm:linClrLst meth="repeat">
+      <a:schemeClr val="lt1"/>
+    </dgm:linClrLst>
+    <dgm:effectClrLst/>
+    <dgm:txLinClrLst/>
+    <dgm:txFillClrLst/>
+    <dgm:txEffectClrLst/>
+  </dgm:styleLbl>
+  <dgm:styleLbl name="asst2">
+    <dgm:fillClrLst meth="repeat">
+      <a:schemeClr val="accent1"/>
+    </dgm:fillClrLst>
+    <dgm:linClrLst meth="repeat">
+      <a:schemeClr val="lt1"/>
+    </dgm:linClrLst>
+    <dgm:effectClrLst/>
+    <dgm:txLinClrLst/>
+    <dgm:txFillClrLst/>
+    <dgm:txEffectClrLst/>
+  </dgm:styleLbl>
+  <dgm:styleLbl name="asst3">
+    <dgm:fillClrLst meth="repeat">
+      <a:schemeClr val="accent1"/>
+    </dgm:fillClrLst>
+    <dgm:linClrLst meth="repeat">
+      <a:schemeClr val="lt1"/>
+    </dgm:linClrLst>
+    <dgm:effectClrLst/>
+    <dgm:txLinClrLst/>
+    <dgm:txFillClrLst/>
+    <dgm:txEffectClrLst/>
+  </dgm:styleLbl>
+  <dgm:styleLbl name="asst4">
+    <dgm:fillClrLst meth="repeat">
+      <a:schemeClr val="accent1"/>
+    </dgm:fillClrLst>
+    <dgm:linClrLst meth="repeat">
+      <a:schemeClr val="lt1"/>
+    </dgm:linClrLst>
+    <dgm:effectClrLst/>
+    <dgm:txLinClrLst/>
+    <dgm:txFillClrLst/>
+    <dgm:txEffectClrLst/>
+  </dgm:styleLbl>
+  <dgm:styleLbl name="parChTrans2D1">
+    <dgm:fillClrLst meth="repeat">
+      <a:schemeClr val="accent1">
+        <a:tint val="60000"/>
+      </a:schemeClr>
+    </dgm:fillClrLst>
+    <dgm:linClrLst meth="repeat">
+      <a:schemeClr val="accent1">
+        <a:tint val="60000"/>
+      </a:schemeClr>
+    </dgm:linClrLst>
+    <dgm:effectClrLst/>
+    <dgm:txLinClrLst/>
+    <dgm:txFillClrLst meth="repeat">
+      <a:schemeClr val="lt1"/>
+    </dgm:txFillClrLst>
+    <dgm:txEffectClrLst/>
+  </dgm:styleLbl>
+  <dgm:styleLbl name="parChTrans2D2">
+    <dgm:fillClrLst meth="repeat">
+      <a:schemeClr val="accent1"/>
+    </dgm:fillClrLst>
+    <dgm:linClrLst meth="repeat">
+      <a:schemeClr val="accent1"/>
+    </dgm:linClrLst>
+    <dgm:effectClrLst/>
+    <dgm:txLinClrLst/>
+    <dgm:txFillClrLst meth="repeat">
+      <a:schemeClr val="lt1"/>
+    </dgm:txFillClrLst>
+    <dgm:txEffectClrLst/>
+  </dgm:styleLbl>
+  <dgm:styleLbl name="parChTrans2D3">
+    <dgm:fillClrLst meth="repeat">
+      <a:schemeClr val="accent1"/>
+    </dgm:fillClrLst>
+    <dgm:linClrLst meth="repeat">
+      <a:schemeClr val="accent1"/>
+    </dgm:linClrLst>
+    <dgm:effectClrLst/>
+    <dgm:txLinClrLst/>
+    <dgm:txFillClrLst meth="repeat">
+      <a:schemeClr val="lt1"/>
+    </dgm:txFillClrLst>
+    <dgm:txEffectClrLst/>
+  </dgm:styleLbl>
+  <dgm:styleLbl name="parChTrans2D4">
+    <dgm:fillClrLst meth="repeat">
+      <a:schemeClr val="accent1"/>
+    </dgm:fillClrLst>
+    <dgm:linClrLst meth="repeat">
+      <a:schemeClr val="accent1"/>
+    </dgm:linClrLst>
+    <dgm:effectClrLst/>
+    <dgm:txLinClrLst/>
+    <dgm:txFillClrLst meth="repeat">
+      <a:schemeClr val="lt1"/>
+    </dgm:txFillClrLst>
+    <dgm:txEffectClrLst/>
+  </dgm:styleLbl>
+  <dgm:styleLbl name="parChTrans1D1">
+    <dgm:fillClrLst meth="repeat">
+      <a:schemeClr val="accent1"/>
+    </dgm:fillClrLst>
+    <dgm:linClrLst meth="repeat">
+      <a:schemeClr val="accent1">
+        <a:shade val="60000"/>
+      </a:schemeClr>
+    </dgm:linClrLst>
+    <dgm:effectClrLst/>
+    <dgm:txLinClrLst/>
+    <dgm:txFillClrLst meth="repeat">
+      <a:schemeClr val="tx1"/>
+    </dgm:txFillClrLst>
+    <dgm:txEffectClrLst/>
+  </dgm:styleLbl>
+  <dgm:styleLbl name="parChTrans1D2">
+    <dgm:fillClrLst meth="repeat">
+      <a:schemeClr val="accent1"/>
+    </dgm:fillClrLst>
+    <dgm:linClrLst meth="repeat">
+      <a:schemeClr val="accent1">
+        <a:shade val="60000"/>
+      </a:schemeClr>
+    </dgm:linClrLst>
+    <dgm:effectClrLst/>
+    <dgm:txLinClrLst/>
+    <dgm:txFillClrLst meth="repeat">
+      <a:schemeClr val="tx1"/>
+    </dgm:txFillClrLst>
+    <dgm:txEffectClrLst/>
+  </dgm:styleLbl>
+  <dgm:styleLbl name="parChTrans1D3">
+    <dgm:fillClrLst meth="repeat">
+      <a:schemeClr val="accent1"/>
+    </dgm:fillClrLst>
+    <dgm:linClrLst meth="repeat">
+      <a:schemeClr val="accent1">
+        <a:shade val="80000"/>
+      </a:schemeClr>
+    </dgm:linClrLst>
+    <dgm:effectClrLst/>
+    <dgm:txLinClrLst/>
+    <dgm:txFillClrLst meth="repeat">
+      <a:schemeClr val="tx1"/>
+    </dgm:txFillClrLst>
+    <dgm:txEffectClrLst/>
+  </dgm:styleLbl>
+  <dgm:styleLbl name="parChTrans1D4">
+    <dgm:fillClrLst meth="repeat">
+      <a:schemeClr val="accent1"/>
+    </dgm:fillClrLst>
+    <dgm:linClrLst meth="repeat">
+      <a:schemeClr val="accent1">
+        <a:shade val="80000"/>
+      </a:schemeClr>
+    </dgm:linClrLst>
+    <dgm:effectClrLst/>
+    <dgm:txLinClrLst/>
+    <dgm:txFillClrLst meth="repeat">
+      <a:schemeClr val="tx1"/>
+    </dgm:txFillClrLst>
+    <dgm:txEffectClrLst/>
+  </dgm:styleLbl>
   <dgm:styleLbl name="fgAcc1">
     <dgm:fillClrLst meth="repeat">
       <a:schemeClr val="lt1">
         <a:alpha val="90000"/>
       </a:schemeClr>
     </dgm:fillClrLst>
-    <dgm:linClrLst>
-      <a:schemeClr val="accent5"/>
-      <a:schemeClr val="accent6"/>
+    <dgm:linClrLst meth="repeat">
+      <a:schemeClr val="accent1"/>
     </dgm:linClrLst>
     <dgm:effectClrLst/>
     <dgm:txLinClrLst/>
@@ -561,9 +556,8 @@
         <a:alpha val="90000"/>
       </a:schemeClr>
     </dgm:fillClrLst>
-    <dgm:linClrLst>
-      <a:schemeClr val="accent5"/>
-      <a:schemeClr val="accent6"/>
+    <dgm:linClrLst meth="repeat">
+      <a:schemeClr val="accent1"/>
     </dgm:linClrLst>
     <dgm:effectClrLst/>
     <dgm:txLinClrLst/>
@@ -578,9 +572,8 @@
         <a:alpha val="90000"/>
       </a:schemeClr>
     </dgm:fillClrLst>
-    <dgm:linClrLst>
-      <a:schemeClr val="accent5"/>
-      <a:schemeClr val="accent6"/>
+    <dgm:linClrLst meth="repeat">
+      <a:schemeClr val="accent1"/>
     </dgm:linClrLst>
     <dgm:effectClrLst/>
     <dgm:txLinClrLst/>
@@ -596,7 +589,7 @@
       </a:schemeClr>
     </dgm:fillClrLst>
     <dgm:linClrLst meth="repeat">
-      <a:schemeClr val="accent5"/>
+      <a:schemeClr val="accent1"/>
     </dgm:linClrLst>
     <dgm:effectClrLst/>
     <dgm:txLinClrLst/>
@@ -611,9 +604,8 @@
         <a:alpha val="90000"/>
       </a:schemeClr>
     </dgm:fillClrLst>
-    <dgm:linClrLst>
-      <a:schemeClr val="accent5"/>
-      <a:schemeClr val="accent6"/>
+    <dgm:linClrLst meth="repeat">
+      <a:schemeClr val="accent1"/>
     </dgm:linClrLst>
     <dgm:effectClrLst/>
     <dgm:txLinClrLst/>
@@ -626,9 +618,8 @@
     <dgm:fillClrLst meth="repeat">
       <a:schemeClr val="lt1"/>
     </dgm:fillClrLst>
-    <dgm:linClrLst>
-      <a:schemeClr val="accent5"/>
-      <a:schemeClr val="accent6"/>
+    <dgm:linClrLst meth="repeat">
+      <a:schemeClr val="accent1"/>
     </dgm:linClrLst>
     <dgm:effectClrLst/>
     <dgm:txLinClrLst/>
@@ -641,9 +632,8 @@
     <dgm:fillClrLst meth="repeat">
       <a:schemeClr val="lt1"/>
     </dgm:fillClrLst>
-    <dgm:linClrLst>
-      <a:schemeClr val="accent5"/>
-      <a:schemeClr val="accent6"/>
+    <dgm:linClrLst meth="repeat">
+      <a:schemeClr val="accent1"/>
     </dgm:linClrLst>
     <dgm:effectClrLst/>
     <dgm:txLinClrLst/>
@@ -656,9 +646,8 @@
     <dgm:fillClrLst meth="repeat">
       <a:schemeClr val="lt1"/>
     </dgm:fillClrLst>
-    <dgm:linClrLst>
-      <a:schemeClr val="accent5"/>
-      <a:schemeClr val="accent6"/>
+    <dgm:linClrLst meth="repeat">
+      <a:schemeClr val="accent1"/>
     </dgm:linClrLst>
     <dgm:effectClrLst/>
     <dgm:txLinClrLst/>
@@ -668,24 +657,16 @@
     <dgm:txEffectClrLst/>
   </dgm:styleLbl>
   <dgm:styleLbl name="fgAccFollowNode1">
-    <dgm:fillClrLst>
-      <a:schemeClr val="accent5">
+    <dgm:fillClrLst meth="repeat">
+      <a:schemeClr val="accent1">
+        <a:alpha val="90000"/>
         <a:tint val="40000"/>
-        <a:alpha val="90000"/>
-      </a:schemeClr>
-      <a:schemeClr val="accent6">
-        <a:tint val="40000"/>
-        <a:alpha val="90000"/>
       </a:schemeClr>
     </dgm:fillClrLst>
-    <dgm:linClrLst>
-      <a:schemeClr val="accent5">
+    <dgm:linClrLst meth="repeat">
+      <a:schemeClr val="accent1">
+        <a:alpha val="90000"/>
         <a:tint val="40000"/>
-        <a:alpha val="90000"/>
-      </a:schemeClr>
-      <a:schemeClr val="accent5">
-        <a:tint val="40000"/>
-        <a:alpha val="90000"/>
       </a:schemeClr>
     </dgm:linClrLst>
     <dgm:effectClrLst/>
@@ -696,24 +677,16 @@
     <dgm:txEffectClrLst/>
   </dgm:styleLbl>
   <dgm:styleLbl name="alignAccFollowNode1">
-    <dgm:fillClrLst>
-      <a:schemeClr val="accent5">
+    <dgm:fillClrLst meth="repeat">
+      <a:schemeClr val="accent1">
+        <a:alpha val="90000"/>
         <a:tint val="40000"/>
-        <a:alpha val="90000"/>
-      </a:schemeClr>
-      <a:schemeClr val="accent6">
-        <a:tint val="40000"/>
-        <a:alpha val="90000"/>
       </a:schemeClr>
     </dgm:fillClrLst>
-    <dgm:linClrLst>
-      <a:schemeClr val="accent5">
+    <dgm:linClrLst meth="repeat">
+      <a:schemeClr val="accent1">
+        <a:alpha val="90000"/>
         <a:tint val="40000"/>
-        <a:alpha val="90000"/>
-      </a:schemeClr>
-      <a:schemeClr val="accent6">
-        <a:tint val="40000"/>
-        <a:alpha val="90000"/>
       </a:schemeClr>
     </dgm:linClrLst>
     <dgm:effectClrLst/>
@@ -724,24 +697,16 @@
     <dgm:txEffectClrLst/>
   </dgm:styleLbl>
   <dgm:styleLbl name="bgAccFollowNode1">
-    <dgm:fillClrLst>
-      <a:schemeClr val="accent5">
+    <dgm:fillClrLst meth="repeat">
+      <a:schemeClr val="accent1">
+        <a:alpha val="90000"/>
         <a:tint val="40000"/>
-        <a:alpha val="90000"/>
-      </a:schemeClr>
-      <a:schemeClr val="accent6">
-        <a:tint val="40000"/>
-        <a:alpha val="90000"/>
       </a:schemeClr>
     </dgm:fillClrLst>
-    <dgm:linClrLst>
-      <a:schemeClr val="accent5">
+    <dgm:linClrLst meth="repeat">
+      <a:schemeClr val="accent1">
+        <a:alpha val="90000"/>
         <a:tint val="40000"/>
-        <a:alpha val="90000"/>
-      </a:schemeClr>
-      <a:schemeClr val="accent6">
-        <a:tint val="40000"/>
-        <a:alpha val="90000"/>
       </a:schemeClr>
     </dgm:linClrLst>
     <dgm:effectClrLst/>
@@ -757,39 +722,7 @@
         <a:alpha val="90000"/>
       </a:schemeClr>
     </dgm:fillClrLst>
-    <dgm:linClrLst>
-      <a:schemeClr val="accent4"/>
-    </dgm:linClrLst>
-    <dgm:effectClrLst/>
-    <dgm:txLinClrLst/>
-    <dgm:txFillClrLst meth="repeat">
-      <a:schemeClr val="dk1"/>
-    </dgm:txFillClrLst>
-    <dgm:txEffectClrLst/>
-  </dgm:styleLbl>
-  <dgm:styleLbl name="fgAcc2">
-    <dgm:fillClrLst meth="repeat">
-      <a:schemeClr val="lt1">
-        <a:alpha val="90000"/>
-      </a:schemeClr>
-    </dgm:fillClrLst>
-    <dgm:linClrLst>
-      <a:schemeClr val="accent6"/>
-    </dgm:linClrLst>
-    <dgm:effectClrLst/>
-    <dgm:txLinClrLst/>
-    <dgm:txFillClrLst meth="repeat">
-      <a:schemeClr val="dk1"/>
-    </dgm:txFillClrLst>
-    <dgm:txEffectClrLst/>
-  </dgm:styleLbl>
-  <dgm:styleLbl name="fgAcc3">
-    <dgm:fillClrLst meth="repeat">
-      <a:schemeClr val="lt1">
-        <a:alpha val="90000"/>
-      </a:schemeClr>
-    </dgm:fillClrLst>
-    <dgm:linClrLst>
+    <dgm:linClrLst meth="repeat">
       <a:schemeClr val="accent1"/>
     </dgm:linClrLst>
     <dgm:effectClrLst/>
@@ -799,14 +732,14 @@
     </dgm:txFillClrLst>
     <dgm:txEffectClrLst/>
   </dgm:styleLbl>
-  <dgm:styleLbl name="fgAcc4">
+  <dgm:styleLbl name="fgAcc2">
     <dgm:fillClrLst meth="repeat">
       <a:schemeClr val="lt1">
         <a:alpha val="90000"/>
       </a:schemeClr>
     </dgm:fillClrLst>
-    <dgm:linClrLst>
-      <a:schemeClr val="accent2"/>
+    <dgm:linClrLst meth="repeat">
+      <a:schemeClr val="accent1"/>
     </dgm:linClrLst>
     <dgm:effectClrLst/>
     <dgm:txLinClrLst/>
@@ -815,14 +748,14 @@
     </dgm:txFillClrLst>
     <dgm:txEffectClrLst/>
   </dgm:styleLbl>
-  <dgm:styleLbl name="bgShp">
+  <dgm:styleLbl name="fgAcc3">
     <dgm:fillClrLst meth="repeat">
-      <a:schemeClr val="accent5">
-        <a:tint val="40000"/>
+      <a:schemeClr val="lt1">
+        <a:alpha val="90000"/>
       </a:schemeClr>
     </dgm:fillClrLst>
     <dgm:linClrLst meth="repeat">
-      <a:schemeClr val="dk1"/>
+      <a:schemeClr val="accent1"/>
     </dgm:linClrLst>
     <dgm:effectClrLst/>
     <dgm:txLinClrLst/>
@@ -831,14 +764,46 @@
     </dgm:txFillClrLst>
     <dgm:txEffectClrLst/>
   </dgm:styleLbl>
-  <dgm:styleLbl name="dkBgShp">
+  <dgm:styleLbl name="fgAcc4">
     <dgm:fillClrLst meth="repeat">
-      <a:schemeClr val="accent5">
-        <a:shade val="90000"/>
+      <a:schemeClr val="lt1">
+        <a:alpha val="90000"/>
       </a:schemeClr>
     </dgm:fillClrLst>
     <dgm:linClrLst meth="repeat">
+      <a:schemeClr val="accent1"/>
+    </dgm:linClrLst>
+    <dgm:effectClrLst/>
+    <dgm:txLinClrLst/>
+    <dgm:txFillClrLst meth="repeat">
       <a:schemeClr val="dk1"/>
+    </dgm:txFillClrLst>
+    <dgm:txEffectClrLst/>
+  </dgm:styleLbl>
+  <dgm:styleLbl name="bgShp">
+    <dgm:fillClrLst meth="repeat">
+      <a:schemeClr val="accent1">
+        <a:tint val="40000"/>
+      </a:schemeClr>
+    </dgm:fillClrLst>
+    <dgm:linClrLst meth="repeat">
+      <a:schemeClr val="accent1"/>
+    </dgm:linClrLst>
+    <dgm:effectClrLst/>
+    <dgm:txLinClrLst/>
+    <dgm:txFillClrLst meth="repeat">
+      <a:schemeClr val="dk1"/>
+    </dgm:txFillClrLst>
+    <dgm:txEffectClrLst/>
+  </dgm:styleLbl>
+  <dgm:styleLbl name="dkBgShp">
+    <dgm:fillClrLst meth="repeat">
+      <a:schemeClr val="accent1">
+        <a:shade val="80000"/>
+      </a:schemeClr>
+    </dgm:fillClrLst>
+    <dgm:linClrLst meth="repeat">
+      <a:schemeClr val="accent1"/>
     </dgm:linClrLst>
     <dgm:effectClrLst/>
     <dgm:txLinClrLst/>
@@ -849,13 +814,13 @@
   </dgm:styleLbl>
   <dgm:styleLbl name="trBgShp">
     <dgm:fillClrLst meth="repeat">
-      <a:schemeClr val="accent5">
+      <a:schemeClr val="accent1">
         <a:tint val="50000"/>
         <a:alpha val="40000"/>
       </a:schemeClr>
     </dgm:fillClrLst>
     <dgm:linClrLst meth="repeat">
-      <a:schemeClr val="accent5"/>
+      <a:schemeClr val="accent1"/>
     </dgm:linClrLst>
     <dgm:effectClrLst/>
     <dgm:txLinClrLst/>
@@ -866,8 +831,8 @@
   </dgm:styleLbl>
   <dgm:styleLbl name="fgShp">
     <dgm:fillClrLst meth="repeat">
-      <a:schemeClr val="accent5">
-        <a:tint val="40000"/>
+      <a:schemeClr val="accent1">
+        <a:tint val="60000"/>
       </a:schemeClr>
     </dgm:fillClrLst>
     <dgm:linClrLst meth="repeat">
@@ -1651,8 +1616,8 @@
 <file path=ppt/diagrams/data1.xml><?xml version="1.0" encoding="utf-8"?>
 <dgm:dataModel xmlns:dgm="http://schemas.openxmlformats.org/drawingml/2006/diagram" xmlns:a="http://schemas.openxmlformats.org/drawingml/2006/main">
   <dgm:ptLst>
-    <dgm:pt modelId="{7AF7EC9B-E4BE-42C2-9C54-FE101322F5B6}" type="doc">
-      <dgm:prSet loTypeId="urn:microsoft.com/office/officeart/2005/8/layout/hierarchy1" loCatId="hierarchy" qsTypeId="urn:microsoft.com/office/officeart/2005/8/quickstyle/simple5" qsCatId="simple" csTypeId="urn:microsoft.com/office/officeart/2005/8/colors/colorful5" csCatId="colorful" phldr="1"/>
+    <dgm:pt modelId="{D3573ADD-3D24-4E02-AA59-A6FE3401488E}" type="doc">
+      <dgm:prSet loTypeId="urn:microsoft.com/office/officeart/2005/8/layout/vList5" loCatId="list" qsTypeId="urn:microsoft.com/office/officeart/2005/8/quickstyle/simple4" qsCatId="simple" csTypeId="urn:microsoft.com/office/officeart/2005/8/colors/accent1_2" csCatId="accent1" phldr="1"/>
       <dgm:spPr/>
       <dgm:t>
         <a:bodyPr/>
@@ -1662,7 +1627,7 @@
         </a:p>
       </dgm:t>
     </dgm:pt>
-    <dgm:pt modelId="{D48BD687-449A-4797-A0D3-7B06551E1ABD}">
+    <dgm:pt modelId="{D396FE9A-9B2F-45B1-8FFA-F9042F06431F}">
       <dgm:prSet/>
       <dgm:spPr/>
       <dgm:t>
@@ -1671,12 +1636,12 @@
         <a:p>
           <a:r>
             <a:rPr lang="en-US" dirty="0"/>
-            <a:t>UI Button Prefab</a:t>
+            <a:t>Unit definition</a:t>
           </a:r>
         </a:p>
       </dgm:t>
     </dgm:pt>
-    <dgm:pt modelId="{4605E369-2C5C-495C-9E88-180CC035866E}" type="parTrans" cxnId="{D3898CE0-593A-4FDD-A9E7-133ACECD75A8}">
+    <dgm:pt modelId="{E3E06133-E60D-4666-84B3-DFA5DC743289}" type="parTrans" cxnId="{F3E74135-64AC-44DF-9978-58806D09FB30}">
       <dgm:prSet/>
       <dgm:spPr/>
       <dgm:t>
@@ -1687,7 +1652,7 @@
         </a:p>
       </dgm:t>
     </dgm:pt>
-    <dgm:pt modelId="{091D725F-5CCF-4951-B19F-BED51D1125AD}" type="sibTrans" cxnId="{D3898CE0-593A-4FDD-A9E7-133ACECD75A8}">
+    <dgm:pt modelId="{DCEBF35F-639B-4924-B16A-059F4CF8DD7F}" type="sibTrans" cxnId="{F3E74135-64AC-44DF-9978-58806D09FB30}">
       <dgm:prSet/>
       <dgm:spPr/>
       <dgm:t>
@@ -1698,7 +1663,115 @@
         </a:p>
       </dgm:t>
     </dgm:pt>
-    <dgm:pt modelId="{8BD2D37A-FDA6-4D11-8724-EC25935A0CE0}">
+    <dgm:pt modelId="{066E7B34-B5BC-4334-9233-605FDA1010F0}">
+      <dgm:prSet/>
+      <dgm:spPr/>
+      <dgm:t>
+        <a:bodyPr/>
+        <a:lstStyle/>
+        <a:p>
+          <a:r>
+            <a:rPr lang="en-US"/>
+            <a:t>Unit details</a:t>
+          </a:r>
+        </a:p>
+      </dgm:t>
+    </dgm:pt>
+    <dgm:pt modelId="{66B84E54-B0A9-4A3A-BD0B-5500F9DD4103}" type="parTrans" cxnId="{7961F69F-0E1A-4620-9581-183DAD94A202}">
+      <dgm:prSet/>
+      <dgm:spPr/>
+      <dgm:t>
+        <a:bodyPr/>
+        <a:lstStyle/>
+        <a:p>
+          <a:endParaRPr lang="en-US"/>
+        </a:p>
+      </dgm:t>
+    </dgm:pt>
+    <dgm:pt modelId="{8DC11522-A8C5-4E7B-A42D-7105E7834138}" type="sibTrans" cxnId="{7961F69F-0E1A-4620-9581-183DAD94A202}">
+      <dgm:prSet/>
+      <dgm:spPr/>
+      <dgm:t>
+        <a:bodyPr/>
+        <a:lstStyle/>
+        <a:p>
+          <a:endParaRPr lang="en-US"/>
+        </a:p>
+      </dgm:t>
+    </dgm:pt>
+    <dgm:pt modelId="{26423E91-FE12-4253-BDC8-3493C92AF914}">
+      <dgm:prSet/>
+      <dgm:spPr/>
+      <dgm:t>
+        <a:bodyPr/>
+        <a:lstStyle/>
+        <a:p>
+          <a:r>
+            <a:rPr lang="en-US" dirty="0"/>
+            <a:t>UI Knapp</a:t>
+          </a:r>
+        </a:p>
+      </dgm:t>
+    </dgm:pt>
+    <dgm:pt modelId="{7AEC4F93-8CB7-469D-BB96-3BCFF6C2F08A}" type="parTrans" cxnId="{AEC71EAB-2F6D-4100-970D-794BC7DF42D9}">
+      <dgm:prSet/>
+      <dgm:spPr/>
+      <dgm:t>
+        <a:bodyPr/>
+        <a:lstStyle/>
+        <a:p>
+          <a:endParaRPr lang="en-US"/>
+        </a:p>
+      </dgm:t>
+    </dgm:pt>
+    <dgm:pt modelId="{6CB252CD-7564-45B4-A2C7-645DC3E341A9}" type="sibTrans" cxnId="{AEC71EAB-2F6D-4100-970D-794BC7DF42D9}">
+      <dgm:prSet/>
+      <dgm:spPr/>
+      <dgm:t>
+        <a:bodyPr/>
+        <a:lstStyle/>
+        <a:p>
+          <a:endParaRPr lang="en-US"/>
+        </a:p>
+      </dgm:t>
+    </dgm:pt>
+    <dgm:pt modelId="{0D25FDD1-B4EE-422C-A797-7645717D4E79}">
+      <dgm:prSet/>
+      <dgm:spPr/>
+      <dgm:t>
+        <a:bodyPr/>
+        <a:lstStyle/>
+        <a:p>
+          <a:r>
+            <a:rPr lang="en-US"/>
+            <a:t>UI hand visuals</a:t>
+          </a:r>
+        </a:p>
+      </dgm:t>
+    </dgm:pt>
+    <dgm:pt modelId="{6E2B55DA-F702-4DB4-8144-ECAA7A266845}" type="parTrans" cxnId="{424030FC-E9B8-48D2-BE8C-B4D1EF8972DB}">
+      <dgm:prSet/>
+      <dgm:spPr/>
+      <dgm:t>
+        <a:bodyPr/>
+        <a:lstStyle/>
+        <a:p>
+          <a:endParaRPr lang="en-US"/>
+        </a:p>
+      </dgm:t>
+    </dgm:pt>
+    <dgm:pt modelId="{CDD54B02-5A38-490B-A092-27DB004EB80D}" type="sibTrans" cxnId="{424030FC-E9B8-48D2-BE8C-B4D1EF8972DB}">
+      <dgm:prSet/>
+      <dgm:spPr/>
+      <dgm:t>
+        <a:bodyPr/>
+        <a:lstStyle/>
+        <a:p>
+          <a:endParaRPr lang="en-US"/>
+        </a:p>
+      </dgm:t>
+    </dgm:pt>
+    <dgm:pt modelId="{E166245D-832E-44FC-8787-FFF8FDFA7977}">
       <dgm:prSet/>
       <dgm:spPr/>
       <dgm:t>
@@ -1712,7 +1785,7 @@
         </a:p>
       </dgm:t>
     </dgm:pt>
-    <dgm:pt modelId="{965689BA-A386-4509-A9AF-0E0A0B5DD1C4}" type="parTrans" cxnId="{7894F8C2-0AF0-4BD0-A27E-2A3BCFF7CCFD}">
+    <dgm:pt modelId="{ECE9C1B7-07D8-4661-8DD9-3E9317A36860}" type="parTrans" cxnId="{39CF1CCB-7156-4CB8-B860-AD518175A69E}">
       <dgm:prSet/>
       <dgm:spPr/>
       <dgm:t>
@@ -1723,7 +1796,7 @@
         </a:p>
       </dgm:t>
     </dgm:pt>
-    <dgm:pt modelId="{4D1C09AB-3835-4268-8B94-90D9644D6861}" type="sibTrans" cxnId="{7894F8C2-0AF0-4BD0-A27E-2A3BCFF7CCFD}">
+    <dgm:pt modelId="{06B77D5E-5BAD-43ED-8502-FE9C1C81522C}" type="sibTrans" cxnId="{39CF1CCB-7156-4CB8-B860-AD518175A69E}">
       <dgm:prSet/>
       <dgm:spPr/>
       <dgm:t>
@@ -1734,7 +1807,7 @@
         </a:p>
       </dgm:t>
     </dgm:pt>
-    <dgm:pt modelId="{A9E93178-A3B0-4D86-B109-D44AE95E728E}">
+    <dgm:pt modelId="{EE0C9488-0B8B-4456-8164-99244AED9707}">
       <dgm:prSet/>
       <dgm:spPr/>
       <dgm:t>
@@ -1743,141 +1816,140 @@
         <a:p>
           <a:r>
             <a:rPr lang="en-US"/>
-            <a:t>Unit Definition</a:t>
+            <a:t>Unit model</a:t>
           </a:r>
         </a:p>
       </dgm:t>
     </dgm:pt>
-    <dgm:pt modelId="{FD83E4B5-7675-4039-825F-377AB191B930}" type="parTrans" cxnId="{771D3647-6960-431F-AA5B-928E404091A5}">
+    <dgm:pt modelId="{7BEFF6DA-475F-4C02-8590-87813FD7E499}" type="parTrans" cxnId="{F947A895-69A8-4E3E-9E04-490C61D5C52D}">
       <dgm:prSet/>
       <dgm:spPr/>
       <dgm:t>
         <a:bodyPr/>
         <a:lstStyle/>
         <a:p>
-          <a:endParaRPr lang="sv-SE"/>
+          <a:endParaRPr lang="en-US"/>
         </a:p>
       </dgm:t>
     </dgm:pt>
-    <dgm:pt modelId="{6AE2789F-196D-4A21-88F3-4868CC5DB399}" type="sibTrans" cxnId="{771D3647-6960-431F-AA5B-928E404091A5}">
+    <dgm:pt modelId="{51853B9E-1432-47E3-BEE0-4D3D1A32BBF7}" type="sibTrans" cxnId="{F947A895-69A8-4E3E-9E04-490C61D5C52D}">
       <dgm:prSet/>
       <dgm:spPr/>
       <dgm:t>
         <a:bodyPr/>
         <a:lstStyle/>
         <a:p>
-          <a:endParaRPr lang="sv-SE"/>
+          <a:endParaRPr lang="en-US"/>
         </a:p>
       </dgm:t>
     </dgm:pt>
-    <dgm:pt modelId="{E318A0E8-2DA0-481E-AF0B-88751D9BC4B9}" type="pres">
-      <dgm:prSet presAssocID="{7AF7EC9B-E4BE-42C2-9C54-FE101322F5B6}" presName="hierChild1" presStyleCnt="0">
+    <dgm:pt modelId="{C3F16E32-EBCA-4B61-89E7-84D84353C63C}" type="pres">
+      <dgm:prSet presAssocID="{D3573ADD-3D24-4E02-AA59-A6FE3401488E}" presName="Name0" presStyleCnt="0">
         <dgm:presLayoutVars>
-          <dgm:chPref val="1"/>
           <dgm:dir/>
-          <dgm:animOne val="branch"/>
           <dgm:animLvl val="lvl"/>
-          <dgm:resizeHandles/>
+          <dgm:resizeHandles val="exact"/>
         </dgm:presLayoutVars>
       </dgm:prSet>
       <dgm:spPr/>
     </dgm:pt>
-    <dgm:pt modelId="{B50A4686-795F-4293-B012-276A9A139853}" type="pres">
-      <dgm:prSet presAssocID="{D48BD687-449A-4797-A0D3-7B06551E1ABD}" presName="hierRoot1" presStyleCnt="0"/>
+    <dgm:pt modelId="{91CA720A-0649-40C2-BAE9-46B6D9B8CFEB}" type="pres">
+      <dgm:prSet presAssocID="{D396FE9A-9B2F-45B1-8FFA-F9042F06431F}" presName="linNode" presStyleCnt="0"/>
       <dgm:spPr/>
     </dgm:pt>
-    <dgm:pt modelId="{60B14C1F-DBF4-4D8E-A4C0-2DB4F377A11E}" type="pres">
-      <dgm:prSet presAssocID="{D48BD687-449A-4797-A0D3-7B06551E1ABD}" presName="composite" presStyleCnt="0"/>
-      <dgm:spPr/>
-    </dgm:pt>
-    <dgm:pt modelId="{274AECA2-A2C6-4293-8387-0DD08C634900}" type="pres">
-      <dgm:prSet presAssocID="{D48BD687-449A-4797-A0D3-7B06551E1ABD}" presName="background" presStyleLbl="node0" presStyleIdx="0" presStyleCnt="3"/>
-      <dgm:spPr/>
-    </dgm:pt>
-    <dgm:pt modelId="{4D8E17D3-4DDA-407A-8CA4-524764F70662}" type="pres">
-      <dgm:prSet presAssocID="{D48BD687-449A-4797-A0D3-7B06551E1ABD}" presName="text" presStyleLbl="fgAcc0" presStyleIdx="0" presStyleCnt="3">
+    <dgm:pt modelId="{334D8514-1787-458A-A6F0-016CC9EA305B}" type="pres">
+      <dgm:prSet presAssocID="{D396FE9A-9B2F-45B1-8FFA-F9042F06431F}" presName="parentText" presStyleLbl="node1" presStyleIdx="0" presStyleCnt="3">
         <dgm:presLayoutVars>
-          <dgm:chPref val="3"/>
+          <dgm:chMax val="1"/>
+          <dgm:bulletEnabled val="1"/>
         </dgm:presLayoutVars>
       </dgm:prSet>
       <dgm:spPr/>
     </dgm:pt>
-    <dgm:pt modelId="{27833DF5-D900-4968-83D8-7FA2DAFF451E}" type="pres">
-      <dgm:prSet presAssocID="{D48BD687-449A-4797-A0D3-7B06551E1ABD}" presName="hierChild2" presStyleCnt="0"/>
-      <dgm:spPr/>
-    </dgm:pt>
-    <dgm:pt modelId="{53B31079-6191-4C3B-BFFC-D5550563E947}" type="pres">
-      <dgm:prSet presAssocID="{A9E93178-A3B0-4D86-B109-D44AE95E728E}" presName="hierRoot1" presStyleCnt="0"/>
-      <dgm:spPr/>
-    </dgm:pt>
-    <dgm:pt modelId="{445937C8-D356-4978-8015-611388CBA308}" type="pres">
-      <dgm:prSet presAssocID="{A9E93178-A3B0-4D86-B109-D44AE95E728E}" presName="composite" presStyleCnt="0"/>
-      <dgm:spPr/>
-    </dgm:pt>
-    <dgm:pt modelId="{122008A8-7DCA-4952-AFED-C89470539ED5}" type="pres">
-      <dgm:prSet presAssocID="{A9E93178-A3B0-4D86-B109-D44AE95E728E}" presName="background" presStyleLbl="node0" presStyleIdx="1" presStyleCnt="3"/>
-      <dgm:spPr/>
-    </dgm:pt>
-    <dgm:pt modelId="{F5329F4A-C37A-4F02-88AB-93E7F9657F2A}" type="pres">
-      <dgm:prSet presAssocID="{A9E93178-A3B0-4D86-B109-D44AE95E728E}" presName="text" presStyleLbl="fgAcc0" presStyleIdx="1" presStyleCnt="3">
+    <dgm:pt modelId="{F603FC5D-A413-4826-820B-5815CC00A1B3}" type="pres">
+      <dgm:prSet presAssocID="{D396FE9A-9B2F-45B1-8FFA-F9042F06431F}" presName="descendantText" presStyleLbl="alignAccFollowNode1" presStyleIdx="0" presStyleCnt="3">
         <dgm:presLayoutVars>
-          <dgm:chPref val="3"/>
+          <dgm:bulletEnabled val="1"/>
         </dgm:presLayoutVars>
       </dgm:prSet>
       <dgm:spPr/>
     </dgm:pt>
-    <dgm:pt modelId="{8A2AEBE6-AF8A-4DAE-8661-823AE0CD7CF8}" type="pres">
-      <dgm:prSet presAssocID="{A9E93178-A3B0-4D86-B109-D44AE95E728E}" presName="hierChild2" presStyleCnt="0"/>
+    <dgm:pt modelId="{6393530E-B991-488C-850A-AE844A5BDDF2}" type="pres">
+      <dgm:prSet presAssocID="{DCEBF35F-639B-4924-B16A-059F4CF8DD7F}" presName="sp" presStyleCnt="0"/>
       <dgm:spPr/>
     </dgm:pt>
-    <dgm:pt modelId="{8D568D53-EA23-4B25-91D6-9079172EDED5}" type="pres">
-      <dgm:prSet presAssocID="{8BD2D37A-FDA6-4D11-8724-EC25935A0CE0}" presName="hierRoot1" presStyleCnt="0"/>
+    <dgm:pt modelId="{EB3739D4-B6DA-4766-91A6-6A0A57B92EDB}" type="pres">
+      <dgm:prSet presAssocID="{26423E91-FE12-4253-BDC8-3493C92AF914}" presName="linNode" presStyleCnt="0"/>
       <dgm:spPr/>
     </dgm:pt>
-    <dgm:pt modelId="{DE48D3E0-9A52-417D-AD6F-94E4C3D5F93A}" type="pres">
-      <dgm:prSet presAssocID="{8BD2D37A-FDA6-4D11-8724-EC25935A0CE0}" presName="composite" presStyleCnt="0"/>
-      <dgm:spPr/>
-    </dgm:pt>
-    <dgm:pt modelId="{606C66B2-3BE0-4EF5-86FD-114B5BA219CC}" type="pres">
-      <dgm:prSet presAssocID="{8BD2D37A-FDA6-4D11-8724-EC25935A0CE0}" presName="background" presStyleLbl="node0" presStyleIdx="2" presStyleCnt="3"/>
-      <dgm:spPr/>
-    </dgm:pt>
-    <dgm:pt modelId="{8B7A3C08-F071-4860-AF10-1E8E8FCE62FF}" type="pres">
-      <dgm:prSet presAssocID="{8BD2D37A-FDA6-4D11-8724-EC25935A0CE0}" presName="text" presStyleLbl="fgAcc0" presStyleIdx="2" presStyleCnt="3">
+    <dgm:pt modelId="{0E6351DC-544C-4F95-8FC6-D23F75D3A076}" type="pres">
+      <dgm:prSet presAssocID="{26423E91-FE12-4253-BDC8-3493C92AF914}" presName="parentText" presStyleLbl="node1" presStyleIdx="1" presStyleCnt="3">
         <dgm:presLayoutVars>
-          <dgm:chPref val="3"/>
+          <dgm:chMax val="1"/>
+          <dgm:bulletEnabled val="1"/>
         </dgm:presLayoutVars>
       </dgm:prSet>
       <dgm:spPr/>
     </dgm:pt>
-    <dgm:pt modelId="{8A80818B-AF78-448C-AD8D-9B8008743BB9}" type="pres">
-      <dgm:prSet presAssocID="{8BD2D37A-FDA6-4D11-8724-EC25935A0CE0}" presName="hierChild2" presStyleCnt="0"/>
+    <dgm:pt modelId="{EDB97782-AFD5-44A6-A377-D226249DF101}" type="pres">
+      <dgm:prSet presAssocID="{26423E91-FE12-4253-BDC8-3493C92AF914}" presName="descendantText" presStyleLbl="alignAccFollowNode1" presStyleIdx="1" presStyleCnt="3">
+        <dgm:presLayoutVars>
+          <dgm:bulletEnabled val="1"/>
+        </dgm:presLayoutVars>
+      </dgm:prSet>
+      <dgm:spPr/>
+    </dgm:pt>
+    <dgm:pt modelId="{CAED4119-82AB-4275-A070-955627789B30}" type="pres">
+      <dgm:prSet presAssocID="{6CB252CD-7564-45B4-A2C7-645DC3E341A9}" presName="sp" presStyleCnt="0"/>
+      <dgm:spPr/>
+    </dgm:pt>
+    <dgm:pt modelId="{679F2B2F-643C-42FF-9E23-793C9C3C4E96}" type="pres">
+      <dgm:prSet presAssocID="{E166245D-832E-44FC-8787-FFF8FDFA7977}" presName="linNode" presStyleCnt="0"/>
+      <dgm:spPr/>
+    </dgm:pt>
+    <dgm:pt modelId="{A88D48A3-AA50-4344-B9E4-53A2DDC08185}" type="pres">
+      <dgm:prSet presAssocID="{E166245D-832E-44FC-8787-FFF8FDFA7977}" presName="parentText" presStyleLbl="node1" presStyleIdx="2" presStyleCnt="3">
+        <dgm:presLayoutVars>
+          <dgm:chMax val="1"/>
+          <dgm:bulletEnabled val="1"/>
+        </dgm:presLayoutVars>
+      </dgm:prSet>
+      <dgm:spPr/>
+    </dgm:pt>
+    <dgm:pt modelId="{E1A6E10F-42C2-438B-9781-3452889F0CD2}" type="pres">
+      <dgm:prSet presAssocID="{E166245D-832E-44FC-8787-FFF8FDFA7977}" presName="descendantText" presStyleLbl="alignAccFollowNode1" presStyleIdx="2" presStyleCnt="3">
+        <dgm:presLayoutVars>
+          <dgm:bulletEnabled val="1"/>
+        </dgm:presLayoutVars>
+      </dgm:prSet>
       <dgm:spPr/>
     </dgm:pt>
   </dgm:ptLst>
   <dgm:cxnLst>
-    <dgm:cxn modelId="{0EA6325D-3074-49D9-95F9-9A1E0AD48042}" type="presOf" srcId="{8BD2D37A-FDA6-4D11-8724-EC25935A0CE0}" destId="{8B7A3C08-F071-4860-AF10-1E8E8FCE62FF}" srcOrd="0" destOrd="0" presId="urn:microsoft.com/office/officeart/2005/8/layout/hierarchy1"/>
-    <dgm:cxn modelId="{771D3647-6960-431F-AA5B-928E404091A5}" srcId="{7AF7EC9B-E4BE-42C2-9C54-FE101322F5B6}" destId="{A9E93178-A3B0-4D86-B109-D44AE95E728E}" srcOrd="1" destOrd="0" parTransId="{FD83E4B5-7675-4039-825F-377AB191B930}" sibTransId="{6AE2789F-196D-4A21-88F3-4868CC5DB399}"/>
-    <dgm:cxn modelId="{1389F668-8C47-4F65-AEF9-A42DD1961514}" type="presOf" srcId="{7AF7EC9B-E4BE-42C2-9C54-FE101322F5B6}" destId="{E318A0E8-2DA0-481E-AF0B-88751D9BC4B9}" srcOrd="0" destOrd="0" presId="urn:microsoft.com/office/officeart/2005/8/layout/hierarchy1"/>
-    <dgm:cxn modelId="{CBDA7078-8867-4C1F-AE7A-96B254C41A2C}" type="presOf" srcId="{A9E93178-A3B0-4D86-B109-D44AE95E728E}" destId="{F5329F4A-C37A-4F02-88AB-93E7F9657F2A}" srcOrd="0" destOrd="0" presId="urn:microsoft.com/office/officeart/2005/8/layout/hierarchy1"/>
-    <dgm:cxn modelId="{3E6A037A-7513-4791-AAF1-4D75E6C0082A}" type="presOf" srcId="{D48BD687-449A-4797-A0D3-7B06551E1ABD}" destId="{4D8E17D3-4DDA-407A-8CA4-524764F70662}" srcOrd="0" destOrd="0" presId="urn:microsoft.com/office/officeart/2005/8/layout/hierarchy1"/>
-    <dgm:cxn modelId="{7894F8C2-0AF0-4BD0-A27E-2A3BCFF7CCFD}" srcId="{7AF7EC9B-E4BE-42C2-9C54-FE101322F5B6}" destId="{8BD2D37A-FDA6-4D11-8724-EC25935A0CE0}" srcOrd="2" destOrd="0" parTransId="{965689BA-A386-4509-A9AF-0E0A0B5DD1C4}" sibTransId="{4D1C09AB-3835-4268-8B94-90D9644D6861}"/>
-    <dgm:cxn modelId="{D3898CE0-593A-4FDD-A9E7-133ACECD75A8}" srcId="{7AF7EC9B-E4BE-42C2-9C54-FE101322F5B6}" destId="{D48BD687-449A-4797-A0D3-7B06551E1ABD}" srcOrd="0" destOrd="0" parTransId="{4605E369-2C5C-495C-9E88-180CC035866E}" sibTransId="{091D725F-5CCF-4951-B19F-BED51D1125AD}"/>
-    <dgm:cxn modelId="{87F82CFB-E323-4899-824A-2BEDF33D5D2B}" type="presParOf" srcId="{E318A0E8-2DA0-481E-AF0B-88751D9BC4B9}" destId="{B50A4686-795F-4293-B012-276A9A139853}" srcOrd="0" destOrd="0" presId="urn:microsoft.com/office/officeart/2005/8/layout/hierarchy1"/>
-    <dgm:cxn modelId="{D80E4045-8CB6-48D2-9B8E-BAEAF4553528}" type="presParOf" srcId="{B50A4686-795F-4293-B012-276A9A139853}" destId="{60B14C1F-DBF4-4D8E-A4C0-2DB4F377A11E}" srcOrd="0" destOrd="0" presId="urn:microsoft.com/office/officeart/2005/8/layout/hierarchy1"/>
-    <dgm:cxn modelId="{005DA9E9-F35E-40E9-9FE7-5D115C82561B}" type="presParOf" srcId="{60B14C1F-DBF4-4D8E-A4C0-2DB4F377A11E}" destId="{274AECA2-A2C6-4293-8387-0DD08C634900}" srcOrd="0" destOrd="0" presId="urn:microsoft.com/office/officeart/2005/8/layout/hierarchy1"/>
-    <dgm:cxn modelId="{F2BECD38-0AE0-4881-A80D-B19AE74B092A}" type="presParOf" srcId="{60B14C1F-DBF4-4D8E-A4C0-2DB4F377A11E}" destId="{4D8E17D3-4DDA-407A-8CA4-524764F70662}" srcOrd="1" destOrd="0" presId="urn:microsoft.com/office/officeart/2005/8/layout/hierarchy1"/>
-    <dgm:cxn modelId="{B16CD2B6-5C3C-4651-BA6A-66C1B9878B2D}" type="presParOf" srcId="{B50A4686-795F-4293-B012-276A9A139853}" destId="{27833DF5-D900-4968-83D8-7FA2DAFF451E}" srcOrd="1" destOrd="0" presId="urn:microsoft.com/office/officeart/2005/8/layout/hierarchy1"/>
-    <dgm:cxn modelId="{7B2DF468-4FD5-48C3-877D-E38A2B7798AD}" type="presParOf" srcId="{E318A0E8-2DA0-481E-AF0B-88751D9BC4B9}" destId="{53B31079-6191-4C3B-BFFC-D5550563E947}" srcOrd="1" destOrd="0" presId="urn:microsoft.com/office/officeart/2005/8/layout/hierarchy1"/>
-    <dgm:cxn modelId="{AB4EFAEE-DB42-4B2F-8805-C78E2BAFE698}" type="presParOf" srcId="{53B31079-6191-4C3B-BFFC-D5550563E947}" destId="{445937C8-D356-4978-8015-611388CBA308}" srcOrd="0" destOrd="0" presId="urn:microsoft.com/office/officeart/2005/8/layout/hierarchy1"/>
-    <dgm:cxn modelId="{B57C2FA6-82C2-49D1-9DCB-BEFA7A22D96B}" type="presParOf" srcId="{445937C8-D356-4978-8015-611388CBA308}" destId="{122008A8-7DCA-4952-AFED-C89470539ED5}" srcOrd="0" destOrd="0" presId="urn:microsoft.com/office/officeart/2005/8/layout/hierarchy1"/>
-    <dgm:cxn modelId="{7B2A09D9-7FF3-4DA9-A76E-93946AC9EAB0}" type="presParOf" srcId="{445937C8-D356-4978-8015-611388CBA308}" destId="{F5329F4A-C37A-4F02-88AB-93E7F9657F2A}" srcOrd="1" destOrd="0" presId="urn:microsoft.com/office/officeart/2005/8/layout/hierarchy1"/>
-    <dgm:cxn modelId="{CB6FF542-342B-4957-8B96-D8CCE63F5825}" type="presParOf" srcId="{53B31079-6191-4C3B-BFFC-D5550563E947}" destId="{8A2AEBE6-AF8A-4DAE-8661-823AE0CD7CF8}" srcOrd="1" destOrd="0" presId="urn:microsoft.com/office/officeart/2005/8/layout/hierarchy1"/>
-    <dgm:cxn modelId="{EFF3B398-450C-4AB1-ACEC-DE0313D73935}" type="presParOf" srcId="{E318A0E8-2DA0-481E-AF0B-88751D9BC4B9}" destId="{8D568D53-EA23-4B25-91D6-9079172EDED5}" srcOrd="2" destOrd="0" presId="urn:microsoft.com/office/officeart/2005/8/layout/hierarchy1"/>
-    <dgm:cxn modelId="{A31F455D-23E2-4CC3-9B9B-73237B44087B}" type="presParOf" srcId="{8D568D53-EA23-4B25-91D6-9079172EDED5}" destId="{DE48D3E0-9A52-417D-AD6F-94E4C3D5F93A}" srcOrd="0" destOrd="0" presId="urn:microsoft.com/office/officeart/2005/8/layout/hierarchy1"/>
-    <dgm:cxn modelId="{61E25A7D-E4F4-4C7D-A9B9-812B239961B5}" type="presParOf" srcId="{DE48D3E0-9A52-417D-AD6F-94E4C3D5F93A}" destId="{606C66B2-3BE0-4EF5-86FD-114B5BA219CC}" srcOrd="0" destOrd="0" presId="urn:microsoft.com/office/officeart/2005/8/layout/hierarchy1"/>
-    <dgm:cxn modelId="{60DF4570-A613-42AC-967A-82094B3355E4}" type="presParOf" srcId="{DE48D3E0-9A52-417D-AD6F-94E4C3D5F93A}" destId="{8B7A3C08-F071-4860-AF10-1E8E8FCE62FF}" srcOrd="1" destOrd="0" presId="urn:microsoft.com/office/officeart/2005/8/layout/hierarchy1"/>
-    <dgm:cxn modelId="{285278F1-369A-4F19-8ED0-048B86786BBF}" type="presParOf" srcId="{8D568D53-EA23-4B25-91D6-9079172EDED5}" destId="{8A80818B-AF78-448C-AD8D-9B8008743BB9}" srcOrd="1" destOrd="0" presId="urn:microsoft.com/office/officeart/2005/8/layout/hierarchy1"/>
+    <dgm:cxn modelId="{E1860214-53CC-4022-8934-5977ABFC2861}" type="presOf" srcId="{066E7B34-B5BC-4334-9233-605FDA1010F0}" destId="{F603FC5D-A413-4826-820B-5815CC00A1B3}" srcOrd="0" destOrd="0" presId="urn:microsoft.com/office/officeart/2005/8/layout/vList5"/>
+    <dgm:cxn modelId="{F3E74135-64AC-44DF-9978-58806D09FB30}" srcId="{D3573ADD-3D24-4E02-AA59-A6FE3401488E}" destId="{D396FE9A-9B2F-45B1-8FFA-F9042F06431F}" srcOrd="0" destOrd="0" parTransId="{E3E06133-E60D-4666-84B3-DFA5DC743289}" sibTransId="{DCEBF35F-639B-4924-B16A-059F4CF8DD7F}"/>
+    <dgm:cxn modelId="{810A565B-18C2-476E-ABEE-37E39F943F78}" type="presOf" srcId="{E166245D-832E-44FC-8787-FFF8FDFA7977}" destId="{A88D48A3-AA50-4344-B9E4-53A2DDC08185}" srcOrd="0" destOrd="0" presId="urn:microsoft.com/office/officeart/2005/8/layout/vList5"/>
+    <dgm:cxn modelId="{FAEFAB41-E812-4B1B-9202-FF3C1F477B9F}" type="presOf" srcId="{D3573ADD-3D24-4E02-AA59-A6FE3401488E}" destId="{C3F16E32-EBCA-4B61-89E7-84D84353C63C}" srcOrd="0" destOrd="0" presId="urn:microsoft.com/office/officeart/2005/8/layout/vList5"/>
+    <dgm:cxn modelId="{99AB7071-38DC-4C0B-AB24-185D0EB33837}" type="presOf" srcId="{EE0C9488-0B8B-4456-8164-99244AED9707}" destId="{E1A6E10F-42C2-438B-9781-3452889F0CD2}" srcOrd="0" destOrd="0" presId="urn:microsoft.com/office/officeart/2005/8/layout/vList5"/>
+    <dgm:cxn modelId="{F947A895-69A8-4E3E-9E04-490C61D5C52D}" srcId="{E166245D-832E-44FC-8787-FFF8FDFA7977}" destId="{EE0C9488-0B8B-4456-8164-99244AED9707}" srcOrd="0" destOrd="0" parTransId="{7BEFF6DA-475F-4C02-8590-87813FD7E499}" sibTransId="{51853B9E-1432-47E3-BEE0-4D3D1A32BBF7}"/>
+    <dgm:cxn modelId="{7961F69F-0E1A-4620-9581-183DAD94A202}" srcId="{D396FE9A-9B2F-45B1-8FFA-F9042F06431F}" destId="{066E7B34-B5BC-4334-9233-605FDA1010F0}" srcOrd="0" destOrd="0" parTransId="{66B84E54-B0A9-4A3A-BD0B-5500F9DD4103}" sibTransId="{8DC11522-A8C5-4E7B-A42D-7105E7834138}"/>
+    <dgm:cxn modelId="{AEC71EAB-2F6D-4100-970D-794BC7DF42D9}" srcId="{D3573ADD-3D24-4E02-AA59-A6FE3401488E}" destId="{26423E91-FE12-4253-BDC8-3493C92AF914}" srcOrd="1" destOrd="0" parTransId="{7AEC4F93-8CB7-469D-BB96-3BCFF6C2F08A}" sibTransId="{6CB252CD-7564-45B4-A2C7-645DC3E341A9}"/>
+    <dgm:cxn modelId="{0EBD06AF-0967-4937-9BBD-509047BD5F1A}" type="presOf" srcId="{D396FE9A-9B2F-45B1-8FFA-F9042F06431F}" destId="{334D8514-1787-458A-A6F0-016CC9EA305B}" srcOrd="0" destOrd="0" presId="urn:microsoft.com/office/officeart/2005/8/layout/vList5"/>
+    <dgm:cxn modelId="{39CF1CCB-7156-4CB8-B860-AD518175A69E}" srcId="{D3573ADD-3D24-4E02-AA59-A6FE3401488E}" destId="{E166245D-832E-44FC-8787-FFF8FDFA7977}" srcOrd="2" destOrd="0" parTransId="{ECE9C1B7-07D8-4661-8DD9-3E9317A36860}" sibTransId="{06B77D5E-5BAD-43ED-8502-FE9C1C81522C}"/>
+    <dgm:cxn modelId="{2AEDD6E0-C134-4547-BE4E-66461F83000B}" type="presOf" srcId="{26423E91-FE12-4253-BDC8-3493C92AF914}" destId="{0E6351DC-544C-4F95-8FC6-D23F75D3A076}" srcOrd="0" destOrd="0" presId="urn:microsoft.com/office/officeart/2005/8/layout/vList5"/>
+    <dgm:cxn modelId="{0D405BFB-64E0-4745-8D92-F7E2977B342C}" type="presOf" srcId="{0D25FDD1-B4EE-422C-A797-7645717D4E79}" destId="{EDB97782-AFD5-44A6-A377-D226249DF101}" srcOrd="0" destOrd="0" presId="urn:microsoft.com/office/officeart/2005/8/layout/vList5"/>
+    <dgm:cxn modelId="{424030FC-E9B8-48D2-BE8C-B4D1EF8972DB}" srcId="{26423E91-FE12-4253-BDC8-3493C92AF914}" destId="{0D25FDD1-B4EE-422C-A797-7645717D4E79}" srcOrd="0" destOrd="0" parTransId="{6E2B55DA-F702-4DB4-8144-ECAA7A266845}" sibTransId="{CDD54B02-5A38-490B-A092-27DB004EB80D}"/>
+    <dgm:cxn modelId="{77EE2918-CCC3-4A4D-BD22-2C6818737F9F}" type="presParOf" srcId="{C3F16E32-EBCA-4B61-89E7-84D84353C63C}" destId="{91CA720A-0649-40C2-BAE9-46B6D9B8CFEB}" srcOrd="0" destOrd="0" presId="urn:microsoft.com/office/officeart/2005/8/layout/vList5"/>
+    <dgm:cxn modelId="{1007BB66-76F1-4C77-984D-C22829A08AFF}" type="presParOf" srcId="{91CA720A-0649-40C2-BAE9-46B6D9B8CFEB}" destId="{334D8514-1787-458A-A6F0-016CC9EA305B}" srcOrd="0" destOrd="0" presId="urn:microsoft.com/office/officeart/2005/8/layout/vList5"/>
+    <dgm:cxn modelId="{FC238EB6-2BA4-42CD-9792-F8F2DA491F5B}" type="presParOf" srcId="{91CA720A-0649-40C2-BAE9-46B6D9B8CFEB}" destId="{F603FC5D-A413-4826-820B-5815CC00A1B3}" srcOrd="1" destOrd="0" presId="urn:microsoft.com/office/officeart/2005/8/layout/vList5"/>
+    <dgm:cxn modelId="{595F76BA-ECF3-48EA-9F68-C031C2756FA6}" type="presParOf" srcId="{C3F16E32-EBCA-4B61-89E7-84D84353C63C}" destId="{6393530E-B991-488C-850A-AE844A5BDDF2}" srcOrd="1" destOrd="0" presId="urn:microsoft.com/office/officeart/2005/8/layout/vList5"/>
+    <dgm:cxn modelId="{F8667DF4-3CE6-4555-8FF4-2D0BE69DF9D0}" type="presParOf" srcId="{C3F16E32-EBCA-4B61-89E7-84D84353C63C}" destId="{EB3739D4-B6DA-4766-91A6-6A0A57B92EDB}" srcOrd="2" destOrd="0" presId="urn:microsoft.com/office/officeart/2005/8/layout/vList5"/>
+    <dgm:cxn modelId="{852C8351-6514-4D20-B022-52721903E43C}" type="presParOf" srcId="{EB3739D4-B6DA-4766-91A6-6A0A57B92EDB}" destId="{0E6351DC-544C-4F95-8FC6-D23F75D3A076}" srcOrd="0" destOrd="0" presId="urn:microsoft.com/office/officeart/2005/8/layout/vList5"/>
+    <dgm:cxn modelId="{A603469C-2150-44F6-9338-7C2A8803E318}" type="presParOf" srcId="{EB3739D4-B6DA-4766-91A6-6A0A57B92EDB}" destId="{EDB97782-AFD5-44A6-A377-D226249DF101}" srcOrd="1" destOrd="0" presId="urn:microsoft.com/office/officeart/2005/8/layout/vList5"/>
+    <dgm:cxn modelId="{E83987E6-2863-407E-9922-CBDDCE2C2142}" type="presParOf" srcId="{C3F16E32-EBCA-4B61-89E7-84D84353C63C}" destId="{CAED4119-82AB-4275-A070-955627789B30}" srcOrd="3" destOrd="0" presId="urn:microsoft.com/office/officeart/2005/8/layout/vList5"/>
+    <dgm:cxn modelId="{BE67FA77-EE32-4C33-A8F7-306A2C540516}" type="presParOf" srcId="{C3F16E32-EBCA-4B61-89E7-84D84353C63C}" destId="{679F2B2F-643C-42FF-9E23-793C9C3C4E96}" srcOrd="4" destOrd="0" presId="urn:microsoft.com/office/officeart/2005/8/layout/vList5"/>
+    <dgm:cxn modelId="{AD990521-0063-4E36-8E76-57C8B9FD6E59}" type="presParOf" srcId="{679F2B2F-643C-42FF-9E23-793C9C3C4E96}" destId="{A88D48A3-AA50-4344-B9E4-53A2DDC08185}" srcOrd="0" destOrd="0" presId="urn:microsoft.com/office/officeart/2005/8/layout/vList5"/>
+    <dgm:cxn modelId="{E468DCF2-CD19-49F5-886E-36AF08D98429}" type="presParOf" srcId="{679F2B2F-643C-42FF-9E23-793C9C3C4E96}" destId="{E1A6E10F-42C2-438B-9781-3452889F0CD2}" srcOrd="1" destOrd="0" presId="urn:microsoft.com/office/officeart/2005/8/layout/vList5"/>
   </dgm:cxnLst>
   <dgm:bg/>
   <dgm:whole/>
@@ -2154,103 +2226,23 @@
       <dsp:cNvGrpSpPr/>
     </dsp:nvGrpSpPr>
     <dsp:grpSpPr/>
-    <dsp:sp modelId="{274AECA2-A2C6-4293-8387-0DD08C634900}">
+    <dsp:sp modelId="{F603FC5D-A413-4826-820B-5815CC00A1B3}">
       <dsp:nvSpPr>
         <dsp:cNvPr id="0" name=""/>
         <dsp:cNvSpPr/>
       </dsp:nvSpPr>
       <dsp:spPr>
-        <a:xfrm>
-          <a:off x="0" y="1080567"/>
-          <a:ext cx="2957512" cy="1878020"/>
+        <a:xfrm rot="5400000">
+          <a:off x="6589693" y="-2661723"/>
+          <a:ext cx="1121829" cy="6729984"/>
         </a:xfrm>
-        <a:prstGeom prst="roundRect">
-          <a:avLst>
-            <a:gd name="adj" fmla="val 10000"/>
-          </a:avLst>
-        </a:prstGeom>
-        <a:gradFill rotWithShape="0">
-          <a:gsLst>
-            <a:gs pos="0">
-              <a:schemeClr val="accent4">
-                <a:hueOff val="0"/>
-                <a:satOff val="0"/>
-                <a:lumOff val="0"/>
-                <a:alphaOff val="0"/>
-                <a:satMod val="103000"/>
-                <a:lumMod val="102000"/>
-                <a:tint val="94000"/>
-              </a:schemeClr>
-            </a:gs>
-            <a:gs pos="50000">
-              <a:schemeClr val="accent4">
-                <a:hueOff val="0"/>
-                <a:satOff val="0"/>
-                <a:lumOff val="0"/>
-                <a:alphaOff val="0"/>
-                <a:satMod val="110000"/>
-                <a:lumMod val="100000"/>
-                <a:shade val="100000"/>
-              </a:schemeClr>
-            </a:gs>
-            <a:gs pos="100000">
-              <a:schemeClr val="accent4">
-                <a:hueOff val="0"/>
-                <a:satOff val="0"/>
-                <a:lumOff val="0"/>
-                <a:alphaOff val="0"/>
-                <a:lumMod val="99000"/>
-                <a:satMod val="120000"/>
-                <a:shade val="78000"/>
-              </a:schemeClr>
-            </a:gs>
-          </a:gsLst>
-          <a:lin ang="5400000" scaled="0"/>
-        </a:gradFill>
-        <a:ln>
-          <a:noFill/>
-        </a:ln>
-        <a:effectLst>
-          <a:outerShdw blurRad="57150" dist="19050" dir="5400000" algn="ctr" rotWithShape="0">
-            <a:srgbClr val="000000">
-              <a:alpha val="63000"/>
-            </a:srgbClr>
-          </a:outerShdw>
-        </a:effectLst>
-      </dsp:spPr>
-      <dsp:style>
-        <a:lnRef idx="0">
-          <a:scrgbClr r="0" g="0" b="0"/>
-        </a:lnRef>
-        <a:fillRef idx="3">
-          <a:scrgbClr r="0" g="0" b="0"/>
-        </a:fillRef>
-        <a:effectRef idx="3">
-          <a:scrgbClr r="0" g="0" b="0"/>
-        </a:effectRef>
-        <a:fontRef idx="minor">
-          <a:schemeClr val="lt1"/>
-        </a:fontRef>
-      </dsp:style>
-    </dsp:sp>
-    <dsp:sp modelId="{4D8E17D3-4DDA-407A-8CA4-524764F70662}">
-      <dsp:nvSpPr>
-        <dsp:cNvPr id="0" name=""/>
-        <dsp:cNvSpPr/>
-      </dsp:nvSpPr>
-      <dsp:spPr>
-        <a:xfrm>
-          <a:off x="328612" y="1392749"/>
-          <a:ext cx="2957512" cy="1878020"/>
-        </a:xfrm>
-        <a:prstGeom prst="roundRect">
-          <a:avLst>
-            <a:gd name="adj" fmla="val 10000"/>
-          </a:avLst>
+        <a:prstGeom prst="round2SameRect">
+          <a:avLst/>
         </a:prstGeom>
         <a:solidFill>
-          <a:schemeClr val="lt1">
+          <a:schemeClr val="accent1">
             <a:alpha val="90000"/>
+            <a:tint val="40000"/>
             <a:hueOff val="0"/>
             <a:satOff val="0"/>
             <a:lumOff val="0"/>
@@ -2259,7 +2251,9 @@
         </a:solidFill>
         <a:ln w="12700" cap="flat" cmpd="sng" algn="ctr">
           <a:solidFill>
-            <a:schemeClr val="accent4">
+            <a:schemeClr val="accent1">
+              <a:alpha val="90000"/>
+              <a:tint val="40000"/>
               <a:hueOff val="0"/>
               <a:satOff val="0"/>
               <a:lumOff val="0"/>
@@ -2278,18 +2272,18 @@
         <a:fillRef idx="1">
           <a:scrgbClr r="0" g="0" b="0"/>
         </a:fillRef>
-        <a:effectRef idx="2">
+        <a:effectRef idx="0">
           <a:scrgbClr r="0" g="0" b="0"/>
         </a:effectRef>
         <a:fontRef idx="minor"/>
       </dsp:style>
       <dsp:txBody>
-        <a:bodyPr spcFirstLastPara="0" vert="horz" wrap="square" lIns="175260" tIns="175260" rIns="175260" bIns="175260" numCol="1" spcCol="1270" anchor="ctr" anchorCtr="0">
+        <a:bodyPr spcFirstLastPara="0" vert="horz" wrap="square" lIns="213360" tIns="106680" rIns="213360" bIns="106680" numCol="1" spcCol="1270" anchor="ctr" anchorCtr="0">
           <a:noAutofit/>
         </a:bodyPr>
         <a:lstStyle/>
         <a:p>
-          <a:pPr marL="0" lvl="0" indent="0" algn="ctr" defTabSz="2044700">
+          <a:pPr marL="285750" lvl="1" indent="-285750" algn="l" defTabSz="2489200">
             <a:lnSpc>
               <a:spcPct val="90000"/>
             </a:lnSpc>
@@ -2297,40 +2291,38 @@
               <a:spcPct val="0"/>
             </a:spcBef>
             <a:spcAft>
-              <a:spcPct val="35000"/>
+              <a:spcPct val="15000"/>
             </a:spcAft>
-            <a:buNone/>
+            <a:buChar char="•"/>
           </a:pPr>
           <a:r>
-            <a:rPr lang="en-US" sz="4600" kern="1200" dirty="0"/>
-            <a:t>UI Button Prefab</a:t>
+            <a:rPr lang="en-US" sz="5600" kern="1200"/>
+            <a:t>Unit details</a:t>
           </a:r>
         </a:p>
       </dsp:txBody>
-      <dsp:txXfrm>
-        <a:off x="383617" y="1447754"/>
-        <a:ext cx="2847502" cy="1768010"/>
+      <dsp:txXfrm rot="-5400000">
+        <a:off x="3785616" y="197117"/>
+        <a:ext cx="6675221" cy="1012303"/>
       </dsp:txXfrm>
     </dsp:sp>
-    <dsp:sp modelId="{122008A8-7DCA-4952-AFED-C89470539ED5}">
+    <dsp:sp modelId="{334D8514-1787-458A-A6F0-016CC9EA305B}">
       <dsp:nvSpPr>
         <dsp:cNvPr id="0" name=""/>
         <dsp:cNvSpPr/>
       </dsp:nvSpPr>
       <dsp:spPr>
         <a:xfrm>
-          <a:off x="3614737" y="1080567"/>
-          <a:ext cx="2957512" cy="1878020"/>
+          <a:off x="0" y="2124"/>
+          <a:ext cx="3785616" cy="1402286"/>
         </a:xfrm>
         <a:prstGeom prst="roundRect">
-          <a:avLst>
-            <a:gd name="adj" fmla="val 10000"/>
-          </a:avLst>
+          <a:avLst/>
         </a:prstGeom>
         <a:gradFill rotWithShape="0">
           <a:gsLst>
             <a:gs pos="0">
-              <a:schemeClr val="accent4">
+              <a:schemeClr val="accent1">
                 <a:hueOff val="0"/>
                 <a:satOff val="0"/>
                 <a:lumOff val="0"/>
@@ -2341,7 +2333,7 @@
               </a:schemeClr>
             </a:gs>
             <a:gs pos="50000">
-              <a:schemeClr val="accent4">
+              <a:schemeClr val="accent1">
                 <a:hueOff val="0"/>
                 <a:satOff val="0"/>
                 <a:lumOff val="0"/>
@@ -2352,7 +2344,7 @@
               </a:schemeClr>
             </a:gs>
             <a:gs pos="100000">
-              <a:schemeClr val="accent4">
+              <a:schemeClr val="accent1">
                 <a:hueOff val="0"/>
                 <a:satOff val="0"/>
                 <a:lumOff val="0"/>
@@ -2368,13 +2360,7 @@
         <a:ln>
           <a:noFill/>
         </a:ln>
-        <a:effectLst>
-          <a:outerShdw blurRad="57150" dist="19050" dir="5400000" algn="ctr" rotWithShape="0">
-            <a:srgbClr val="000000">
-              <a:alpha val="63000"/>
-            </a:srgbClr>
-          </a:outerShdw>
-        </a:effectLst>
+        <a:effectLst/>
       </dsp:spPr>
       <dsp:style>
         <a:lnRef idx="0">
@@ -2383,32 +2369,59 @@
         <a:fillRef idx="3">
           <a:scrgbClr r="0" g="0" b="0"/>
         </a:fillRef>
-        <a:effectRef idx="3">
+        <a:effectRef idx="2">
           <a:scrgbClr r="0" g="0" b="0"/>
         </a:effectRef>
         <a:fontRef idx="minor">
           <a:schemeClr val="lt1"/>
         </a:fontRef>
       </dsp:style>
+      <dsp:txBody>
+        <a:bodyPr spcFirstLastPara="0" vert="horz" wrap="square" lIns="163830" tIns="81915" rIns="163830" bIns="81915" numCol="1" spcCol="1270" anchor="ctr" anchorCtr="0">
+          <a:noAutofit/>
+        </a:bodyPr>
+        <a:lstStyle/>
+        <a:p>
+          <a:pPr marL="0" lvl="0" indent="0" algn="ctr" defTabSz="1911350">
+            <a:lnSpc>
+              <a:spcPct val="90000"/>
+            </a:lnSpc>
+            <a:spcBef>
+              <a:spcPct val="0"/>
+            </a:spcBef>
+            <a:spcAft>
+              <a:spcPct val="35000"/>
+            </a:spcAft>
+            <a:buNone/>
+          </a:pPr>
+          <a:r>
+            <a:rPr lang="en-US" sz="4300" kern="1200" dirty="0"/>
+            <a:t>Unit definition</a:t>
+          </a:r>
+        </a:p>
+      </dsp:txBody>
+      <dsp:txXfrm>
+        <a:off x="68454" y="70578"/>
+        <a:ext cx="3648708" cy="1265378"/>
+      </dsp:txXfrm>
     </dsp:sp>
-    <dsp:sp modelId="{F5329F4A-C37A-4F02-88AB-93E7F9657F2A}">
+    <dsp:sp modelId="{EDB97782-AFD5-44A6-A377-D226249DF101}">
       <dsp:nvSpPr>
         <dsp:cNvPr id="0" name=""/>
         <dsp:cNvSpPr/>
       </dsp:nvSpPr>
       <dsp:spPr>
-        <a:xfrm>
-          <a:off x="3943350" y="1392749"/>
-          <a:ext cx="2957512" cy="1878020"/>
+        <a:xfrm rot="5400000">
+          <a:off x="6589693" y="-1189323"/>
+          <a:ext cx="1121829" cy="6729984"/>
         </a:xfrm>
-        <a:prstGeom prst="roundRect">
-          <a:avLst>
-            <a:gd name="adj" fmla="val 10000"/>
-          </a:avLst>
+        <a:prstGeom prst="round2SameRect">
+          <a:avLst/>
         </a:prstGeom>
         <a:solidFill>
-          <a:schemeClr val="lt1">
+          <a:schemeClr val="accent1">
             <a:alpha val="90000"/>
+            <a:tint val="40000"/>
             <a:hueOff val="0"/>
             <a:satOff val="0"/>
             <a:lumOff val="0"/>
@@ -2417,7 +2430,9 @@
         </a:solidFill>
         <a:ln w="12700" cap="flat" cmpd="sng" algn="ctr">
           <a:solidFill>
-            <a:schemeClr val="accent4">
+            <a:schemeClr val="accent1">
+              <a:alpha val="90000"/>
+              <a:tint val="40000"/>
               <a:hueOff val="0"/>
               <a:satOff val="0"/>
               <a:lumOff val="0"/>
@@ -2436,18 +2451,18 @@
         <a:fillRef idx="1">
           <a:scrgbClr r="0" g="0" b="0"/>
         </a:fillRef>
-        <a:effectRef idx="2">
+        <a:effectRef idx="0">
           <a:scrgbClr r="0" g="0" b="0"/>
         </a:effectRef>
         <a:fontRef idx="minor"/>
       </dsp:style>
       <dsp:txBody>
-        <a:bodyPr spcFirstLastPara="0" vert="horz" wrap="square" lIns="175260" tIns="175260" rIns="175260" bIns="175260" numCol="1" spcCol="1270" anchor="ctr" anchorCtr="0">
+        <a:bodyPr spcFirstLastPara="0" vert="horz" wrap="square" lIns="213360" tIns="106680" rIns="213360" bIns="106680" numCol="1" spcCol="1270" anchor="ctr" anchorCtr="0">
           <a:noAutofit/>
         </a:bodyPr>
         <a:lstStyle/>
         <a:p>
-          <a:pPr marL="0" lvl="0" indent="0" algn="ctr" defTabSz="2044700">
+          <a:pPr marL="285750" lvl="1" indent="-285750" algn="l" defTabSz="2489200">
             <a:lnSpc>
               <a:spcPct val="90000"/>
             </a:lnSpc>
@@ -2455,40 +2470,38 @@
               <a:spcPct val="0"/>
             </a:spcBef>
             <a:spcAft>
-              <a:spcPct val="35000"/>
+              <a:spcPct val="15000"/>
             </a:spcAft>
-            <a:buNone/>
+            <a:buChar char="•"/>
           </a:pPr>
           <a:r>
-            <a:rPr lang="en-US" sz="4600" kern="1200"/>
-            <a:t>Unit Definition</a:t>
+            <a:rPr lang="en-US" sz="5600" kern="1200"/>
+            <a:t>UI hand visuals</a:t>
           </a:r>
         </a:p>
       </dsp:txBody>
-      <dsp:txXfrm>
-        <a:off x="3998355" y="1447754"/>
-        <a:ext cx="2847502" cy="1768010"/>
+      <dsp:txXfrm rot="-5400000">
+        <a:off x="3785616" y="1669517"/>
+        <a:ext cx="6675221" cy="1012303"/>
       </dsp:txXfrm>
     </dsp:sp>
-    <dsp:sp modelId="{606C66B2-3BE0-4EF5-86FD-114B5BA219CC}">
+    <dsp:sp modelId="{0E6351DC-544C-4F95-8FC6-D23F75D3A076}">
       <dsp:nvSpPr>
         <dsp:cNvPr id="0" name=""/>
         <dsp:cNvSpPr/>
       </dsp:nvSpPr>
       <dsp:spPr>
         <a:xfrm>
-          <a:off x="7229475" y="1080567"/>
-          <a:ext cx="2957512" cy="1878020"/>
+          <a:off x="0" y="1474525"/>
+          <a:ext cx="3785616" cy="1402286"/>
         </a:xfrm>
         <a:prstGeom prst="roundRect">
-          <a:avLst>
-            <a:gd name="adj" fmla="val 10000"/>
-          </a:avLst>
+          <a:avLst/>
         </a:prstGeom>
         <a:gradFill rotWithShape="0">
           <a:gsLst>
             <a:gs pos="0">
-              <a:schemeClr val="accent4">
+              <a:schemeClr val="accent1">
                 <a:hueOff val="0"/>
                 <a:satOff val="0"/>
                 <a:lumOff val="0"/>
@@ -2499,7 +2512,7 @@
               </a:schemeClr>
             </a:gs>
             <a:gs pos="50000">
-              <a:schemeClr val="accent4">
+              <a:schemeClr val="accent1">
                 <a:hueOff val="0"/>
                 <a:satOff val="0"/>
                 <a:lumOff val="0"/>
@@ -2510,7 +2523,7 @@
               </a:schemeClr>
             </a:gs>
             <a:gs pos="100000">
-              <a:schemeClr val="accent4">
+              <a:schemeClr val="accent1">
                 <a:hueOff val="0"/>
                 <a:satOff val="0"/>
                 <a:lumOff val="0"/>
@@ -2526,13 +2539,7 @@
         <a:ln>
           <a:noFill/>
         </a:ln>
-        <a:effectLst>
-          <a:outerShdw blurRad="57150" dist="19050" dir="5400000" algn="ctr" rotWithShape="0">
-            <a:srgbClr val="000000">
-              <a:alpha val="63000"/>
-            </a:srgbClr>
-          </a:outerShdw>
-        </a:effectLst>
+        <a:effectLst/>
       </dsp:spPr>
       <dsp:style>
         <a:lnRef idx="0">
@@ -2541,32 +2548,59 @@
         <a:fillRef idx="3">
           <a:scrgbClr r="0" g="0" b="0"/>
         </a:fillRef>
-        <a:effectRef idx="3">
+        <a:effectRef idx="2">
           <a:scrgbClr r="0" g="0" b="0"/>
         </a:effectRef>
         <a:fontRef idx="minor">
           <a:schemeClr val="lt1"/>
         </a:fontRef>
       </dsp:style>
+      <dsp:txBody>
+        <a:bodyPr spcFirstLastPara="0" vert="horz" wrap="square" lIns="163830" tIns="81915" rIns="163830" bIns="81915" numCol="1" spcCol="1270" anchor="ctr" anchorCtr="0">
+          <a:noAutofit/>
+        </a:bodyPr>
+        <a:lstStyle/>
+        <a:p>
+          <a:pPr marL="0" lvl="0" indent="0" algn="ctr" defTabSz="1911350">
+            <a:lnSpc>
+              <a:spcPct val="90000"/>
+            </a:lnSpc>
+            <a:spcBef>
+              <a:spcPct val="0"/>
+            </a:spcBef>
+            <a:spcAft>
+              <a:spcPct val="35000"/>
+            </a:spcAft>
+            <a:buNone/>
+          </a:pPr>
+          <a:r>
+            <a:rPr lang="en-US" sz="4300" kern="1200" dirty="0"/>
+            <a:t>UI Knapp</a:t>
+          </a:r>
+        </a:p>
+      </dsp:txBody>
+      <dsp:txXfrm>
+        <a:off x="68454" y="1542979"/>
+        <a:ext cx="3648708" cy="1265378"/>
+      </dsp:txXfrm>
     </dsp:sp>
-    <dsp:sp modelId="{8B7A3C08-F071-4860-AF10-1E8E8FCE62FF}">
+    <dsp:sp modelId="{E1A6E10F-42C2-438B-9781-3452889F0CD2}">
       <dsp:nvSpPr>
         <dsp:cNvPr id="0" name=""/>
         <dsp:cNvSpPr/>
       </dsp:nvSpPr>
       <dsp:spPr>
-        <a:xfrm>
-          <a:off x="7558087" y="1392749"/>
-          <a:ext cx="2957512" cy="1878020"/>
+        <a:xfrm rot="5400000">
+          <a:off x="6589693" y="283077"/>
+          <a:ext cx="1121829" cy="6729984"/>
         </a:xfrm>
-        <a:prstGeom prst="roundRect">
-          <a:avLst>
-            <a:gd name="adj" fmla="val 10000"/>
-          </a:avLst>
+        <a:prstGeom prst="round2SameRect">
+          <a:avLst/>
         </a:prstGeom>
         <a:solidFill>
-          <a:schemeClr val="lt1">
+          <a:schemeClr val="accent1">
             <a:alpha val="90000"/>
+            <a:tint val="40000"/>
             <a:hueOff val="0"/>
             <a:satOff val="0"/>
             <a:lumOff val="0"/>
@@ -2575,7 +2609,9 @@
         </a:solidFill>
         <a:ln w="12700" cap="flat" cmpd="sng" algn="ctr">
           <a:solidFill>
-            <a:schemeClr val="accent4">
+            <a:schemeClr val="accent1">
+              <a:alpha val="90000"/>
+              <a:tint val="40000"/>
               <a:hueOff val="0"/>
               <a:satOff val="0"/>
               <a:lumOff val="0"/>
@@ -2594,18 +2630,117 @@
         <a:fillRef idx="1">
           <a:scrgbClr r="0" g="0" b="0"/>
         </a:fillRef>
-        <a:effectRef idx="2">
+        <a:effectRef idx="0">
           <a:scrgbClr r="0" g="0" b="0"/>
         </a:effectRef>
         <a:fontRef idx="minor"/>
       </dsp:style>
       <dsp:txBody>
-        <a:bodyPr spcFirstLastPara="0" vert="horz" wrap="square" lIns="175260" tIns="175260" rIns="175260" bIns="175260" numCol="1" spcCol="1270" anchor="ctr" anchorCtr="0">
+        <a:bodyPr spcFirstLastPara="0" vert="horz" wrap="square" lIns="213360" tIns="106680" rIns="213360" bIns="106680" numCol="1" spcCol="1270" anchor="ctr" anchorCtr="0">
           <a:noAutofit/>
         </a:bodyPr>
         <a:lstStyle/>
         <a:p>
-          <a:pPr marL="0" lvl="0" indent="0" algn="ctr" defTabSz="2044700">
+          <a:pPr marL="285750" lvl="1" indent="-285750" algn="l" defTabSz="2489200">
+            <a:lnSpc>
+              <a:spcPct val="90000"/>
+            </a:lnSpc>
+            <a:spcBef>
+              <a:spcPct val="0"/>
+            </a:spcBef>
+            <a:spcAft>
+              <a:spcPct val="15000"/>
+            </a:spcAft>
+            <a:buChar char="•"/>
+          </a:pPr>
+          <a:r>
+            <a:rPr lang="en-US" sz="5600" kern="1200"/>
+            <a:t>Unit model</a:t>
+          </a:r>
+        </a:p>
+      </dsp:txBody>
+      <dsp:txXfrm rot="-5400000">
+        <a:off x="3785616" y="3141918"/>
+        <a:ext cx="6675221" cy="1012303"/>
+      </dsp:txXfrm>
+    </dsp:sp>
+    <dsp:sp modelId="{A88D48A3-AA50-4344-B9E4-53A2DDC08185}">
+      <dsp:nvSpPr>
+        <dsp:cNvPr id="0" name=""/>
+        <dsp:cNvSpPr/>
+      </dsp:nvSpPr>
+      <dsp:spPr>
+        <a:xfrm>
+          <a:off x="0" y="2946926"/>
+          <a:ext cx="3785616" cy="1402286"/>
+        </a:xfrm>
+        <a:prstGeom prst="roundRect">
+          <a:avLst/>
+        </a:prstGeom>
+        <a:gradFill rotWithShape="0">
+          <a:gsLst>
+            <a:gs pos="0">
+              <a:schemeClr val="accent1">
+                <a:hueOff val="0"/>
+                <a:satOff val="0"/>
+                <a:lumOff val="0"/>
+                <a:alphaOff val="0"/>
+                <a:satMod val="103000"/>
+                <a:lumMod val="102000"/>
+                <a:tint val="94000"/>
+              </a:schemeClr>
+            </a:gs>
+            <a:gs pos="50000">
+              <a:schemeClr val="accent1">
+                <a:hueOff val="0"/>
+                <a:satOff val="0"/>
+                <a:lumOff val="0"/>
+                <a:alphaOff val="0"/>
+                <a:satMod val="110000"/>
+                <a:lumMod val="100000"/>
+                <a:shade val="100000"/>
+              </a:schemeClr>
+            </a:gs>
+            <a:gs pos="100000">
+              <a:schemeClr val="accent1">
+                <a:hueOff val="0"/>
+                <a:satOff val="0"/>
+                <a:lumOff val="0"/>
+                <a:alphaOff val="0"/>
+                <a:lumMod val="99000"/>
+                <a:satMod val="120000"/>
+                <a:shade val="78000"/>
+              </a:schemeClr>
+            </a:gs>
+          </a:gsLst>
+          <a:lin ang="5400000" scaled="0"/>
+        </a:gradFill>
+        <a:ln>
+          <a:noFill/>
+        </a:ln>
+        <a:effectLst/>
+      </dsp:spPr>
+      <dsp:style>
+        <a:lnRef idx="0">
+          <a:scrgbClr r="0" g="0" b="0"/>
+        </a:lnRef>
+        <a:fillRef idx="3">
+          <a:scrgbClr r="0" g="0" b="0"/>
+        </a:fillRef>
+        <a:effectRef idx="2">
+          <a:scrgbClr r="0" g="0" b="0"/>
+        </a:effectRef>
+        <a:fontRef idx="minor">
+          <a:schemeClr val="lt1"/>
+        </a:fontRef>
+      </dsp:style>
+      <dsp:txBody>
+        <a:bodyPr spcFirstLastPara="0" vert="horz" wrap="square" lIns="163830" tIns="81915" rIns="163830" bIns="81915" numCol="1" spcCol="1270" anchor="ctr" anchorCtr="0">
+          <a:noAutofit/>
+        </a:bodyPr>
+        <a:lstStyle/>
+        <a:p>
+          <a:pPr marL="0" lvl="0" indent="0" algn="ctr" defTabSz="1911350">
             <a:lnSpc>
               <a:spcPct val="90000"/>
             </a:lnSpc>
@@ -2618,14 +2753,14 @@
             <a:buNone/>
           </a:pPr>
           <a:r>
-            <a:rPr lang="en-US" sz="4600" kern="1200" dirty="0"/>
+            <a:rPr lang="en-US" sz="4300" kern="1200" dirty="0"/>
             <a:t>Unit Prefab</a:t>
           </a:r>
         </a:p>
       </dsp:txBody>
       <dsp:txXfrm>
-        <a:off x="7613092" y="1447754"/>
-        <a:ext cx="2847502" cy="1768010"/>
+        <a:off x="68454" y="3015380"/>
+        <a:ext cx="3648708" cy="1265378"/>
       </dsp:txXfrm>
     </dsp:sp>
   </dsp:spTree>
@@ -3129,17 +3264,24 @@
 </file>
 
 <file path=ppt/diagrams/layout1.xml><?xml version="1.0" encoding="utf-8"?>
-<dgm:layoutDef xmlns:dgm="http://schemas.openxmlformats.org/drawingml/2006/diagram" xmlns:a="http://schemas.openxmlformats.org/drawingml/2006/main" uniqueId="urn:microsoft.com/office/officeart/2005/8/layout/hierarchy1">
+<dgm:layoutDef xmlns:dgm="http://schemas.openxmlformats.org/drawingml/2006/diagram" xmlns:a="http://schemas.openxmlformats.org/drawingml/2006/main" uniqueId="urn:microsoft.com/office/officeart/2005/8/layout/vList5">
   <dgm:title val=""/>
   <dgm:desc val=""/>
   <dgm:catLst>
-    <dgm:cat type="hierarchy" pri="2000"/>
+    <dgm:cat type="list" pri="15000"/>
+    <dgm:cat type="convert" pri="2000"/>
   </dgm:catLst>
   <dgm:sampData>
     <dgm:dataModel>
       <dgm:ptLst>
         <dgm:pt modelId="0" type="doc"/>
         <dgm:pt modelId="1">
+          <dgm:prSet phldr="1"/>
+        </dgm:pt>
+        <dgm:pt modelId="11">
+          <dgm:prSet phldr="1"/>
+        </dgm:pt>
+        <dgm:pt modelId="12">
           <dgm:prSet phldr="1"/>
         </dgm:pt>
         <dgm:pt modelId="2">
@@ -3157,14 +3299,20 @@
         <dgm:pt modelId="31">
           <dgm:prSet phldr="1"/>
         </dgm:pt>
+        <dgm:pt modelId="32">
+          <dgm:prSet phldr="1"/>
+        </dgm:pt>
       </dgm:ptLst>
       <dgm:cxnLst>
         <dgm:cxn modelId="4" srcId="0" destId="1" srcOrd="0" destOrd="0"/>
-        <dgm:cxn modelId="5" srcId="1" destId="2" srcOrd="0" destOrd="0"/>
-        <dgm:cxn modelId="6" srcId="1" destId="3" srcOrd="1" destOrd="0"/>
+        <dgm:cxn modelId="5" srcId="0" destId="2" srcOrd="1" destOrd="0"/>
+        <dgm:cxn modelId="6" srcId="0" destId="3" srcOrd="2" destOrd="0"/>
+        <dgm:cxn modelId="13" srcId="1" destId="11" srcOrd="0" destOrd="0"/>
+        <dgm:cxn modelId="14" srcId="1" destId="12" srcOrd="1" destOrd="0"/>
         <dgm:cxn modelId="23" srcId="2" destId="21" srcOrd="0" destOrd="0"/>
         <dgm:cxn modelId="24" srcId="2" destId="22" srcOrd="1" destOrd="0"/>
         <dgm:cxn modelId="33" srcId="3" destId="31" srcOrd="0" destOrd="0"/>
+        <dgm:cxn modelId="34" srcId="3" destId="32" srcOrd="1" destOrd="0"/>
       </dgm:cxnLst>
       <dgm:bg/>
       <dgm:whole/>
@@ -3176,12 +3324,14 @@
         <dgm:pt modelId="0" type="doc"/>
         <dgm:pt modelId="1"/>
         <dgm:pt modelId="11"/>
-        <dgm:pt modelId="12"/>
+        <dgm:pt modelId="2"/>
+        <dgm:pt modelId="21"/>
       </dgm:ptLst>
       <dgm:cxnLst>
-        <dgm:cxn modelId="2" srcId="0" destId="1" srcOrd="0" destOrd="0"/>
+        <dgm:cxn modelId="4" srcId="0" destId="1" srcOrd="0" destOrd="0"/>
+        <dgm:cxn modelId="5" srcId="0" destId="2" srcOrd="1" destOrd="0"/>
         <dgm:cxn modelId="13" srcId="1" destId="11" srcOrd="0" destOrd="0"/>
-        <dgm:cxn modelId="14" srcId="1" destId="12" srcOrd="1" destOrd="0"/>
+        <dgm:cxn modelId="23" srcId="2" destId="21" srcOrd="0" destOrd="0"/>
       </dgm:cxnLst>
       <dgm:bg/>
       <dgm:whole/>
@@ -3192,43 +3342,45 @@
       <dgm:ptLst>
         <dgm:pt modelId="0" type="doc"/>
         <dgm:pt modelId="1"/>
+        <dgm:pt modelId="11"/>
         <dgm:pt modelId="2"/>
         <dgm:pt modelId="21"/>
-        <dgm:pt modelId="211"/>
         <dgm:pt modelId="3"/>
         <dgm:pt modelId="31"/>
-        <dgm:pt modelId="311"/>
+        <dgm:pt modelId="4"/>
+        <dgm:pt modelId="41"/>
       </dgm:ptLst>
       <dgm:cxnLst>
-        <dgm:cxn modelId="4" srcId="0" destId="1" srcOrd="0" destOrd="0"/>
-        <dgm:cxn modelId="5" srcId="1" destId="2" srcOrd="0" destOrd="0"/>
-        <dgm:cxn modelId="6" srcId="1" destId="3" srcOrd="1" destOrd="0"/>
+        <dgm:cxn modelId="5" srcId="0" destId="1" srcOrd="0" destOrd="0"/>
+        <dgm:cxn modelId="6" srcId="0" destId="2" srcOrd="1" destOrd="0"/>
+        <dgm:cxn modelId="7" srcId="0" destId="3" srcOrd="2" destOrd="0"/>
+        <dgm:cxn modelId="8" srcId="0" destId="4" srcOrd="3" destOrd="0"/>
+        <dgm:cxn modelId="13" srcId="1" destId="11" srcOrd="0" destOrd="0"/>
         <dgm:cxn modelId="23" srcId="2" destId="21" srcOrd="0" destOrd="0"/>
-        <dgm:cxn modelId="24" srcId="21" destId="211" srcOrd="0" destOrd="0"/>
         <dgm:cxn modelId="33" srcId="3" destId="31" srcOrd="0" destOrd="0"/>
-        <dgm:cxn modelId="34" srcId="31" destId="311" srcOrd="0" destOrd="0"/>
+        <dgm:cxn modelId="43" srcId="4" destId="41" srcOrd="0" destOrd="0"/>
       </dgm:cxnLst>
       <dgm:bg/>
       <dgm:whole/>
     </dgm:dataModel>
   </dgm:clrData>
-  <dgm:layoutNode name="hierChild1">
+  <dgm:layoutNode name="Name0">
     <dgm:varLst>
-      <dgm:chPref val="1"/>
       <dgm:dir/>
-      <dgm:animOne val="branch"/>
       <dgm:animLvl val="lvl"/>
-      <dgm:resizeHandles/>
+      <dgm:resizeHandles val="exact"/>
     </dgm:varLst>
-    <dgm:choose name="Name0">
-      <dgm:if name="Name1" func="var" arg="dir" op="equ" val="norm">
-        <dgm:alg type="hierChild">
-          <dgm:param type="linDir" val="fromL"/>
+    <dgm:choose name="Name1">
+      <dgm:if name="Name2" func="var" arg="dir" op="equ" val="norm">
+        <dgm:alg type="lin">
+          <dgm:param type="linDir" val="fromT"/>
+          <dgm:param type="nodeHorzAlign" val="l"/>
         </dgm:alg>
       </dgm:if>
-      <dgm:else name="Name2">
-        <dgm:alg type="hierChild">
-          <dgm:param type="linDir" val="fromR"/>
+      <dgm:else name="Name3">
+        <dgm:alg type="lin">
+          <dgm:param type="linDir" val="fromT"/>
+          <dgm:param type="nodeHorzAlign" val="r"/>
         </dgm:alg>
       </dgm:else>
     </dgm:choose>
@@ -3237,453 +3389,106 @@
     </dgm:shape>
     <dgm:presOf/>
     <dgm:constrLst>
-      <dgm:constr type="primFontSz" for="des" ptType="node" op="equ" val="65"/>
-      <dgm:constr type="w" for="des" forName="composite" refType="w"/>
-      <dgm:constr type="h" for="des" forName="composite" refType="w" refFor="des" refForName="composite" fact="0.667"/>
-      <dgm:constr type="w" for="des" forName="composite2" refType="w" refFor="des" refForName="composite"/>
-      <dgm:constr type="h" for="des" forName="composite2" refType="h" refFor="des" refForName="composite"/>
-      <dgm:constr type="w" for="des" forName="composite3" refType="w" refFor="des" refForName="composite"/>
-      <dgm:constr type="h" for="des" forName="composite3" refType="h" refFor="des" refForName="composite"/>
-      <dgm:constr type="w" for="des" forName="composite4" refType="w" refFor="des" refForName="composite"/>
-      <dgm:constr type="h" for="des" forName="composite4" refType="h" refFor="des" refForName="composite"/>
-      <dgm:constr type="w" for="des" forName="composite5" refType="w" refFor="des" refForName="composite"/>
-      <dgm:constr type="h" for="des" forName="composite5" refType="h" refFor="des" refForName="composite"/>
-      <dgm:constr type="sibSp" refType="w" refFor="des" refForName="composite" fact="0.1"/>
-      <dgm:constr type="sibSp" for="des" forName="hierChild2" refType="sibSp"/>
-      <dgm:constr type="sibSp" for="des" forName="hierChild3" refType="sibSp"/>
-      <dgm:constr type="sibSp" for="des" forName="hierChild4" refType="sibSp"/>
-      <dgm:constr type="sibSp" for="des" forName="hierChild5" refType="sibSp"/>
-      <dgm:constr type="sibSp" for="des" forName="hierChild6" refType="sibSp"/>
-      <dgm:constr type="sp" for="des" forName="hierRoot1" refType="h" refFor="des" refForName="composite" fact="0.25"/>
-      <dgm:constr type="sp" for="des" forName="hierRoot2" refType="sp" refFor="des" refForName="hierRoot1"/>
-      <dgm:constr type="sp" for="des" forName="hierRoot3" refType="sp" refFor="des" refForName="hierRoot1"/>
-      <dgm:constr type="sp" for="des" forName="hierRoot4" refType="sp" refFor="des" refForName="hierRoot1"/>
-      <dgm:constr type="sp" for="des" forName="hierRoot5" refType="sp" refFor="des" refForName="hierRoot1"/>
+      <dgm:constr type="h" for="ch" forName="linNode" refType="h"/>
+      <dgm:constr type="w" for="ch" forName="linNode" refType="w"/>
+      <dgm:constr type="h" for="ch" forName="sp" refType="h" fact="0.05"/>
+      <dgm:constr type="primFontSz" for="des" forName="parentText" op="equ" val="65"/>
+      <dgm:constr type="secFontSz" for="des" forName="descendantText" op="equ"/>
     </dgm:constrLst>
     <dgm:ruleLst/>
-    <dgm:forEach name="Name3" axis="ch">
-      <dgm:forEach name="Name4" axis="self" ptType="node">
-        <dgm:layoutNode name="hierRoot1">
-          <dgm:alg type="hierRoot"/>
+    <dgm:forEach name="Name4" axis="ch" ptType="node">
+      <dgm:layoutNode name="linNode">
+        <dgm:choose name="Name5">
+          <dgm:if name="Name6" func="var" arg="dir" op="equ" val="norm">
+            <dgm:alg type="lin">
+              <dgm:param type="linDir" val="fromL"/>
+            </dgm:alg>
+          </dgm:if>
+          <dgm:else name="Name7">
+            <dgm:alg type="lin">
+              <dgm:param type="linDir" val="fromR"/>
+            </dgm:alg>
+          </dgm:else>
+        </dgm:choose>
+        <dgm:shape xmlns:r="http://schemas.openxmlformats.org/officeDocument/2006/relationships" r:blip="">
+          <dgm:adjLst/>
+        </dgm:shape>
+        <dgm:presOf/>
+        <dgm:constrLst>
+          <dgm:constr type="w" for="ch" forName="parentText" refType="w" fact="0.36"/>
+          <dgm:constr type="w" for="ch" forName="descendantText" refType="w" fact="0.64"/>
+          <dgm:constr type="h" for="ch" forName="parentText" refType="h"/>
+          <dgm:constr type="h" for="ch" forName="descendantText" refType="h" refFor="ch" refForName="parentText" fact="0.8"/>
+        </dgm:constrLst>
+        <dgm:ruleLst/>
+        <dgm:layoutNode name="parentText">
+          <dgm:varLst>
+            <dgm:chMax val="1"/>
+            <dgm:bulletEnabled val="1"/>
+          </dgm:varLst>
+          <dgm:alg type="tx"/>
+          <dgm:shape xmlns:r="http://schemas.openxmlformats.org/officeDocument/2006/relationships" type="roundRect" r:blip="" zOrderOff="3">
+            <dgm:adjLst/>
+          </dgm:shape>
+          <dgm:presOf axis="self" ptType="node"/>
+          <dgm:constrLst>
+            <dgm:constr type="tMarg" refType="primFontSz" fact="0.15"/>
+            <dgm:constr type="bMarg" refType="primFontSz" fact="0.15"/>
+            <dgm:constr type="lMarg" refType="primFontSz" fact="0.3"/>
+            <dgm:constr type="rMarg" refType="primFontSz" fact="0.3"/>
+          </dgm:constrLst>
+          <dgm:ruleLst>
+            <dgm:rule type="primFontSz" val="5" fact="NaN" max="NaN"/>
+          </dgm:ruleLst>
+        </dgm:layoutNode>
+        <dgm:choose name="Name8">
+          <dgm:if name="Name9" axis="ch" ptType="node" func="cnt" op="gte" val="1">
+            <dgm:layoutNode name="descendantText" styleLbl="alignAccFollowNode1">
+              <dgm:varLst>
+                <dgm:bulletEnabled val="1"/>
+              </dgm:varLst>
+              <dgm:alg type="tx">
+                <dgm:param type="stBulletLvl" val="1"/>
+                <dgm:param type="txAnchorVertCh" val="mid"/>
+              </dgm:alg>
+              <dgm:choose name="Name10">
+                <dgm:if name="Name11" func="var" arg="dir" op="equ" val="norm">
+                  <dgm:shape xmlns:r="http://schemas.openxmlformats.org/officeDocument/2006/relationships" rot="90" type="round2SameRect" r:blip="">
+                    <dgm:adjLst/>
+                  </dgm:shape>
+                </dgm:if>
+                <dgm:else name="Name12">
+                  <dgm:shape xmlns:r="http://schemas.openxmlformats.org/officeDocument/2006/relationships" rot="-90" type="round2SameRect" r:blip="">
+                    <dgm:adjLst/>
+                  </dgm:shape>
+                </dgm:else>
+              </dgm:choose>
+              <dgm:presOf axis="des" ptType="node"/>
+              <dgm:constrLst>
+                <dgm:constr type="secFontSz" val="65"/>
+                <dgm:constr type="primFontSz" refType="secFontSz"/>
+                <dgm:constr type="lMarg" refType="secFontSz" fact="0.3"/>
+                <dgm:constr type="rMarg" refType="secFontSz" fact="0.3"/>
+                <dgm:constr type="tMarg" refType="secFontSz" fact="0.15"/>
+                <dgm:constr type="bMarg" refType="secFontSz" fact="0.15"/>
+              </dgm:constrLst>
+              <dgm:ruleLst>
+                <dgm:rule type="secFontSz" val="5" fact="NaN" max="NaN"/>
+              </dgm:ruleLst>
+            </dgm:layoutNode>
+          </dgm:if>
+          <dgm:else name="Name13"/>
+        </dgm:choose>
+      </dgm:layoutNode>
+      <dgm:forEach name="Name14" axis="followSib" ptType="sibTrans" cnt="1">
+        <dgm:layoutNode name="sp">
+          <dgm:alg type="sp"/>
           <dgm:shape xmlns:r="http://schemas.openxmlformats.org/officeDocument/2006/relationships" r:blip="">
             <dgm:adjLst/>
           </dgm:shape>
           <dgm:presOf/>
-          <dgm:constrLst>
-            <dgm:constr type="bendDist" for="des" ptType="parTrans" refType="sp" fact="0.5"/>
-          </dgm:constrLst>
+          <dgm:constrLst/>
           <dgm:ruleLst/>
-          <dgm:layoutNode name="composite">
-            <dgm:alg type="composite"/>
-            <dgm:shape xmlns:r="http://schemas.openxmlformats.org/officeDocument/2006/relationships" r:blip="">
-              <dgm:adjLst/>
-            </dgm:shape>
-            <dgm:presOf/>
-            <dgm:constrLst>
-              <dgm:constr type="w" for="ch" forName="background" refType="w" fact="0.9"/>
-              <dgm:constr type="h" for="ch" forName="background" refType="w" refFor="ch" refForName="background" fact="0.635"/>
-              <dgm:constr type="t" for="ch" forName="background"/>
-              <dgm:constr type="l" for="ch" forName="background"/>
-              <dgm:constr type="w" for="ch" forName="text" refType="w" fact="0.9"/>
-              <dgm:constr type="h" for="ch" forName="text" refType="w" refFor="ch" refForName="text" fact="0.635"/>
-              <dgm:constr type="t" for="ch" forName="text" refType="w" fact="0.095"/>
-              <dgm:constr type="l" for="ch" forName="text" refType="w" fact="0.1"/>
-            </dgm:constrLst>
-            <dgm:ruleLst/>
-            <dgm:layoutNode name="background" styleLbl="node0" moveWith="text">
-              <dgm:alg type="sp"/>
-              <dgm:shape xmlns:r="http://schemas.openxmlformats.org/officeDocument/2006/relationships" type="roundRect" r:blip="">
-                <dgm:adjLst>
-                  <dgm:adj idx="1" val="0.1"/>
-                </dgm:adjLst>
-              </dgm:shape>
-              <dgm:presOf/>
-              <dgm:constrLst/>
-              <dgm:ruleLst/>
-            </dgm:layoutNode>
-            <dgm:layoutNode name="text" styleLbl="fgAcc0">
-              <dgm:varLst>
-                <dgm:chPref val="3"/>
-              </dgm:varLst>
-              <dgm:alg type="tx"/>
-              <dgm:shape xmlns:r="http://schemas.openxmlformats.org/officeDocument/2006/relationships" type="roundRect" r:blip="">
-                <dgm:adjLst>
-                  <dgm:adj idx="1" val="0.1"/>
-                </dgm:adjLst>
-              </dgm:shape>
-              <dgm:presOf axis="self"/>
-              <dgm:constrLst>
-                <dgm:constr type="tMarg" refType="primFontSz" fact="0.3"/>
-                <dgm:constr type="bMarg" refType="primFontSz" fact="0.3"/>
-                <dgm:constr type="lMarg" refType="primFontSz" fact="0.3"/>
-                <dgm:constr type="rMarg" refType="primFontSz" fact="0.3"/>
-              </dgm:constrLst>
-              <dgm:ruleLst>
-                <dgm:rule type="primFontSz" val="5" fact="NaN" max="NaN"/>
-              </dgm:ruleLst>
-            </dgm:layoutNode>
-          </dgm:layoutNode>
-          <dgm:layoutNode name="hierChild2">
-            <dgm:choose name="Name5">
-              <dgm:if name="Name6" func="var" arg="dir" op="equ" val="norm">
-                <dgm:alg type="hierChild">
-                  <dgm:param type="linDir" val="fromL"/>
-                </dgm:alg>
-              </dgm:if>
-              <dgm:else name="Name7">
-                <dgm:alg type="hierChild">
-                  <dgm:param type="linDir" val="fromR"/>
-                </dgm:alg>
-              </dgm:else>
-            </dgm:choose>
-            <dgm:shape xmlns:r="http://schemas.openxmlformats.org/officeDocument/2006/relationships" r:blip="">
-              <dgm:adjLst/>
-            </dgm:shape>
-            <dgm:presOf/>
-            <dgm:constrLst/>
-            <dgm:ruleLst/>
-            <dgm:forEach name="Name8" axis="ch">
-              <dgm:forEach name="Name9" axis="self" ptType="parTrans" cnt="1">
-                <dgm:layoutNode name="Name10">
-                  <dgm:alg type="conn">
-                    <dgm:param type="dim" val="1D"/>
-                    <dgm:param type="endSty" val="noArr"/>
-                    <dgm:param type="connRout" val="bend"/>
-                    <dgm:param type="bendPt" val="end"/>
-                    <dgm:param type="begPts" val="bCtr"/>
-                    <dgm:param type="endPts" val="tCtr"/>
-                    <dgm:param type="srcNode" val="background"/>
-                    <dgm:param type="dstNode" val="background2"/>
-                  </dgm:alg>
-                  <dgm:shape xmlns:r="http://schemas.openxmlformats.org/officeDocument/2006/relationships" type="conn" r:blip="" zOrderOff="-999">
-                    <dgm:adjLst/>
-                  </dgm:shape>
-                  <dgm:presOf axis="self"/>
-                  <dgm:constrLst>
-                    <dgm:constr type="begPad"/>
-                    <dgm:constr type="endPad"/>
-                  </dgm:constrLst>
-                  <dgm:ruleLst/>
-                </dgm:layoutNode>
-              </dgm:forEach>
-              <dgm:forEach name="Name11" axis="self" ptType="node">
-                <dgm:layoutNode name="hierRoot2">
-                  <dgm:alg type="hierRoot"/>
-                  <dgm:shape xmlns:r="http://schemas.openxmlformats.org/officeDocument/2006/relationships" r:blip="">
-                    <dgm:adjLst/>
-                  </dgm:shape>
-                  <dgm:presOf/>
-                  <dgm:constrLst>
-                    <dgm:constr type="bendDist" for="des" ptType="parTrans" refType="sp" fact="0.5"/>
-                  </dgm:constrLst>
-                  <dgm:ruleLst/>
-                  <dgm:layoutNode name="composite2">
-                    <dgm:alg type="composite"/>
-                    <dgm:shape xmlns:r="http://schemas.openxmlformats.org/officeDocument/2006/relationships" r:blip="">
-                      <dgm:adjLst/>
-                    </dgm:shape>
-                    <dgm:presOf/>
-                    <dgm:constrLst>
-                      <dgm:constr type="w" for="ch" forName="background2" refType="w" fact="0.9"/>
-                      <dgm:constr type="h" for="ch" forName="background2" refType="w" refFor="ch" refForName="background2" fact="0.635"/>
-                      <dgm:constr type="t" for="ch" forName="background2"/>
-                      <dgm:constr type="l" for="ch" forName="background2"/>
-                      <dgm:constr type="w" for="ch" forName="text2" refType="w" fact="0.9"/>
-                      <dgm:constr type="h" for="ch" forName="text2" refType="w" refFor="ch" refForName="text2" fact="0.635"/>
-                      <dgm:constr type="t" for="ch" forName="text2" refType="w" fact="0.095"/>
-                      <dgm:constr type="l" for="ch" forName="text2" refType="w" fact="0.1"/>
-                    </dgm:constrLst>
-                    <dgm:ruleLst/>
-                    <dgm:layoutNode name="background2" moveWith="text2">
-                      <dgm:alg type="sp"/>
-                      <dgm:shape xmlns:r="http://schemas.openxmlformats.org/officeDocument/2006/relationships" type="roundRect" r:blip="">
-                        <dgm:adjLst>
-                          <dgm:adj idx="1" val="0.1"/>
-                        </dgm:adjLst>
-                      </dgm:shape>
-                      <dgm:presOf/>
-                      <dgm:constrLst/>
-                      <dgm:ruleLst/>
-                    </dgm:layoutNode>
-                    <dgm:layoutNode name="text2" styleLbl="fgAcc2">
-                      <dgm:varLst>
-                        <dgm:chPref val="3"/>
-                      </dgm:varLst>
-                      <dgm:alg type="tx"/>
-                      <dgm:shape xmlns:r="http://schemas.openxmlformats.org/officeDocument/2006/relationships" type="roundRect" r:blip="">
-                        <dgm:adjLst>
-                          <dgm:adj idx="1" val="0.1"/>
-                        </dgm:adjLst>
-                      </dgm:shape>
-                      <dgm:presOf axis="self"/>
-                      <dgm:constrLst>
-                        <dgm:constr type="tMarg" refType="primFontSz" fact="0.3"/>
-                        <dgm:constr type="bMarg" refType="primFontSz" fact="0.3"/>
-                        <dgm:constr type="lMarg" refType="primFontSz" fact="0.3"/>
-                        <dgm:constr type="rMarg" refType="primFontSz" fact="0.3"/>
-                      </dgm:constrLst>
-                      <dgm:ruleLst>
-                        <dgm:rule type="primFontSz" val="5" fact="NaN" max="NaN"/>
-                      </dgm:ruleLst>
-                    </dgm:layoutNode>
-                  </dgm:layoutNode>
-                  <dgm:layoutNode name="hierChild3">
-                    <dgm:choose name="Name12">
-                      <dgm:if name="Name13" func="var" arg="dir" op="equ" val="norm">
-                        <dgm:alg type="hierChild">
-                          <dgm:param type="linDir" val="fromL"/>
-                        </dgm:alg>
-                      </dgm:if>
-                      <dgm:else name="Name14">
-                        <dgm:alg type="hierChild">
-                          <dgm:param type="linDir" val="fromR"/>
-                        </dgm:alg>
-                      </dgm:else>
-                    </dgm:choose>
-                    <dgm:shape xmlns:r="http://schemas.openxmlformats.org/officeDocument/2006/relationships" r:blip="">
-                      <dgm:adjLst/>
-                    </dgm:shape>
-                    <dgm:presOf/>
-                    <dgm:constrLst/>
-                    <dgm:ruleLst/>
-                    <dgm:forEach name="Name15" axis="ch">
-                      <dgm:forEach name="Name16" axis="self" ptType="parTrans" cnt="1">
-                        <dgm:layoutNode name="Name17">
-                          <dgm:alg type="conn">
-                            <dgm:param type="dim" val="1D"/>
-                            <dgm:param type="endSty" val="noArr"/>
-                            <dgm:param type="connRout" val="bend"/>
-                            <dgm:param type="bendPt" val="end"/>
-                            <dgm:param type="begPts" val="bCtr"/>
-                            <dgm:param type="endPts" val="tCtr"/>
-                            <dgm:param type="srcNode" val="background2"/>
-                            <dgm:param type="dstNode" val="background3"/>
-                          </dgm:alg>
-                          <dgm:shape xmlns:r="http://schemas.openxmlformats.org/officeDocument/2006/relationships" type="conn" r:blip="" zOrderOff="-999">
-                            <dgm:adjLst/>
-                          </dgm:shape>
-                          <dgm:presOf axis="self"/>
-                          <dgm:constrLst>
-                            <dgm:constr type="begPad"/>
-                            <dgm:constr type="endPad"/>
-                          </dgm:constrLst>
-                          <dgm:ruleLst/>
-                        </dgm:layoutNode>
-                      </dgm:forEach>
-                      <dgm:forEach name="Name18" axis="self" ptType="node">
-                        <dgm:layoutNode name="hierRoot3">
-                          <dgm:alg type="hierRoot"/>
-                          <dgm:shape xmlns:r="http://schemas.openxmlformats.org/officeDocument/2006/relationships" r:blip="">
-                            <dgm:adjLst/>
-                          </dgm:shape>
-                          <dgm:presOf/>
-                          <dgm:constrLst>
-                            <dgm:constr type="bendDist" for="des" ptType="parTrans" refType="sp" fact="0.5"/>
-                          </dgm:constrLst>
-                          <dgm:ruleLst/>
-                          <dgm:layoutNode name="composite3">
-                            <dgm:alg type="composite"/>
-                            <dgm:shape xmlns:r="http://schemas.openxmlformats.org/officeDocument/2006/relationships" r:blip="">
-                              <dgm:adjLst/>
-                            </dgm:shape>
-                            <dgm:presOf/>
-                            <dgm:constrLst>
-                              <dgm:constr type="w" for="ch" forName="background3" refType="w" fact="0.9"/>
-                              <dgm:constr type="h" for="ch" forName="background3" refType="w" refFor="ch" refForName="background3" fact="0.635"/>
-                              <dgm:constr type="t" for="ch" forName="background3"/>
-                              <dgm:constr type="l" for="ch" forName="background3"/>
-                              <dgm:constr type="w" for="ch" forName="text3" refType="w" fact="0.9"/>
-                              <dgm:constr type="h" for="ch" forName="text3" refType="w" refFor="ch" refForName="text3" fact="0.635"/>
-                              <dgm:constr type="t" for="ch" forName="text3" refType="w" fact="0.095"/>
-                              <dgm:constr type="l" for="ch" forName="text3" refType="w" fact="0.1"/>
-                            </dgm:constrLst>
-                            <dgm:ruleLst/>
-                            <dgm:layoutNode name="background3" moveWith="text3">
-                              <dgm:alg type="sp"/>
-                              <dgm:shape xmlns:r="http://schemas.openxmlformats.org/officeDocument/2006/relationships" type="roundRect" r:blip="">
-                                <dgm:adjLst>
-                                  <dgm:adj idx="1" val="0.1"/>
-                                </dgm:adjLst>
-                              </dgm:shape>
-                              <dgm:presOf/>
-                              <dgm:constrLst/>
-                              <dgm:ruleLst/>
-                            </dgm:layoutNode>
-                            <dgm:layoutNode name="text3" styleLbl="fgAcc3">
-                              <dgm:varLst>
-                                <dgm:chPref val="3"/>
-                              </dgm:varLst>
-                              <dgm:alg type="tx"/>
-                              <dgm:shape xmlns:r="http://schemas.openxmlformats.org/officeDocument/2006/relationships" type="roundRect" r:blip="">
-                                <dgm:adjLst>
-                                  <dgm:adj idx="1" val="0.1"/>
-                                </dgm:adjLst>
-                              </dgm:shape>
-                              <dgm:presOf axis="self"/>
-                              <dgm:constrLst>
-                                <dgm:constr type="tMarg" refType="primFontSz" fact="0.3"/>
-                                <dgm:constr type="bMarg" refType="primFontSz" fact="0.3"/>
-                                <dgm:constr type="lMarg" refType="primFontSz" fact="0.3"/>
-                                <dgm:constr type="rMarg" refType="primFontSz" fact="0.3"/>
-                              </dgm:constrLst>
-                              <dgm:ruleLst>
-                                <dgm:rule type="primFontSz" val="5" fact="NaN" max="NaN"/>
-                              </dgm:ruleLst>
-                            </dgm:layoutNode>
-                          </dgm:layoutNode>
-                          <dgm:layoutNode name="hierChild4">
-                            <dgm:choose name="Name19">
-                              <dgm:if name="Name20" func="var" arg="dir" op="equ" val="norm">
-                                <dgm:alg type="hierChild">
-                                  <dgm:param type="linDir" val="fromL"/>
-                                </dgm:alg>
-                              </dgm:if>
-                              <dgm:else name="Name21">
-                                <dgm:alg type="hierChild">
-                                  <dgm:param type="linDir" val="fromR"/>
-                                </dgm:alg>
-                              </dgm:else>
-                            </dgm:choose>
-                            <dgm:shape xmlns:r="http://schemas.openxmlformats.org/officeDocument/2006/relationships" r:blip="">
-                              <dgm:adjLst/>
-                            </dgm:shape>
-                            <dgm:presOf/>
-                            <dgm:constrLst/>
-                            <dgm:ruleLst/>
-                            <dgm:forEach name="repeat" axis="ch">
-                              <dgm:forEach name="Name22" axis="self" ptType="parTrans" cnt="1">
-                                <dgm:layoutNode name="Name23">
-                                  <dgm:choose name="Name24">
-                                    <dgm:if name="Name25" axis="self" func="depth" op="lte" val="4">
-                                      <dgm:alg type="conn">
-                                        <dgm:param type="dim" val="1D"/>
-                                        <dgm:param type="endSty" val="noArr"/>
-                                        <dgm:param type="connRout" val="bend"/>
-                                        <dgm:param type="bendPt" val="end"/>
-                                        <dgm:param type="begPts" val="bCtr"/>
-                                        <dgm:param type="endPts" val="tCtr"/>
-                                        <dgm:param type="srcNode" val="background3"/>
-                                        <dgm:param type="dstNode" val="background4"/>
-                                      </dgm:alg>
-                                    </dgm:if>
-                                    <dgm:else name="Name26">
-                                      <dgm:alg type="conn">
-                                        <dgm:param type="dim" val="1D"/>
-                                        <dgm:param type="endSty" val="noArr"/>
-                                        <dgm:param type="connRout" val="bend"/>
-                                        <dgm:param type="bendPt" val="end"/>
-                                        <dgm:param type="begPts" val="bCtr"/>
-                                        <dgm:param type="endPts" val="tCtr"/>
-                                        <dgm:param type="srcNode" val="background4"/>
-                                        <dgm:param type="dstNode" val="background4"/>
-                                      </dgm:alg>
-                                    </dgm:else>
-                                  </dgm:choose>
-                                  <dgm:shape xmlns:r="http://schemas.openxmlformats.org/officeDocument/2006/relationships" type="conn" r:blip="" zOrderOff="-999">
-                                    <dgm:adjLst/>
-                                  </dgm:shape>
-                                  <dgm:presOf axis="self"/>
-                                  <dgm:constrLst>
-                                    <dgm:constr type="begPad"/>
-                                    <dgm:constr type="endPad"/>
-                                  </dgm:constrLst>
-                                  <dgm:ruleLst/>
-                                </dgm:layoutNode>
-                              </dgm:forEach>
-                              <dgm:forEach name="Name27" axis="self" ptType="node">
-                                <dgm:layoutNode name="hierRoot4">
-                                  <dgm:alg type="hierRoot"/>
-                                  <dgm:shape xmlns:r="http://schemas.openxmlformats.org/officeDocument/2006/relationships" r:blip="">
-                                    <dgm:adjLst/>
-                                  </dgm:shape>
-                                  <dgm:presOf/>
-                                  <dgm:constrLst>
-                                    <dgm:constr type="bendDist" for="des" ptType="parTrans" refType="sp" fact="0.5"/>
-                                  </dgm:constrLst>
-                                  <dgm:ruleLst/>
-                                  <dgm:layoutNode name="composite4">
-                                    <dgm:alg type="composite"/>
-                                    <dgm:shape xmlns:r="http://schemas.openxmlformats.org/officeDocument/2006/relationships" r:blip="">
-                                      <dgm:adjLst/>
-                                    </dgm:shape>
-                                    <dgm:presOf/>
-                                    <dgm:constrLst>
-                                      <dgm:constr type="w" for="ch" forName="background4" refType="w" fact="0.9"/>
-                                      <dgm:constr type="h" for="ch" forName="background4" refType="w" refFor="ch" refForName="background4" fact="0.635"/>
-                                      <dgm:constr type="t" for="ch" forName="background4"/>
-                                      <dgm:constr type="l" for="ch" forName="background4"/>
-                                      <dgm:constr type="w" for="ch" forName="text4" refType="w" fact="0.9"/>
-                                      <dgm:constr type="h" for="ch" forName="text4" refType="w" refFor="ch" refForName="text4" fact="0.635"/>
-                                      <dgm:constr type="t" for="ch" forName="text4" refType="w" fact="0.095"/>
-                                      <dgm:constr type="l" for="ch" forName="text4" refType="w" fact="0.1"/>
-                                    </dgm:constrLst>
-                                    <dgm:ruleLst/>
-                                    <dgm:layoutNode name="background4" moveWith="text4">
-                                      <dgm:alg type="sp"/>
-                                      <dgm:shape xmlns:r="http://schemas.openxmlformats.org/officeDocument/2006/relationships" type="roundRect" r:blip="">
-                                        <dgm:adjLst>
-                                          <dgm:adj idx="1" val="0.1"/>
-                                        </dgm:adjLst>
-                                      </dgm:shape>
-                                      <dgm:presOf/>
-                                      <dgm:constrLst/>
-                                      <dgm:ruleLst/>
-                                    </dgm:layoutNode>
-                                    <dgm:layoutNode name="text4" styleLbl="fgAcc4">
-                                      <dgm:varLst>
-                                        <dgm:chPref val="3"/>
-                                      </dgm:varLst>
-                                      <dgm:alg type="tx"/>
-                                      <dgm:shape xmlns:r="http://schemas.openxmlformats.org/officeDocument/2006/relationships" type="roundRect" r:blip="">
-                                        <dgm:adjLst>
-                                          <dgm:adj idx="1" val="0.1"/>
-                                        </dgm:adjLst>
-                                      </dgm:shape>
-                                      <dgm:presOf axis="self"/>
-                                      <dgm:constrLst>
-                                        <dgm:constr type="tMarg" refType="primFontSz" fact="0.3"/>
-                                        <dgm:constr type="bMarg" refType="primFontSz" fact="0.3"/>
-                                        <dgm:constr type="lMarg" refType="primFontSz" fact="0.3"/>
-                                        <dgm:constr type="rMarg" refType="primFontSz" fact="0.3"/>
-                                      </dgm:constrLst>
-                                      <dgm:ruleLst>
-                                        <dgm:rule type="primFontSz" val="5" fact="NaN" max="NaN"/>
-                                      </dgm:ruleLst>
-                                    </dgm:layoutNode>
-                                  </dgm:layoutNode>
-                                  <dgm:layoutNode name="hierChild5">
-                                    <dgm:choose name="Name28">
-                                      <dgm:if name="Name29" func="var" arg="dir" op="equ" val="norm">
-                                        <dgm:alg type="hierChild">
-                                          <dgm:param type="linDir" val="fromL"/>
-                                        </dgm:alg>
-                                      </dgm:if>
-                                      <dgm:else name="Name30">
-                                        <dgm:alg type="hierChild">
-                                          <dgm:param type="linDir" val="fromR"/>
-                                        </dgm:alg>
-                                      </dgm:else>
-                                    </dgm:choose>
-                                    <dgm:shape xmlns:r="http://schemas.openxmlformats.org/officeDocument/2006/relationships" r:blip="">
-                                      <dgm:adjLst/>
-                                    </dgm:shape>
-                                    <dgm:presOf/>
-                                    <dgm:constrLst/>
-                                    <dgm:ruleLst/>
-                                    <dgm:forEach name="Name31" ref="repeat"/>
-                                  </dgm:layoutNode>
-                                </dgm:layoutNode>
-                              </dgm:forEach>
-                            </dgm:forEach>
-                          </dgm:layoutNode>
-                        </dgm:layoutNode>
-                      </dgm:forEach>
-                    </dgm:forEach>
-                  </dgm:layoutNode>
-                </dgm:layoutNode>
-              </dgm:forEach>
-            </dgm:forEach>
-          </dgm:layoutNode>
         </dgm:layoutNode>
       </dgm:forEach>
     </dgm:forEach>
@@ -4918,11 +4723,11 @@
 </file>
 
 <file path=ppt/diagrams/quickStyle1.xml><?xml version="1.0" encoding="utf-8"?>
-<dgm:styleDef xmlns:dgm="http://schemas.openxmlformats.org/drawingml/2006/diagram" xmlns:a="http://schemas.openxmlformats.org/drawingml/2006/main" uniqueId="urn:microsoft.com/office/officeart/2005/8/quickstyle/simple5">
+<dgm:styleDef xmlns:dgm="http://schemas.openxmlformats.org/drawingml/2006/diagram" xmlns:a="http://schemas.openxmlformats.org/drawingml/2006/main" uniqueId="urn:microsoft.com/office/officeart/2005/8/quickstyle/simple4">
   <dgm:title val=""/>
   <dgm:desc val=""/>
   <dgm:catLst>
-    <dgm:cat type="simple" pri="10500"/>
+    <dgm:cat type="simple" pri="10400"/>
   </dgm:catLst>
   <dgm:scene3d>
     <a:camera prst="orthographicFront"/>
@@ -4942,7 +4747,7 @@
       <a:fillRef idx="3">
         <a:scrgbClr r="0" g="0" b="0"/>
       </a:fillRef>
-      <a:effectRef idx="3">
+      <a:effectRef idx="2">
         <a:scrgbClr r="0" g="0" b="0"/>
       </a:effectRef>
       <a:fontRef idx="minor">
@@ -4958,13 +4763,13 @@
     <dgm:sp3d/>
     <dgm:txPr/>
     <dgm:style>
-      <a:lnRef idx="0">
+      <a:lnRef idx="1">
         <a:scrgbClr r="0" g="0" b="0"/>
       </a:lnRef>
       <a:fillRef idx="3">
         <a:scrgbClr r="0" g="0" b="0"/>
       </a:fillRef>
-      <a:effectRef idx="3">
+      <a:effectRef idx="2">
         <a:scrgbClr r="0" g="0" b="0"/>
       </a:effectRef>
       <a:fontRef idx="minor">
@@ -4986,7 +4791,7 @@
       <a:fillRef idx="3">
         <a:scrgbClr r="0" g="0" b="0"/>
       </a:fillRef>
-      <a:effectRef idx="3">
+      <a:effectRef idx="0">
         <a:scrgbClr r="0" g="0" b="0"/>
       </a:effectRef>
       <a:fontRef idx="minor">
@@ -5008,7 +4813,7 @@
       <a:fillRef idx="3">
         <a:scrgbClr r="0" g="0" b="0"/>
       </a:fillRef>
-      <a:effectRef idx="3">
+      <a:effectRef idx="2">
         <a:scrgbClr r="0" g="0" b="0"/>
       </a:effectRef>
       <a:fontRef idx="minor">
@@ -5030,7 +4835,7 @@
       <a:fillRef idx="3">
         <a:scrgbClr r="0" g="0" b="0"/>
       </a:fillRef>
-      <a:effectRef idx="3">
+      <a:effectRef idx="2">
         <a:scrgbClr r="0" g="0" b="0"/>
       </a:effectRef>
       <a:fontRef idx="minor">
@@ -5052,7 +4857,7 @@
       <a:fillRef idx="3">
         <a:scrgbClr r="0" g="0" b="0"/>
       </a:fillRef>
-      <a:effectRef idx="3">
+      <a:effectRef idx="2">
         <a:scrgbClr r="0" g="0" b="0"/>
       </a:effectRef>
       <a:fontRef idx="minor">
@@ -5074,7 +4879,7 @@
       <a:fillRef idx="3">
         <a:scrgbClr r="0" g="0" b="0"/>
       </a:fillRef>
-      <a:effectRef idx="3">
+      <a:effectRef idx="2">
         <a:scrgbClr r="0" g="0" b="0"/>
       </a:effectRef>
       <a:fontRef idx="minor">
@@ -5096,7 +4901,7 @@
       <a:fillRef idx="3">
         <a:scrgbClr r="0" g="0" b="0"/>
       </a:fillRef>
-      <a:effectRef idx="3">
+      <a:effectRef idx="2">
         <a:scrgbClr r="0" g="0" b="0"/>
       </a:effectRef>
       <a:fontRef idx="minor">
@@ -5118,7 +4923,7 @@
       <a:fillRef idx="1">
         <a:scrgbClr r="0" g="0" b="0"/>
       </a:fillRef>
-      <a:effectRef idx="3">
+      <a:effectRef idx="2">
         <a:scrgbClr r="0" g="0" b="0"/>
       </a:effectRef>
       <a:fontRef idx="minor"/>
@@ -5138,7 +4943,7 @@
       <a:fillRef idx="1">
         <a:scrgbClr r="0" g="0" b="0"/>
       </a:fillRef>
-      <a:effectRef idx="3">
+      <a:effectRef idx="2">
         <a:scrgbClr r="0" g="0" b="0"/>
       </a:effectRef>
       <a:fontRef idx="minor"/>
@@ -5158,7 +4963,7 @@
       <a:fillRef idx="1">
         <a:scrgbClr r="0" g="0" b="0"/>
       </a:fillRef>
-      <a:effectRef idx="3">
+      <a:effectRef idx="2">
         <a:scrgbClr r="0" g="0" b="0"/>
       </a:effectRef>
       <a:fontRef idx="minor"/>
@@ -5178,7 +4983,7 @@
       <a:fillRef idx="3">
         <a:scrgbClr r="0" g="0" b="0"/>
       </a:fillRef>
-      <a:effectRef idx="3">
+      <a:effectRef idx="2">
         <a:scrgbClr r="0" g="0" b="0"/>
       </a:effectRef>
       <a:fontRef idx="minor">
@@ -5200,7 +5005,7 @@
       <a:fillRef idx="3">
         <a:scrgbClr r="0" g="0" b="0"/>
       </a:fillRef>
-      <a:effectRef idx="3">
+      <a:effectRef idx="2">
         <a:scrgbClr r="0" g="0" b="0"/>
       </a:effectRef>
       <a:fontRef idx="minor">
@@ -5222,7 +5027,7 @@
       <a:fillRef idx="3">
         <a:scrgbClr r="0" g="0" b="0"/>
       </a:fillRef>
-      <a:effectRef idx="3">
+      <a:effectRef idx="2">
         <a:scrgbClr r="0" g="0" b="0"/>
       </a:effectRef>
       <a:fontRef idx="minor">
@@ -5258,10 +5063,10 @@
     <dgm:sp3d/>
     <dgm:txPr/>
     <dgm:style>
-      <a:lnRef idx="1">
+      <a:lnRef idx="2">
         <a:scrgbClr r="0" g="0" b="0"/>
       </a:lnRef>
-      <a:fillRef idx="0">
+      <a:fillRef idx="1">
         <a:scrgbClr r="0" g="0" b="0"/>
       </a:fillRef>
       <a:effectRef idx="1">
@@ -5284,7 +5089,7 @@
       <a:fillRef idx="3">
         <a:scrgbClr r="0" g="0" b="0"/>
       </a:fillRef>
-      <a:effectRef idx="3">
+      <a:effectRef idx="2">
         <a:scrgbClr r="0" g="0" b="0"/>
       </a:effectRef>
       <a:fontRef idx="minor">
@@ -5306,7 +5111,7 @@
       <a:fillRef idx="3">
         <a:scrgbClr r="0" g="0" b="0"/>
       </a:fillRef>
-      <a:effectRef idx="3">
+      <a:effectRef idx="2">
         <a:scrgbClr r="0" g="0" b="0"/>
       </a:effectRef>
       <a:fontRef idx="minor">
@@ -5328,7 +5133,7 @@
       <a:fillRef idx="3">
         <a:scrgbClr r="0" g="0" b="0"/>
       </a:fillRef>
-      <a:effectRef idx="3">
+      <a:effectRef idx="2">
         <a:scrgbClr r="0" g="0" b="0"/>
       </a:effectRef>
       <a:fontRef idx="minor">
@@ -5350,7 +5155,7 @@
       <a:fillRef idx="3">
         <a:scrgbClr r="0" g="0" b="0"/>
       </a:fillRef>
-      <a:effectRef idx="3">
+      <a:effectRef idx="2">
         <a:scrgbClr r="0" g="0" b="0"/>
       </a:effectRef>
       <a:fontRef idx="minor">
@@ -5372,7 +5177,7 @@
       <a:fillRef idx="3">
         <a:scrgbClr r="0" g="0" b="0"/>
       </a:fillRef>
-      <a:effectRef idx="3">
+      <a:effectRef idx="2">
         <a:scrgbClr r="0" g="0" b="0"/>
       </a:effectRef>
       <a:fontRef idx="minor">
@@ -5394,7 +5199,7 @@
       <a:fillRef idx="3">
         <a:scrgbClr r="0" g="0" b="0"/>
       </a:fillRef>
-      <a:effectRef idx="3">
+      <a:effectRef idx="2">
         <a:scrgbClr r="0" g="0" b="0"/>
       </a:effectRef>
       <a:fontRef idx="minor">
@@ -5416,7 +5221,7 @@
       <a:fillRef idx="3">
         <a:scrgbClr r="0" g="0" b="0"/>
       </a:fillRef>
-      <a:effectRef idx="3">
+      <a:effectRef idx="2">
         <a:scrgbClr r="0" g="0" b="0"/>
       </a:effectRef>
       <a:fontRef idx="minor">
@@ -5432,13 +5237,13 @@
     <dgm:sp3d/>
     <dgm:txPr/>
     <dgm:style>
-      <a:lnRef idx="0">
+      <a:lnRef idx="1">
         <a:scrgbClr r="0" g="0" b="0"/>
       </a:lnRef>
       <a:fillRef idx="3">
         <a:scrgbClr r="0" g="0" b="0"/>
       </a:fillRef>
-      <a:effectRef idx="3">
+      <a:effectRef idx="2">
         <a:scrgbClr r="0" g="0" b="0"/>
       </a:effectRef>
       <a:fontRef idx="minor">
@@ -5454,13 +5259,13 @@
     <dgm:sp3d/>
     <dgm:txPr/>
     <dgm:style>
-      <a:lnRef idx="0">
+      <a:lnRef idx="1">
         <a:scrgbClr r="0" g="0" b="0"/>
       </a:lnRef>
       <a:fillRef idx="3">
         <a:scrgbClr r="0" g="0" b="0"/>
       </a:fillRef>
-      <a:effectRef idx="3">
+      <a:effectRef idx="2">
         <a:scrgbClr r="0" g="0" b="0"/>
       </a:effectRef>
       <a:fontRef idx="minor">
@@ -5476,7 +5281,7 @@
     <dgm:sp3d/>
     <dgm:txPr/>
     <dgm:style>
-      <a:lnRef idx="2">
+      <a:lnRef idx="1">
         <a:scrgbClr r="0" g="0" b="0"/>
       </a:lnRef>
       <a:fillRef idx="0">
@@ -5496,7 +5301,7 @@
     <dgm:sp3d/>
     <dgm:txPr/>
     <dgm:style>
-      <a:lnRef idx="2">
+      <a:lnRef idx="1">
         <a:scrgbClr r="0" g="0" b="0"/>
       </a:lnRef>
       <a:fillRef idx="0">
@@ -5516,7 +5321,7 @@
     <dgm:sp3d/>
     <dgm:txPr/>
     <dgm:style>
-      <a:lnRef idx="2">
+      <a:lnRef idx="1">
         <a:scrgbClr r="0" g="0" b="0"/>
       </a:lnRef>
       <a:fillRef idx="0">
@@ -5536,7 +5341,7 @@
     <dgm:sp3d/>
     <dgm:txPr/>
     <dgm:style>
-      <a:lnRef idx="2">
+      <a:lnRef idx="1">
         <a:scrgbClr r="0" g="0" b="0"/>
       </a:lnRef>
       <a:fillRef idx="0">
@@ -5562,7 +5367,7 @@
       <a:fillRef idx="1">
         <a:scrgbClr r="0" g="0" b="0"/>
       </a:fillRef>
-      <a:effectRef idx="2">
+      <a:effectRef idx="0">
         <a:scrgbClr r="0" g="0" b="0"/>
       </a:effectRef>
       <a:fontRef idx="minor"/>
@@ -5582,7 +5387,7 @@
       <a:fillRef idx="1">
         <a:scrgbClr r="0" g="0" b="0"/>
       </a:fillRef>
-      <a:effectRef idx="2">
+      <a:effectRef idx="0">
         <a:scrgbClr r="0" g="0" b="0"/>
       </a:effectRef>
       <a:fontRef idx="minor"/>
@@ -5602,7 +5407,7 @@
       <a:fillRef idx="1">
         <a:scrgbClr r="0" g="0" b="0"/>
       </a:fillRef>
-      <a:effectRef idx="2">
+      <a:effectRef idx="0">
         <a:scrgbClr r="0" g="0" b="0"/>
       </a:effectRef>
       <a:fontRef idx="minor"/>
@@ -5642,7 +5447,7 @@
       <a:fillRef idx="1">
         <a:scrgbClr r="0" g="0" b="0"/>
       </a:fillRef>
-      <a:effectRef idx="2">
+      <a:effectRef idx="0">
         <a:scrgbClr r="0" g="0" b="0"/>
       </a:effectRef>
       <a:fontRef idx="minor"/>
@@ -5662,7 +5467,7 @@
       <a:fillRef idx="1">
         <a:scrgbClr r="0" g="0" b="0"/>
       </a:fillRef>
-      <a:effectRef idx="2">
+      <a:effectRef idx="0">
         <a:scrgbClr r="0" g="0" b="0"/>
       </a:effectRef>
       <a:fontRef idx="minor"/>
@@ -5682,7 +5487,7 @@
       <a:fillRef idx="1">
         <a:scrgbClr r="0" g="0" b="0"/>
       </a:fillRef>
-      <a:effectRef idx="3">
+      <a:effectRef idx="0">
         <a:scrgbClr r="0" g="0" b="0"/>
       </a:effectRef>
       <a:fontRef idx="minor"/>
@@ -5702,7 +5507,7 @@
       <a:fillRef idx="1">
         <a:scrgbClr r="0" g="0" b="0"/>
       </a:fillRef>
-      <a:effectRef idx="3">
+      <a:effectRef idx="0">
         <a:scrgbClr r="0" g="0" b="0"/>
       </a:effectRef>
       <a:fontRef idx="minor"/>
@@ -5722,7 +5527,7 @@
       <a:fillRef idx="1">
         <a:scrgbClr r="0" g="0" b="0"/>
       </a:fillRef>
-      <a:effectRef idx="2">
+      <a:effectRef idx="0">
         <a:scrgbClr r="0" g="0" b="0"/>
       </a:effectRef>
       <a:fontRef idx="minor"/>
@@ -5742,7 +5547,7 @@
       <a:fillRef idx="1">
         <a:scrgbClr r="0" g="0" b="0"/>
       </a:fillRef>
-      <a:effectRef idx="2">
+      <a:effectRef idx="0">
         <a:scrgbClr r="0" g="0" b="0"/>
       </a:effectRef>
       <a:fontRef idx="minor"/>
@@ -5762,7 +5567,7 @@
       <a:fillRef idx="1">
         <a:scrgbClr r="0" g="0" b="0"/>
       </a:fillRef>
-      <a:effectRef idx="2">
+      <a:effectRef idx="0">
         <a:scrgbClr r="0" g="0" b="0"/>
       </a:effectRef>
       <a:fontRef idx="minor"/>
@@ -5782,7 +5587,7 @@
       <a:fillRef idx="1">
         <a:scrgbClr r="0" g="0" b="0"/>
       </a:fillRef>
-      <a:effectRef idx="2">
+      <a:effectRef idx="0">
         <a:scrgbClr r="0" g="0" b="0"/>
       </a:effectRef>
       <a:fontRef idx="minor"/>
@@ -5802,7 +5607,7 @@
       <a:fillRef idx="1">
         <a:scrgbClr r="0" g="0" b="0"/>
       </a:fillRef>
-      <a:effectRef idx="2">
+      <a:effectRef idx="0">
         <a:scrgbClr r="0" g="0" b="0"/>
       </a:effectRef>
       <a:fontRef idx="minor"/>
@@ -5822,7 +5627,7 @@
       <a:fillRef idx="1">
         <a:scrgbClr r="0" g="0" b="0"/>
       </a:fillRef>
-      <a:effectRef idx="2">
+      <a:effectRef idx="0">
         <a:scrgbClr r="0" g="0" b="0"/>
       </a:effectRef>
       <a:fontRef idx="minor"/>
@@ -5842,7 +5647,7 @@
       <a:fillRef idx="1">
         <a:scrgbClr r="0" g="0" b="0"/>
       </a:fillRef>
-      <a:effectRef idx="2">
+      <a:effectRef idx="0">
         <a:scrgbClr r="0" g="0" b="0"/>
       </a:effectRef>
       <a:fontRef idx="minor"/>
@@ -5882,7 +5687,7 @@
       <a:fillRef idx="1">
         <a:scrgbClr r="0" g="0" b="0"/>
       </a:fillRef>
-      <a:effectRef idx="3">
+      <a:effectRef idx="2">
         <a:scrgbClr r="0" g="0" b="0"/>
       </a:effectRef>
       <a:fontRef idx="minor"/>
@@ -5922,7 +5727,7 @@
       <a:fillRef idx="3">
         <a:scrgbClr r="0" g="0" b="0"/>
       </a:fillRef>
-      <a:effectRef idx="3">
+      <a:effectRef idx="2">
         <a:scrgbClr r="0" g="0" b="0"/>
       </a:effectRef>
       <a:fontRef idx="minor"/>
@@ -7132,7 +6937,7 @@
           <a:p>
             <a:fld id="{5DA88A6F-FA6A-4228-B280-881FCD7B9AA7}" type="datetimeFigureOut">
               <a:rPr lang="sv-SE" smtClean="0"/>
-              <a:t>2026-07-15</a:t>
+              <a:t>2026-07-18</a:t>
             </a:fld>
             <a:endParaRPr lang="sv-SE"/>
           </a:p>
@@ -7330,7 +7135,7 @@
           <a:p>
             <a:fld id="{5DA88A6F-FA6A-4228-B280-881FCD7B9AA7}" type="datetimeFigureOut">
               <a:rPr lang="sv-SE" smtClean="0"/>
-              <a:t>2026-07-15</a:t>
+              <a:t>2026-07-18</a:t>
             </a:fld>
             <a:endParaRPr lang="sv-SE"/>
           </a:p>
@@ -7538,7 +7343,7 @@
           <a:p>
             <a:fld id="{5DA88A6F-FA6A-4228-B280-881FCD7B9AA7}" type="datetimeFigureOut">
               <a:rPr lang="sv-SE" smtClean="0"/>
-              <a:t>2026-07-15</a:t>
+              <a:t>2026-07-18</a:t>
             </a:fld>
             <a:endParaRPr lang="sv-SE"/>
           </a:p>
@@ -7736,7 +7541,7 @@
           <a:p>
             <a:fld id="{5DA88A6F-FA6A-4228-B280-881FCD7B9AA7}" type="datetimeFigureOut">
               <a:rPr lang="sv-SE" smtClean="0"/>
-              <a:t>2026-07-15</a:t>
+              <a:t>2026-07-18</a:t>
             </a:fld>
             <a:endParaRPr lang="sv-SE"/>
           </a:p>
@@ -8011,7 +7816,7 @@
           <a:p>
             <a:fld id="{5DA88A6F-FA6A-4228-B280-881FCD7B9AA7}" type="datetimeFigureOut">
               <a:rPr lang="sv-SE" smtClean="0"/>
-              <a:t>2026-07-15</a:t>
+              <a:t>2026-07-18</a:t>
             </a:fld>
             <a:endParaRPr lang="sv-SE"/>
           </a:p>
@@ -8276,7 +8081,7 @@
           <a:p>
             <a:fld id="{5DA88A6F-FA6A-4228-B280-881FCD7B9AA7}" type="datetimeFigureOut">
               <a:rPr lang="sv-SE" smtClean="0"/>
-              <a:t>2026-07-15</a:t>
+              <a:t>2026-07-18</a:t>
             </a:fld>
             <a:endParaRPr lang="sv-SE"/>
           </a:p>
@@ -8688,7 +8493,7 @@
           <a:p>
             <a:fld id="{5DA88A6F-FA6A-4228-B280-881FCD7B9AA7}" type="datetimeFigureOut">
               <a:rPr lang="sv-SE" smtClean="0"/>
-              <a:t>2026-07-15</a:t>
+              <a:t>2026-07-18</a:t>
             </a:fld>
             <a:endParaRPr lang="sv-SE"/>
           </a:p>
@@ -8829,7 +8634,7 @@
           <a:p>
             <a:fld id="{5DA88A6F-FA6A-4228-B280-881FCD7B9AA7}" type="datetimeFigureOut">
               <a:rPr lang="sv-SE" smtClean="0"/>
-              <a:t>2026-07-15</a:t>
+              <a:t>2026-07-18</a:t>
             </a:fld>
             <a:endParaRPr lang="sv-SE"/>
           </a:p>
@@ -8942,7 +8747,7 @@
           <a:p>
             <a:fld id="{5DA88A6F-FA6A-4228-B280-881FCD7B9AA7}" type="datetimeFigureOut">
               <a:rPr lang="sv-SE" smtClean="0"/>
-              <a:t>2026-07-15</a:t>
+              <a:t>2026-07-18</a:t>
             </a:fld>
             <a:endParaRPr lang="sv-SE"/>
           </a:p>
@@ -9253,7 +9058,7 @@
           <a:p>
             <a:fld id="{5DA88A6F-FA6A-4228-B280-881FCD7B9AA7}" type="datetimeFigureOut">
               <a:rPr lang="sv-SE" smtClean="0"/>
-              <a:t>2026-07-15</a:t>
+              <a:t>2026-07-18</a:t>
             </a:fld>
             <a:endParaRPr lang="sv-SE"/>
           </a:p>
@@ -9541,7 +9346,7 @@
           <a:p>
             <a:fld id="{5DA88A6F-FA6A-4228-B280-881FCD7B9AA7}" type="datetimeFigureOut">
               <a:rPr lang="sv-SE" smtClean="0"/>
-              <a:t>2026-07-15</a:t>
+              <a:t>2026-07-18</a:t>
             </a:fld>
             <a:endParaRPr lang="sv-SE"/>
           </a:p>
@@ -9782,7 +9587,7 @@
           <a:p>
             <a:fld id="{5DA88A6F-FA6A-4228-B280-881FCD7B9AA7}" type="datetimeFigureOut">
               <a:rPr lang="sv-SE" smtClean="0"/>
-              <a:t>2026-07-15</a:t>
+              <a:t>2026-07-18</a:t>
             </a:fld>
             <a:endParaRPr lang="sv-SE"/>
           </a:p>
@@ -10801,7 +10606,10 @@
           <a:lstStyle/>
           <a:p>
             <a:pPr algn="l"/>
-            <a:endParaRPr lang="sv-SE"/>
+            <a:r>
+              <a:rPr lang="sv-SE" dirty="0"/>
+              <a:t>Mest för Fabian</a:t>
+            </a:r>
           </a:p>
         </p:txBody>
       </p:sp>
@@ -10916,7 +10724,7 @@
     <p:bg>
       <p:bgPr>
         <a:solidFill>
-          <a:schemeClr val="bg1"/>
+          <a:schemeClr val="bg2"/>
         </a:solidFill>
         <a:effectLst/>
       </p:bgPr>
@@ -10937,10 +10745,10 @@
       </p:grpSpPr>
       <p:pic>
         <p:nvPicPr>
-          <p:cNvPr id="17" name="Picture 16">
+          <p:cNvPr id="29" name="Picture 28">
             <a:extLst>
               <a:ext uri="{FF2B5EF4-FFF2-40B4-BE49-F238E27FC236}">
-                <a16:creationId xmlns:a16="http://schemas.microsoft.com/office/drawing/2014/main" id="{96EB7922-D1A9-2E36-99DF-7FF7CC920583}"/>
+                <a16:creationId xmlns:a16="http://schemas.microsoft.com/office/drawing/2014/main" id="{32B65AF7-8A31-11F8-1616-11B563187564}"/>
               </a:ext>
             </a:extLst>
           </p:cNvPr>
@@ -10952,14 +10760,15 @@
         <p:blipFill>
           <a:blip r:embed="rId2">
             <a:duotone>
-              <a:schemeClr val="bg2">
-                <a:shade val="45000"/>
-                <a:satMod val="135000"/>
+              <a:prstClr val="black"/>
+              <a:schemeClr val="tx2">
+                <a:tint val="45000"/>
+                <a:satMod val="400000"/>
               </a:schemeClr>
-              <a:prstClr val="white"/>
             </a:duotone>
+            <a:alphaModFix amt="25000"/>
           </a:blip>
-          <a:srcRect t="14773" r="9091"/>
+          <a:srcRect t="15287" b="444"/>
           <a:stretch>
             <a:fillRect/>
           </a:stretch>
@@ -10976,10 +10785,111 @@
       </p:pic>
       <p:sp>
         <p:nvSpPr>
-          <p:cNvPr id="26" name="Rectangle 25">
+          <p:cNvPr id="2" name="Rubrik 1">
             <a:extLst>
               <a:ext uri="{FF2B5EF4-FFF2-40B4-BE49-F238E27FC236}">
-                <a16:creationId xmlns:a16="http://schemas.microsoft.com/office/drawing/2014/main" id="{B50AB553-2A96-4A92-96F2-93548E096954}"/>
+                <a16:creationId xmlns:a16="http://schemas.microsoft.com/office/drawing/2014/main" id="{E72AB9B4-6B5C-8E61-7EAC-280A4FA14351}"/>
+              </a:ext>
+            </a:extLst>
+          </p:cNvPr>
+          <p:cNvSpPr>
+            <a:spLocks noGrp="1"/>
+          </p:cNvSpPr>
+          <p:nvPr>
+            <p:ph type="title"/>
+          </p:nvPr>
+        </p:nvSpPr>
+        <p:spPr>
+          <a:xfrm>
+            <a:off x="838200" y="365125"/>
+            <a:ext cx="10515600" cy="1325563"/>
+          </a:xfrm>
+        </p:spPr>
+        <p:txBody>
+          <a:bodyPr vert="horz" lIns="91440" tIns="45720" rIns="91440" bIns="45720" rtlCol="0" anchor="ctr">
+            <a:normAutofit/>
+          </a:bodyPr>
+          <a:lstStyle/>
+          <a:p>
+            <a:r>
+              <a:rPr lang="en-US"/>
+              <a:t>En unit behöver 3 grejer</a:t>
+            </a:r>
+          </a:p>
+        </p:txBody>
+      </p:sp>
+      <p:graphicFrame>
+        <p:nvGraphicFramePr>
+          <p:cNvPr id="28" name="TextBox 11">
+            <a:extLst>
+              <a:ext uri="{FF2B5EF4-FFF2-40B4-BE49-F238E27FC236}">
+                <a16:creationId xmlns:a16="http://schemas.microsoft.com/office/drawing/2014/main" id="{CB0BDA97-2258-3CAD-A6BB-0DC604C74732}"/>
+              </a:ext>
+            </a:extLst>
+          </p:cNvPr>
+          <p:cNvGraphicFramePr/>
+          <p:nvPr>
+            <p:extLst>
+              <p:ext uri="{D42A27DB-BD31-4B8C-83A1-F6EECF244321}">
+                <p14:modId xmlns:p14="http://schemas.microsoft.com/office/powerpoint/2010/main" val="3067483481"/>
+              </p:ext>
+            </p:extLst>
+          </p:nvPr>
+        </p:nvGraphicFramePr>
+        <p:xfrm>
+          <a:off x="838200" y="1825625"/>
+          <a:ext cx="10515600" cy="4351338"/>
+        </p:xfrm>
+        <a:graphic>
+          <a:graphicData uri="http://schemas.openxmlformats.org/drawingml/2006/diagram">
+            <dgm:relIds xmlns:dgm="http://schemas.openxmlformats.org/drawingml/2006/diagram" xmlns:r="http://schemas.openxmlformats.org/officeDocument/2006/relationships" r:dm="rId3" r:lo="rId4" r:qs="rId5" r:cs="rId6"/>
+          </a:graphicData>
+        </a:graphic>
+      </p:graphicFrame>
+    </p:spTree>
+    <p:extLst>
+      <p:ext uri="{BB962C8B-B14F-4D97-AF65-F5344CB8AC3E}">
+        <p14:creationId xmlns:p14="http://schemas.microsoft.com/office/powerpoint/2010/main" val="1268312454"/>
+      </p:ext>
+    </p:extLst>
+  </p:cSld>
+  <p:clrMapOvr>
+    <a:overrideClrMapping bg1="dk1" tx1="lt1" bg2="dk2" tx2="lt2" accent1="accent1" accent2="accent2" accent3="accent3" accent4="accent4" accent5="accent5" accent6="accent6" hlink="hlink" folHlink="folHlink"/>
+  </p:clrMapOvr>
+</p:sld>
+</file>
+
+<file path=ppt/slides/slide3.xml><?xml version="1.0" encoding="utf-8"?>
+<p:sld xmlns:a="http://schemas.openxmlformats.org/drawingml/2006/main" xmlns:r="http://schemas.openxmlformats.org/officeDocument/2006/relationships" xmlns:p="http://schemas.openxmlformats.org/presentationml/2006/main">
+  <p:cSld>
+    <p:bg>
+      <p:bgPr>
+        <a:solidFill>
+          <a:schemeClr val="bg1"/>
+        </a:solidFill>
+        <a:effectLst/>
+      </p:bgPr>
+    </p:bg>
+    <p:spTree>
+      <p:nvGrpSpPr>
+        <p:cNvPr id="1" name=""/>
+        <p:cNvGrpSpPr/>
+        <p:nvPr/>
+      </p:nvGrpSpPr>
+      <p:grpSpPr>
+        <a:xfrm>
+          <a:off x="0" y="0"/>
+          <a:ext cx="0" cy="0"/>
+          <a:chOff x="0" y="0"/>
+          <a:chExt cx="0" cy="0"/>
+        </a:xfrm>
+      </p:grpSpPr>
+      <p:sp useBgFill="1">
+        <p:nvSpPr>
+          <p:cNvPr id="19" name="Rectangle 18">
+            <a:extLst>
+              <a:ext uri="{FF2B5EF4-FFF2-40B4-BE49-F238E27FC236}">
+                <a16:creationId xmlns:a16="http://schemas.microsoft.com/office/drawing/2014/main" id="{1B15ED52-F352-441B-82BF-E0EA34836D08}"/>
               </a:ext>
               <a:ext uri="{C183D7F6-B498-43B3-948B-1728B52AA6E4}">
                 <adec:decorative xmlns:adec="http://schemas.microsoft.com/office/drawing/2017/decorative" val="1"/>
@@ -11005,22 +10915,294 @@
           <a:prstGeom prst="rect">
             <a:avLst/>
           </a:prstGeom>
+          <a:ln w="12700" cap="flat" cmpd="sng" algn="ctr">
+            <a:noFill/>
+            <a:prstDash val="solid"/>
+            <a:miter lim="800000"/>
+          </a:ln>
+          <a:effectLst/>
+          <a:extLst>
+            <a:ext uri="{91240B29-F687-4F45-9708-019B960494DF}">
+              <a14:hiddenLine xmlns:a14="http://schemas.microsoft.com/office/drawing/2010/main" w="12700" cap="flat" cmpd="sng" algn="ctr">
+                <a:solidFill>
+                  <a:schemeClr val="accent1">
+                    <a:shade val="50000"/>
+                  </a:schemeClr>
+                </a:solidFill>
+                <a:prstDash val="solid"/>
+                <a:miter lim="800000"/>
+              </a14:hiddenLine>
+            </a:ext>
+          </a:extLst>
+        </p:spPr>
+        <p:style>
+          <a:lnRef idx="2">
+            <a:schemeClr val="accent1">
+              <a:shade val="50000"/>
+            </a:schemeClr>
+          </a:lnRef>
+          <a:fillRef idx="1">
+            <a:schemeClr val="accent1"/>
+          </a:fillRef>
+          <a:effectRef idx="0">
+            <a:schemeClr val="accent1"/>
+          </a:effectRef>
+          <a:fontRef idx="minor">
+            <a:schemeClr val="lt1"/>
+          </a:fontRef>
+        </p:style>
+        <p:txBody>
+          <a:bodyPr rtlCol="0" anchor="ctr"/>
+          <a:lstStyle/>
+          <a:p>
+            <a:pPr algn="ctr"/>
+            <a:endParaRPr lang="en-US"/>
+          </a:p>
+        </p:txBody>
+      </p:sp>
+      <p:sp>
+        <p:nvSpPr>
+          <p:cNvPr id="2" name="Rubrik 1">
+            <a:extLst>
+              <a:ext uri="{FF2B5EF4-FFF2-40B4-BE49-F238E27FC236}">
+                <a16:creationId xmlns:a16="http://schemas.microsoft.com/office/drawing/2014/main" id="{2BD47063-DEBF-3B9F-9663-450A1A9EDC09}"/>
+              </a:ext>
+            </a:extLst>
+          </p:cNvPr>
+          <p:cNvSpPr>
+            <a:spLocks noGrp="1"/>
+          </p:cNvSpPr>
+          <p:nvPr>
+            <p:ph type="title"/>
+          </p:nvPr>
+        </p:nvSpPr>
+        <p:spPr>
+          <a:xfrm>
+            <a:off x="1149716" y="499397"/>
+            <a:ext cx="5929422" cy="1640180"/>
+          </a:xfrm>
+        </p:spPr>
+        <p:txBody>
+          <a:bodyPr anchor="b">
+            <a:normAutofit/>
+          </a:bodyPr>
+          <a:lstStyle/>
+          <a:p>
+            <a:r>
+              <a:rPr lang="en-US" sz="4000" dirty="0"/>
+              <a:t>Unit Definition </a:t>
+            </a:r>
+            <a:r>
+              <a:rPr lang="en-US" sz="2800" dirty="0"/>
+              <a:t>–</a:t>
+            </a:r>
+            <a:r>
+              <a:rPr lang="en-US" sz="4000" dirty="0"/>
+              <a:t> </a:t>
+            </a:r>
+            <a:r>
+              <a:rPr lang="en-US" sz="2800" dirty="0"/>
+              <a:t>Unit Details</a:t>
+            </a:r>
+            <a:endParaRPr lang="sv-SE" sz="2800" dirty="0"/>
+          </a:p>
+        </p:txBody>
+      </p:sp>
+      <p:sp>
+        <p:nvSpPr>
+          <p:cNvPr id="3" name="Platshållare för innehåll 2">
+            <a:extLst>
+              <a:ext uri="{FF2B5EF4-FFF2-40B4-BE49-F238E27FC236}">
+                <a16:creationId xmlns:a16="http://schemas.microsoft.com/office/drawing/2014/main" id="{E3E2D60A-07D6-4158-5D3D-D4C7BA3BBAD2}"/>
+              </a:ext>
+            </a:extLst>
+          </p:cNvPr>
+          <p:cNvSpPr>
+            <a:spLocks noGrp="1"/>
+          </p:cNvSpPr>
+          <p:nvPr>
+            <p:ph idx="1"/>
+          </p:nvPr>
+        </p:nvSpPr>
+        <p:spPr>
+          <a:xfrm>
+            <a:off x="1149717" y="2423821"/>
+            <a:ext cx="5929422" cy="3519780"/>
+          </a:xfrm>
+        </p:spPr>
+        <p:txBody>
+          <a:bodyPr>
+            <a:normAutofit/>
+          </a:bodyPr>
+          <a:lstStyle/>
+          <a:p>
+            <a:r>
+              <a:rPr lang="en-US" sz="2000" dirty="0"/>
+              <a:t>En unit definition </a:t>
+            </a:r>
+            <a:r>
+              <a:rPr lang="en-US" sz="2000" dirty="0" err="1"/>
+              <a:t>definerar</a:t>
+            </a:r>
+            <a:r>
+              <a:rPr lang="en-US" sz="2000" dirty="0"/>
+              <a:t> </a:t>
+            </a:r>
+            <a:r>
+              <a:rPr lang="en-US" sz="2000" dirty="0" err="1"/>
+              <a:t>vad</a:t>
+            </a:r>
+            <a:r>
+              <a:rPr lang="en-US" sz="2000" dirty="0"/>
+              <a:t> </a:t>
+            </a:r>
+            <a:r>
+              <a:rPr lang="en-US" sz="2000" dirty="0" err="1"/>
+              <a:t>en</a:t>
+            </a:r>
+            <a:r>
+              <a:rPr lang="en-US" sz="2000" dirty="0"/>
+              <a:t> unit är</a:t>
+            </a:r>
+          </a:p>
+          <a:p>
+            <a:r>
+              <a:rPr lang="en-US" sz="2000" dirty="0" err="1"/>
+              <a:t>Här</a:t>
+            </a:r>
+            <a:r>
+              <a:rPr lang="en-US" sz="2000" dirty="0"/>
+              <a:t> </a:t>
+            </a:r>
+            <a:r>
+              <a:rPr lang="en-US" sz="2000" dirty="0" err="1"/>
+              <a:t>skrivs</a:t>
+            </a:r>
+            <a:r>
+              <a:rPr lang="en-US" sz="2000" dirty="0"/>
+              <a:t> all relevant data in</a:t>
+            </a:r>
+          </a:p>
+          <a:p>
+            <a:r>
+              <a:rPr lang="en-US" sz="2000" dirty="0"/>
+              <a:t>Triangle footprints </a:t>
+            </a:r>
+            <a:r>
+              <a:rPr lang="en-US" sz="2000" dirty="0" err="1"/>
+              <a:t>skapas</a:t>
+            </a:r>
+            <a:r>
+              <a:rPr lang="en-US" sz="2000" dirty="0"/>
+              <a:t> via </a:t>
+            </a:r>
+            <a:r>
+              <a:rPr lang="en-US" sz="2000" dirty="0" err="1"/>
+              <a:t>scenen</a:t>
+            </a:r>
+            <a:r>
+              <a:rPr lang="en-US" sz="2000" dirty="0"/>
+              <a:t> </a:t>
+            </a:r>
+            <a:r>
+              <a:rPr lang="en-US" sz="2000" b="1" dirty="0"/>
+              <a:t>Unit Builder</a:t>
+            </a:r>
+          </a:p>
+          <a:p>
+            <a:r>
+              <a:rPr lang="en-US" sz="2000" dirty="0"/>
+              <a:t>Relevant för </a:t>
+            </a:r>
+            <a:r>
+              <a:rPr lang="en-US" sz="2000" b="1" dirty="0" err="1"/>
+              <a:t>båda</a:t>
+            </a:r>
+            <a:r>
+              <a:rPr lang="en-US" sz="2000" b="1" dirty="0"/>
+              <a:t> </a:t>
+            </a:r>
+            <a:r>
+              <a:rPr lang="en-US" sz="2000" b="1" dirty="0" err="1"/>
+              <a:t>scenerna</a:t>
+            </a:r>
+            <a:endParaRPr lang="sv-SE" sz="2000" b="1" dirty="0"/>
+          </a:p>
+        </p:txBody>
+      </p:sp>
+      <p:pic>
+        <p:nvPicPr>
+          <p:cNvPr id="5" name="Bildobjekt 4">
+            <a:extLst>
+              <a:ext uri="{FF2B5EF4-FFF2-40B4-BE49-F238E27FC236}">
+                <a16:creationId xmlns:a16="http://schemas.microsoft.com/office/drawing/2014/main" id="{D27E6685-44E5-B95A-4981-C401214FD1D6}"/>
+              </a:ext>
+            </a:extLst>
+          </p:cNvPr>
+          <p:cNvPicPr>
+            <a:picLocks noChangeAspect="1"/>
+          </p:cNvPicPr>
+          <p:nvPr/>
+        </p:nvPicPr>
+        <p:blipFill>
+          <a:blip r:embed="rId2"/>
+          <a:stretch>
+            <a:fillRect/>
+          </a:stretch>
+        </p:blipFill>
+        <p:spPr>
+          <a:xfrm>
+            <a:off x="7745506" y="1449291"/>
+            <a:ext cx="3765176" cy="3851842"/>
+          </a:xfrm>
+          <a:prstGeom prst="rect">
+            <a:avLst/>
+          </a:prstGeom>
+        </p:spPr>
+      </p:pic>
+      <p:sp>
+        <p:nvSpPr>
+          <p:cNvPr id="21" name="Rectangle 20">
+            <a:extLst>
+              <a:ext uri="{FF2B5EF4-FFF2-40B4-BE49-F238E27FC236}">
+                <a16:creationId xmlns:a16="http://schemas.microsoft.com/office/drawing/2014/main" id="{61707E60-CEC9-4661-AA82-69242EB4BDC3}"/>
+              </a:ext>
+              <a:ext uri="{C183D7F6-B498-43B3-948B-1728B52AA6E4}">
+                <adec:decorative xmlns:adec="http://schemas.microsoft.com/office/drawing/2017/decorative" val="1"/>
+              </a:ext>
+            </a:extLst>
+          </p:cNvPr>
+          <p:cNvSpPr>
+            <a:spLocks noGrp="1" noRot="1" noChangeAspect="1" noMove="1" noResize="1" noEditPoints="1" noAdjustHandles="1" noChangeArrowheads="1" noChangeShapeType="1" noTextEdit="1"/>
+          </p:cNvSpPr>
+          <p:nvPr>
+            <p:extLst>
+              <p:ext uri="{386F3935-93C4-4BCD-93E2-E3B085C9AB24}">
+                <p16:designElem xmlns:p16="http://schemas.microsoft.com/office/powerpoint/2015/main" val="1"/>
+              </p:ext>
+            </p:extLst>
+          </p:nvPr>
+        </p:nvSpPr>
+        <p:spPr>
+          <a:xfrm flipH="1">
+            <a:off x="0" y="6406116"/>
+            <a:ext cx="12191998" cy="461774"/>
+          </a:xfrm>
+          <a:prstGeom prst="rect">
+            <a:avLst/>
+          </a:prstGeom>
           <a:gradFill>
             <a:gsLst>
-              <a:gs pos="10000">
-                <a:schemeClr val="bg2">
-                  <a:alpha val="68000"/>
-                </a:schemeClr>
+              <a:gs pos="0">
+                <a:srgbClr val="000000"/>
               </a:gs>
-              <a:gs pos="85000">
-                <a:schemeClr val="bg2">
-                  <a:alpha val="97000"/>
+              <a:gs pos="100000">
+                <a:schemeClr val="accent1">
+                  <a:lumMod val="75000"/>
                 </a:schemeClr>
               </a:gs>
             </a:gsLst>
-            <a:path path="circle">
-              <a:fillToRect l="50000" t="50000" r="50000" b="50000"/>
-            </a:path>
+            <a:lin ang="15600000" scaled="0"/>
           </a:gradFill>
           <a:ln>
             <a:noFill/>
@@ -11053,75 +11235,81 @@
       </p:sp>
       <p:sp>
         <p:nvSpPr>
-          <p:cNvPr id="2" name="Rubrik 1">
+          <p:cNvPr id="23" name="Rectangle 22">
             <a:extLst>
               <a:ext uri="{FF2B5EF4-FFF2-40B4-BE49-F238E27FC236}">
-                <a16:creationId xmlns:a16="http://schemas.microsoft.com/office/drawing/2014/main" id="{E72AB9B4-6B5C-8E61-7EAC-280A4FA14351}"/>
+                <a16:creationId xmlns:a16="http://schemas.microsoft.com/office/drawing/2014/main" id="{8F035CD8-AE30-4146-96F2-036B0CE5E4F3}"/>
+              </a:ext>
+              <a:ext uri="{C183D7F6-B498-43B3-948B-1728B52AA6E4}">
+                <adec:decorative xmlns:adec="http://schemas.microsoft.com/office/drawing/2017/decorative" val="1"/>
               </a:ext>
             </a:extLst>
           </p:cNvPr>
           <p:cNvSpPr>
-            <a:spLocks noGrp="1"/>
+            <a:spLocks noGrp="1" noRot="1" noChangeAspect="1" noMove="1" noResize="1" noEditPoints="1" noAdjustHandles="1" noChangeArrowheads="1" noChangeShapeType="1" noTextEdit="1"/>
           </p:cNvSpPr>
           <p:nvPr>
-            <p:ph type="title"/>
+            <p:extLst>
+              <p:ext uri="{386F3935-93C4-4BCD-93E2-E3B085C9AB24}">
+                <p16:designElem xmlns:p16="http://schemas.microsoft.com/office/powerpoint/2015/main" val="1"/>
+              </p:ext>
+            </p:extLst>
           </p:nvPr>
         </p:nvSpPr>
         <p:spPr>
-          <a:xfrm>
-            <a:off x="838200" y="365125"/>
-            <a:ext cx="10515600" cy="1325563"/>
+          <a:xfrm flipH="1">
+            <a:off x="8115300" y="6406115"/>
+            <a:ext cx="4076698" cy="464399"/>
           </a:xfrm>
+          <a:prstGeom prst="rect">
+            <a:avLst/>
+          </a:prstGeom>
+          <a:gradFill>
+            <a:gsLst>
+              <a:gs pos="19000">
+                <a:srgbClr val="000000">
+                  <a:alpha val="46000"/>
+                </a:srgbClr>
+              </a:gs>
+              <a:gs pos="99000">
+                <a:schemeClr val="accent1"/>
+              </a:gs>
+            </a:gsLst>
+            <a:lin ang="13200000" scaled="0"/>
+          </a:gradFill>
+          <a:ln>
+            <a:noFill/>
+          </a:ln>
         </p:spPr>
+        <p:style>
+          <a:lnRef idx="2">
+            <a:schemeClr val="accent1">
+              <a:shade val="50000"/>
+            </a:schemeClr>
+          </a:lnRef>
+          <a:fillRef idx="1">
+            <a:schemeClr val="accent1"/>
+          </a:fillRef>
+          <a:effectRef idx="0">
+            <a:schemeClr val="accent1"/>
+          </a:effectRef>
+          <a:fontRef idx="minor">
+            <a:schemeClr val="lt1"/>
+          </a:fontRef>
+        </p:style>
         <p:txBody>
-          <a:bodyPr>
-            <a:normAutofit/>
-          </a:bodyPr>
+          <a:bodyPr rtlCol="0" anchor="ctr"/>
           <a:lstStyle/>
           <a:p>
-            <a:r>
-              <a:rPr lang="en-US"/>
-              <a:t>En unit behöver 3 grejer</a:t>
-            </a:r>
-            <a:endParaRPr lang="sv-SE"/>
+            <a:pPr algn="ctr"/>
+            <a:endParaRPr lang="en-US"/>
           </a:p>
         </p:txBody>
       </p:sp>
-      <p:graphicFrame>
-        <p:nvGraphicFramePr>
-          <p:cNvPr id="5" name="Platshållare för innehåll 2">
-            <a:extLst>
-              <a:ext uri="{FF2B5EF4-FFF2-40B4-BE49-F238E27FC236}">
-                <a16:creationId xmlns:a16="http://schemas.microsoft.com/office/drawing/2014/main" id="{C9EBB8A2-E0BF-0806-E6C3-8F9E32886D84}"/>
-              </a:ext>
-            </a:extLst>
-          </p:cNvPr>
-          <p:cNvGraphicFramePr>
-            <a:graphicFrameLocks noGrp="1"/>
-          </p:cNvGraphicFramePr>
-          <p:nvPr>
-            <p:ph idx="1"/>
-            <p:extLst>
-              <p:ext uri="{D42A27DB-BD31-4B8C-83A1-F6EECF244321}">
-                <p14:modId xmlns:p14="http://schemas.microsoft.com/office/powerpoint/2010/main" val="2009835851"/>
-              </p:ext>
-            </p:extLst>
-          </p:nvPr>
-        </p:nvGraphicFramePr>
-        <p:xfrm>
-          <a:off x="838200" y="1825625"/>
-          <a:ext cx="10515600" cy="4351338"/>
-        </p:xfrm>
-        <a:graphic>
-          <a:graphicData uri="http://schemas.openxmlformats.org/drawingml/2006/diagram">
-            <dgm:relIds xmlns:dgm="http://schemas.openxmlformats.org/drawingml/2006/diagram" xmlns:r="http://schemas.openxmlformats.org/officeDocument/2006/relationships" r:dm="rId3" r:lo="rId4" r:qs="rId5" r:cs="rId6"/>
-          </a:graphicData>
-        </a:graphic>
-      </p:graphicFrame>
     </p:spTree>
     <p:extLst>
       <p:ext uri="{BB962C8B-B14F-4D97-AF65-F5344CB8AC3E}">
-        <p14:creationId xmlns:p14="http://schemas.microsoft.com/office/powerpoint/2010/main" val="1268312454"/>
+        <p14:creationId xmlns:p14="http://schemas.microsoft.com/office/powerpoint/2010/main" val="4126772509"/>
       </p:ext>
     </p:extLst>
   </p:cSld>
@@ -11131,7 +11319,7 @@
 </p:sld>
 </file>
 
-<file path=ppt/slides/slide3.xml><?xml version="1.0" encoding="utf-8"?>
+<file path=ppt/slides/slide4.xml><?xml version="1.0" encoding="utf-8"?>
 <p:sld xmlns:a="http://schemas.openxmlformats.org/drawingml/2006/main" xmlns:r="http://schemas.openxmlformats.org/officeDocument/2006/relationships" xmlns:p="http://schemas.openxmlformats.org/presentationml/2006/main">
   <p:cSld>
     <p:bg>
@@ -11256,8 +11444,8 @@
         </p:nvSpPr>
         <p:spPr>
           <a:xfrm>
-            <a:off x="1136396" y="457201"/>
-            <a:ext cx="5814240" cy="1556870"/>
+            <a:off x="1043275" y="457201"/>
+            <a:ext cx="6775151" cy="1556870"/>
           </a:xfrm>
         </p:spPr>
         <p:txBody>
@@ -11268,7 +11456,27 @@
           <a:p>
             <a:r>
               <a:rPr lang="en-US" sz="4000" dirty="0"/>
-              <a:t> UI Button Prefab</a:t>
+              <a:t> UI </a:t>
+            </a:r>
+            <a:r>
+              <a:rPr lang="en-US" sz="4000" dirty="0" err="1"/>
+              <a:t>knapp</a:t>
+            </a:r>
+            <a:r>
+              <a:rPr lang="en-US" sz="4000" dirty="0"/>
+              <a:t> </a:t>
+            </a:r>
+            <a:r>
+              <a:rPr lang="en-US" sz="2800" dirty="0"/>
+              <a:t>–</a:t>
+            </a:r>
+            <a:r>
+              <a:rPr lang="en-US" sz="4000" dirty="0"/>
+              <a:t> </a:t>
+            </a:r>
+            <a:r>
+              <a:rPr lang="en-US" sz="2800" dirty="0"/>
+              <a:t>UI unit card in hand</a:t>
             </a:r>
             <a:endParaRPr lang="sv-SE" sz="4000" dirty="0"/>
           </a:p>
@@ -11369,82 +11577,109 @@
           <a:p>
             <a:r>
               <a:rPr lang="en-US" sz="2000" dirty="0"/>
-              <a:t>Dels </a:t>
+              <a:t>Denna component </a:t>
             </a:r>
             <a:r>
               <a:rPr lang="en-US" sz="2000" dirty="0" err="1"/>
-              <a:t>finns</a:t>
+              <a:t>fyller</a:t>
             </a:r>
             <a:r>
               <a:rPr lang="en-US" sz="2000" dirty="0"/>
-              <a:t> Unit Card UI </a:t>
+              <a:t> I all information </a:t>
             </a:r>
             <a:r>
               <a:rPr lang="en-US" sz="2000" dirty="0" err="1"/>
-              <a:t>som</a:t>
+              <a:t>själv</a:t>
             </a:r>
             <a:r>
               <a:rPr lang="en-US" sz="2000" dirty="0"/>
-              <a:t> ska </a:t>
+              <a:t> </a:t>
+            </a:r>
+            <a:r>
+              <a:rPr lang="en-US" sz="2000" b="1" dirty="0" err="1"/>
+              <a:t>så</a:t>
+            </a:r>
+            <a:r>
+              <a:rPr lang="en-US" sz="2000" b="1" dirty="0"/>
+              <a:t> </a:t>
+            </a:r>
+            <a:r>
+              <a:rPr lang="en-US" sz="2000" b="1" dirty="0" err="1"/>
+              <a:t>länge</a:t>
+            </a:r>
+            <a:r>
+              <a:rPr lang="en-US" sz="2000" b="1" dirty="0"/>
+              <a:t> den </a:t>
+            </a:r>
+            <a:r>
+              <a:rPr lang="en-US" sz="2000" b="1" dirty="0" err="1"/>
+              <a:t>får</a:t>
+            </a:r>
+            <a:r>
+              <a:rPr lang="en-US" sz="2000" dirty="0"/>
+              <a:t> </a:t>
             </a:r>
             <a:r>
               <a:rPr lang="en-US" sz="2000" dirty="0" err="1"/>
-              <a:t>fyllas</a:t>
+              <a:t>en</a:t>
             </a:r>
             <a:r>
               <a:rPr lang="en-US" sz="2000" dirty="0"/>
-              <a:t> med information. </a:t>
+              <a:t> </a:t>
+            </a:r>
+            <a:r>
+              <a:rPr lang="en-US" sz="2000" b="1" dirty="0"/>
+              <a:t>Unit Definition </a:t>
             </a:r>
             <a:r>
               <a:rPr lang="en-US" sz="2000" dirty="0" err="1"/>
-              <a:t>Viktigaste</a:t>
+              <a:t>instoppad</a:t>
             </a:r>
             <a:r>
               <a:rPr lang="en-US" sz="2000" dirty="0"/>
-              <a:t> är de under </a:t>
-            </a:r>
-            <a:r>
-              <a:rPr lang="en-US" sz="2000" b="1" dirty="0"/>
-              <a:t>References</a:t>
-            </a:r>
-            <a:endParaRPr lang="en-US" sz="2000" dirty="0"/>
-          </a:p>
-          <a:p>
+              <a:t> med all info</a:t>
+            </a:r>
+          </a:p>
+          <a:p>
+            <a:r>
+              <a:rPr lang="en-US" sz="2000" dirty="0" err="1"/>
+              <a:t>Så</a:t>
+            </a:r>
             <a:r>
               <a:rPr lang="en-US" sz="2000" dirty="0"/>
-              <a:t>Sen ska </a:t>
+              <a:t> </a:t>
             </a:r>
             <a:r>
               <a:rPr lang="en-US" sz="2000" dirty="0" err="1"/>
-              <a:t>varje</a:t>
+              <a:t>allt</a:t>
             </a:r>
             <a:r>
               <a:rPr lang="en-US" sz="2000" dirty="0"/>
-              <a:t> child </a:t>
+              <a:t> du ska </a:t>
             </a:r>
             <a:r>
               <a:rPr lang="en-US" sz="2000" dirty="0" err="1"/>
-              <a:t>få</a:t>
+              <a:t>göra</a:t>
             </a:r>
             <a:r>
               <a:rPr lang="en-US" sz="2000" dirty="0"/>
-              <a:t> info </a:t>
+              <a:t> </a:t>
             </a:r>
             <a:r>
               <a:rPr lang="en-US" sz="2000" dirty="0" err="1"/>
-              <a:t>som</a:t>
+              <a:t>är</a:t>
             </a:r>
             <a:r>
               <a:rPr lang="en-US" sz="2000" dirty="0"/>
-              <a:t> ikon, </a:t>
+              <a:t> </a:t>
             </a:r>
             <a:r>
               <a:rPr lang="en-US" sz="2000" dirty="0" err="1"/>
-              <a:t>namn</a:t>
+              <a:t>att</a:t>
             </a:r>
             <a:r>
               <a:rPr lang="en-US" sz="2000" dirty="0"/>
-              <a:t> etc.</a:t>
+              <a:t> drag &amp; drop Unit Definition</a:t>
             </a:r>
           </a:p>
           <a:p>
@@ -11691,454 +11926,6 @@
 </p:sld>
 </file>
 
-<file path=ppt/slides/slide4.xml><?xml version="1.0" encoding="utf-8"?>
-<p:sld xmlns:a="http://schemas.openxmlformats.org/drawingml/2006/main" xmlns:r="http://schemas.openxmlformats.org/officeDocument/2006/relationships" xmlns:p="http://schemas.openxmlformats.org/presentationml/2006/main">
-  <p:cSld>
-    <p:bg>
-      <p:bgPr>
-        <a:solidFill>
-          <a:schemeClr val="bg1"/>
-        </a:solidFill>
-        <a:effectLst/>
-      </p:bgPr>
-    </p:bg>
-    <p:spTree>
-      <p:nvGrpSpPr>
-        <p:cNvPr id="1" name=""/>
-        <p:cNvGrpSpPr/>
-        <p:nvPr/>
-      </p:nvGrpSpPr>
-      <p:grpSpPr>
-        <a:xfrm>
-          <a:off x="0" y="0"/>
-          <a:ext cx="0" cy="0"/>
-          <a:chOff x="0" y="0"/>
-          <a:chExt cx="0" cy="0"/>
-        </a:xfrm>
-      </p:grpSpPr>
-      <p:sp useBgFill="1">
-        <p:nvSpPr>
-          <p:cNvPr id="19" name="Rectangle 18">
-            <a:extLst>
-              <a:ext uri="{FF2B5EF4-FFF2-40B4-BE49-F238E27FC236}">
-                <a16:creationId xmlns:a16="http://schemas.microsoft.com/office/drawing/2014/main" id="{1B15ED52-F352-441B-82BF-E0EA34836D08}"/>
-              </a:ext>
-              <a:ext uri="{C183D7F6-B498-43B3-948B-1728B52AA6E4}">
-                <adec:decorative xmlns:adec="http://schemas.microsoft.com/office/drawing/2017/decorative" val="1"/>
-              </a:ext>
-            </a:extLst>
-          </p:cNvPr>
-          <p:cNvSpPr>
-            <a:spLocks noGrp="1" noRot="1" noChangeAspect="1" noMove="1" noResize="1" noEditPoints="1" noAdjustHandles="1" noChangeArrowheads="1" noChangeShapeType="1" noTextEdit="1"/>
-          </p:cNvSpPr>
-          <p:nvPr>
-            <p:extLst>
-              <p:ext uri="{386F3935-93C4-4BCD-93E2-E3B085C9AB24}">
-                <p16:designElem xmlns:p16="http://schemas.microsoft.com/office/powerpoint/2015/main" val="1"/>
-              </p:ext>
-            </p:extLst>
-          </p:nvPr>
-        </p:nvSpPr>
-        <p:spPr>
-          <a:xfrm>
-            <a:off x="0" y="0"/>
-            <a:ext cx="12192000" cy="6858000"/>
-          </a:xfrm>
-          <a:prstGeom prst="rect">
-            <a:avLst/>
-          </a:prstGeom>
-          <a:ln w="12700" cap="flat" cmpd="sng" algn="ctr">
-            <a:noFill/>
-            <a:prstDash val="solid"/>
-            <a:miter lim="800000"/>
-          </a:ln>
-          <a:effectLst/>
-          <a:extLst>
-            <a:ext uri="{91240B29-F687-4F45-9708-019B960494DF}">
-              <a14:hiddenLine xmlns:a14="http://schemas.microsoft.com/office/drawing/2010/main" w="12700" cap="flat" cmpd="sng" algn="ctr">
-                <a:solidFill>
-                  <a:schemeClr val="accent1">
-                    <a:shade val="50000"/>
-                  </a:schemeClr>
-                </a:solidFill>
-                <a:prstDash val="solid"/>
-                <a:miter lim="800000"/>
-              </a14:hiddenLine>
-            </a:ext>
-          </a:extLst>
-        </p:spPr>
-        <p:style>
-          <a:lnRef idx="2">
-            <a:schemeClr val="accent1">
-              <a:shade val="50000"/>
-            </a:schemeClr>
-          </a:lnRef>
-          <a:fillRef idx="1">
-            <a:schemeClr val="accent1"/>
-          </a:fillRef>
-          <a:effectRef idx="0">
-            <a:schemeClr val="accent1"/>
-          </a:effectRef>
-          <a:fontRef idx="minor">
-            <a:schemeClr val="lt1"/>
-          </a:fontRef>
-        </p:style>
-        <p:txBody>
-          <a:bodyPr rtlCol="0" anchor="ctr"/>
-          <a:lstStyle/>
-          <a:p>
-            <a:pPr algn="ctr"/>
-            <a:endParaRPr lang="en-US"/>
-          </a:p>
-        </p:txBody>
-      </p:sp>
-      <p:sp>
-        <p:nvSpPr>
-          <p:cNvPr id="2" name="Rubrik 1">
-            <a:extLst>
-              <a:ext uri="{FF2B5EF4-FFF2-40B4-BE49-F238E27FC236}">
-                <a16:creationId xmlns:a16="http://schemas.microsoft.com/office/drawing/2014/main" id="{2BD47063-DEBF-3B9F-9663-450A1A9EDC09}"/>
-              </a:ext>
-            </a:extLst>
-          </p:cNvPr>
-          <p:cNvSpPr>
-            <a:spLocks noGrp="1"/>
-          </p:cNvSpPr>
-          <p:nvPr>
-            <p:ph type="title"/>
-          </p:nvPr>
-        </p:nvSpPr>
-        <p:spPr>
-          <a:xfrm>
-            <a:off x="1149716" y="499397"/>
-            <a:ext cx="5929422" cy="1640180"/>
-          </a:xfrm>
-        </p:spPr>
-        <p:txBody>
-          <a:bodyPr anchor="b">
-            <a:normAutofit/>
-          </a:bodyPr>
-          <a:lstStyle/>
-          <a:p>
-            <a:r>
-              <a:rPr lang="en-US" sz="4000"/>
-              <a:t>Unit Definition</a:t>
-            </a:r>
-            <a:endParaRPr lang="sv-SE" sz="4000"/>
-          </a:p>
-        </p:txBody>
-      </p:sp>
-      <p:sp>
-        <p:nvSpPr>
-          <p:cNvPr id="3" name="Platshållare för innehåll 2">
-            <a:extLst>
-              <a:ext uri="{FF2B5EF4-FFF2-40B4-BE49-F238E27FC236}">
-                <a16:creationId xmlns:a16="http://schemas.microsoft.com/office/drawing/2014/main" id="{E3E2D60A-07D6-4158-5D3D-D4C7BA3BBAD2}"/>
-              </a:ext>
-            </a:extLst>
-          </p:cNvPr>
-          <p:cNvSpPr>
-            <a:spLocks noGrp="1"/>
-          </p:cNvSpPr>
-          <p:nvPr>
-            <p:ph idx="1"/>
-          </p:nvPr>
-        </p:nvSpPr>
-        <p:spPr>
-          <a:xfrm>
-            <a:off x="1149717" y="2423821"/>
-            <a:ext cx="5929422" cy="3519780"/>
-          </a:xfrm>
-        </p:spPr>
-        <p:txBody>
-          <a:bodyPr>
-            <a:normAutofit/>
-          </a:bodyPr>
-          <a:lstStyle/>
-          <a:p>
-            <a:r>
-              <a:rPr lang="en-US" sz="2000" dirty="0"/>
-              <a:t>En unit definition </a:t>
-            </a:r>
-            <a:r>
-              <a:rPr lang="en-US" sz="2000" dirty="0" err="1"/>
-              <a:t>definerar</a:t>
-            </a:r>
-            <a:r>
-              <a:rPr lang="en-US" sz="2000" dirty="0"/>
-              <a:t> </a:t>
-            </a:r>
-            <a:r>
-              <a:rPr lang="en-US" sz="2000" dirty="0" err="1"/>
-              <a:t>vad</a:t>
-            </a:r>
-            <a:r>
-              <a:rPr lang="en-US" sz="2000" dirty="0"/>
-              <a:t> </a:t>
-            </a:r>
-            <a:r>
-              <a:rPr lang="en-US" sz="2000" dirty="0" err="1"/>
-              <a:t>en</a:t>
-            </a:r>
-            <a:r>
-              <a:rPr lang="en-US" sz="2000" dirty="0"/>
-              <a:t> unit är</a:t>
-            </a:r>
-          </a:p>
-          <a:p>
-            <a:r>
-              <a:rPr lang="en-US" sz="2000" dirty="0" err="1"/>
-              <a:t>Här</a:t>
-            </a:r>
-            <a:r>
-              <a:rPr lang="en-US" sz="2000" dirty="0"/>
-              <a:t> </a:t>
-            </a:r>
-            <a:r>
-              <a:rPr lang="en-US" sz="2000" dirty="0" err="1"/>
-              <a:t>skrivs</a:t>
-            </a:r>
-            <a:r>
-              <a:rPr lang="en-US" sz="2000" dirty="0"/>
-              <a:t> all relevant data in</a:t>
-            </a:r>
-          </a:p>
-          <a:p>
-            <a:r>
-              <a:rPr lang="en-US" sz="2000" dirty="0"/>
-              <a:t>Triangle footprints </a:t>
-            </a:r>
-            <a:r>
-              <a:rPr lang="en-US" sz="2000" dirty="0" err="1"/>
-              <a:t>skapas</a:t>
-            </a:r>
-            <a:r>
-              <a:rPr lang="en-US" sz="2000" dirty="0"/>
-              <a:t> via </a:t>
-            </a:r>
-            <a:r>
-              <a:rPr lang="en-US" sz="2000" dirty="0" err="1"/>
-              <a:t>scenen</a:t>
-            </a:r>
-            <a:r>
-              <a:rPr lang="en-US" sz="2000" dirty="0"/>
-              <a:t> </a:t>
-            </a:r>
-            <a:r>
-              <a:rPr lang="en-US" sz="2000" b="1" dirty="0"/>
-              <a:t>Unit Builder</a:t>
-            </a:r>
-          </a:p>
-          <a:p>
-            <a:r>
-              <a:rPr lang="en-US" sz="2000" dirty="0"/>
-              <a:t>Relevant för </a:t>
-            </a:r>
-            <a:r>
-              <a:rPr lang="en-US" sz="2000" b="1" dirty="0" err="1"/>
-              <a:t>båda</a:t>
-            </a:r>
-            <a:r>
-              <a:rPr lang="en-US" sz="2000" b="1" dirty="0"/>
-              <a:t> </a:t>
-            </a:r>
-            <a:r>
-              <a:rPr lang="en-US" sz="2000" b="1" dirty="0" err="1"/>
-              <a:t>scenerna</a:t>
-            </a:r>
-            <a:endParaRPr lang="sv-SE" sz="2000" b="1" dirty="0"/>
-          </a:p>
-        </p:txBody>
-      </p:sp>
-      <p:pic>
-        <p:nvPicPr>
-          <p:cNvPr id="5" name="Bildobjekt 4">
-            <a:extLst>
-              <a:ext uri="{FF2B5EF4-FFF2-40B4-BE49-F238E27FC236}">
-                <a16:creationId xmlns:a16="http://schemas.microsoft.com/office/drawing/2014/main" id="{D27E6685-44E5-B95A-4981-C401214FD1D6}"/>
-              </a:ext>
-            </a:extLst>
-          </p:cNvPr>
-          <p:cNvPicPr>
-            <a:picLocks noChangeAspect="1"/>
-          </p:cNvPicPr>
-          <p:nvPr/>
-        </p:nvPicPr>
-        <p:blipFill>
-          <a:blip r:embed="rId2"/>
-          <a:stretch>
-            <a:fillRect/>
-          </a:stretch>
-        </p:blipFill>
-        <p:spPr>
-          <a:xfrm>
-            <a:off x="7745506" y="1449291"/>
-            <a:ext cx="3765176" cy="3851842"/>
-          </a:xfrm>
-          <a:prstGeom prst="rect">
-            <a:avLst/>
-          </a:prstGeom>
-        </p:spPr>
-      </p:pic>
-      <p:sp>
-        <p:nvSpPr>
-          <p:cNvPr id="21" name="Rectangle 20">
-            <a:extLst>
-              <a:ext uri="{FF2B5EF4-FFF2-40B4-BE49-F238E27FC236}">
-                <a16:creationId xmlns:a16="http://schemas.microsoft.com/office/drawing/2014/main" id="{61707E60-CEC9-4661-AA82-69242EB4BDC3}"/>
-              </a:ext>
-              <a:ext uri="{C183D7F6-B498-43B3-948B-1728B52AA6E4}">
-                <adec:decorative xmlns:adec="http://schemas.microsoft.com/office/drawing/2017/decorative" val="1"/>
-              </a:ext>
-            </a:extLst>
-          </p:cNvPr>
-          <p:cNvSpPr>
-            <a:spLocks noGrp="1" noRot="1" noChangeAspect="1" noMove="1" noResize="1" noEditPoints="1" noAdjustHandles="1" noChangeArrowheads="1" noChangeShapeType="1" noTextEdit="1"/>
-          </p:cNvSpPr>
-          <p:nvPr>
-            <p:extLst>
-              <p:ext uri="{386F3935-93C4-4BCD-93E2-E3B085C9AB24}">
-                <p16:designElem xmlns:p16="http://schemas.microsoft.com/office/powerpoint/2015/main" val="1"/>
-              </p:ext>
-            </p:extLst>
-          </p:nvPr>
-        </p:nvSpPr>
-        <p:spPr>
-          <a:xfrm flipH="1">
-            <a:off x="0" y="6406116"/>
-            <a:ext cx="12191998" cy="461774"/>
-          </a:xfrm>
-          <a:prstGeom prst="rect">
-            <a:avLst/>
-          </a:prstGeom>
-          <a:gradFill>
-            <a:gsLst>
-              <a:gs pos="0">
-                <a:srgbClr val="000000"/>
-              </a:gs>
-              <a:gs pos="100000">
-                <a:schemeClr val="accent1">
-                  <a:lumMod val="75000"/>
-                </a:schemeClr>
-              </a:gs>
-            </a:gsLst>
-            <a:lin ang="15600000" scaled="0"/>
-          </a:gradFill>
-          <a:ln>
-            <a:noFill/>
-          </a:ln>
-        </p:spPr>
-        <p:style>
-          <a:lnRef idx="2">
-            <a:schemeClr val="accent1">
-              <a:shade val="50000"/>
-            </a:schemeClr>
-          </a:lnRef>
-          <a:fillRef idx="1">
-            <a:schemeClr val="accent1"/>
-          </a:fillRef>
-          <a:effectRef idx="0">
-            <a:schemeClr val="accent1"/>
-          </a:effectRef>
-          <a:fontRef idx="minor">
-            <a:schemeClr val="lt1"/>
-          </a:fontRef>
-        </p:style>
-        <p:txBody>
-          <a:bodyPr rtlCol="0" anchor="ctr"/>
-          <a:lstStyle/>
-          <a:p>
-            <a:pPr algn="ctr"/>
-            <a:endParaRPr lang="en-US"/>
-          </a:p>
-        </p:txBody>
-      </p:sp>
-      <p:sp>
-        <p:nvSpPr>
-          <p:cNvPr id="23" name="Rectangle 22">
-            <a:extLst>
-              <a:ext uri="{FF2B5EF4-FFF2-40B4-BE49-F238E27FC236}">
-                <a16:creationId xmlns:a16="http://schemas.microsoft.com/office/drawing/2014/main" id="{8F035CD8-AE30-4146-96F2-036B0CE5E4F3}"/>
-              </a:ext>
-              <a:ext uri="{C183D7F6-B498-43B3-948B-1728B52AA6E4}">
-                <adec:decorative xmlns:adec="http://schemas.microsoft.com/office/drawing/2017/decorative" val="1"/>
-              </a:ext>
-            </a:extLst>
-          </p:cNvPr>
-          <p:cNvSpPr>
-            <a:spLocks noGrp="1" noRot="1" noChangeAspect="1" noMove="1" noResize="1" noEditPoints="1" noAdjustHandles="1" noChangeArrowheads="1" noChangeShapeType="1" noTextEdit="1"/>
-          </p:cNvSpPr>
-          <p:nvPr>
-            <p:extLst>
-              <p:ext uri="{386F3935-93C4-4BCD-93E2-E3B085C9AB24}">
-                <p16:designElem xmlns:p16="http://schemas.microsoft.com/office/powerpoint/2015/main" val="1"/>
-              </p:ext>
-            </p:extLst>
-          </p:nvPr>
-        </p:nvSpPr>
-        <p:spPr>
-          <a:xfrm flipH="1">
-            <a:off x="8115300" y="6406115"/>
-            <a:ext cx="4076698" cy="464399"/>
-          </a:xfrm>
-          <a:prstGeom prst="rect">
-            <a:avLst/>
-          </a:prstGeom>
-          <a:gradFill>
-            <a:gsLst>
-              <a:gs pos="19000">
-                <a:srgbClr val="000000">
-                  <a:alpha val="46000"/>
-                </a:srgbClr>
-              </a:gs>
-              <a:gs pos="99000">
-                <a:schemeClr val="accent1"/>
-              </a:gs>
-            </a:gsLst>
-            <a:lin ang="13200000" scaled="0"/>
-          </a:gradFill>
-          <a:ln>
-            <a:noFill/>
-          </a:ln>
-        </p:spPr>
-        <p:style>
-          <a:lnRef idx="2">
-            <a:schemeClr val="accent1">
-              <a:shade val="50000"/>
-            </a:schemeClr>
-          </a:lnRef>
-          <a:fillRef idx="1">
-            <a:schemeClr val="accent1"/>
-          </a:fillRef>
-          <a:effectRef idx="0">
-            <a:schemeClr val="accent1"/>
-          </a:effectRef>
-          <a:fontRef idx="minor">
-            <a:schemeClr val="lt1"/>
-          </a:fontRef>
-        </p:style>
-        <p:txBody>
-          <a:bodyPr rtlCol="0" anchor="ctr"/>
-          <a:lstStyle/>
-          <a:p>
-            <a:pPr algn="ctr"/>
-            <a:endParaRPr lang="en-US"/>
-          </a:p>
-        </p:txBody>
-      </p:sp>
-    </p:spTree>
-    <p:extLst>
-      <p:ext uri="{BB962C8B-B14F-4D97-AF65-F5344CB8AC3E}">
-        <p14:creationId xmlns:p14="http://schemas.microsoft.com/office/powerpoint/2010/main" val="4126772509"/>
-      </p:ext>
-    </p:extLst>
-  </p:cSld>
-  <p:clrMapOvr>
-    <a:masterClrMapping/>
-  </p:clrMapOvr>
-</p:sld>
-</file>
-
 <file path=ppt/slides/slide5.xml><?xml version="1.0" encoding="utf-8"?>
 <p:sld xmlns:a="http://schemas.openxmlformats.org/drawingml/2006/main" xmlns:r="http://schemas.openxmlformats.org/officeDocument/2006/relationships" xmlns:p="http://schemas.openxmlformats.org/presentationml/2006/main">
   <p:cSld>
@@ -12276,9 +12063,21 @@
           <a:p>
             <a:r>
               <a:rPr lang="en-US" sz="4000" dirty="0"/>
-              <a:t>Unit Prefab</a:t>
-            </a:r>
-            <a:endParaRPr lang="sv-SE" sz="4000" dirty="0"/>
+              <a:t>Unit Prefab </a:t>
+            </a:r>
+            <a:r>
+              <a:rPr lang="en-US" sz="2800" dirty="0"/>
+              <a:t>–</a:t>
+            </a:r>
+            <a:r>
+              <a:rPr lang="en-US" sz="4000" dirty="0"/>
+              <a:t> </a:t>
+            </a:r>
+            <a:r>
+              <a:rPr lang="en-US" sz="2800" dirty="0"/>
+              <a:t> Model / Visuals</a:t>
+            </a:r>
+            <a:endParaRPr lang="sv-SE" sz="2800" dirty="0"/>
           </a:p>
         </p:txBody>
       </p:sp>
@@ -12338,8 +12137,20 @@
           </a:p>
           <a:p>
             <a:r>
+              <a:rPr lang="en-US" sz="2000" dirty="0"/>
+              <a:t>Detta </a:t>
+            </a:r>
+            <a:r>
               <a:rPr lang="en-US" sz="2000" dirty="0" err="1"/>
-              <a:t>Här</a:t>
+              <a:t>är</a:t>
+            </a:r>
+            <a:r>
+              <a:rPr lang="en-US" sz="2000" dirty="0"/>
+              <a:t> den </a:t>
+            </a:r>
+            <a:r>
+              <a:rPr lang="en-US" sz="2000" dirty="0" err="1"/>
+              <a:t>visuella</a:t>
             </a:r>
             <a:r>
               <a:rPr lang="en-US" sz="2000" dirty="0"/>
@@ -12347,7 +12158,7 @@
             </a:r>
             <a:r>
               <a:rPr lang="en-US" sz="2000" dirty="0" err="1"/>
-              <a:t>finns</a:t>
+              <a:t>komponenten</a:t>
             </a:r>
             <a:r>
               <a:rPr lang="en-US" sz="2000" dirty="0"/>
@@ -12355,25 +12166,7 @@
             </a:r>
             <a:r>
               <a:rPr lang="en-US" sz="2000" dirty="0" err="1"/>
-              <a:t>referens</a:t>
-            </a:r>
-            <a:r>
-              <a:rPr lang="en-US" sz="2000" dirty="0"/>
-              <a:t> till Unit Definition</a:t>
-            </a:r>
-          </a:p>
-          <a:p>
-            <a:r>
-              <a:rPr lang="en-US" sz="2000" dirty="0" err="1"/>
-              <a:t>Dessutom</a:t>
-            </a:r>
-            <a:r>
-              <a:rPr lang="en-US" sz="2000" dirty="0"/>
-              <a:t> Finns </a:t>
-            </a:r>
-            <a:r>
-              <a:rPr lang="en-US" sz="2000" dirty="0" err="1"/>
-              <a:t>visuella</a:t>
+              <a:t>på</a:t>
             </a:r>
             <a:r>
               <a:rPr lang="en-US" sz="2000" dirty="0"/>
@@ -12381,7 +12174,7 @@
             </a:r>
             <a:r>
               <a:rPr lang="en-US" sz="2000" dirty="0" err="1"/>
-              <a:t>komponenten</a:t>
+              <a:t>brädet</a:t>
             </a:r>
             <a:r>
               <a:rPr lang="en-US" sz="2000" dirty="0"/>
@@ -12398,14 +12191,22 @@
           </a:p>
           <a:p>
             <a:r>
-              <a:rPr lang="en-US" sz="2000" dirty="0"/>
-              <a:t>Bara relevant för </a:t>
-            </a:r>
-            <a:r>
               <a:rPr lang="en-US" sz="2000" b="1" dirty="0"/>
-              <a:t>Unit Definition</a:t>
-            </a:r>
-            <a:endParaRPr lang="sv-SE" sz="2000" dirty="0"/>
+              <a:t>Denna </a:t>
+            </a:r>
+            <a:r>
+              <a:rPr lang="en-US" sz="2000" b="1" dirty="0" err="1"/>
+              <a:t>skapas</a:t>
+            </a:r>
+            <a:r>
+              <a:rPr lang="en-US" sz="2000" b="1" dirty="0"/>
+              <a:t> av sig </a:t>
+            </a:r>
+            <a:r>
+              <a:rPr lang="en-US" sz="2000" b="1" dirty="0" err="1"/>
+              <a:t>själv</a:t>
+            </a:r>
+            <a:endParaRPr lang="sv-SE" sz="2000" b="1" dirty="0"/>
           </a:p>
         </p:txBody>
       </p:sp>
@@ -13051,7 +12852,7 @@
         <p:spPr>
           <a:xfrm>
             <a:off x="1136396" y="457201"/>
-            <a:ext cx="5814240" cy="1556870"/>
+            <a:ext cx="6350638" cy="1556870"/>
           </a:xfrm>
         </p:spPr>
         <p:txBody>
@@ -13061,10 +12862,26 @@
           <a:lstStyle/>
           <a:p>
             <a:r>
-              <a:rPr lang="en-US" sz="4000"/>
-              <a:t>Unit Builder Scenen</a:t>
-            </a:r>
-            <a:endParaRPr lang="sv-SE" sz="4000"/>
+              <a:rPr lang="en-US" sz="4000" dirty="0"/>
+              <a:t>Unit Builder </a:t>
+            </a:r>
+            <a:r>
+              <a:rPr lang="en-US" sz="2800" dirty="0"/>
+              <a:t>–</a:t>
+            </a:r>
+            <a:r>
+              <a:rPr lang="en-US" sz="4000" dirty="0"/>
+              <a:t> </a:t>
+            </a:r>
+            <a:r>
+              <a:rPr lang="en-US" sz="2800" dirty="0" err="1"/>
+              <a:t>skapa</a:t>
+            </a:r>
+            <a:r>
+              <a:rPr lang="en-US" sz="2800" dirty="0"/>
+              <a:t> unit former</a:t>
+            </a:r>
+            <a:endParaRPr lang="sv-SE" sz="2800" dirty="0"/>
           </a:p>
         </p:txBody>
       </p:sp>
@@ -13092,7 +12909,7 @@
         </p:spPr>
         <p:txBody>
           <a:bodyPr>
-            <a:normAutofit lnSpcReduction="10000"/>
+            <a:normAutofit/>
           </a:bodyPr>
           <a:lstStyle/>
           <a:p>
@@ -13197,8 +13014,36 @@
             </a:r>
             <a:r>
               <a:rPr lang="en-US" sz="2000" dirty="0"/>
-              <a:t>. </a:t>
-            </a:r>
+              <a:t>.</a:t>
+            </a:r>
+          </a:p>
+          <a:p>
+            <a:r>
+              <a:rPr lang="en-US" sz="2000" dirty="0" err="1"/>
+              <a:t>Gör</a:t>
+            </a:r>
+            <a:r>
+              <a:rPr lang="en-US" sz="2000" dirty="0"/>
+              <a:t> </a:t>
+            </a:r>
+            <a:r>
+              <a:rPr lang="en-US" sz="2000" dirty="0" err="1"/>
+              <a:t>både</a:t>
+            </a:r>
+            <a:r>
+              <a:rPr lang="en-US" sz="2000" dirty="0"/>
+              <a:t> </a:t>
+            </a:r>
+            <a:r>
+              <a:rPr lang="en-US" sz="2000" dirty="0" err="1"/>
+              <a:t>en</a:t>
+            </a:r>
+            <a:r>
+              <a:rPr lang="en-US" sz="2000" dirty="0"/>
+              <a:t> bas och support area</a:t>
+            </a:r>
+          </a:p>
+          <a:p>
             <a:r>
               <a:rPr lang="en-US" sz="2000" dirty="0" err="1"/>
               <a:t>Viktigt</a:t>
@@ -13219,36 +13064,64 @@
               <a:rPr lang="en-US" sz="2000" b="1" dirty="0"/>
               <a:t>Finished</a:t>
             </a:r>
-            <a:endParaRPr lang="en-US" sz="2000" dirty="0"/>
-          </a:p>
-          <a:p>
-            <a:r>
-              <a:rPr lang="en-US" sz="2000" dirty="0"/>
-              <a:t>På </a:t>
-            </a:r>
-            <a:r>
-              <a:rPr lang="en-US" sz="2000" dirty="0" err="1"/>
-              <a:t>toppen</a:t>
-            </a:r>
             <a:r>
               <a:rPr lang="en-US" sz="2000" dirty="0"/>
               <a:t> </a:t>
             </a:r>
             <a:r>
               <a:rPr lang="en-US" sz="2000" dirty="0" err="1"/>
-              <a:t>använd</a:t>
+              <a:t>när</a:t>
+            </a:r>
+            <a:r>
+              <a:rPr lang="en-US" sz="2000" dirty="0"/>
+              <a:t> man </a:t>
+            </a:r>
+            <a:r>
+              <a:rPr lang="en-US" sz="2000" dirty="0" err="1"/>
+              <a:t>är</a:t>
             </a:r>
             <a:r>
               <a:rPr lang="en-US" sz="2000" dirty="0"/>
               <a:t> </a:t>
             </a:r>
             <a:r>
-              <a:rPr lang="en-US" sz="2000" b="1" dirty="0"/>
-              <a:t>Up / Down</a:t>
+              <a:rPr lang="en-US" sz="2000" dirty="0" err="1"/>
+              <a:t>klar</a:t>
+            </a:r>
+            <a:endParaRPr lang="en-US" sz="2000" dirty="0"/>
+          </a:p>
+          <a:p>
+            <a:r>
+              <a:rPr lang="en-US" sz="2000" dirty="0" err="1"/>
+              <a:t>På</a:t>
             </a:r>
             <a:r>
               <a:rPr lang="en-US" sz="2000" dirty="0"/>
-              <a:t> Knappen för </a:t>
+              <a:t> </a:t>
+            </a:r>
+            <a:r>
+              <a:rPr lang="en-US" sz="2000" dirty="0" err="1"/>
+              <a:t>botten</a:t>
+            </a:r>
+            <a:r>
+              <a:rPr lang="en-US" sz="2000" dirty="0"/>
+              <a:t> </a:t>
+            </a:r>
+            <a:r>
+              <a:rPr lang="en-US" sz="2000" dirty="0" err="1"/>
+              <a:t>finns</a:t>
+            </a:r>
+            <a:r>
+              <a:rPr lang="en-US" sz="2000" dirty="0"/>
+              <a:t> </a:t>
+            </a:r>
+            <a:r>
+              <a:rPr lang="en-US" sz="2000" dirty="0" err="1"/>
+              <a:t>verktyg</a:t>
+            </a:r>
+            <a:r>
+              <a:rPr lang="en-US" sz="2000" dirty="0"/>
+              <a:t> för </a:t>
             </a:r>
             <a:r>
               <a:rPr lang="en-US" sz="2000" dirty="0" err="1"/>
@@ -13260,7 +13133,7 @@
             </a:r>
             <a:r>
               <a:rPr lang="en-US" sz="2000" dirty="0" err="1"/>
-              <a:t>ändra</a:t>
+              <a:t>markera</a:t>
             </a:r>
             <a:r>
               <a:rPr lang="en-US" sz="2000" dirty="0"/>
@@ -13268,109 +13141,7 @@
             </a:r>
             <a:r>
               <a:rPr lang="en-US" sz="2000" dirty="0" err="1"/>
-              <a:t>riktningen</a:t>
-            </a:r>
-            <a:r>
-              <a:rPr lang="en-US" sz="2000" dirty="0"/>
-              <a:t> på alla </a:t>
-            </a:r>
-            <a:r>
-              <a:rPr lang="en-US" sz="2000" dirty="0" err="1"/>
               <a:t>trianglar</a:t>
-            </a:r>
-            <a:endParaRPr lang="en-US" sz="2000" dirty="0"/>
-          </a:p>
-          <a:p>
-            <a:r>
-              <a:rPr lang="en-US" sz="2000" dirty="0" err="1"/>
-              <a:t>Där</a:t>
-            </a:r>
-            <a:r>
-              <a:rPr lang="en-US" sz="2000" dirty="0"/>
-              <a:t> </a:t>
-            </a:r>
-            <a:r>
-              <a:rPr lang="en-US" sz="2000" dirty="0" err="1"/>
-              <a:t>nere</a:t>
-            </a:r>
-            <a:r>
-              <a:rPr lang="en-US" sz="2000" dirty="0"/>
-              <a:t> </a:t>
-            </a:r>
-            <a:r>
-              <a:rPr lang="en-US" sz="2000" dirty="0" err="1"/>
-              <a:t>finns</a:t>
-            </a:r>
-            <a:r>
-              <a:rPr lang="en-US" sz="2000" dirty="0"/>
-              <a:t> </a:t>
-            </a:r>
-            <a:r>
-              <a:rPr lang="en-US" sz="2000" dirty="0" err="1"/>
-              <a:t>verktyg</a:t>
-            </a:r>
-            <a:r>
-              <a:rPr lang="en-US" sz="2000" dirty="0"/>
-              <a:t> för </a:t>
-            </a:r>
-            <a:r>
-              <a:rPr lang="en-US" sz="2000" dirty="0" err="1"/>
-              <a:t>att</a:t>
-            </a:r>
-            <a:r>
-              <a:rPr lang="en-US" sz="2000" dirty="0"/>
-              <a:t> </a:t>
-            </a:r>
-            <a:r>
-              <a:rPr lang="en-US" sz="2000" dirty="0" err="1"/>
-              <a:t>markera</a:t>
-            </a:r>
-            <a:r>
-              <a:rPr lang="en-US" sz="2000" dirty="0"/>
-              <a:t> </a:t>
-            </a:r>
-            <a:r>
-              <a:rPr lang="en-US" sz="2000" dirty="0" err="1"/>
-              <a:t>trianglar</a:t>
-            </a:r>
-            <a:endParaRPr lang="en-US" sz="2000" dirty="0"/>
-          </a:p>
-          <a:p>
-            <a:r>
-              <a:rPr lang="en-US" sz="2000" dirty="0" err="1"/>
-              <a:t>Dubbelkolla</a:t>
-            </a:r>
-            <a:r>
-              <a:rPr lang="en-US" sz="2000" dirty="0"/>
-              <a:t> din unit definition </a:t>
-            </a:r>
-            <a:r>
-              <a:rPr lang="en-US" sz="2000" dirty="0" err="1"/>
-              <a:t>att</a:t>
-            </a:r>
-            <a:r>
-              <a:rPr lang="en-US" sz="2000" dirty="0"/>
-              <a:t> Up/Down anchor </a:t>
-            </a:r>
-            <a:r>
-              <a:rPr lang="en-US" sz="2000" dirty="0" err="1"/>
-              <a:t>inte</a:t>
-            </a:r>
-            <a:r>
-              <a:rPr lang="en-US" sz="2000" dirty="0"/>
-              <a:t> är </a:t>
-            </a:r>
-            <a:r>
-              <a:rPr lang="en-US" sz="2000" dirty="0" err="1"/>
-              <a:t>tomma</a:t>
-            </a:r>
-            <a:r>
-              <a:rPr lang="en-US" sz="2000" dirty="0"/>
-              <a:t> </a:t>
-            </a:r>
-            <a:r>
-              <a:rPr lang="en-US" sz="2000" dirty="0" err="1"/>
-              <a:t>listor</a:t>
             </a:r>
             <a:endParaRPr lang="en-US" sz="2000" dirty="0"/>
           </a:p>
@@ -13750,8 +13521,16 @@
               <a:t>Triangle Grid </a:t>
             </a:r>
             <a:r>
-              <a:rPr lang="en-US" sz="4000" dirty="0" err="1"/>
-              <a:t>Scenen</a:t>
+              <a:rPr lang="en-US" sz="2800" dirty="0"/>
+              <a:t>–</a:t>
+            </a:r>
+            <a:r>
+              <a:rPr lang="en-US" sz="4000" dirty="0"/>
+              <a:t> </a:t>
+            </a:r>
+            <a:r>
+              <a:rPr lang="en-US" sz="2800" dirty="0" err="1"/>
+              <a:t>Spelkartan</a:t>
             </a:r>
             <a:endParaRPr lang="sv-SE" sz="4000" dirty="0"/>
           </a:p>
@@ -13873,11 +13652,21 @@
             </a:r>
             <a:r>
               <a:rPr lang="en-US" sz="2000" dirty="0"/>
-              <a:t> din UI Button Prefab </a:t>
+              <a:t> </a:t>
             </a:r>
             <a:r>
               <a:rPr lang="en-US" sz="2000" dirty="0" err="1"/>
-              <a:t>likt</a:t>
+              <a:t>fått</a:t>
+            </a:r>
+            <a:r>
+              <a:rPr lang="en-US" sz="2000" dirty="0"/>
+              <a:t> din unit definition.</a:t>
+            </a:r>
+          </a:p>
+          <a:p>
+            <a:r>
+              <a:rPr lang="en-US" sz="2000" dirty="0" err="1"/>
+              <a:t>På</a:t>
             </a:r>
             <a:r>
               <a:rPr lang="en-US" sz="2000" dirty="0"/>
@@ -13889,17 +13678,19 @@
             </a:r>
             <a:r>
               <a:rPr lang="en-US" sz="2000" dirty="0"/>
-              <a:t>.</a:t>
-            </a:r>
-          </a:p>
-          <a:p>
+              <a:t> ser du </a:t>
+            </a:r>
+            <a:r>
+              <a:rPr lang="en-US" sz="2000" dirty="0" err="1"/>
+              <a:t>hur</a:t>
+            </a:r>
             <a:r>
               <a:rPr lang="en-US" sz="2000" dirty="0"/>
-              <a:t>Sen </a:t>
+              <a:t> du </a:t>
             </a:r>
             <a:r>
               <a:rPr lang="en-US" sz="2000" dirty="0" err="1"/>
-              <a:t>dubbelchecka</a:t>
+              <a:t>hittar</a:t>
             </a:r>
             <a:r>
               <a:rPr lang="en-US" sz="2000" dirty="0"/>
@@ -13907,34 +13698,38 @@
             </a:r>
             <a:r>
               <a:rPr lang="en-US" sz="2000" dirty="0" err="1"/>
-              <a:t>att</a:t>
+              <a:t>dit</a:t>
+            </a:r>
+            <a:endParaRPr lang="en-US" sz="2000" dirty="0"/>
+          </a:p>
+          <a:p>
+            <a:r>
+              <a:rPr lang="en-US" sz="2000" dirty="0" err="1"/>
+              <a:t>När</a:t>
             </a:r>
             <a:r>
               <a:rPr lang="en-US" sz="2000" dirty="0"/>
-              <a:t> all information är </a:t>
+              <a:t> </a:t>
             </a:r>
             <a:r>
               <a:rPr lang="en-US" sz="2000" dirty="0" err="1"/>
-              <a:t>ifylld</a:t>
-            </a:r>
-            <a:endParaRPr lang="en-US" sz="2000" dirty="0"/>
-          </a:p>
-          <a:p>
+              <a:t>scenen</a:t>
+            </a:r>
             <a:r>
               <a:rPr lang="en-US" sz="2000" dirty="0"/>
-              <a:t>På </a:t>
+              <a:t> </a:t>
             </a:r>
             <a:r>
               <a:rPr lang="en-US" sz="2000" dirty="0" err="1"/>
-              <a:t>bilden</a:t>
+              <a:t>körs</a:t>
             </a:r>
             <a:r>
               <a:rPr lang="en-US" sz="2000" dirty="0"/>
-              <a:t> ser du </a:t>
+              <a:t> </a:t>
             </a:r>
             <a:r>
               <a:rPr lang="en-US" sz="2000" dirty="0" err="1"/>
-              <a:t>hur</a:t>
+              <a:t>klickar</a:t>
             </a:r>
             <a:r>
               <a:rPr lang="en-US" sz="2000" dirty="0"/>
@@ -13942,7 +13737,15 @@
             </a:r>
             <a:r>
               <a:rPr lang="en-US" sz="2000" dirty="0" err="1"/>
-              <a:t>hittar</a:t>
+              <a:t>på</a:t>
+            </a:r>
+            <a:r>
+              <a:rPr lang="en-US" sz="2000" dirty="0"/>
+              <a:t> UIn för </a:t>
+            </a:r>
+            <a:r>
+              <a:rPr lang="en-US" sz="2000" dirty="0" err="1"/>
+              <a:t>att</a:t>
             </a:r>
             <a:r>
               <a:rPr lang="en-US" sz="2000" dirty="0"/>
@@ -13950,7 +13753,49 @@
             </a:r>
             <a:r>
               <a:rPr lang="en-US" sz="2000" dirty="0" err="1"/>
-              <a:t>dit</a:t>
+              <a:t>välja</a:t>
+            </a:r>
+            <a:r>
+              <a:rPr lang="en-US" sz="2000" dirty="0"/>
+              <a:t> units</a:t>
+            </a:r>
+          </a:p>
+          <a:p>
+            <a:r>
+              <a:rPr lang="en-US" sz="2000" dirty="0" err="1"/>
+              <a:t>Använd</a:t>
+            </a:r>
+            <a:r>
+              <a:rPr lang="en-US" sz="2000" dirty="0"/>
+              <a:t> </a:t>
+            </a:r>
+            <a:r>
+              <a:rPr lang="en-US" sz="2000" dirty="0" err="1"/>
+              <a:t>mus</a:t>
+            </a:r>
+            <a:r>
+              <a:rPr lang="en-US" sz="2000" dirty="0"/>
+              <a:t> scroll el 1-6 för </a:t>
+            </a:r>
+            <a:r>
+              <a:rPr lang="en-US" sz="2000" dirty="0" err="1"/>
+              <a:t>att</a:t>
+            </a:r>
+            <a:r>
+              <a:rPr lang="en-US" sz="2000" dirty="0"/>
+              <a:t>  din unit </a:t>
+            </a:r>
+            <a:r>
+              <a:rPr lang="en-US" sz="2000" dirty="0" err="1"/>
+              <a:t>innan</a:t>
+            </a:r>
+            <a:r>
+              <a:rPr lang="en-US" sz="2000" dirty="0"/>
+              <a:t> du </a:t>
+            </a:r>
+            <a:r>
+              <a:rPr lang="en-US" sz="2000" dirty="0" err="1"/>
+              <a:t>placerar</a:t>
             </a:r>
             <a:endParaRPr lang="sv-SE" sz="2000" dirty="0"/>
           </a:p>
